--- a/docs/plots/carbo/jx_carbo_linsubhr_ratio_grade3.pptx
+++ b/docs/plots/carbo/jx_carbo_linsubhr_ratio_grade3.pptx
@@ -3003,515 +3003,512 @@
           <p:spPr>
             <a:xfrm>
               <a:off x="817517" y="1896563"/>
-              <a:ext cx="7370972" cy="3634705"/>
+              <a:ext cx="7370972" cy="3641696"/>
             </a:xfrm>
             <a:custGeom>
               <a:avLst/>
               <a:pathLst>
-                <a:path w="7370972" h="3634705">
+                <a:path w="7370972" h="3641696">
                   <a:moveTo>
-                    <a:pt x="1913375" y="0"/>
+                    <a:pt x="2079523" y="0"/>
                   </a:moveTo>
                   <a:lnTo>
-                    <a:pt x="1936589" y="83822"/>
-                  </a:lnTo>
-                  <a:lnTo>
-                    <a:pt x="2014223" y="343729"/>
-                  </a:lnTo>
-                  <a:lnTo>
-                    <a:pt x="2091857" y="584707"/>
-                  </a:lnTo>
-                  <a:lnTo>
-                    <a:pt x="2169491" y="808136"/>
-                  </a:lnTo>
-                  <a:lnTo>
-                    <a:pt x="2247125" y="1015293"/>
-                  </a:lnTo>
-                  <a:lnTo>
-                    <a:pt x="2324759" y="1207363"/>
-                  </a:lnTo>
-                  <a:lnTo>
-                    <a:pt x="2402393" y="1385445"/>
-                  </a:lnTo>
-                  <a:lnTo>
-                    <a:pt x="2480027" y="1550559"/>
-                  </a:lnTo>
-                  <a:lnTo>
-                    <a:pt x="2557661" y="1703647"/>
-                  </a:lnTo>
-                  <a:lnTo>
-                    <a:pt x="2635295" y="1845587"/>
-                  </a:lnTo>
-                  <a:lnTo>
-                    <a:pt x="2712930" y="1977189"/>
-                  </a:lnTo>
-                  <a:lnTo>
-                    <a:pt x="2790564" y="2099207"/>
-                  </a:lnTo>
-                  <a:lnTo>
-                    <a:pt x="2868198" y="2212340"/>
-                  </a:lnTo>
-                  <a:lnTo>
-                    <a:pt x="2945832" y="2317233"/>
-                  </a:lnTo>
-                  <a:lnTo>
-                    <a:pt x="3023466" y="2414487"/>
-                  </a:lnTo>
-                  <a:lnTo>
-                    <a:pt x="3101100" y="2504658"/>
-                  </a:lnTo>
-                  <a:lnTo>
-                    <a:pt x="3178734" y="2588262"/>
-                  </a:lnTo>
-                  <a:lnTo>
-                    <a:pt x="3256368" y="2665778"/>
-                  </a:lnTo>
-                  <a:lnTo>
-                    <a:pt x="3334002" y="2737648"/>
-                  </a:lnTo>
-                  <a:lnTo>
-                    <a:pt x="3411636" y="2788490"/>
-                  </a:lnTo>
-                  <a:lnTo>
-                    <a:pt x="3489270" y="2805105"/>
-                  </a:lnTo>
-                  <a:lnTo>
-                    <a:pt x="3566904" y="2821401"/>
-                  </a:lnTo>
-                  <a:lnTo>
-                    <a:pt x="3644538" y="2837383"/>
-                  </a:lnTo>
-                  <a:lnTo>
-                    <a:pt x="3722172" y="2853058"/>
-                  </a:lnTo>
-                  <a:lnTo>
-                    <a:pt x="3799806" y="2868431"/>
-                  </a:lnTo>
-                  <a:lnTo>
-                    <a:pt x="3877440" y="2883509"/>
-                  </a:lnTo>
-                  <a:lnTo>
-                    <a:pt x="3955074" y="2898297"/>
-                  </a:lnTo>
-                  <a:lnTo>
-                    <a:pt x="4032708" y="2912801"/>
-                  </a:lnTo>
-                  <a:lnTo>
-                    <a:pt x="4110342" y="2927026"/>
-                  </a:lnTo>
-                  <a:lnTo>
-                    <a:pt x="4187976" y="2940977"/>
-                  </a:lnTo>
-                  <a:lnTo>
-                    <a:pt x="4265610" y="2954660"/>
-                  </a:lnTo>
-                  <a:lnTo>
-                    <a:pt x="4343244" y="2968080"/>
-                  </a:lnTo>
-                  <a:lnTo>
-                    <a:pt x="4420879" y="2981242"/>
-                  </a:lnTo>
-                  <a:lnTo>
-                    <a:pt x="4498513" y="2994151"/>
-                  </a:lnTo>
-                  <a:lnTo>
-                    <a:pt x="4576147" y="3006812"/>
-                  </a:lnTo>
-                  <a:lnTo>
-                    <a:pt x="4653781" y="3019229"/>
-                  </a:lnTo>
-                  <a:lnTo>
-                    <a:pt x="4731415" y="3031408"/>
-                  </a:lnTo>
-                  <a:lnTo>
-                    <a:pt x="4809049" y="3043352"/>
-                  </a:lnTo>
-                  <a:lnTo>
-                    <a:pt x="4886683" y="3055067"/>
-                  </a:lnTo>
-                  <a:lnTo>
-                    <a:pt x="4964317" y="3066556"/>
-                  </a:lnTo>
-                  <a:lnTo>
-                    <a:pt x="5041951" y="3077825"/>
-                  </a:lnTo>
-                  <a:lnTo>
-                    <a:pt x="5119585" y="3088877"/>
-                  </a:lnTo>
-                  <a:lnTo>
-                    <a:pt x="5197219" y="3099716"/>
-                  </a:lnTo>
-                  <a:lnTo>
-                    <a:pt x="5274853" y="3110348"/>
-                  </a:lnTo>
-                  <a:lnTo>
-                    <a:pt x="5352487" y="3120774"/>
-                  </a:lnTo>
-                  <a:lnTo>
-                    <a:pt x="5430121" y="3131000"/>
-                  </a:lnTo>
-                  <a:lnTo>
-                    <a:pt x="5507755" y="3141030"/>
-                  </a:lnTo>
-                  <a:lnTo>
-                    <a:pt x="5585389" y="3150867"/>
-                  </a:lnTo>
-                  <a:lnTo>
-                    <a:pt x="5663023" y="3160514"/>
-                  </a:lnTo>
-                  <a:lnTo>
-                    <a:pt x="5740657" y="3169976"/>
-                  </a:lnTo>
-                  <a:lnTo>
-                    <a:pt x="5818291" y="3179256"/>
-                  </a:lnTo>
-                  <a:lnTo>
-                    <a:pt x="5895925" y="3188358"/>
-                  </a:lnTo>
-                  <a:lnTo>
-                    <a:pt x="5973559" y="3197285"/>
-                  </a:lnTo>
-                  <a:lnTo>
-                    <a:pt x="6051193" y="3206040"/>
-                  </a:lnTo>
-                  <a:lnTo>
-                    <a:pt x="6128827" y="3214627"/>
-                  </a:lnTo>
-                  <a:lnTo>
-                    <a:pt x="6206462" y="3223049"/>
-                  </a:lnTo>
-                  <a:lnTo>
-                    <a:pt x="6284096" y="3231308"/>
-                  </a:lnTo>
-                  <a:lnTo>
-                    <a:pt x="6361730" y="3239409"/>
-                  </a:lnTo>
-                  <a:lnTo>
-                    <a:pt x="6439364" y="3247354"/>
-                  </a:lnTo>
-                  <a:lnTo>
-                    <a:pt x="6516998" y="3255147"/>
-                  </a:lnTo>
-                  <a:lnTo>
-                    <a:pt x="6594632" y="3262789"/>
-                  </a:lnTo>
-                  <a:lnTo>
-                    <a:pt x="6672266" y="3270285"/>
-                  </a:lnTo>
-                  <a:lnTo>
-                    <a:pt x="6749900" y="3277637"/>
-                  </a:lnTo>
-                  <a:lnTo>
-                    <a:pt x="6827534" y="3284847"/>
-                  </a:lnTo>
-                  <a:lnTo>
-                    <a:pt x="6905168" y="3291918"/>
-                  </a:lnTo>
-                  <a:lnTo>
-                    <a:pt x="6982802" y="3298854"/>
-                  </a:lnTo>
-                  <a:lnTo>
-                    <a:pt x="7060436" y="3305656"/>
-                  </a:lnTo>
-                  <a:lnTo>
-                    <a:pt x="7138070" y="3312328"/>
-                  </a:lnTo>
-                  <a:lnTo>
-                    <a:pt x="7215704" y="3318871"/>
-                  </a:lnTo>
-                  <a:lnTo>
-                    <a:pt x="7293338" y="3325288"/>
-                  </a:lnTo>
-                  <a:lnTo>
-                    <a:pt x="7370972" y="3331582"/>
-                  </a:lnTo>
-                  <a:lnTo>
-                    <a:pt x="7370972" y="3634705"/>
-                  </a:lnTo>
-                  <a:lnTo>
-                    <a:pt x="7293338" y="3633296"/>
-                  </a:lnTo>
-                  <a:lnTo>
-                    <a:pt x="7215704" y="3631776"/>
-                  </a:lnTo>
-                  <a:lnTo>
-                    <a:pt x="7138070" y="3630137"/>
-                  </a:lnTo>
-                  <a:lnTo>
-                    <a:pt x="7060436" y="3628370"/>
-                  </a:lnTo>
-                  <a:lnTo>
-                    <a:pt x="6982802" y="3626463"/>
-                  </a:lnTo>
-                  <a:lnTo>
-                    <a:pt x="6905168" y="3624407"/>
-                  </a:lnTo>
-                  <a:lnTo>
-                    <a:pt x="6827534" y="3622189"/>
-                  </a:lnTo>
-                  <a:lnTo>
-                    <a:pt x="6749900" y="3619797"/>
-                  </a:lnTo>
-                  <a:lnTo>
-                    <a:pt x="6672266" y="3617216"/>
-                  </a:lnTo>
-                  <a:lnTo>
-                    <a:pt x="6594632" y="3614434"/>
-                  </a:lnTo>
-                  <a:lnTo>
-                    <a:pt x="6516998" y="3611433"/>
-                  </a:lnTo>
-                  <a:lnTo>
-                    <a:pt x="6439364" y="3608196"/>
-                  </a:lnTo>
-                  <a:lnTo>
-                    <a:pt x="6361730" y="3604704"/>
-                  </a:lnTo>
-                  <a:lnTo>
-                    <a:pt x="6284096" y="3600939"/>
-                  </a:lnTo>
-                  <a:lnTo>
-                    <a:pt x="6206462" y="3596878"/>
-                  </a:lnTo>
-                  <a:lnTo>
-                    <a:pt x="6128827" y="3592497"/>
-                  </a:lnTo>
-                  <a:lnTo>
-                    <a:pt x="6051193" y="3587773"/>
-                  </a:lnTo>
-                  <a:lnTo>
-                    <a:pt x="5973559" y="3582678"/>
-                  </a:lnTo>
-                  <a:lnTo>
-                    <a:pt x="5895925" y="3577182"/>
-                  </a:lnTo>
-                  <a:lnTo>
-                    <a:pt x="5818291" y="3571255"/>
-                  </a:lnTo>
-                  <a:lnTo>
-                    <a:pt x="5740657" y="3564862"/>
-                  </a:lnTo>
-                  <a:lnTo>
-                    <a:pt x="5663023" y="3557967"/>
-                  </a:lnTo>
-                  <a:lnTo>
-                    <a:pt x="5585389" y="3550530"/>
-                  </a:lnTo>
-                  <a:lnTo>
-                    <a:pt x="5507755" y="3542510"/>
-                  </a:lnTo>
-                  <a:lnTo>
-                    <a:pt x="5430121" y="3533859"/>
-                  </a:lnTo>
-                  <a:lnTo>
-                    <a:pt x="5352487" y="3524529"/>
-                  </a:lnTo>
-                  <a:lnTo>
-                    <a:pt x="5274853" y="3514466"/>
-                  </a:lnTo>
-                  <a:lnTo>
-                    <a:pt x="5197219" y="3503612"/>
-                  </a:lnTo>
-                  <a:lnTo>
-                    <a:pt x="5119585" y="3491906"/>
-                  </a:lnTo>
-                  <a:lnTo>
-                    <a:pt x="5041951" y="3479281"/>
-                  </a:lnTo>
-                  <a:lnTo>
-                    <a:pt x="4964317" y="3465663"/>
-                  </a:lnTo>
-                  <a:lnTo>
-                    <a:pt x="4886683" y="3450977"/>
-                  </a:lnTo>
-                  <a:lnTo>
-                    <a:pt x="4809049" y="3435136"/>
-                  </a:lnTo>
-                  <a:lnTo>
-                    <a:pt x="4731415" y="3418052"/>
-                  </a:lnTo>
-                  <a:lnTo>
-                    <a:pt x="4653781" y="3399625"/>
-                  </a:lnTo>
-                  <a:lnTo>
-                    <a:pt x="4576147" y="3379751"/>
-                  </a:lnTo>
-                  <a:lnTo>
-                    <a:pt x="4498513" y="3358316"/>
-                  </a:lnTo>
-                  <a:lnTo>
-                    <a:pt x="4420879" y="3335197"/>
-                  </a:lnTo>
-                  <a:lnTo>
-                    <a:pt x="4343244" y="3310263"/>
-                  </a:lnTo>
-                  <a:lnTo>
-                    <a:pt x="4265610" y="3283370"/>
-                  </a:lnTo>
-                  <a:lnTo>
-                    <a:pt x="4187976" y="3254364"/>
-                  </a:lnTo>
-                  <a:lnTo>
-                    <a:pt x="4110342" y="3223081"/>
-                  </a:lnTo>
-                  <a:lnTo>
-                    <a:pt x="4032708" y="3189340"/>
-                  </a:lnTo>
-                  <a:lnTo>
-                    <a:pt x="3955074" y="3152948"/>
-                  </a:lnTo>
-                  <a:lnTo>
-                    <a:pt x="3877440" y="3113699"/>
-                  </a:lnTo>
-                  <a:lnTo>
-                    <a:pt x="3799806" y="3071366"/>
-                  </a:lnTo>
-                  <a:lnTo>
-                    <a:pt x="3722172" y="3025708"/>
-                  </a:lnTo>
-                  <a:lnTo>
-                    <a:pt x="3644538" y="2976464"/>
-                  </a:lnTo>
-                  <a:lnTo>
-                    <a:pt x="3566904" y="2923352"/>
-                  </a:lnTo>
-                  <a:lnTo>
-                    <a:pt x="3489270" y="2866068"/>
-                  </a:lnTo>
-                  <a:lnTo>
-                    <a:pt x="3411636" y="2804285"/>
-                  </a:lnTo>
-                  <a:lnTo>
-                    <a:pt x="3334002" y="2771550"/>
-                  </a:lnTo>
-                  <a:lnTo>
-                    <a:pt x="3256368" y="2754277"/>
-                  </a:lnTo>
-                  <a:lnTo>
-                    <a:pt x="3178734" y="2736665"/>
-                  </a:lnTo>
-                  <a:lnTo>
-                    <a:pt x="3101100" y="2718709"/>
-                  </a:lnTo>
-                  <a:lnTo>
-                    <a:pt x="3023466" y="2700400"/>
-                  </a:lnTo>
-                  <a:lnTo>
-                    <a:pt x="2945832" y="2681733"/>
-                  </a:lnTo>
-                  <a:lnTo>
-                    <a:pt x="2868198" y="2662699"/>
-                  </a:lnTo>
-                  <a:lnTo>
-                    <a:pt x="2790564" y="2643292"/>
-                  </a:lnTo>
-                  <a:lnTo>
-                    <a:pt x="2712930" y="2623505"/>
-                  </a:lnTo>
-                  <a:lnTo>
-                    <a:pt x="2635295" y="2603330"/>
-                  </a:lnTo>
-                  <a:lnTo>
-                    <a:pt x="2557661" y="2582760"/>
-                  </a:lnTo>
-                  <a:lnTo>
-                    <a:pt x="2480027" y="2561786"/>
-                  </a:lnTo>
-                  <a:lnTo>
-                    <a:pt x="2402393" y="2540401"/>
-                  </a:lnTo>
-                  <a:lnTo>
-                    <a:pt x="2324759" y="2518597"/>
-                  </a:lnTo>
-                  <a:lnTo>
-                    <a:pt x="2247125" y="2496365"/>
-                  </a:lnTo>
-                  <a:lnTo>
-                    <a:pt x="2169491" y="2473698"/>
-                  </a:lnTo>
-                  <a:lnTo>
-                    <a:pt x="2091857" y="2450586"/>
-                  </a:lnTo>
-                  <a:lnTo>
-                    <a:pt x="2014223" y="2427021"/>
-                  </a:lnTo>
-                  <a:lnTo>
-                    <a:pt x="1936589" y="2402995"/>
-                  </a:lnTo>
-                  <a:lnTo>
-                    <a:pt x="1858955" y="2378497"/>
-                  </a:lnTo>
-                  <a:lnTo>
-                    <a:pt x="1781321" y="2353519"/>
-                  </a:lnTo>
-                  <a:lnTo>
-                    <a:pt x="1703687" y="2328051"/>
-                  </a:lnTo>
-                  <a:lnTo>
-                    <a:pt x="1626053" y="2302084"/>
-                  </a:lnTo>
-                  <a:lnTo>
-                    <a:pt x="1548419" y="2275608"/>
-                  </a:lnTo>
-                  <a:lnTo>
-                    <a:pt x="1470785" y="2248613"/>
-                  </a:lnTo>
-                  <a:lnTo>
-                    <a:pt x="1393151" y="2221088"/>
-                  </a:lnTo>
-                  <a:lnTo>
-                    <a:pt x="1315517" y="2193025"/>
-                  </a:lnTo>
-                  <a:lnTo>
-                    <a:pt x="1237883" y="2164411"/>
-                  </a:lnTo>
-                  <a:lnTo>
-                    <a:pt x="1160249" y="2135236"/>
-                  </a:lnTo>
-                  <a:lnTo>
-                    <a:pt x="1082615" y="2105489"/>
-                  </a:lnTo>
-                  <a:lnTo>
-                    <a:pt x="1004981" y="2075159"/>
-                  </a:lnTo>
-                  <a:lnTo>
-                    <a:pt x="927346" y="2044234"/>
-                  </a:lnTo>
-                  <a:lnTo>
-                    <a:pt x="849712" y="2012703"/>
-                  </a:lnTo>
-                  <a:lnTo>
-                    <a:pt x="772078" y="1980554"/>
-                  </a:lnTo>
-                  <a:lnTo>
-                    <a:pt x="694444" y="1947775"/>
-                  </a:lnTo>
-                  <a:lnTo>
-                    <a:pt x="616810" y="1914353"/>
-                  </a:lnTo>
-                  <a:lnTo>
-                    <a:pt x="539176" y="1880276"/>
-                  </a:lnTo>
-                  <a:lnTo>
-                    <a:pt x="461542" y="1845531"/>
-                  </a:lnTo>
-                  <a:lnTo>
-                    <a:pt x="383908" y="1810105"/>
-                  </a:lnTo>
-                  <a:lnTo>
-                    <a:pt x="306274" y="1773984"/>
-                  </a:lnTo>
-                  <a:lnTo>
-                    <a:pt x="228640" y="1737155"/>
-                  </a:lnTo>
-                  <a:lnTo>
-                    <a:pt x="151006" y="1699604"/>
-                  </a:lnTo>
-                  <a:lnTo>
-                    <a:pt x="73372" y="1661317"/>
-                  </a:lnTo>
-                  <a:lnTo>
-                    <a:pt x="0" y="1624423"/>
+                    <a:pt x="2091857" y="50913"/>
+                  </a:lnTo>
+                  <a:lnTo>
+                    <a:pt x="2169491" y="345192"/>
+                  </a:lnTo>
+                  <a:lnTo>
+                    <a:pt x="2247125" y="615428"/>
+                  </a:lnTo>
+                  <a:lnTo>
+                    <a:pt x="2324759" y="863584"/>
+                  </a:lnTo>
+                  <a:lnTo>
+                    <a:pt x="2402393" y="1091465"/>
+                  </a:lnTo>
+                  <a:lnTo>
+                    <a:pt x="2480027" y="1300726"/>
+                  </a:lnTo>
+                  <a:lnTo>
+                    <a:pt x="2557661" y="1492890"/>
+                  </a:lnTo>
+                  <a:lnTo>
+                    <a:pt x="2635295" y="1669353"/>
+                  </a:lnTo>
+                  <a:lnTo>
+                    <a:pt x="2712930" y="1831398"/>
+                  </a:lnTo>
+                  <a:lnTo>
+                    <a:pt x="2790564" y="1980203"/>
+                  </a:lnTo>
+                  <a:lnTo>
+                    <a:pt x="2868198" y="2116850"/>
+                  </a:lnTo>
+                  <a:lnTo>
+                    <a:pt x="2945832" y="2242332"/>
+                  </a:lnTo>
+                  <a:lnTo>
+                    <a:pt x="3023466" y="2357562"/>
+                  </a:lnTo>
+                  <a:lnTo>
+                    <a:pt x="3101100" y="2463376"/>
+                  </a:lnTo>
+                  <a:lnTo>
+                    <a:pt x="3178734" y="2560546"/>
+                  </a:lnTo>
+                  <a:lnTo>
+                    <a:pt x="3256368" y="2649776"/>
+                  </a:lnTo>
+                  <a:lnTo>
+                    <a:pt x="3334002" y="2731715"/>
+                  </a:lnTo>
+                  <a:lnTo>
+                    <a:pt x="3411636" y="2788045"/>
+                  </a:lnTo>
+                  <a:lnTo>
+                    <a:pt x="3489270" y="2803338"/>
+                  </a:lnTo>
+                  <a:lnTo>
+                    <a:pt x="3566904" y="2818360"/>
+                  </a:lnTo>
+                  <a:lnTo>
+                    <a:pt x="3644538" y="2833116"/>
+                  </a:lnTo>
+                  <a:lnTo>
+                    <a:pt x="3722172" y="2847611"/>
+                  </a:lnTo>
+                  <a:lnTo>
+                    <a:pt x="3799806" y="2861850"/>
+                  </a:lnTo>
+                  <a:lnTo>
+                    <a:pt x="3877440" y="2875837"/>
+                  </a:lnTo>
+                  <a:lnTo>
+                    <a:pt x="3955074" y="2889577"/>
+                  </a:lnTo>
+                  <a:lnTo>
+                    <a:pt x="4032708" y="2903073"/>
+                  </a:lnTo>
+                  <a:lnTo>
+                    <a:pt x="4110342" y="2916331"/>
+                  </a:lnTo>
+                  <a:lnTo>
+                    <a:pt x="4187976" y="2929355"/>
+                  </a:lnTo>
+                  <a:lnTo>
+                    <a:pt x="4265610" y="2942148"/>
+                  </a:lnTo>
+                  <a:lnTo>
+                    <a:pt x="4343244" y="2954715"/>
+                  </a:lnTo>
+                  <a:lnTo>
+                    <a:pt x="4420879" y="2967059"/>
+                  </a:lnTo>
+                  <a:lnTo>
+                    <a:pt x="4498513" y="2979185"/>
+                  </a:lnTo>
+                  <a:lnTo>
+                    <a:pt x="4576147" y="2991097"/>
+                  </a:lnTo>
+                  <a:lnTo>
+                    <a:pt x="4653781" y="3002798"/>
+                  </a:lnTo>
+                  <a:lnTo>
+                    <a:pt x="4731415" y="3014292"/>
+                  </a:lnTo>
+                  <a:lnTo>
+                    <a:pt x="4809049" y="3025583"/>
+                  </a:lnTo>
+                  <a:lnTo>
+                    <a:pt x="4886683" y="3036674"/>
+                  </a:lnTo>
+                  <a:lnTo>
+                    <a:pt x="4964317" y="3047569"/>
+                  </a:lnTo>
+                  <a:lnTo>
+                    <a:pt x="5041951" y="3058271"/>
+                  </a:lnTo>
+                  <a:lnTo>
+                    <a:pt x="5119585" y="3068784"/>
+                  </a:lnTo>
+                  <a:lnTo>
+                    <a:pt x="5197219" y="3079111"/>
+                  </a:lnTo>
+                  <a:lnTo>
+                    <a:pt x="5274853" y="3089255"/>
+                  </a:lnTo>
+                  <a:lnTo>
+                    <a:pt x="5352487" y="3099220"/>
+                  </a:lnTo>
+                  <a:lnTo>
+                    <a:pt x="5430121" y="3109008"/>
+                  </a:lnTo>
+                  <a:lnTo>
+                    <a:pt x="5507755" y="3118624"/>
+                  </a:lnTo>
+                  <a:lnTo>
+                    <a:pt x="5585389" y="3128069"/>
+                  </a:lnTo>
+                  <a:lnTo>
+                    <a:pt x="5663023" y="3137347"/>
+                  </a:lnTo>
+                  <a:lnTo>
+                    <a:pt x="5740657" y="3146462"/>
+                  </a:lnTo>
+                  <a:lnTo>
+                    <a:pt x="5818291" y="3155415"/>
+                  </a:lnTo>
+                  <a:lnTo>
+                    <a:pt x="5895925" y="3164209"/>
+                  </a:lnTo>
+                  <a:lnTo>
+                    <a:pt x="5973559" y="3172848"/>
+                  </a:lnTo>
+                  <a:lnTo>
+                    <a:pt x="6051193" y="3181335"/>
+                  </a:lnTo>
+                  <a:lnTo>
+                    <a:pt x="6128827" y="3189671"/>
+                  </a:lnTo>
+                  <a:lnTo>
+                    <a:pt x="6206462" y="3197860"/>
+                  </a:lnTo>
+                  <a:lnTo>
+                    <a:pt x="6284096" y="3205904"/>
+                  </a:lnTo>
+                  <a:lnTo>
+                    <a:pt x="6361730" y="3213805"/>
+                  </a:lnTo>
+                  <a:lnTo>
+                    <a:pt x="6439364" y="3221567"/>
+                  </a:lnTo>
+                  <a:lnTo>
+                    <a:pt x="6516998" y="3229192"/>
+                  </a:lnTo>
+                  <a:lnTo>
+                    <a:pt x="6594632" y="3236681"/>
+                  </a:lnTo>
+                  <a:lnTo>
+                    <a:pt x="6672266" y="3244039"/>
+                  </a:lnTo>
+                  <a:lnTo>
+                    <a:pt x="6749900" y="3251266"/>
+                  </a:lnTo>
+                  <a:lnTo>
+                    <a:pt x="6827534" y="3258365"/>
+                  </a:lnTo>
+                  <a:lnTo>
+                    <a:pt x="6905168" y="3265339"/>
+                  </a:lnTo>
+                  <a:lnTo>
+                    <a:pt x="6982802" y="3272189"/>
+                  </a:lnTo>
+                  <a:lnTo>
+                    <a:pt x="7060436" y="3278918"/>
+                  </a:lnTo>
+                  <a:lnTo>
+                    <a:pt x="7138070" y="3285529"/>
+                  </a:lnTo>
+                  <a:lnTo>
+                    <a:pt x="7215704" y="3292022"/>
+                  </a:lnTo>
+                  <a:lnTo>
+                    <a:pt x="7293338" y="3298400"/>
+                  </a:lnTo>
+                  <a:lnTo>
+                    <a:pt x="7370972" y="3304666"/>
+                  </a:lnTo>
+                  <a:lnTo>
+                    <a:pt x="7370972" y="3641696"/>
+                  </a:lnTo>
+                  <a:lnTo>
+                    <a:pt x="7293338" y="3640722"/>
+                  </a:lnTo>
+                  <a:lnTo>
+                    <a:pt x="7215704" y="3639662"/>
+                  </a:lnTo>
+                  <a:lnTo>
+                    <a:pt x="7138070" y="3638506"/>
+                  </a:lnTo>
+                  <a:lnTo>
+                    <a:pt x="7060436" y="3637249"/>
+                  </a:lnTo>
+                  <a:lnTo>
+                    <a:pt x="6982802" y="3635879"/>
+                  </a:lnTo>
+                  <a:lnTo>
+                    <a:pt x="6905168" y="3634387"/>
+                  </a:lnTo>
+                  <a:lnTo>
+                    <a:pt x="6827534" y="3632763"/>
+                  </a:lnTo>
+                  <a:lnTo>
+                    <a:pt x="6749900" y="3630994"/>
+                  </a:lnTo>
+                  <a:lnTo>
+                    <a:pt x="6672266" y="3629068"/>
+                  </a:lnTo>
+                  <a:lnTo>
+                    <a:pt x="6594632" y="3626970"/>
+                  </a:lnTo>
+                  <a:lnTo>
+                    <a:pt x="6516998" y="3624686"/>
+                  </a:lnTo>
+                  <a:lnTo>
+                    <a:pt x="6439364" y="3622199"/>
+                  </a:lnTo>
+                  <a:lnTo>
+                    <a:pt x="6361730" y="3619490"/>
+                  </a:lnTo>
+                  <a:lnTo>
+                    <a:pt x="6284096" y="3616540"/>
+                  </a:lnTo>
+                  <a:lnTo>
+                    <a:pt x="6206462" y="3613328"/>
+                  </a:lnTo>
+                  <a:lnTo>
+                    <a:pt x="6128827" y="3609830"/>
+                  </a:lnTo>
+                  <a:lnTo>
+                    <a:pt x="6051193" y="3606020"/>
+                  </a:lnTo>
+                  <a:lnTo>
+                    <a:pt x="5973559" y="3601872"/>
+                  </a:lnTo>
+                  <a:lnTo>
+                    <a:pt x="5895925" y="3597354"/>
+                  </a:lnTo>
+                  <a:lnTo>
+                    <a:pt x="5818291" y="3592435"/>
+                  </a:lnTo>
+                  <a:lnTo>
+                    <a:pt x="5740657" y="3587078"/>
+                  </a:lnTo>
+                  <a:lnTo>
+                    <a:pt x="5663023" y="3581245"/>
+                  </a:lnTo>
+                  <a:lnTo>
+                    <a:pt x="5585389" y="3574892"/>
+                  </a:lnTo>
+                  <a:lnTo>
+                    <a:pt x="5507755" y="3567974"/>
+                  </a:lnTo>
+                  <a:lnTo>
+                    <a:pt x="5430121" y="3560440"/>
+                  </a:lnTo>
+                  <a:lnTo>
+                    <a:pt x="5352487" y="3552237"/>
+                  </a:lnTo>
+                  <a:lnTo>
+                    <a:pt x="5274853" y="3543303"/>
+                  </a:lnTo>
+                  <a:lnTo>
+                    <a:pt x="5197219" y="3533575"/>
+                  </a:lnTo>
+                  <a:lnTo>
+                    <a:pt x="5119585" y="3522980"/>
+                  </a:lnTo>
+                  <a:lnTo>
+                    <a:pt x="5041951" y="3511444"/>
+                  </a:lnTo>
+                  <a:lnTo>
+                    <a:pt x="4964317" y="3498881"/>
+                  </a:lnTo>
+                  <a:lnTo>
+                    <a:pt x="4886683" y="3485199"/>
+                  </a:lnTo>
+                  <a:lnTo>
+                    <a:pt x="4809049" y="3470301"/>
+                  </a:lnTo>
+                  <a:lnTo>
+                    <a:pt x="4731415" y="3454077"/>
+                  </a:lnTo>
+                  <a:lnTo>
+                    <a:pt x="4653781" y="3436410"/>
+                  </a:lnTo>
+                  <a:lnTo>
+                    <a:pt x="4576147" y="3417171"/>
+                  </a:lnTo>
+                  <a:lnTo>
+                    <a:pt x="4498513" y="3396220"/>
+                  </a:lnTo>
+                  <a:lnTo>
+                    <a:pt x="4420879" y="3373404"/>
+                  </a:lnTo>
+                  <a:lnTo>
+                    <a:pt x="4343244" y="3348559"/>
+                  </a:lnTo>
+                  <a:lnTo>
+                    <a:pt x="4265610" y="3321503"/>
+                  </a:lnTo>
+                  <a:lnTo>
+                    <a:pt x="4187976" y="3292040"/>
+                  </a:lnTo>
+                  <a:lnTo>
+                    <a:pt x="4110342" y="3259955"/>
+                  </a:lnTo>
+                  <a:lnTo>
+                    <a:pt x="4032708" y="3225016"/>
+                  </a:lnTo>
+                  <a:lnTo>
+                    <a:pt x="3955074" y="3186968"/>
+                  </a:lnTo>
+                  <a:lnTo>
+                    <a:pt x="3877440" y="3145535"/>
+                  </a:lnTo>
+                  <a:lnTo>
+                    <a:pt x="3799806" y="3100415"/>
+                  </a:lnTo>
+                  <a:lnTo>
+                    <a:pt x="3722172" y="3051280"/>
+                  </a:lnTo>
+                  <a:lnTo>
+                    <a:pt x="3644538" y="2997774"/>
+                  </a:lnTo>
+                  <a:lnTo>
+                    <a:pt x="3566904" y="2939507"/>
+                  </a:lnTo>
+                  <a:lnTo>
+                    <a:pt x="3489270" y="2876056"/>
+                  </a:lnTo>
+                  <a:lnTo>
+                    <a:pt x="3411636" y="2806960"/>
+                  </a:lnTo>
+                  <a:lnTo>
+                    <a:pt x="3334002" y="2772477"/>
+                  </a:lnTo>
+                  <a:lnTo>
+                    <a:pt x="3256368" y="2756629"/>
+                  </a:lnTo>
+                  <a:lnTo>
+                    <a:pt x="3178734" y="2740496"/>
+                  </a:lnTo>
+                  <a:lnTo>
+                    <a:pt x="3101100" y="2724072"/>
+                  </a:lnTo>
+                  <a:lnTo>
+                    <a:pt x="3023466" y="2707352"/>
+                  </a:lnTo>
+                  <a:lnTo>
+                    <a:pt x="2945832" y="2690332"/>
+                  </a:lnTo>
+                  <a:lnTo>
+                    <a:pt x="2868198" y="2673004"/>
+                  </a:lnTo>
+                  <a:lnTo>
+                    <a:pt x="2790564" y="2655365"/>
+                  </a:lnTo>
+                  <a:lnTo>
+                    <a:pt x="2712930" y="2637408"/>
+                  </a:lnTo>
+                  <a:lnTo>
+                    <a:pt x="2635295" y="2619128"/>
+                  </a:lnTo>
+                  <a:lnTo>
+                    <a:pt x="2557661" y="2600519"/>
+                  </a:lnTo>
+                  <a:lnTo>
+                    <a:pt x="2480027" y="2581575"/>
+                  </a:lnTo>
+                  <a:lnTo>
+                    <a:pt x="2402393" y="2562289"/>
+                  </a:lnTo>
+                  <a:lnTo>
+                    <a:pt x="2324759" y="2542656"/>
+                  </a:lnTo>
+                  <a:lnTo>
+                    <a:pt x="2247125" y="2522670"/>
+                  </a:lnTo>
+                  <a:lnTo>
+                    <a:pt x="2169491" y="2502324"/>
+                  </a:lnTo>
+                  <a:lnTo>
+                    <a:pt x="2091857" y="2481612"/>
+                  </a:lnTo>
+                  <a:lnTo>
+                    <a:pt x="2014223" y="2460526"/>
+                  </a:lnTo>
+                  <a:lnTo>
+                    <a:pt x="1936589" y="2439061"/>
+                  </a:lnTo>
+                  <a:lnTo>
+                    <a:pt x="1858955" y="2417210"/>
+                  </a:lnTo>
+                  <a:lnTo>
+                    <a:pt x="1781321" y="2394965"/>
+                  </a:lnTo>
+                  <a:lnTo>
+                    <a:pt x="1703687" y="2372319"/>
+                  </a:lnTo>
+                  <a:lnTo>
+                    <a:pt x="1626053" y="2349266"/>
+                  </a:lnTo>
+                  <a:lnTo>
+                    <a:pt x="1548419" y="2325797"/>
+                  </a:lnTo>
+                  <a:lnTo>
+                    <a:pt x="1470785" y="2301906"/>
+                  </a:lnTo>
+                  <a:lnTo>
+                    <a:pt x="1393151" y="2277585"/>
+                  </a:lnTo>
+                  <a:lnTo>
+                    <a:pt x="1315517" y="2252826"/>
+                  </a:lnTo>
+                  <a:lnTo>
+                    <a:pt x="1237883" y="2227621"/>
+                  </a:lnTo>
+                  <a:lnTo>
+                    <a:pt x="1160249" y="2201963"/>
+                  </a:lnTo>
+                  <a:lnTo>
+                    <a:pt x="1082615" y="2175842"/>
+                  </a:lnTo>
+                  <a:lnTo>
+                    <a:pt x="1004981" y="2149251"/>
+                  </a:lnTo>
+                  <a:lnTo>
+                    <a:pt x="927346" y="2122181"/>
+                  </a:lnTo>
+                  <a:lnTo>
+                    <a:pt x="849712" y="2094624"/>
+                  </a:lnTo>
+                  <a:lnTo>
+                    <a:pt x="772078" y="2066571"/>
+                  </a:lnTo>
+                  <a:lnTo>
+                    <a:pt x="694444" y="2038012"/>
+                  </a:lnTo>
+                  <a:lnTo>
+                    <a:pt x="616810" y="2008939"/>
+                  </a:lnTo>
+                  <a:lnTo>
+                    <a:pt x="539176" y="1979343"/>
+                  </a:lnTo>
+                  <a:lnTo>
+                    <a:pt x="461542" y="1949214"/>
+                  </a:lnTo>
+                  <a:lnTo>
+                    <a:pt x="383908" y="1918542"/>
+                  </a:lnTo>
+                  <a:lnTo>
+                    <a:pt x="306274" y="1887318"/>
+                  </a:lnTo>
+                  <a:lnTo>
+                    <a:pt x="228640" y="1855532"/>
+                  </a:lnTo>
+                  <a:lnTo>
+                    <a:pt x="151006" y="1823174"/>
+                  </a:lnTo>
+                  <a:lnTo>
+                    <a:pt x="73372" y="1790233"/>
+                  </a:lnTo>
+                  <a:lnTo>
+                    <a:pt x="0" y="1758539"/>
+                  </a:lnTo>
+                  <a:lnTo>
+                    <a:pt x="0" y="0"/>
                   </a:lnTo>
                   <a:close/>
                 </a:path>
@@ -3537,228 +3534,222 @@
           </p:nvSpPr>
           <p:spPr>
             <a:xfrm>
-              <a:off x="2730893" y="1896563"/>
-              <a:ext cx="5457597" cy="3331582"/>
+              <a:off x="2897041" y="1896563"/>
+              <a:ext cx="5291449" cy="3304666"/>
             </a:xfrm>
             <a:custGeom>
               <a:avLst/>
               <a:pathLst>
-                <a:path w="5457597" h="3331582">
+                <a:path w="5291449" h="3304666">
                   <a:moveTo>
                     <a:pt x="0" y="0"/>
                   </a:moveTo>
                   <a:lnTo>
-                    <a:pt x="23214" y="83822"/>
-                  </a:lnTo>
-                  <a:lnTo>
-                    <a:pt x="100848" y="343729"/>
-                  </a:lnTo>
-                  <a:lnTo>
-                    <a:pt x="178482" y="584707"/>
-                  </a:lnTo>
-                  <a:lnTo>
-                    <a:pt x="256116" y="808136"/>
-                  </a:lnTo>
-                  <a:lnTo>
-                    <a:pt x="333750" y="1015293"/>
-                  </a:lnTo>
-                  <a:lnTo>
-                    <a:pt x="411384" y="1207363"/>
-                  </a:lnTo>
-                  <a:lnTo>
-                    <a:pt x="489018" y="1385445"/>
-                  </a:lnTo>
-                  <a:lnTo>
-                    <a:pt x="566652" y="1550559"/>
-                  </a:lnTo>
-                  <a:lnTo>
-                    <a:pt x="644286" y="1703647"/>
-                  </a:lnTo>
-                  <a:lnTo>
-                    <a:pt x="721920" y="1845587"/>
-                  </a:lnTo>
-                  <a:lnTo>
-                    <a:pt x="799554" y="1977189"/>
-                  </a:lnTo>
-                  <a:lnTo>
-                    <a:pt x="877188" y="2099207"/>
-                  </a:lnTo>
-                  <a:lnTo>
-                    <a:pt x="954822" y="2212340"/>
-                  </a:lnTo>
-                  <a:lnTo>
-                    <a:pt x="1032456" y="2317233"/>
-                  </a:lnTo>
-                  <a:lnTo>
-                    <a:pt x="1110090" y="2414487"/>
-                  </a:lnTo>
-                  <a:lnTo>
-                    <a:pt x="1187725" y="2504658"/>
-                  </a:lnTo>
-                  <a:lnTo>
-                    <a:pt x="1265359" y="2588262"/>
-                  </a:lnTo>
-                  <a:lnTo>
-                    <a:pt x="1342993" y="2665778"/>
-                  </a:lnTo>
-                  <a:lnTo>
-                    <a:pt x="1420627" y="2737648"/>
-                  </a:lnTo>
-                  <a:lnTo>
-                    <a:pt x="1498261" y="2788490"/>
-                  </a:lnTo>
-                  <a:lnTo>
-                    <a:pt x="1575895" y="2805105"/>
-                  </a:lnTo>
-                  <a:lnTo>
-                    <a:pt x="1653529" y="2821401"/>
-                  </a:lnTo>
-                  <a:lnTo>
-                    <a:pt x="1731163" y="2837383"/>
-                  </a:lnTo>
-                  <a:lnTo>
-                    <a:pt x="1808797" y="2853058"/>
-                  </a:lnTo>
-                  <a:lnTo>
-                    <a:pt x="1886431" y="2868431"/>
-                  </a:lnTo>
-                  <a:lnTo>
-                    <a:pt x="1964065" y="2883509"/>
-                  </a:lnTo>
-                  <a:lnTo>
-                    <a:pt x="2041699" y="2898297"/>
-                  </a:lnTo>
-                  <a:lnTo>
-                    <a:pt x="2119333" y="2912801"/>
-                  </a:lnTo>
-                  <a:lnTo>
-                    <a:pt x="2196967" y="2927026"/>
-                  </a:lnTo>
-                  <a:lnTo>
-                    <a:pt x="2274601" y="2940977"/>
-                  </a:lnTo>
-                  <a:lnTo>
-                    <a:pt x="2352235" y="2954660"/>
-                  </a:lnTo>
-                  <a:lnTo>
-                    <a:pt x="2429869" y="2968080"/>
-                  </a:lnTo>
-                  <a:lnTo>
-                    <a:pt x="2507503" y="2981242"/>
-                  </a:lnTo>
-                  <a:lnTo>
-                    <a:pt x="2585137" y="2994151"/>
-                  </a:lnTo>
-                  <a:lnTo>
-                    <a:pt x="2662771" y="3006812"/>
-                  </a:lnTo>
-                  <a:lnTo>
-                    <a:pt x="2740405" y="3019229"/>
-                  </a:lnTo>
-                  <a:lnTo>
-                    <a:pt x="2818039" y="3031408"/>
-                  </a:lnTo>
-                  <a:lnTo>
-                    <a:pt x="2895674" y="3043352"/>
-                  </a:lnTo>
-                  <a:lnTo>
-                    <a:pt x="2973308" y="3055067"/>
-                  </a:lnTo>
-                  <a:lnTo>
-                    <a:pt x="3050942" y="3066556"/>
-                  </a:lnTo>
-                  <a:lnTo>
-                    <a:pt x="3128576" y="3077825"/>
-                  </a:lnTo>
-                  <a:lnTo>
-                    <a:pt x="3206210" y="3088877"/>
-                  </a:lnTo>
-                  <a:lnTo>
-                    <a:pt x="3283844" y="3099716"/>
-                  </a:lnTo>
-                  <a:lnTo>
-                    <a:pt x="3361478" y="3110348"/>
-                  </a:lnTo>
-                  <a:lnTo>
-                    <a:pt x="3439112" y="3120774"/>
-                  </a:lnTo>
-                  <a:lnTo>
-                    <a:pt x="3516746" y="3131000"/>
-                  </a:lnTo>
-                  <a:lnTo>
-                    <a:pt x="3594380" y="3141030"/>
-                  </a:lnTo>
-                  <a:lnTo>
-                    <a:pt x="3672014" y="3150867"/>
-                  </a:lnTo>
-                  <a:lnTo>
-                    <a:pt x="3749648" y="3160514"/>
-                  </a:lnTo>
-                  <a:lnTo>
-                    <a:pt x="3827282" y="3169976"/>
-                  </a:lnTo>
-                  <a:lnTo>
-                    <a:pt x="3904916" y="3179256"/>
-                  </a:lnTo>
-                  <a:lnTo>
-                    <a:pt x="3982550" y="3188358"/>
-                  </a:lnTo>
-                  <a:lnTo>
-                    <a:pt x="4060184" y="3197285"/>
-                  </a:lnTo>
-                  <a:lnTo>
-                    <a:pt x="4137818" y="3206040"/>
-                  </a:lnTo>
-                  <a:lnTo>
-                    <a:pt x="4215452" y="3214627"/>
-                  </a:lnTo>
-                  <a:lnTo>
-                    <a:pt x="4293086" y="3223049"/>
-                  </a:lnTo>
-                  <a:lnTo>
-                    <a:pt x="4370720" y="3231308"/>
-                  </a:lnTo>
-                  <a:lnTo>
-                    <a:pt x="4448354" y="3239409"/>
-                  </a:lnTo>
-                  <a:lnTo>
-                    <a:pt x="4525988" y="3247354"/>
-                  </a:lnTo>
-                  <a:lnTo>
-                    <a:pt x="4603623" y="3255147"/>
-                  </a:lnTo>
-                  <a:lnTo>
-                    <a:pt x="4681257" y="3262789"/>
-                  </a:lnTo>
-                  <a:lnTo>
-                    <a:pt x="4758891" y="3270285"/>
-                  </a:lnTo>
-                  <a:lnTo>
-                    <a:pt x="4836525" y="3277637"/>
-                  </a:lnTo>
-                  <a:lnTo>
-                    <a:pt x="4914159" y="3284847"/>
-                  </a:lnTo>
-                  <a:lnTo>
-                    <a:pt x="4991793" y="3291918"/>
-                  </a:lnTo>
-                  <a:lnTo>
-                    <a:pt x="5069427" y="3298854"/>
-                  </a:lnTo>
-                  <a:lnTo>
-                    <a:pt x="5147061" y="3305656"/>
-                  </a:lnTo>
-                  <a:lnTo>
-                    <a:pt x="5224695" y="3312328"/>
-                  </a:lnTo>
-                  <a:lnTo>
-                    <a:pt x="5302329" y="3318871"/>
-                  </a:lnTo>
-                  <a:lnTo>
-                    <a:pt x="5379963" y="3325288"/>
-                  </a:lnTo>
-                  <a:lnTo>
-                    <a:pt x="5457597" y="3331582"/>
+                    <a:pt x="12333" y="50913"/>
+                  </a:lnTo>
+                  <a:lnTo>
+                    <a:pt x="89968" y="345192"/>
+                  </a:lnTo>
+                  <a:lnTo>
+                    <a:pt x="167602" y="615428"/>
+                  </a:lnTo>
+                  <a:lnTo>
+                    <a:pt x="245236" y="863584"/>
+                  </a:lnTo>
+                  <a:lnTo>
+                    <a:pt x="322870" y="1091465"/>
+                  </a:lnTo>
+                  <a:lnTo>
+                    <a:pt x="400504" y="1300726"/>
+                  </a:lnTo>
+                  <a:lnTo>
+                    <a:pt x="478138" y="1492890"/>
+                  </a:lnTo>
+                  <a:lnTo>
+                    <a:pt x="555772" y="1669353"/>
+                  </a:lnTo>
+                  <a:lnTo>
+                    <a:pt x="633406" y="1831398"/>
+                  </a:lnTo>
+                  <a:lnTo>
+                    <a:pt x="711040" y="1980203"/>
+                  </a:lnTo>
+                  <a:lnTo>
+                    <a:pt x="788674" y="2116850"/>
+                  </a:lnTo>
+                  <a:lnTo>
+                    <a:pt x="866308" y="2242332"/>
+                  </a:lnTo>
+                  <a:lnTo>
+                    <a:pt x="943942" y="2357562"/>
+                  </a:lnTo>
+                  <a:lnTo>
+                    <a:pt x="1021576" y="2463376"/>
+                  </a:lnTo>
+                  <a:lnTo>
+                    <a:pt x="1099210" y="2560546"/>
+                  </a:lnTo>
+                  <a:lnTo>
+                    <a:pt x="1176844" y="2649776"/>
+                  </a:lnTo>
+                  <a:lnTo>
+                    <a:pt x="1254478" y="2731715"/>
+                  </a:lnTo>
+                  <a:lnTo>
+                    <a:pt x="1332112" y="2788045"/>
+                  </a:lnTo>
+                  <a:lnTo>
+                    <a:pt x="1409746" y="2803338"/>
+                  </a:lnTo>
+                  <a:lnTo>
+                    <a:pt x="1487380" y="2818360"/>
+                  </a:lnTo>
+                  <a:lnTo>
+                    <a:pt x="1565014" y="2833116"/>
+                  </a:lnTo>
+                  <a:lnTo>
+                    <a:pt x="1642648" y="2847611"/>
+                  </a:lnTo>
+                  <a:lnTo>
+                    <a:pt x="1720282" y="2861850"/>
+                  </a:lnTo>
+                  <a:lnTo>
+                    <a:pt x="1797917" y="2875837"/>
+                  </a:lnTo>
+                  <a:lnTo>
+                    <a:pt x="1875551" y="2889577"/>
+                  </a:lnTo>
+                  <a:lnTo>
+                    <a:pt x="1953185" y="2903073"/>
+                  </a:lnTo>
+                  <a:lnTo>
+                    <a:pt x="2030819" y="2916331"/>
+                  </a:lnTo>
+                  <a:lnTo>
+                    <a:pt x="2108453" y="2929355"/>
+                  </a:lnTo>
+                  <a:lnTo>
+                    <a:pt x="2186087" y="2942148"/>
+                  </a:lnTo>
+                  <a:lnTo>
+                    <a:pt x="2263721" y="2954715"/>
+                  </a:lnTo>
+                  <a:lnTo>
+                    <a:pt x="2341355" y="2967059"/>
+                  </a:lnTo>
+                  <a:lnTo>
+                    <a:pt x="2418989" y="2979185"/>
+                  </a:lnTo>
+                  <a:lnTo>
+                    <a:pt x="2496623" y="2991097"/>
+                  </a:lnTo>
+                  <a:lnTo>
+                    <a:pt x="2574257" y="3002798"/>
+                  </a:lnTo>
+                  <a:lnTo>
+                    <a:pt x="2651891" y="3014292"/>
+                  </a:lnTo>
+                  <a:lnTo>
+                    <a:pt x="2729525" y="3025583"/>
+                  </a:lnTo>
+                  <a:lnTo>
+                    <a:pt x="2807159" y="3036674"/>
+                  </a:lnTo>
+                  <a:lnTo>
+                    <a:pt x="2884793" y="3047569"/>
+                  </a:lnTo>
+                  <a:lnTo>
+                    <a:pt x="2962427" y="3058271"/>
+                  </a:lnTo>
+                  <a:lnTo>
+                    <a:pt x="3040061" y="3068784"/>
+                  </a:lnTo>
+                  <a:lnTo>
+                    <a:pt x="3117695" y="3079111"/>
+                  </a:lnTo>
+                  <a:lnTo>
+                    <a:pt x="3195329" y="3089255"/>
+                  </a:lnTo>
+                  <a:lnTo>
+                    <a:pt x="3272963" y="3099220"/>
+                  </a:lnTo>
+                  <a:lnTo>
+                    <a:pt x="3350597" y="3109008"/>
+                  </a:lnTo>
+                  <a:lnTo>
+                    <a:pt x="3428231" y="3118624"/>
+                  </a:lnTo>
+                  <a:lnTo>
+                    <a:pt x="3505866" y="3128069"/>
+                  </a:lnTo>
+                  <a:lnTo>
+                    <a:pt x="3583500" y="3137347"/>
+                  </a:lnTo>
+                  <a:lnTo>
+                    <a:pt x="3661134" y="3146462"/>
+                  </a:lnTo>
+                  <a:lnTo>
+                    <a:pt x="3738768" y="3155415"/>
+                  </a:lnTo>
+                  <a:lnTo>
+                    <a:pt x="3816402" y="3164209"/>
+                  </a:lnTo>
+                  <a:lnTo>
+                    <a:pt x="3894036" y="3172848"/>
+                  </a:lnTo>
+                  <a:lnTo>
+                    <a:pt x="3971670" y="3181335"/>
+                  </a:lnTo>
+                  <a:lnTo>
+                    <a:pt x="4049304" y="3189671"/>
+                  </a:lnTo>
+                  <a:lnTo>
+                    <a:pt x="4126938" y="3197860"/>
+                  </a:lnTo>
+                  <a:lnTo>
+                    <a:pt x="4204572" y="3205904"/>
+                  </a:lnTo>
+                  <a:lnTo>
+                    <a:pt x="4282206" y="3213805"/>
+                  </a:lnTo>
+                  <a:lnTo>
+                    <a:pt x="4359840" y="3221567"/>
+                  </a:lnTo>
+                  <a:lnTo>
+                    <a:pt x="4437474" y="3229192"/>
+                  </a:lnTo>
+                  <a:lnTo>
+                    <a:pt x="4515108" y="3236681"/>
+                  </a:lnTo>
+                  <a:lnTo>
+                    <a:pt x="4592742" y="3244039"/>
+                  </a:lnTo>
+                  <a:lnTo>
+                    <a:pt x="4670376" y="3251266"/>
+                  </a:lnTo>
+                  <a:lnTo>
+                    <a:pt x="4748010" y="3258365"/>
+                  </a:lnTo>
+                  <a:lnTo>
+                    <a:pt x="4825644" y="3265339"/>
+                  </a:lnTo>
+                  <a:lnTo>
+                    <a:pt x="4903278" y="3272189"/>
+                  </a:lnTo>
+                  <a:lnTo>
+                    <a:pt x="4980912" y="3278918"/>
+                  </a:lnTo>
+                  <a:lnTo>
+                    <a:pt x="5058546" y="3285529"/>
+                  </a:lnTo>
+                  <a:lnTo>
+                    <a:pt x="5136180" y="3292022"/>
+                  </a:lnTo>
+                  <a:lnTo>
+                    <a:pt x="5213815" y="3298400"/>
+                  </a:lnTo>
+                  <a:lnTo>
+                    <a:pt x="5291449" y="3304666"/>
                   </a:lnTo>
                 </a:path>
               </a:pathLst>
@@ -3778,297 +3769,297 @@
           </p:nvSpPr>
           <p:spPr>
             <a:xfrm>
-              <a:off x="817517" y="3520986"/>
-              <a:ext cx="7370972" cy="2010282"/>
+              <a:off x="817517" y="3655103"/>
+              <a:ext cx="7370972" cy="1883157"/>
             </a:xfrm>
             <a:custGeom>
               <a:avLst/>
               <a:pathLst>
-                <a:path w="7370972" h="2010282">
+                <a:path w="7370972" h="1883157">
                   <a:moveTo>
-                    <a:pt x="7370972" y="2010282"/>
+                    <a:pt x="7370972" y="1883157"/>
                   </a:moveTo>
                   <a:lnTo>
-                    <a:pt x="7293338" y="2008873"/>
-                  </a:lnTo>
-                  <a:lnTo>
-                    <a:pt x="7215704" y="2007353"/>
-                  </a:lnTo>
-                  <a:lnTo>
-                    <a:pt x="7138070" y="2005714"/>
-                  </a:lnTo>
-                  <a:lnTo>
-                    <a:pt x="7060436" y="2003947"/>
-                  </a:lnTo>
-                  <a:lnTo>
-                    <a:pt x="6982802" y="2002040"/>
-                  </a:lnTo>
-                  <a:lnTo>
-                    <a:pt x="6905168" y="1999983"/>
-                  </a:lnTo>
-                  <a:lnTo>
-                    <a:pt x="6827534" y="1997766"/>
-                  </a:lnTo>
-                  <a:lnTo>
-                    <a:pt x="6749900" y="1995373"/>
-                  </a:lnTo>
-                  <a:lnTo>
-                    <a:pt x="6672266" y="1992793"/>
-                  </a:lnTo>
-                  <a:lnTo>
-                    <a:pt x="6594632" y="1990011"/>
-                  </a:lnTo>
-                  <a:lnTo>
-                    <a:pt x="6516998" y="1987009"/>
-                  </a:lnTo>
-                  <a:lnTo>
-                    <a:pt x="6439364" y="1983772"/>
-                  </a:lnTo>
-                  <a:lnTo>
-                    <a:pt x="6361730" y="1980281"/>
-                  </a:lnTo>
-                  <a:lnTo>
-                    <a:pt x="6284096" y="1976516"/>
-                  </a:lnTo>
-                  <a:lnTo>
-                    <a:pt x="6206462" y="1972454"/>
-                  </a:lnTo>
-                  <a:lnTo>
-                    <a:pt x="6128827" y="1968074"/>
-                  </a:lnTo>
-                  <a:lnTo>
-                    <a:pt x="6051193" y="1963350"/>
-                  </a:lnTo>
-                  <a:lnTo>
-                    <a:pt x="5973559" y="1958255"/>
-                  </a:lnTo>
-                  <a:lnTo>
-                    <a:pt x="5895925" y="1952759"/>
-                  </a:lnTo>
-                  <a:lnTo>
-                    <a:pt x="5818291" y="1946832"/>
-                  </a:lnTo>
-                  <a:lnTo>
-                    <a:pt x="5740657" y="1940439"/>
-                  </a:lnTo>
-                  <a:lnTo>
-                    <a:pt x="5663023" y="1933544"/>
-                  </a:lnTo>
-                  <a:lnTo>
-                    <a:pt x="5585389" y="1926107"/>
-                  </a:lnTo>
-                  <a:lnTo>
-                    <a:pt x="5507755" y="1918086"/>
-                  </a:lnTo>
-                  <a:lnTo>
-                    <a:pt x="5430121" y="1909436"/>
-                  </a:lnTo>
-                  <a:lnTo>
-                    <a:pt x="5352487" y="1900106"/>
-                  </a:lnTo>
-                  <a:lnTo>
-                    <a:pt x="5274853" y="1890042"/>
-                  </a:lnTo>
-                  <a:lnTo>
-                    <a:pt x="5197219" y="1879189"/>
-                  </a:lnTo>
-                  <a:lnTo>
-                    <a:pt x="5119585" y="1867483"/>
-                  </a:lnTo>
-                  <a:lnTo>
-                    <a:pt x="5041951" y="1854857"/>
-                  </a:lnTo>
-                  <a:lnTo>
-                    <a:pt x="4964317" y="1841240"/>
-                  </a:lnTo>
-                  <a:lnTo>
-                    <a:pt x="4886683" y="1826553"/>
-                  </a:lnTo>
-                  <a:lnTo>
-                    <a:pt x="4809049" y="1810713"/>
-                  </a:lnTo>
-                  <a:lnTo>
-                    <a:pt x="4731415" y="1793628"/>
-                  </a:lnTo>
-                  <a:lnTo>
-                    <a:pt x="4653781" y="1775202"/>
-                  </a:lnTo>
-                  <a:lnTo>
-                    <a:pt x="4576147" y="1755328"/>
-                  </a:lnTo>
-                  <a:lnTo>
-                    <a:pt x="4498513" y="1733893"/>
-                  </a:lnTo>
-                  <a:lnTo>
-                    <a:pt x="4420879" y="1710774"/>
-                  </a:lnTo>
-                  <a:lnTo>
-                    <a:pt x="4343244" y="1685840"/>
-                  </a:lnTo>
-                  <a:lnTo>
-                    <a:pt x="4265610" y="1658947"/>
-                  </a:lnTo>
-                  <a:lnTo>
-                    <a:pt x="4187976" y="1629941"/>
-                  </a:lnTo>
-                  <a:lnTo>
-                    <a:pt x="4110342" y="1598658"/>
-                  </a:lnTo>
-                  <a:lnTo>
-                    <a:pt x="4032708" y="1564917"/>
-                  </a:lnTo>
-                  <a:lnTo>
-                    <a:pt x="3955074" y="1528525"/>
-                  </a:lnTo>
-                  <a:lnTo>
-                    <a:pt x="3877440" y="1489276"/>
-                  </a:lnTo>
-                  <a:lnTo>
-                    <a:pt x="3799806" y="1446943"/>
-                  </a:lnTo>
-                  <a:lnTo>
-                    <a:pt x="3722172" y="1401285"/>
-                  </a:lnTo>
-                  <a:lnTo>
-                    <a:pt x="3644538" y="1352041"/>
-                  </a:lnTo>
-                  <a:lnTo>
-                    <a:pt x="3566904" y="1298929"/>
-                  </a:lnTo>
-                  <a:lnTo>
-                    <a:pt x="3489270" y="1241645"/>
-                  </a:lnTo>
-                  <a:lnTo>
-                    <a:pt x="3411636" y="1179862"/>
-                  </a:lnTo>
-                  <a:lnTo>
-                    <a:pt x="3334002" y="1147127"/>
-                  </a:lnTo>
-                  <a:lnTo>
-                    <a:pt x="3256368" y="1129854"/>
-                  </a:lnTo>
-                  <a:lnTo>
-                    <a:pt x="3178734" y="1112242"/>
-                  </a:lnTo>
-                  <a:lnTo>
-                    <a:pt x="3101100" y="1094286"/>
-                  </a:lnTo>
-                  <a:lnTo>
-                    <a:pt x="3023466" y="1075977"/>
-                  </a:lnTo>
-                  <a:lnTo>
-                    <a:pt x="2945832" y="1057310"/>
-                  </a:lnTo>
-                  <a:lnTo>
-                    <a:pt x="2868198" y="1038276"/>
-                  </a:lnTo>
-                  <a:lnTo>
-                    <a:pt x="2790564" y="1018869"/>
-                  </a:lnTo>
-                  <a:lnTo>
-                    <a:pt x="2712930" y="999082"/>
-                  </a:lnTo>
-                  <a:lnTo>
-                    <a:pt x="2635295" y="978907"/>
-                  </a:lnTo>
-                  <a:lnTo>
-                    <a:pt x="2557661" y="958337"/>
-                  </a:lnTo>
-                  <a:lnTo>
-                    <a:pt x="2480027" y="937363"/>
-                  </a:lnTo>
-                  <a:lnTo>
-                    <a:pt x="2402393" y="915978"/>
-                  </a:lnTo>
-                  <a:lnTo>
-                    <a:pt x="2324759" y="894174"/>
-                  </a:lnTo>
-                  <a:lnTo>
-                    <a:pt x="2247125" y="871942"/>
-                  </a:lnTo>
-                  <a:lnTo>
-                    <a:pt x="2169491" y="849275"/>
-                  </a:lnTo>
-                  <a:lnTo>
-                    <a:pt x="2091857" y="826163"/>
-                  </a:lnTo>
-                  <a:lnTo>
-                    <a:pt x="2014223" y="802598"/>
-                  </a:lnTo>
-                  <a:lnTo>
-                    <a:pt x="1936589" y="778572"/>
-                  </a:lnTo>
-                  <a:lnTo>
-                    <a:pt x="1858955" y="754074"/>
-                  </a:lnTo>
-                  <a:lnTo>
-                    <a:pt x="1781321" y="729096"/>
-                  </a:lnTo>
-                  <a:lnTo>
-                    <a:pt x="1703687" y="703628"/>
-                  </a:lnTo>
-                  <a:lnTo>
-                    <a:pt x="1626053" y="677661"/>
-                  </a:lnTo>
-                  <a:lnTo>
-                    <a:pt x="1548419" y="651185"/>
-                  </a:lnTo>
-                  <a:lnTo>
-                    <a:pt x="1470785" y="624190"/>
-                  </a:lnTo>
-                  <a:lnTo>
-                    <a:pt x="1393151" y="596665"/>
-                  </a:lnTo>
-                  <a:lnTo>
-                    <a:pt x="1315517" y="568602"/>
-                  </a:lnTo>
-                  <a:lnTo>
-                    <a:pt x="1237883" y="539987"/>
-                  </a:lnTo>
-                  <a:lnTo>
-                    <a:pt x="1160249" y="510813"/>
-                  </a:lnTo>
-                  <a:lnTo>
-                    <a:pt x="1082615" y="481066"/>
-                  </a:lnTo>
-                  <a:lnTo>
-                    <a:pt x="1004981" y="450736"/>
-                  </a:lnTo>
-                  <a:lnTo>
-                    <a:pt x="927346" y="419811"/>
-                  </a:lnTo>
-                  <a:lnTo>
-                    <a:pt x="849712" y="388280"/>
-                  </a:lnTo>
-                  <a:lnTo>
-                    <a:pt x="772078" y="356131"/>
-                  </a:lnTo>
-                  <a:lnTo>
-                    <a:pt x="694444" y="323352"/>
-                  </a:lnTo>
-                  <a:lnTo>
-                    <a:pt x="616810" y="289930"/>
-                  </a:lnTo>
-                  <a:lnTo>
-                    <a:pt x="539176" y="255853"/>
-                  </a:lnTo>
-                  <a:lnTo>
-                    <a:pt x="461542" y="221108"/>
-                  </a:lnTo>
-                  <a:lnTo>
-                    <a:pt x="383908" y="185681"/>
-                  </a:lnTo>
-                  <a:lnTo>
-                    <a:pt x="306274" y="149561"/>
-                  </a:lnTo>
-                  <a:lnTo>
-                    <a:pt x="228640" y="112732"/>
-                  </a:lnTo>
-                  <a:lnTo>
-                    <a:pt x="151006" y="75181"/>
-                  </a:lnTo>
-                  <a:lnTo>
-                    <a:pt x="73372" y="36894"/>
+                    <a:pt x="7293338" y="1882183"/>
+                  </a:lnTo>
+                  <a:lnTo>
+                    <a:pt x="7215704" y="1881122"/>
+                  </a:lnTo>
+                  <a:lnTo>
+                    <a:pt x="7138070" y="1879967"/>
+                  </a:lnTo>
+                  <a:lnTo>
+                    <a:pt x="7060436" y="1878709"/>
+                  </a:lnTo>
+                  <a:lnTo>
+                    <a:pt x="6982802" y="1877339"/>
+                  </a:lnTo>
+                  <a:lnTo>
+                    <a:pt x="6905168" y="1875848"/>
+                  </a:lnTo>
+                  <a:lnTo>
+                    <a:pt x="6827534" y="1874223"/>
+                  </a:lnTo>
+                  <a:lnTo>
+                    <a:pt x="6749900" y="1872454"/>
+                  </a:lnTo>
+                  <a:lnTo>
+                    <a:pt x="6672266" y="1870528"/>
+                  </a:lnTo>
+                  <a:lnTo>
+                    <a:pt x="6594632" y="1868431"/>
+                  </a:lnTo>
+                  <a:lnTo>
+                    <a:pt x="6516998" y="1866146"/>
+                  </a:lnTo>
+                  <a:lnTo>
+                    <a:pt x="6439364" y="1863659"/>
+                  </a:lnTo>
+                  <a:lnTo>
+                    <a:pt x="6361730" y="1860950"/>
+                  </a:lnTo>
+                  <a:lnTo>
+                    <a:pt x="6284096" y="1858000"/>
+                  </a:lnTo>
+                  <a:lnTo>
+                    <a:pt x="6206462" y="1854788"/>
+                  </a:lnTo>
+                  <a:lnTo>
+                    <a:pt x="6128827" y="1851290"/>
+                  </a:lnTo>
+                  <a:lnTo>
+                    <a:pt x="6051193" y="1847480"/>
+                  </a:lnTo>
+                  <a:lnTo>
+                    <a:pt x="5973559" y="1843332"/>
+                  </a:lnTo>
+                  <a:lnTo>
+                    <a:pt x="5895925" y="1838815"/>
+                  </a:lnTo>
+                  <a:lnTo>
+                    <a:pt x="5818291" y="1833896"/>
+                  </a:lnTo>
+                  <a:lnTo>
+                    <a:pt x="5740657" y="1828539"/>
+                  </a:lnTo>
+                  <a:lnTo>
+                    <a:pt x="5663023" y="1822705"/>
+                  </a:lnTo>
+                  <a:lnTo>
+                    <a:pt x="5585389" y="1816352"/>
+                  </a:lnTo>
+                  <a:lnTo>
+                    <a:pt x="5507755" y="1809434"/>
+                  </a:lnTo>
+                  <a:lnTo>
+                    <a:pt x="5430121" y="1801901"/>
+                  </a:lnTo>
+                  <a:lnTo>
+                    <a:pt x="5352487" y="1793697"/>
+                  </a:lnTo>
+                  <a:lnTo>
+                    <a:pt x="5274853" y="1784763"/>
+                  </a:lnTo>
+                  <a:lnTo>
+                    <a:pt x="5197219" y="1775035"/>
+                  </a:lnTo>
+                  <a:lnTo>
+                    <a:pt x="5119585" y="1764441"/>
+                  </a:lnTo>
+                  <a:lnTo>
+                    <a:pt x="5041951" y="1752904"/>
+                  </a:lnTo>
+                  <a:lnTo>
+                    <a:pt x="4964317" y="1740341"/>
+                  </a:lnTo>
+                  <a:lnTo>
+                    <a:pt x="4886683" y="1726660"/>
+                  </a:lnTo>
+                  <a:lnTo>
+                    <a:pt x="4809049" y="1711762"/>
+                  </a:lnTo>
+                  <a:lnTo>
+                    <a:pt x="4731415" y="1695538"/>
+                  </a:lnTo>
+                  <a:lnTo>
+                    <a:pt x="4653781" y="1677870"/>
+                  </a:lnTo>
+                  <a:lnTo>
+                    <a:pt x="4576147" y="1658631"/>
+                  </a:lnTo>
+                  <a:lnTo>
+                    <a:pt x="4498513" y="1637680"/>
+                  </a:lnTo>
+                  <a:lnTo>
+                    <a:pt x="4420879" y="1614865"/>
+                  </a:lnTo>
+                  <a:lnTo>
+                    <a:pt x="4343244" y="1590019"/>
+                  </a:lnTo>
+                  <a:lnTo>
+                    <a:pt x="4265610" y="1562964"/>
+                  </a:lnTo>
+                  <a:lnTo>
+                    <a:pt x="4187976" y="1533500"/>
+                  </a:lnTo>
+                  <a:lnTo>
+                    <a:pt x="4110342" y="1501416"/>
+                  </a:lnTo>
+                  <a:lnTo>
+                    <a:pt x="4032708" y="1466476"/>
+                  </a:lnTo>
+                  <a:lnTo>
+                    <a:pt x="3955074" y="1428428"/>
+                  </a:lnTo>
+                  <a:lnTo>
+                    <a:pt x="3877440" y="1386995"/>
+                  </a:lnTo>
+                  <a:lnTo>
+                    <a:pt x="3799806" y="1341875"/>
+                  </a:lnTo>
+                  <a:lnTo>
+                    <a:pt x="3722172" y="1292741"/>
+                  </a:lnTo>
+                  <a:lnTo>
+                    <a:pt x="3644538" y="1239235"/>
+                  </a:lnTo>
+                  <a:lnTo>
+                    <a:pt x="3566904" y="1180968"/>
+                  </a:lnTo>
+                  <a:lnTo>
+                    <a:pt x="3489270" y="1117517"/>
+                  </a:lnTo>
+                  <a:lnTo>
+                    <a:pt x="3411636" y="1048420"/>
+                  </a:lnTo>
+                  <a:lnTo>
+                    <a:pt x="3334002" y="1013938"/>
+                  </a:lnTo>
+                  <a:lnTo>
+                    <a:pt x="3256368" y="998090"/>
+                  </a:lnTo>
+                  <a:lnTo>
+                    <a:pt x="3178734" y="981956"/>
+                  </a:lnTo>
+                  <a:lnTo>
+                    <a:pt x="3101100" y="965532"/>
+                  </a:lnTo>
+                  <a:lnTo>
+                    <a:pt x="3023466" y="948813"/>
+                  </a:lnTo>
+                  <a:lnTo>
+                    <a:pt x="2945832" y="931792"/>
+                  </a:lnTo>
+                  <a:lnTo>
+                    <a:pt x="2868198" y="914465"/>
+                  </a:lnTo>
+                  <a:lnTo>
+                    <a:pt x="2790564" y="896825"/>
+                  </a:lnTo>
+                  <a:lnTo>
+                    <a:pt x="2712930" y="878869"/>
+                  </a:lnTo>
+                  <a:lnTo>
+                    <a:pt x="2635295" y="860588"/>
+                  </a:lnTo>
+                  <a:lnTo>
+                    <a:pt x="2557661" y="841979"/>
+                  </a:lnTo>
+                  <a:lnTo>
+                    <a:pt x="2480027" y="823035"/>
+                  </a:lnTo>
+                  <a:lnTo>
+                    <a:pt x="2402393" y="803749"/>
+                  </a:lnTo>
+                  <a:lnTo>
+                    <a:pt x="2324759" y="784117"/>
+                  </a:lnTo>
+                  <a:lnTo>
+                    <a:pt x="2247125" y="764130"/>
+                  </a:lnTo>
+                  <a:lnTo>
+                    <a:pt x="2169491" y="743784"/>
+                  </a:lnTo>
+                  <a:lnTo>
+                    <a:pt x="2091857" y="723072"/>
+                  </a:lnTo>
+                  <a:lnTo>
+                    <a:pt x="2014223" y="701986"/>
+                  </a:lnTo>
+                  <a:lnTo>
+                    <a:pt x="1936589" y="680521"/>
+                  </a:lnTo>
+                  <a:lnTo>
+                    <a:pt x="1858955" y="658670"/>
+                  </a:lnTo>
+                  <a:lnTo>
+                    <a:pt x="1781321" y="636425"/>
+                  </a:lnTo>
+                  <a:lnTo>
+                    <a:pt x="1703687" y="613779"/>
+                  </a:lnTo>
+                  <a:lnTo>
+                    <a:pt x="1626053" y="590726"/>
+                  </a:lnTo>
+                  <a:lnTo>
+                    <a:pt x="1548419" y="567258"/>
+                  </a:lnTo>
+                  <a:lnTo>
+                    <a:pt x="1470785" y="543367"/>
+                  </a:lnTo>
+                  <a:lnTo>
+                    <a:pt x="1393151" y="519046"/>
+                  </a:lnTo>
+                  <a:lnTo>
+                    <a:pt x="1315517" y="494287"/>
+                  </a:lnTo>
+                  <a:lnTo>
+                    <a:pt x="1237883" y="469082"/>
+                  </a:lnTo>
+                  <a:lnTo>
+                    <a:pt x="1160249" y="443423"/>
+                  </a:lnTo>
+                  <a:lnTo>
+                    <a:pt x="1082615" y="417302"/>
+                  </a:lnTo>
+                  <a:lnTo>
+                    <a:pt x="1004981" y="390711"/>
+                  </a:lnTo>
+                  <a:lnTo>
+                    <a:pt x="927346" y="363642"/>
+                  </a:lnTo>
+                  <a:lnTo>
+                    <a:pt x="849712" y="336084"/>
+                  </a:lnTo>
+                  <a:lnTo>
+                    <a:pt x="772078" y="308031"/>
+                  </a:lnTo>
+                  <a:lnTo>
+                    <a:pt x="694444" y="279472"/>
+                  </a:lnTo>
+                  <a:lnTo>
+                    <a:pt x="616810" y="250400"/>
+                  </a:lnTo>
+                  <a:lnTo>
+                    <a:pt x="539176" y="220803"/>
+                  </a:lnTo>
+                  <a:lnTo>
+                    <a:pt x="461542" y="190674"/>
+                  </a:lnTo>
+                  <a:lnTo>
+                    <a:pt x="383908" y="160003"/>
+                  </a:lnTo>
+                  <a:lnTo>
+                    <a:pt x="306274" y="128779"/>
+                  </a:lnTo>
+                  <a:lnTo>
+                    <a:pt x="228640" y="96993"/>
+                  </a:lnTo>
+                  <a:lnTo>
+                    <a:pt x="151006" y="64634"/>
+                  </a:lnTo>
+                  <a:lnTo>
+                    <a:pt x="73372" y="31693"/>
                   </a:lnTo>
                   <a:lnTo>
                     <a:pt x="0" y="0"/>
@@ -4091,261 +4082,255 @@
           </p:nvSpPr>
           <p:spPr>
             <a:xfrm>
-              <a:off x="1859350" y="1896563"/>
-              <a:ext cx="6329140" cy="3576754"/>
+              <a:off x="2042355" y="1896563"/>
+              <a:ext cx="6146134" cy="3590923"/>
             </a:xfrm>
             <a:custGeom>
               <a:avLst/>
               <a:pathLst>
-                <a:path w="6329140" h="3576754">
+                <a:path w="6146134" h="3590923">
                   <a:moveTo>
                     <a:pt x="0" y="0"/>
                   </a:moveTo>
                   <a:lnTo>
-                    <a:pt x="40782" y="91045"/>
-                  </a:lnTo>
-                  <a:lnTo>
-                    <a:pt x="118416" y="256315"/>
-                  </a:lnTo>
-                  <a:lnTo>
-                    <a:pt x="196050" y="413916"/>
-                  </a:lnTo>
-                  <a:lnTo>
-                    <a:pt x="273685" y="564204"/>
-                  </a:lnTo>
-                  <a:lnTo>
-                    <a:pt x="351319" y="707519"/>
-                  </a:lnTo>
-                  <a:lnTo>
-                    <a:pt x="428953" y="844183"/>
-                  </a:lnTo>
-                  <a:lnTo>
-                    <a:pt x="506587" y="974505"/>
-                  </a:lnTo>
-                  <a:lnTo>
-                    <a:pt x="584221" y="1098780"/>
-                  </a:lnTo>
-                  <a:lnTo>
-                    <a:pt x="661855" y="1217288"/>
-                  </a:lnTo>
-                  <a:lnTo>
-                    <a:pt x="739489" y="1330297"/>
-                  </a:lnTo>
-                  <a:lnTo>
-                    <a:pt x="817123" y="1438062"/>
-                  </a:lnTo>
-                  <a:lnTo>
-                    <a:pt x="894757" y="1540826"/>
-                  </a:lnTo>
-                  <a:lnTo>
-                    <a:pt x="972391" y="1638822"/>
-                  </a:lnTo>
-                  <a:lnTo>
-                    <a:pt x="1050025" y="1732270"/>
-                  </a:lnTo>
-                  <a:lnTo>
-                    <a:pt x="1127659" y="1821382"/>
-                  </a:lnTo>
-                  <a:lnTo>
-                    <a:pt x="1205293" y="1906359"/>
-                  </a:lnTo>
-                  <a:lnTo>
-                    <a:pt x="1282927" y="1987392"/>
-                  </a:lnTo>
-                  <a:lnTo>
-                    <a:pt x="1360561" y="2064666"/>
-                  </a:lnTo>
-                  <a:lnTo>
-                    <a:pt x="1438195" y="2138353"/>
-                  </a:lnTo>
-                  <a:lnTo>
-                    <a:pt x="1515829" y="2208622"/>
-                  </a:lnTo>
-                  <a:lnTo>
-                    <a:pt x="1593463" y="2275629"/>
-                  </a:lnTo>
-                  <a:lnTo>
-                    <a:pt x="1671097" y="2339527"/>
-                  </a:lnTo>
-                  <a:lnTo>
-                    <a:pt x="1748731" y="2400461"/>
-                  </a:lnTo>
-                  <a:lnTo>
-                    <a:pt x="1826365" y="2458566"/>
-                  </a:lnTo>
-                  <a:lnTo>
-                    <a:pt x="1903999" y="2513975"/>
-                  </a:lnTo>
-                  <a:lnTo>
-                    <a:pt x="1981633" y="2566814"/>
-                  </a:lnTo>
-                  <a:lnTo>
-                    <a:pt x="2059268" y="2617200"/>
-                  </a:lnTo>
-                  <a:lnTo>
-                    <a:pt x="2136902" y="2665248"/>
-                  </a:lnTo>
-                  <a:lnTo>
-                    <a:pt x="2214536" y="2711067"/>
-                  </a:lnTo>
-                  <a:lnTo>
-                    <a:pt x="2292170" y="2754759"/>
-                  </a:lnTo>
-                  <a:lnTo>
-                    <a:pt x="2369804" y="2796424"/>
-                  </a:lnTo>
-                  <a:lnTo>
-                    <a:pt x="2447438" y="2836155"/>
-                  </a:lnTo>
-                  <a:lnTo>
-                    <a:pt x="2525072" y="2874043"/>
-                  </a:lnTo>
-                  <a:lnTo>
-                    <a:pt x="2602706" y="2910173"/>
-                  </a:lnTo>
-                  <a:lnTo>
-                    <a:pt x="2680340" y="2944626"/>
-                  </a:lnTo>
-                  <a:lnTo>
-                    <a:pt x="2757974" y="2977481"/>
-                  </a:lnTo>
-                  <a:lnTo>
-                    <a:pt x="2835608" y="3008810"/>
-                  </a:lnTo>
-                  <a:lnTo>
-                    <a:pt x="2913242" y="3038687"/>
-                  </a:lnTo>
-                  <a:lnTo>
-                    <a:pt x="2990876" y="3067176"/>
-                  </a:lnTo>
-                  <a:lnTo>
-                    <a:pt x="3068510" y="3094344"/>
-                  </a:lnTo>
-                  <a:lnTo>
-                    <a:pt x="3146144" y="3120251"/>
-                  </a:lnTo>
-                  <a:lnTo>
-                    <a:pt x="3223778" y="3144956"/>
-                  </a:lnTo>
-                  <a:lnTo>
-                    <a:pt x="3301412" y="3168514"/>
-                  </a:lnTo>
-                  <a:lnTo>
-                    <a:pt x="3379046" y="3190980"/>
-                  </a:lnTo>
-                  <a:lnTo>
-                    <a:pt x="3456680" y="3212402"/>
-                  </a:lnTo>
-                  <a:lnTo>
-                    <a:pt x="3534314" y="3232831"/>
-                  </a:lnTo>
-                  <a:lnTo>
-                    <a:pt x="3611948" y="3252312"/>
-                  </a:lnTo>
-                  <a:lnTo>
-                    <a:pt x="3689582" y="3270889"/>
-                  </a:lnTo>
-                  <a:lnTo>
-                    <a:pt x="3767217" y="3288603"/>
-                  </a:lnTo>
-                  <a:lnTo>
-                    <a:pt x="3844851" y="3305496"/>
-                  </a:lnTo>
-                  <a:lnTo>
-                    <a:pt x="3922485" y="3321605"/>
-                  </a:lnTo>
-                  <a:lnTo>
-                    <a:pt x="4000119" y="3336966"/>
-                  </a:lnTo>
-                  <a:lnTo>
-                    <a:pt x="4077753" y="3351615"/>
-                  </a:lnTo>
-                  <a:lnTo>
-                    <a:pt x="4155387" y="3365583"/>
-                  </a:lnTo>
-                  <a:lnTo>
-                    <a:pt x="4233021" y="3378904"/>
-                  </a:lnTo>
-                  <a:lnTo>
-                    <a:pt x="4310655" y="3391606"/>
-                  </a:lnTo>
-                  <a:lnTo>
-                    <a:pt x="4388289" y="3403719"/>
-                  </a:lnTo>
-                  <a:lnTo>
-                    <a:pt x="4465923" y="3415270"/>
-                  </a:lnTo>
-                  <a:lnTo>
-                    <a:pt x="4543557" y="3426285"/>
-                  </a:lnTo>
-                  <a:lnTo>
-                    <a:pt x="4621191" y="3436789"/>
-                  </a:lnTo>
-                  <a:lnTo>
-                    <a:pt x="4698825" y="3446805"/>
-                  </a:lnTo>
-                  <a:lnTo>
-                    <a:pt x="4776459" y="3456357"/>
-                  </a:lnTo>
-                  <a:lnTo>
-                    <a:pt x="4854093" y="3465465"/>
-                  </a:lnTo>
-                  <a:lnTo>
-                    <a:pt x="4931727" y="3474151"/>
-                  </a:lnTo>
-                  <a:lnTo>
-                    <a:pt x="5009361" y="3482434"/>
-                  </a:lnTo>
-                  <a:lnTo>
-                    <a:pt x="5086995" y="3490332"/>
-                  </a:lnTo>
-                  <a:lnTo>
-                    <a:pt x="5164629" y="3497864"/>
-                  </a:lnTo>
-                  <a:lnTo>
-                    <a:pt x="5242263" y="3505046"/>
-                  </a:lnTo>
-                  <a:lnTo>
-                    <a:pt x="5319897" y="3511895"/>
-                  </a:lnTo>
-                  <a:lnTo>
-                    <a:pt x="5397531" y="3518426"/>
-                  </a:lnTo>
-                  <a:lnTo>
-                    <a:pt x="5475166" y="3524655"/>
-                  </a:lnTo>
-                  <a:lnTo>
-                    <a:pt x="5552800" y="3530594"/>
-                  </a:lnTo>
-                  <a:lnTo>
-                    <a:pt x="5630434" y="3536257"/>
-                  </a:lnTo>
-                  <a:lnTo>
-                    <a:pt x="5708068" y="3541658"/>
-                  </a:lnTo>
-                  <a:lnTo>
-                    <a:pt x="5785702" y="3546808"/>
-                  </a:lnTo>
-                  <a:lnTo>
-                    <a:pt x="5863336" y="3551719"/>
-                  </a:lnTo>
-                  <a:lnTo>
-                    <a:pt x="5940970" y="3556402"/>
-                  </a:lnTo>
-                  <a:lnTo>
-                    <a:pt x="6018604" y="3560868"/>
-                  </a:lnTo>
-                  <a:lnTo>
-                    <a:pt x="6096238" y="3565127"/>
-                  </a:lnTo>
-                  <a:lnTo>
-                    <a:pt x="6173872" y="3569188"/>
-                  </a:lnTo>
-                  <a:lnTo>
-                    <a:pt x="6251506" y="3573061"/>
-                  </a:lnTo>
-                  <a:lnTo>
-                    <a:pt x="6329140" y="3576754"/>
+                    <a:pt x="13045" y="32177"/>
+                  </a:lnTo>
+                  <a:lnTo>
+                    <a:pt x="90679" y="214053"/>
+                  </a:lnTo>
+                  <a:lnTo>
+                    <a:pt x="168313" y="386792"/>
+                  </a:lnTo>
+                  <a:lnTo>
+                    <a:pt x="245947" y="550854"/>
+                  </a:lnTo>
+                  <a:lnTo>
+                    <a:pt x="323581" y="706673"/>
+                  </a:lnTo>
+                  <a:lnTo>
+                    <a:pt x="401215" y="854666"/>
+                  </a:lnTo>
+                  <a:lnTo>
+                    <a:pt x="478849" y="995223"/>
+                  </a:lnTo>
+                  <a:lnTo>
+                    <a:pt x="556483" y="1128720"/>
+                  </a:lnTo>
+                  <a:lnTo>
+                    <a:pt x="634117" y="1255510"/>
+                  </a:lnTo>
+                  <a:lnTo>
+                    <a:pt x="711751" y="1375932"/>
+                  </a:lnTo>
+                  <a:lnTo>
+                    <a:pt x="789385" y="1490303"/>
+                  </a:lnTo>
+                  <a:lnTo>
+                    <a:pt x="867019" y="1598929"/>
+                  </a:lnTo>
+                  <a:lnTo>
+                    <a:pt x="944653" y="1702099"/>
+                  </a:lnTo>
+                  <a:lnTo>
+                    <a:pt x="1022287" y="1800085"/>
+                  </a:lnTo>
+                  <a:lnTo>
+                    <a:pt x="1099921" y="1893149"/>
+                  </a:lnTo>
+                  <a:lnTo>
+                    <a:pt x="1177555" y="1981538"/>
+                  </a:lnTo>
+                  <a:lnTo>
+                    <a:pt x="1255189" y="2065487"/>
+                  </a:lnTo>
+                  <a:lnTo>
+                    <a:pt x="1332823" y="2145218"/>
+                  </a:lnTo>
+                  <a:lnTo>
+                    <a:pt x="1410457" y="2220945"/>
+                  </a:lnTo>
+                  <a:lnTo>
+                    <a:pt x="1488091" y="2292867"/>
+                  </a:lnTo>
+                  <a:lnTo>
+                    <a:pt x="1565726" y="2361176"/>
+                  </a:lnTo>
+                  <a:lnTo>
+                    <a:pt x="1643360" y="2426053"/>
+                  </a:lnTo>
+                  <a:lnTo>
+                    <a:pt x="1720994" y="2487671"/>
+                  </a:lnTo>
+                  <a:lnTo>
+                    <a:pt x="1798628" y="2546194"/>
+                  </a:lnTo>
+                  <a:lnTo>
+                    <a:pt x="1876262" y="2601777"/>
+                  </a:lnTo>
+                  <a:lnTo>
+                    <a:pt x="1953896" y="2654568"/>
+                  </a:lnTo>
+                  <a:lnTo>
+                    <a:pt x="2031530" y="2704707"/>
+                  </a:lnTo>
+                  <a:lnTo>
+                    <a:pt x="2109164" y="2752327"/>
+                  </a:lnTo>
+                  <a:lnTo>
+                    <a:pt x="2186798" y="2797555"/>
+                  </a:lnTo>
+                  <a:lnTo>
+                    <a:pt x="2264432" y="2840510"/>
+                  </a:lnTo>
+                  <a:lnTo>
+                    <a:pt x="2342066" y="2881308"/>
+                  </a:lnTo>
+                  <a:lnTo>
+                    <a:pt x="2419700" y="2920057"/>
+                  </a:lnTo>
+                  <a:lnTo>
+                    <a:pt x="2497334" y="2956859"/>
+                  </a:lnTo>
+                  <a:lnTo>
+                    <a:pt x="2574968" y="2991812"/>
+                  </a:lnTo>
+                  <a:lnTo>
+                    <a:pt x="2652602" y="3025009"/>
+                  </a:lnTo>
+                  <a:lnTo>
+                    <a:pt x="2730236" y="3056538"/>
+                  </a:lnTo>
+                  <a:lnTo>
+                    <a:pt x="2807870" y="3086484"/>
+                  </a:lnTo>
+                  <a:lnTo>
+                    <a:pt x="2885504" y="3114925"/>
+                  </a:lnTo>
+                  <a:lnTo>
+                    <a:pt x="2963138" y="3141938"/>
+                  </a:lnTo>
+                  <a:lnTo>
+                    <a:pt x="3040772" y="3167593"/>
+                  </a:lnTo>
+                  <a:lnTo>
+                    <a:pt x="3118406" y="3191960"/>
+                  </a:lnTo>
+                  <a:lnTo>
+                    <a:pt x="3196040" y="3215103"/>
+                  </a:lnTo>
+                  <a:lnTo>
+                    <a:pt x="3273675" y="3237083"/>
+                  </a:lnTo>
+                  <a:lnTo>
+                    <a:pt x="3351309" y="3257959"/>
+                  </a:lnTo>
+                  <a:lnTo>
+                    <a:pt x="3428943" y="3277786"/>
+                  </a:lnTo>
+                  <a:lnTo>
+                    <a:pt x="3506577" y="3296617"/>
+                  </a:lnTo>
+                  <a:lnTo>
+                    <a:pt x="3584211" y="3314502"/>
+                  </a:lnTo>
+                  <a:lnTo>
+                    <a:pt x="3661845" y="3331489"/>
+                  </a:lnTo>
+                  <a:lnTo>
+                    <a:pt x="3739479" y="3347622"/>
+                  </a:lnTo>
+                  <a:lnTo>
+                    <a:pt x="3817113" y="3362945"/>
+                  </a:lnTo>
+                  <a:lnTo>
+                    <a:pt x="3894747" y="3377498"/>
+                  </a:lnTo>
+                  <a:lnTo>
+                    <a:pt x="3972381" y="3391320"/>
+                  </a:lnTo>
+                  <a:lnTo>
+                    <a:pt x="4050015" y="3404448"/>
+                  </a:lnTo>
+                  <a:lnTo>
+                    <a:pt x="4127649" y="3416916"/>
+                  </a:lnTo>
+                  <a:lnTo>
+                    <a:pt x="4205283" y="3428758"/>
+                  </a:lnTo>
+                  <a:lnTo>
+                    <a:pt x="4282917" y="3440005"/>
+                  </a:lnTo>
+                  <a:lnTo>
+                    <a:pt x="4360551" y="3450687"/>
+                  </a:lnTo>
+                  <a:lnTo>
+                    <a:pt x="4438185" y="3460832"/>
+                  </a:lnTo>
+                  <a:lnTo>
+                    <a:pt x="4515819" y="3470468"/>
+                  </a:lnTo>
+                  <a:lnTo>
+                    <a:pt x="4593453" y="3479620"/>
+                  </a:lnTo>
+                  <a:lnTo>
+                    <a:pt x="4671087" y="3488312"/>
+                  </a:lnTo>
+                  <a:lnTo>
+                    <a:pt x="4748721" y="3496567"/>
+                  </a:lnTo>
+                  <a:lnTo>
+                    <a:pt x="4826355" y="3504407"/>
+                  </a:lnTo>
+                  <a:lnTo>
+                    <a:pt x="4903989" y="3511854"/>
+                  </a:lnTo>
+                  <a:lnTo>
+                    <a:pt x="4981623" y="3518927"/>
+                  </a:lnTo>
+                  <a:lnTo>
+                    <a:pt x="5059258" y="3525644"/>
+                  </a:lnTo>
+                  <a:lnTo>
+                    <a:pt x="5136892" y="3532024"/>
+                  </a:lnTo>
+                  <a:lnTo>
+                    <a:pt x="5214526" y="3538083"/>
+                  </a:lnTo>
+                  <a:lnTo>
+                    <a:pt x="5292160" y="3543838"/>
+                  </a:lnTo>
+                  <a:lnTo>
+                    <a:pt x="5369794" y="3549304"/>
+                  </a:lnTo>
+                  <a:lnTo>
+                    <a:pt x="5447428" y="3554495"/>
+                  </a:lnTo>
+                  <a:lnTo>
+                    <a:pt x="5525062" y="3559426"/>
+                  </a:lnTo>
+                  <a:lnTo>
+                    <a:pt x="5602696" y="3564109"/>
+                  </a:lnTo>
+                  <a:lnTo>
+                    <a:pt x="5680330" y="3568556"/>
+                  </a:lnTo>
+                  <a:lnTo>
+                    <a:pt x="5757964" y="3572780"/>
+                  </a:lnTo>
+                  <a:lnTo>
+                    <a:pt x="5835598" y="3576792"/>
+                  </a:lnTo>
+                  <a:lnTo>
+                    <a:pt x="5913232" y="3580603"/>
+                  </a:lnTo>
+                  <a:lnTo>
+                    <a:pt x="5990866" y="3584222"/>
+                  </a:lnTo>
+                  <a:lnTo>
+                    <a:pt x="6068500" y="3587659"/>
+                  </a:lnTo>
+                  <a:lnTo>
+                    <a:pt x="6146134" y="3590923"/>
                   </a:lnTo>
                 </a:path>
               </a:pathLst>

--- a/docs/plots/carbo/jx_carbo_linsubhr_ratio_grade3.pptx
+++ b/docs/plots/carbo/jx_carbo_linsubhr_ratio_grade3.pptx
@@ -3003,512 +3003,515 @@
           <p:spPr>
             <a:xfrm>
               <a:off x="817517" y="1896563"/>
-              <a:ext cx="7370972" cy="3641696"/>
+              <a:ext cx="7370972" cy="3632373"/>
             </a:xfrm>
             <a:custGeom>
               <a:avLst/>
               <a:pathLst>
-                <a:path w="7370972" h="3641696">
+                <a:path w="7370972" h="3632373">
                   <a:moveTo>
-                    <a:pt x="2079523" y="0"/>
+                    <a:pt x="1865051" y="0"/>
                   </a:moveTo>
                   <a:lnTo>
-                    <a:pt x="2091857" y="50913"/>
-                  </a:lnTo>
-                  <a:lnTo>
-                    <a:pt x="2169491" y="345192"/>
-                  </a:lnTo>
-                  <a:lnTo>
-                    <a:pt x="2247125" y="615428"/>
-                  </a:lnTo>
-                  <a:lnTo>
-                    <a:pt x="2324759" y="863584"/>
-                  </a:lnTo>
-                  <a:lnTo>
-                    <a:pt x="2402393" y="1091465"/>
-                  </a:lnTo>
-                  <a:lnTo>
-                    <a:pt x="2480027" y="1300726"/>
-                  </a:lnTo>
-                  <a:lnTo>
-                    <a:pt x="2557661" y="1492890"/>
-                  </a:lnTo>
-                  <a:lnTo>
-                    <a:pt x="2635295" y="1669353"/>
-                  </a:lnTo>
-                  <a:lnTo>
-                    <a:pt x="2712930" y="1831398"/>
-                  </a:lnTo>
-                  <a:lnTo>
-                    <a:pt x="2790564" y="1980203"/>
-                  </a:lnTo>
-                  <a:lnTo>
-                    <a:pt x="2868198" y="2116850"/>
-                  </a:lnTo>
-                  <a:lnTo>
-                    <a:pt x="2945832" y="2242332"/>
-                  </a:lnTo>
-                  <a:lnTo>
-                    <a:pt x="3023466" y="2357562"/>
-                  </a:lnTo>
-                  <a:lnTo>
-                    <a:pt x="3101100" y="2463376"/>
-                  </a:lnTo>
-                  <a:lnTo>
-                    <a:pt x="3178734" y="2560546"/>
-                  </a:lnTo>
-                  <a:lnTo>
-                    <a:pt x="3256368" y="2649776"/>
-                  </a:lnTo>
-                  <a:lnTo>
-                    <a:pt x="3334002" y="2731715"/>
-                  </a:lnTo>
-                  <a:lnTo>
-                    <a:pt x="3411636" y="2788045"/>
-                  </a:lnTo>
-                  <a:lnTo>
-                    <a:pt x="3489270" y="2803338"/>
-                  </a:lnTo>
-                  <a:lnTo>
-                    <a:pt x="3566904" y="2818360"/>
-                  </a:lnTo>
-                  <a:lnTo>
-                    <a:pt x="3644538" y="2833116"/>
-                  </a:lnTo>
-                  <a:lnTo>
-                    <a:pt x="3722172" y="2847611"/>
-                  </a:lnTo>
-                  <a:lnTo>
-                    <a:pt x="3799806" y="2861850"/>
-                  </a:lnTo>
-                  <a:lnTo>
-                    <a:pt x="3877440" y="2875837"/>
-                  </a:lnTo>
-                  <a:lnTo>
-                    <a:pt x="3955074" y="2889577"/>
-                  </a:lnTo>
-                  <a:lnTo>
-                    <a:pt x="4032708" y="2903073"/>
-                  </a:lnTo>
-                  <a:lnTo>
-                    <a:pt x="4110342" y="2916331"/>
-                  </a:lnTo>
-                  <a:lnTo>
-                    <a:pt x="4187976" y="2929355"/>
-                  </a:lnTo>
-                  <a:lnTo>
-                    <a:pt x="4265610" y="2942148"/>
-                  </a:lnTo>
-                  <a:lnTo>
-                    <a:pt x="4343244" y="2954715"/>
-                  </a:lnTo>
-                  <a:lnTo>
-                    <a:pt x="4420879" y="2967059"/>
-                  </a:lnTo>
-                  <a:lnTo>
-                    <a:pt x="4498513" y="2979185"/>
-                  </a:lnTo>
-                  <a:lnTo>
-                    <a:pt x="4576147" y="2991097"/>
-                  </a:lnTo>
-                  <a:lnTo>
-                    <a:pt x="4653781" y="3002798"/>
-                  </a:lnTo>
-                  <a:lnTo>
-                    <a:pt x="4731415" y="3014292"/>
-                  </a:lnTo>
-                  <a:lnTo>
-                    <a:pt x="4809049" y="3025583"/>
-                  </a:lnTo>
-                  <a:lnTo>
-                    <a:pt x="4886683" y="3036674"/>
-                  </a:lnTo>
-                  <a:lnTo>
-                    <a:pt x="4964317" y="3047569"/>
-                  </a:lnTo>
-                  <a:lnTo>
-                    <a:pt x="5041951" y="3058271"/>
-                  </a:lnTo>
-                  <a:lnTo>
-                    <a:pt x="5119585" y="3068784"/>
-                  </a:lnTo>
-                  <a:lnTo>
-                    <a:pt x="5197219" y="3079111"/>
-                  </a:lnTo>
-                  <a:lnTo>
-                    <a:pt x="5274853" y="3089255"/>
-                  </a:lnTo>
-                  <a:lnTo>
-                    <a:pt x="5352487" y="3099220"/>
-                  </a:lnTo>
-                  <a:lnTo>
-                    <a:pt x="5430121" y="3109008"/>
-                  </a:lnTo>
-                  <a:lnTo>
-                    <a:pt x="5507755" y="3118624"/>
-                  </a:lnTo>
-                  <a:lnTo>
-                    <a:pt x="5585389" y="3128069"/>
-                  </a:lnTo>
-                  <a:lnTo>
-                    <a:pt x="5663023" y="3137347"/>
-                  </a:lnTo>
-                  <a:lnTo>
-                    <a:pt x="5740657" y="3146462"/>
-                  </a:lnTo>
-                  <a:lnTo>
-                    <a:pt x="5818291" y="3155415"/>
-                  </a:lnTo>
-                  <a:lnTo>
-                    <a:pt x="5895925" y="3164209"/>
-                  </a:lnTo>
-                  <a:lnTo>
-                    <a:pt x="5973559" y="3172848"/>
-                  </a:lnTo>
-                  <a:lnTo>
-                    <a:pt x="6051193" y="3181335"/>
-                  </a:lnTo>
-                  <a:lnTo>
-                    <a:pt x="6128827" y="3189671"/>
-                  </a:lnTo>
-                  <a:lnTo>
-                    <a:pt x="6206462" y="3197860"/>
-                  </a:lnTo>
-                  <a:lnTo>
-                    <a:pt x="6284096" y="3205904"/>
-                  </a:lnTo>
-                  <a:lnTo>
-                    <a:pt x="6361730" y="3213805"/>
-                  </a:lnTo>
-                  <a:lnTo>
-                    <a:pt x="6439364" y="3221567"/>
-                  </a:lnTo>
-                  <a:lnTo>
-                    <a:pt x="6516998" y="3229192"/>
-                  </a:lnTo>
-                  <a:lnTo>
-                    <a:pt x="6594632" y="3236681"/>
-                  </a:lnTo>
-                  <a:lnTo>
-                    <a:pt x="6672266" y="3244039"/>
-                  </a:lnTo>
-                  <a:lnTo>
-                    <a:pt x="6749900" y="3251266"/>
-                  </a:lnTo>
-                  <a:lnTo>
-                    <a:pt x="6827534" y="3258365"/>
-                  </a:lnTo>
-                  <a:lnTo>
-                    <a:pt x="6905168" y="3265339"/>
-                  </a:lnTo>
-                  <a:lnTo>
-                    <a:pt x="6982802" y="3272189"/>
-                  </a:lnTo>
-                  <a:lnTo>
-                    <a:pt x="7060436" y="3278918"/>
-                  </a:lnTo>
-                  <a:lnTo>
-                    <a:pt x="7138070" y="3285529"/>
-                  </a:lnTo>
-                  <a:lnTo>
-                    <a:pt x="7215704" y="3292022"/>
-                  </a:lnTo>
-                  <a:lnTo>
-                    <a:pt x="7293338" y="3298400"/>
-                  </a:lnTo>
-                  <a:lnTo>
-                    <a:pt x="7370972" y="3304666"/>
-                  </a:lnTo>
-                  <a:lnTo>
-                    <a:pt x="7370972" y="3641696"/>
-                  </a:lnTo>
-                  <a:lnTo>
-                    <a:pt x="7293338" y="3640722"/>
-                  </a:lnTo>
-                  <a:lnTo>
-                    <a:pt x="7215704" y="3639662"/>
-                  </a:lnTo>
-                  <a:lnTo>
-                    <a:pt x="7138070" y="3638506"/>
-                  </a:lnTo>
-                  <a:lnTo>
-                    <a:pt x="7060436" y="3637249"/>
-                  </a:lnTo>
-                  <a:lnTo>
-                    <a:pt x="6982802" y="3635879"/>
-                  </a:lnTo>
-                  <a:lnTo>
-                    <a:pt x="6905168" y="3634387"/>
-                  </a:lnTo>
-                  <a:lnTo>
-                    <a:pt x="6827534" y="3632763"/>
-                  </a:lnTo>
-                  <a:lnTo>
-                    <a:pt x="6749900" y="3630994"/>
-                  </a:lnTo>
-                  <a:lnTo>
-                    <a:pt x="6672266" y="3629068"/>
-                  </a:lnTo>
-                  <a:lnTo>
-                    <a:pt x="6594632" y="3626970"/>
-                  </a:lnTo>
-                  <a:lnTo>
-                    <a:pt x="6516998" y="3624686"/>
-                  </a:lnTo>
-                  <a:lnTo>
-                    <a:pt x="6439364" y="3622199"/>
-                  </a:lnTo>
-                  <a:lnTo>
-                    <a:pt x="6361730" y="3619490"/>
-                  </a:lnTo>
-                  <a:lnTo>
-                    <a:pt x="6284096" y="3616540"/>
-                  </a:lnTo>
-                  <a:lnTo>
-                    <a:pt x="6206462" y="3613328"/>
-                  </a:lnTo>
-                  <a:lnTo>
-                    <a:pt x="6128827" y="3609830"/>
-                  </a:lnTo>
-                  <a:lnTo>
-                    <a:pt x="6051193" y="3606020"/>
-                  </a:lnTo>
-                  <a:lnTo>
-                    <a:pt x="5973559" y="3601872"/>
-                  </a:lnTo>
-                  <a:lnTo>
-                    <a:pt x="5895925" y="3597354"/>
-                  </a:lnTo>
-                  <a:lnTo>
-                    <a:pt x="5818291" y="3592435"/>
-                  </a:lnTo>
-                  <a:lnTo>
-                    <a:pt x="5740657" y="3587078"/>
-                  </a:lnTo>
-                  <a:lnTo>
-                    <a:pt x="5663023" y="3581245"/>
-                  </a:lnTo>
-                  <a:lnTo>
-                    <a:pt x="5585389" y="3574892"/>
-                  </a:lnTo>
-                  <a:lnTo>
-                    <a:pt x="5507755" y="3567974"/>
-                  </a:lnTo>
-                  <a:lnTo>
-                    <a:pt x="5430121" y="3560440"/>
-                  </a:lnTo>
-                  <a:lnTo>
-                    <a:pt x="5352487" y="3552237"/>
-                  </a:lnTo>
-                  <a:lnTo>
-                    <a:pt x="5274853" y="3543303"/>
-                  </a:lnTo>
-                  <a:lnTo>
-                    <a:pt x="5197219" y="3533575"/>
-                  </a:lnTo>
-                  <a:lnTo>
-                    <a:pt x="5119585" y="3522980"/>
-                  </a:lnTo>
-                  <a:lnTo>
-                    <a:pt x="5041951" y="3511444"/>
-                  </a:lnTo>
-                  <a:lnTo>
-                    <a:pt x="4964317" y="3498881"/>
-                  </a:lnTo>
-                  <a:lnTo>
-                    <a:pt x="4886683" y="3485199"/>
-                  </a:lnTo>
-                  <a:lnTo>
-                    <a:pt x="4809049" y="3470301"/>
-                  </a:lnTo>
-                  <a:lnTo>
-                    <a:pt x="4731415" y="3454077"/>
-                  </a:lnTo>
-                  <a:lnTo>
-                    <a:pt x="4653781" y="3436410"/>
-                  </a:lnTo>
-                  <a:lnTo>
-                    <a:pt x="4576147" y="3417171"/>
-                  </a:lnTo>
-                  <a:lnTo>
-                    <a:pt x="4498513" y="3396220"/>
-                  </a:lnTo>
-                  <a:lnTo>
-                    <a:pt x="4420879" y="3373404"/>
-                  </a:lnTo>
-                  <a:lnTo>
-                    <a:pt x="4343244" y="3348559"/>
-                  </a:lnTo>
-                  <a:lnTo>
-                    <a:pt x="4265610" y="3321503"/>
-                  </a:lnTo>
-                  <a:lnTo>
-                    <a:pt x="4187976" y="3292040"/>
-                  </a:lnTo>
-                  <a:lnTo>
-                    <a:pt x="4110342" y="3259955"/>
-                  </a:lnTo>
-                  <a:lnTo>
-                    <a:pt x="4032708" y="3225016"/>
-                  </a:lnTo>
-                  <a:lnTo>
-                    <a:pt x="3955074" y="3186968"/>
-                  </a:lnTo>
-                  <a:lnTo>
-                    <a:pt x="3877440" y="3145535"/>
-                  </a:lnTo>
-                  <a:lnTo>
-                    <a:pt x="3799806" y="3100415"/>
-                  </a:lnTo>
-                  <a:lnTo>
-                    <a:pt x="3722172" y="3051280"/>
-                  </a:lnTo>
-                  <a:lnTo>
-                    <a:pt x="3644538" y="2997774"/>
-                  </a:lnTo>
-                  <a:lnTo>
-                    <a:pt x="3566904" y="2939507"/>
-                  </a:lnTo>
-                  <a:lnTo>
-                    <a:pt x="3489270" y="2876056"/>
-                  </a:lnTo>
-                  <a:lnTo>
-                    <a:pt x="3411636" y="2806960"/>
-                  </a:lnTo>
-                  <a:lnTo>
-                    <a:pt x="3334002" y="2772477"/>
-                  </a:lnTo>
-                  <a:lnTo>
-                    <a:pt x="3256368" y="2756629"/>
-                  </a:lnTo>
-                  <a:lnTo>
-                    <a:pt x="3178734" y="2740496"/>
-                  </a:lnTo>
-                  <a:lnTo>
-                    <a:pt x="3101100" y="2724072"/>
-                  </a:lnTo>
-                  <a:lnTo>
-                    <a:pt x="3023466" y="2707352"/>
-                  </a:lnTo>
-                  <a:lnTo>
-                    <a:pt x="2945832" y="2690332"/>
-                  </a:lnTo>
-                  <a:lnTo>
-                    <a:pt x="2868198" y="2673004"/>
-                  </a:lnTo>
-                  <a:lnTo>
-                    <a:pt x="2790564" y="2655365"/>
-                  </a:lnTo>
-                  <a:lnTo>
-                    <a:pt x="2712930" y="2637408"/>
-                  </a:lnTo>
-                  <a:lnTo>
-                    <a:pt x="2635295" y="2619128"/>
-                  </a:lnTo>
-                  <a:lnTo>
-                    <a:pt x="2557661" y="2600519"/>
-                  </a:lnTo>
-                  <a:lnTo>
-                    <a:pt x="2480027" y="2581575"/>
-                  </a:lnTo>
-                  <a:lnTo>
-                    <a:pt x="2402393" y="2562289"/>
-                  </a:lnTo>
-                  <a:lnTo>
-                    <a:pt x="2324759" y="2542656"/>
-                  </a:lnTo>
-                  <a:lnTo>
-                    <a:pt x="2247125" y="2522670"/>
-                  </a:lnTo>
-                  <a:lnTo>
-                    <a:pt x="2169491" y="2502324"/>
-                  </a:lnTo>
-                  <a:lnTo>
-                    <a:pt x="2091857" y="2481612"/>
-                  </a:lnTo>
-                  <a:lnTo>
-                    <a:pt x="2014223" y="2460526"/>
-                  </a:lnTo>
-                  <a:lnTo>
-                    <a:pt x="1936589" y="2439061"/>
-                  </a:lnTo>
-                  <a:lnTo>
-                    <a:pt x="1858955" y="2417210"/>
-                  </a:lnTo>
-                  <a:lnTo>
-                    <a:pt x="1781321" y="2394965"/>
-                  </a:lnTo>
-                  <a:lnTo>
-                    <a:pt x="1703687" y="2372319"/>
-                  </a:lnTo>
-                  <a:lnTo>
-                    <a:pt x="1626053" y="2349266"/>
-                  </a:lnTo>
-                  <a:lnTo>
-                    <a:pt x="1548419" y="2325797"/>
-                  </a:lnTo>
-                  <a:lnTo>
-                    <a:pt x="1470785" y="2301906"/>
-                  </a:lnTo>
-                  <a:lnTo>
-                    <a:pt x="1393151" y="2277585"/>
-                  </a:lnTo>
-                  <a:lnTo>
-                    <a:pt x="1315517" y="2252826"/>
-                  </a:lnTo>
-                  <a:lnTo>
-                    <a:pt x="1237883" y="2227621"/>
-                  </a:lnTo>
-                  <a:lnTo>
-                    <a:pt x="1160249" y="2201963"/>
-                  </a:lnTo>
-                  <a:lnTo>
-                    <a:pt x="1082615" y="2175842"/>
-                  </a:lnTo>
-                  <a:lnTo>
-                    <a:pt x="1004981" y="2149251"/>
-                  </a:lnTo>
-                  <a:lnTo>
-                    <a:pt x="927346" y="2122181"/>
-                  </a:lnTo>
-                  <a:lnTo>
-                    <a:pt x="849712" y="2094624"/>
-                  </a:lnTo>
-                  <a:lnTo>
-                    <a:pt x="772078" y="2066571"/>
-                  </a:lnTo>
-                  <a:lnTo>
-                    <a:pt x="694444" y="2038012"/>
-                  </a:lnTo>
-                  <a:lnTo>
-                    <a:pt x="616810" y="2008939"/>
-                  </a:lnTo>
-                  <a:lnTo>
-                    <a:pt x="539176" y="1979343"/>
-                  </a:lnTo>
-                  <a:lnTo>
-                    <a:pt x="461542" y="1949214"/>
-                  </a:lnTo>
-                  <a:lnTo>
-                    <a:pt x="383908" y="1918542"/>
-                  </a:lnTo>
-                  <a:lnTo>
-                    <a:pt x="306274" y="1887318"/>
-                  </a:lnTo>
-                  <a:lnTo>
-                    <a:pt x="228640" y="1855532"/>
-                  </a:lnTo>
-                  <a:lnTo>
-                    <a:pt x="151006" y="1823174"/>
-                  </a:lnTo>
-                  <a:lnTo>
-                    <a:pt x="73372" y="1790233"/>
-                  </a:lnTo>
-                  <a:lnTo>
-                    <a:pt x="0" y="1758539"/>
-                  </a:lnTo>
-                  <a:lnTo>
-                    <a:pt x="0" y="0"/>
+                    <a:pt x="1936589" y="239008"/>
+                  </a:lnTo>
+                  <a:lnTo>
+                    <a:pt x="2014223" y="480068"/>
+                  </a:lnTo>
+                  <a:lnTo>
+                    <a:pt x="2091857" y="704105"/>
+                  </a:lnTo>
+                  <a:lnTo>
+                    <a:pt x="2169491" y="912321"/>
+                  </a:lnTo>
+                  <a:lnTo>
+                    <a:pt x="2247125" y="1105834"/>
+                  </a:lnTo>
+                  <a:lnTo>
+                    <a:pt x="2324759" y="1285682"/>
+                  </a:lnTo>
+                  <a:lnTo>
+                    <a:pt x="2402393" y="1452829"/>
+                  </a:lnTo>
+                  <a:lnTo>
+                    <a:pt x="2480027" y="1608172"/>
+                  </a:lnTo>
+                  <a:lnTo>
+                    <a:pt x="2557661" y="1752546"/>
+                  </a:lnTo>
+                  <a:lnTo>
+                    <a:pt x="2635295" y="1886725"/>
+                  </a:lnTo>
+                  <a:lnTo>
+                    <a:pt x="2712930" y="2011429"/>
+                  </a:lnTo>
+                  <a:lnTo>
+                    <a:pt x="2790564" y="2127326"/>
+                  </a:lnTo>
+                  <a:lnTo>
+                    <a:pt x="2868198" y="2235039"/>
+                  </a:lnTo>
+                  <a:lnTo>
+                    <a:pt x="2945832" y="2335145"/>
+                  </a:lnTo>
+                  <a:lnTo>
+                    <a:pt x="3023466" y="2428183"/>
+                  </a:lnTo>
+                  <a:lnTo>
+                    <a:pt x="3101100" y="2514650"/>
+                  </a:lnTo>
+                  <a:lnTo>
+                    <a:pt x="3178734" y="2595012"/>
+                  </a:lnTo>
+                  <a:lnTo>
+                    <a:pt x="3256368" y="2669698"/>
+                  </a:lnTo>
+                  <a:lnTo>
+                    <a:pt x="3334002" y="2739111"/>
+                  </a:lnTo>
+                  <a:lnTo>
+                    <a:pt x="3411636" y="2787903"/>
+                  </a:lnTo>
+                  <a:lnTo>
+                    <a:pt x="3489270" y="2802772"/>
+                  </a:lnTo>
+                  <a:lnTo>
+                    <a:pt x="3566904" y="2817386"/>
+                  </a:lnTo>
+                  <a:lnTo>
+                    <a:pt x="3644538" y="2831748"/>
+                  </a:lnTo>
+                  <a:lnTo>
+                    <a:pt x="3722172" y="2845863"/>
+                  </a:lnTo>
+                  <a:lnTo>
+                    <a:pt x="3799806" y="2859735"/>
+                  </a:lnTo>
+                  <a:lnTo>
+                    <a:pt x="3877440" y="2873369"/>
+                  </a:lnTo>
+                  <a:lnTo>
+                    <a:pt x="3955074" y="2886769"/>
+                  </a:lnTo>
+                  <a:lnTo>
+                    <a:pt x="4032708" y="2899938"/>
+                  </a:lnTo>
+                  <a:lnTo>
+                    <a:pt x="4110342" y="2912880"/>
+                  </a:lnTo>
+                  <a:lnTo>
+                    <a:pt x="4187976" y="2925601"/>
+                  </a:lnTo>
+                  <a:lnTo>
+                    <a:pt x="4265610" y="2938102"/>
+                  </a:lnTo>
+                  <a:lnTo>
+                    <a:pt x="4343244" y="2950388"/>
+                  </a:lnTo>
+                  <a:lnTo>
+                    <a:pt x="4420879" y="2962464"/>
+                  </a:lnTo>
+                  <a:lnTo>
+                    <a:pt x="4498513" y="2974331"/>
+                  </a:lnTo>
+                  <a:lnTo>
+                    <a:pt x="4576147" y="2985995"/>
+                  </a:lnTo>
+                  <a:lnTo>
+                    <a:pt x="4653781" y="2997457"/>
+                  </a:lnTo>
+                  <a:lnTo>
+                    <a:pt x="4731415" y="3008723"/>
+                  </a:lnTo>
+                  <a:lnTo>
+                    <a:pt x="4809049" y="3019795"/>
+                  </a:lnTo>
+                  <a:lnTo>
+                    <a:pt x="4886683" y="3030677"/>
+                  </a:lnTo>
+                  <a:lnTo>
+                    <a:pt x="4964317" y="3041372"/>
+                  </a:lnTo>
+                  <a:lnTo>
+                    <a:pt x="5041951" y="3051882"/>
+                  </a:lnTo>
+                  <a:lnTo>
+                    <a:pt x="5119585" y="3062212"/>
+                  </a:lnTo>
+                  <a:lnTo>
+                    <a:pt x="5197219" y="3072365"/>
+                  </a:lnTo>
+                  <a:lnTo>
+                    <a:pt x="5274853" y="3082343"/>
+                  </a:lnTo>
+                  <a:lnTo>
+                    <a:pt x="5352487" y="3092149"/>
+                  </a:lnTo>
+                  <a:lnTo>
+                    <a:pt x="5430121" y="3101786"/>
+                  </a:lnTo>
+                  <a:lnTo>
+                    <a:pt x="5507755" y="3111258"/>
+                  </a:lnTo>
+                  <a:lnTo>
+                    <a:pt x="5585389" y="3120567"/>
+                  </a:lnTo>
+                  <a:lnTo>
+                    <a:pt x="5663023" y="3129716"/>
+                  </a:lnTo>
+                  <a:lnTo>
+                    <a:pt x="5740657" y="3138708"/>
+                  </a:lnTo>
+                  <a:lnTo>
+                    <a:pt x="5818291" y="3147545"/>
+                  </a:lnTo>
+                  <a:lnTo>
+                    <a:pt x="5895925" y="3156230"/>
+                  </a:lnTo>
+                  <a:lnTo>
+                    <a:pt x="5973559" y="3164766"/>
+                  </a:lnTo>
+                  <a:lnTo>
+                    <a:pt x="6051193" y="3173155"/>
+                  </a:lnTo>
+                  <a:lnTo>
+                    <a:pt x="6128827" y="3181400"/>
+                  </a:lnTo>
+                  <a:lnTo>
+                    <a:pt x="6206462" y="3189503"/>
+                  </a:lnTo>
+                  <a:lnTo>
+                    <a:pt x="6284096" y="3197466"/>
+                  </a:lnTo>
+                  <a:lnTo>
+                    <a:pt x="6361730" y="3205293"/>
+                  </a:lnTo>
+                  <a:lnTo>
+                    <a:pt x="6439364" y="3212985"/>
+                  </a:lnTo>
+                  <a:lnTo>
+                    <a:pt x="6516998" y="3220545"/>
+                  </a:lnTo>
+                  <a:lnTo>
+                    <a:pt x="6594632" y="3227975"/>
+                  </a:lnTo>
+                  <a:lnTo>
+                    <a:pt x="6672266" y="3235277"/>
+                  </a:lnTo>
+                  <a:lnTo>
+                    <a:pt x="6749900" y="3242453"/>
+                  </a:lnTo>
+                  <a:lnTo>
+                    <a:pt x="6827534" y="3249507"/>
+                  </a:lnTo>
+                  <a:lnTo>
+                    <a:pt x="6905168" y="3256438"/>
+                  </a:lnTo>
+                  <a:lnTo>
+                    <a:pt x="6982802" y="3263251"/>
+                  </a:lnTo>
+                  <a:lnTo>
+                    <a:pt x="7060436" y="3269947"/>
+                  </a:lnTo>
+                  <a:lnTo>
+                    <a:pt x="7138070" y="3276527"/>
+                  </a:lnTo>
+                  <a:lnTo>
+                    <a:pt x="7215704" y="3282994"/>
+                  </a:lnTo>
+                  <a:lnTo>
+                    <a:pt x="7293338" y="3289350"/>
+                  </a:lnTo>
+                  <a:lnTo>
+                    <a:pt x="7370972" y="3295597"/>
+                  </a:lnTo>
+                  <a:lnTo>
+                    <a:pt x="7370972" y="3632373"/>
+                  </a:lnTo>
+                  <a:lnTo>
+                    <a:pt x="7293338" y="3630833"/>
+                  </a:lnTo>
+                  <a:lnTo>
+                    <a:pt x="7215704" y="3629176"/>
+                  </a:lnTo>
+                  <a:lnTo>
+                    <a:pt x="7138070" y="3627393"/>
+                  </a:lnTo>
+                  <a:lnTo>
+                    <a:pt x="7060436" y="3625474"/>
+                  </a:lnTo>
+                  <a:lnTo>
+                    <a:pt x="6982802" y="3623410"/>
+                  </a:lnTo>
+                  <a:lnTo>
+                    <a:pt x="6905168" y="3621189"/>
+                  </a:lnTo>
+                  <a:lnTo>
+                    <a:pt x="6827534" y="3618799"/>
+                  </a:lnTo>
+                  <a:lnTo>
+                    <a:pt x="6749900" y="3616227"/>
+                  </a:lnTo>
+                  <a:lnTo>
+                    <a:pt x="6672266" y="3613460"/>
+                  </a:lnTo>
+                  <a:lnTo>
+                    <a:pt x="6594632" y="3610483"/>
+                  </a:lnTo>
+                  <a:lnTo>
+                    <a:pt x="6516998" y="3607279"/>
+                  </a:lnTo>
+                  <a:lnTo>
+                    <a:pt x="6439364" y="3603832"/>
+                  </a:lnTo>
+                  <a:lnTo>
+                    <a:pt x="6361730" y="3600124"/>
+                  </a:lnTo>
+                  <a:lnTo>
+                    <a:pt x="6284096" y="3596133"/>
+                  </a:lnTo>
+                  <a:lnTo>
+                    <a:pt x="6206462" y="3591839"/>
+                  </a:lnTo>
+                  <a:lnTo>
+                    <a:pt x="6128827" y="3587219"/>
+                  </a:lnTo>
+                  <a:lnTo>
+                    <a:pt x="6051193" y="3582248"/>
+                  </a:lnTo>
+                  <a:lnTo>
+                    <a:pt x="5973559" y="3576899"/>
+                  </a:lnTo>
+                  <a:lnTo>
+                    <a:pt x="5895925" y="3571144"/>
+                  </a:lnTo>
+                  <a:lnTo>
+                    <a:pt x="5818291" y="3564952"/>
+                  </a:lnTo>
+                  <a:lnTo>
+                    <a:pt x="5740657" y="3558289"/>
+                  </a:lnTo>
+                  <a:lnTo>
+                    <a:pt x="5663023" y="3551119"/>
+                  </a:lnTo>
+                  <a:lnTo>
+                    <a:pt x="5585389" y="3543405"/>
+                  </a:lnTo>
+                  <a:lnTo>
+                    <a:pt x="5507755" y="3535105"/>
+                  </a:lnTo>
+                  <a:lnTo>
+                    <a:pt x="5430121" y="3526174"/>
+                  </a:lnTo>
+                  <a:lnTo>
+                    <a:pt x="5352487" y="3516565"/>
+                  </a:lnTo>
+                  <a:lnTo>
+                    <a:pt x="5274853" y="3506225"/>
+                  </a:lnTo>
+                  <a:lnTo>
+                    <a:pt x="5197219" y="3495100"/>
+                  </a:lnTo>
+                  <a:lnTo>
+                    <a:pt x="5119585" y="3483129"/>
+                  </a:lnTo>
+                  <a:lnTo>
+                    <a:pt x="5041951" y="3470249"/>
+                  </a:lnTo>
+                  <a:lnTo>
+                    <a:pt x="4964317" y="3456391"/>
+                  </a:lnTo>
+                  <a:lnTo>
+                    <a:pt x="4886683" y="3441479"/>
+                  </a:lnTo>
+                  <a:lnTo>
+                    <a:pt x="4809049" y="3425434"/>
+                  </a:lnTo>
+                  <a:lnTo>
+                    <a:pt x="4731415" y="3408170"/>
+                  </a:lnTo>
+                  <a:lnTo>
+                    <a:pt x="4653781" y="3389595"/>
+                  </a:lnTo>
+                  <a:lnTo>
+                    <a:pt x="4576147" y="3369607"/>
+                  </a:lnTo>
+                  <a:lnTo>
+                    <a:pt x="4498513" y="3348102"/>
+                  </a:lnTo>
+                  <a:lnTo>
+                    <a:pt x="4420879" y="3324962"/>
+                  </a:lnTo>
+                  <a:lnTo>
+                    <a:pt x="4343244" y="3300064"/>
+                  </a:lnTo>
+                  <a:lnTo>
+                    <a:pt x="4265610" y="3273274"/>
+                  </a:lnTo>
+                  <a:lnTo>
+                    <a:pt x="4187976" y="3244449"/>
+                  </a:lnTo>
+                  <a:lnTo>
+                    <a:pt x="4110342" y="3213433"/>
+                  </a:lnTo>
+                  <a:lnTo>
+                    <a:pt x="4032708" y="3180061"/>
+                  </a:lnTo>
+                  <a:lnTo>
+                    <a:pt x="3955074" y="3144153"/>
+                  </a:lnTo>
+                  <a:lnTo>
+                    <a:pt x="3877440" y="3105517"/>
+                  </a:lnTo>
+                  <a:lnTo>
+                    <a:pt x="3799806" y="3063945"/>
+                  </a:lnTo>
+                  <a:lnTo>
+                    <a:pt x="3722172" y="3019214"/>
+                  </a:lnTo>
+                  <a:lnTo>
+                    <a:pt x="3644538" y="2971084"/>
+                  </a:lnTo>
+                  <a:lnTo>
+                    <a:pt x="3566904" y="2919298"/>
+                  </a:lnTo>
+                  <a:lnTo>
+                    <a:pt x="3489270" y="2863577"/>
+                  </a:lnTo>
+                  <a:lnTo>
+                    <a:pt x="3411636" y="2803621"/>
+                  </a:lnTo>
+                  <a:lnTo>
+                    <a:pt x="3334002" y="2772774"/>
+                  </a:lnTo>
+                  <a:lnTo>
+                    <a:pt x="3256368" y="2757380"/>
+                  </a:lnTo>
+                  <a:lnTo>
+                    <a:pt x="3178734" y="2741717"/>
+                  </a:lnTo>
+                  <a:lnTo>
+                    <a:pt x="3101100" y="2725779"/>
+                  </a:lnTo>
+                  <a:lnTo>
+                    <a:pt x="3023466" y="2709563"/>
+                  </a:lnTo>
+                  <a:lnTo>
+                    <a:pt x="2945832" y="2693063"/>
+                  </a:lnTo>
+                  <a:lnTo>
+                    <a:pt x="2868198" y="2676275"/>
+                  </a:lnTo>
+                  <a:lnTo>
+                    <a:pt x="2790564" y="2659193"/>
+                  </a:lnTo>
+                  <a:lnTo>
+                    <a:pt x="2712930" y="2641812"/>
+                  </a:lnTo>
+                  <a:lnTo>
+                    <a:pt x="2635295" y="2624126"/>
+                  </a:lnTo>
+                  <a:lnTo>
+                    <a:pt x="2557661" y="2606132"/>
+                  </a:lnTo>
+                  <a:lnTo>
+                    <a:pt x="2480027" y="2587822"/>
+                  </a:lnTo>
+                  <a:lnTo>
+                    <a:pt x="2402393" y="2569193"/>
+                  </a:lnTo>
+                  <a:lnTo>
+                    <a:pt x="2324759" y="2550237"/>
+                  </a:lnTo>
+                  <a:lnTo>
+                    <a:pt x="2247125" y="2530950"/>
+                  </a:lnTo>
+                  <a:lnTo>
+                    <a:pt x="2169491" y="2511325"/>
+                  </a:lnTo>
+                  <a:lnTo>
+                    <a:pt x="2091857" y="2491357"/>
+                  </a:lnTo>
+                  <a:lnTo>
+                    <a:pt x="2014223" y="2471039"/>
+                  </a:lnTo>
+                  <a:lnTo>
+                    <a:pt x="1936589" y="2450366"/>
+                  </a:lnTo>
+                  <a:lnTo>
+                    <a:pt x="1858955" y="2429331"/>
+                  </a:lnTo>
+                  <a:lnTo>
+                    <a:pt x="1781321" y="2407929"/>
+                  </a:lnTo>
+                  <a:lnTo>
+                    <a:pt x="1703687" y="2386152"/>
+                  </a:lnTo>
+                  <a:lnTo>
+                    <a:pt x="1626053" y="2363994"/>
+                  </a:lnTo>
+                  <a:lnTo>
+                    <a:pt x="1548419" y="2341448"/>
+                  </a:lnTo>
+                  <a:lnTo>
+                    <a:pt x="1470785" y="2318507"/>
+                  </a:lnTo>
+                  <a:lnTo>
+                    <a:pt x="1393151" y="2295166"/>
+                  </a:lnTo>
+                  <a:lnTo>
+                    <a:pt x="1315517" y="2271416"/>
+                  </a:lnTo>
+                  <a:lnTo>
+                    <a:pt x="1237883" y="2247250"/>
+                  </a:lnTo>
+                  <a:lnTo>
+                    <a:pt x="1160249" y="2222662"/>
+                  </a:lnTo>
+                  <a:lnTo>
+                    <a:pt x="1082615" y="2197644"/>
+                  </a:lnTo>
+                  <a:lnTo>
+                    <a:pt x="1004981" y="2172187"/>
+                  </a:lnTo>
+                  <a:lnTo>
+                    <a:pt x="927346" y="2146286"/>
+                  </a:lnTo>
+                  <a:lnTo>
+                    <a:pt x="849712" y="2119931"/>
+                  </a:lnTo>
+                  <a:lnTo>
+                    <a:pt x="772078" y="2093115"/>
+                  </a:lnTo>
+                  <a:lnTo>
+                    <a:pt x="694444" y="2065830"/>
+                  </a:lnTo>
+                  <a:lnTo>
+                    <a:pt x="616810" y="2038068"/>
+                  </a:lnTo>
+                  <a:lnTo>
+                    <a:pt x="539176" y="2009820"/>
+                  </a:lnTo>
+                  <a:lnTo>
+                    <a:pt x="461542" y="1981077"/>
+                  </a:lnTo>
+                  <a:lnTo>
+                    <a:pt x="383908" y="1951832"/>
+                  </a:lnTo>
+                  <a:lnTo>
+                    <a:pt x="306274" y="1922075"/>
+                  </a:lnTo>
+                  <a:lnTo>
+                    <a:pt x="228640" y="1891798"/>
+                  </a:lnTo>
+                  <a:lnTo>
+                    <a:pt x="151006" y="1860991"/>
+                  </a:lnTo>
+                  <a:lnTo>
+                    <a:pt x="73372" y="1829644"/>
+                  </a:lnTo>
+                  <a:lnTo>
+                    <a:pt x="0" y="1799501"/>
                   </a:lnTo>
                   <a:close/>
                 </a:path>
@@ -3534,222 +3537,228 @@
           </p:nvSpPr>
           <p:spPr>
             <a:xfrm>
-              <a:off x="2897041" y="1896563"/>
-              <a:ext cx="5291449" cy="3304666"/>
+              <a:off x="2682569" y="1896563"/>
+              <a:ext cx="5505921" cy="3295597"/>
             </a:xfrm>
             <a:custGeom>
               <a:avLst/>
               <a:pathLst>
-                <a:path w="5291449" h="3304666">
+                <a:path w="5505921" h="3295597">
                   <a:moveTo>
                     <a:pt x="0" y="0"/>
                   </a:moveTo>
                   <a:lnTo>
-                    <a:pt x="12333" y="50913"/>
-                  </a:lnTo>
-                  <a:lnTo>
-                    <a:pt x="89968" y="345192"/>
-                  </a:lnTo>
-                  <a:lnTo>
-                    <a:pt x="167602" y="615428"/>
-                  </a:lnTo>
-                  <a:lnTo>
-                    <a:pt x="245236" y="863584"/>
-                  </a:lnTo>
-                  <a:lnTo>
-                    <a:pt x="322870" y="1091465"/>
-                  </a:lnTo>
-                  <a:lnTo>
-                    <a:pt x="400504" y="1300726"/>
-                  </a:lnTo>
-                  <a:lnTo>
-                    <a:pt x="478138" y="1492890"/>
-                  </a:lnTo>
-                  <a:lnTo>
-                    <a:pt x="555772" y="1669353"/>
-                  </a:lnTo>
-                  <a:lnTo>
-                    <a:pt x="633406" y="1831398"/>
-                  </a:lnTo>
-                  <a:lnTo>
-                    <a:pt x="711040" y="1980203"/>
-                  </a:lnTo>
-                  <a:lnTo>
-                    <a:pt x="788674" y="2116850"/>
-                  </a:lnTo>
-                  <a:lnTo>
-                    <a:pt x="866308" y="2242332"/>
-                  </a:lnTo>
-                  <a:lnTo>
-                    <a:pt x="943942" y="2357562"/>
-                  </a:lnTo>
-                  <a:lnTo>
-                    <a:pt x="1021576" y="2463376"/>
-                  </a:lnTo>
-                  <a:lnTo>
-                    <a:pt x="1099210" y="2560546"/>
-                  </a:lnTo>
-                  <a:lnTo>
-                    <a:pt x="1176844" y="2649776"/>
-                  </a:lnTo>
-                  <a:lnTo>
-                    <a:pt x="1254478" y="2731715"/>
-                  </a:lnTo>
-                  <a:lnTo>
-                    <a:pt x="1332112" y="2788045"/>
-                  </a:lnTo>
-                  <a:lnTo>
-                    <a:pt x="1409746" y="2803338"/>
-                  </a:lnTo>
-                  <a:lnTo>
-                    <a:pt x="1487380" y="2818360"/>
-                  </a:lnTo>
-                  <a:lnTo>
-                    <a:pt x="1565014" y="2833116"/>
-                  </a:lnTo>
-                  <a:lnTo>
-                    <a:pt x="1642648" y="2847611"/>
-                  </a:lnTo>
-                  <a:lnTo>
-                    <a:pt x="1720282" y="2861850"/>
-                  </a:lnTo>
-                  <a:lnTo>
-                    <a:pt x="1797917" y="2875837"/>
-                  </a:lnTo>
-                  <a:lnTo>
-                    <a:pt x="1875551" y="2889577"/>
-                  </a:lnTo>
-                  <a:lnTo>
-                    <a:pt x="1953185" y="2903073"/>
-                  </a:lnTo>
-                  <a:lnTo>
-                    <a:pt x="2030819" y="2916331"/>
-                  </a:lnTo>
-                  <a:lnTo>
-                    <a:pt x="2108453" y="2929355"/>
-                  </a:lnTo>
-                  <a:lnTo>
-                    <a:pt x="2186087" y="2942148"/>
-                  </a:lnTo>
-                  <a:lnTo>
-                    <a:pt x="2263721" y="2954715"/>
-                  </a:lnTo>
-                  <a:lnTo>
-                    <a:pt x="2341355" y="2967059"/>
-                  </a:lnTo>
-                  <a:lnTo>
-                    <a:pt x="2418989" y="2979185"/>
-                  </a:lnTo>
-                  <a:lnTo>
-                    <a:pt x="2496623" y="2991097"/>
-                  </a:lnTo>
-                  <a:lnTo>
-                    <a:pt x="2574257" y="3002798"/>
-                  </a:lnTo>
-                  <a:lnTo>
-                    <a:pt x="2651891" y="3014292"/>
-                  </a:lnTo>
-                  <a:lnTo>
-                    <a:pt x="2729525" y="3025583"/>
-                  </a:lnTo>
-                  <a:lnTo>
-                    <a:pt x="2807159" y="3036674"/>
-                  </a:lnTo>
-                  <a:lnTo>
-                    <a:pt x="2884793" y="3047569"/>
-                  </a:lnTo>
-                  <a:lnTo>
-                    <a:pt x="2962427" y="3058271"/>
-                  </a:lnTo>
-                  <a:lnTo>
-                    <a:pt x="3040061" y="3068784"/>
-                  </a:lnTo>
-                  <a:lnTo>
-                    <a:pt x="3117695" y="3079111"/>
-                  </a:lnTo>
-                  <a:lnTo>
-                    <a:pt x="3195329" y="3089255"/>
-                  </a:lnTo>
-                  <a:lnTo>
-                    <a:pt x="3272963" y="3099220"/>
-                  </a:lnTo>
-                  <a:lnTo>
-                    <a:pt x="3350597" y="3109008"/>
-                  </a:lnTo>
-                  <a:lnTo>
-                    <a:pt x="3428231" y="3118624"/>
-                  </a:lnTo>
-                  <a:lnTo>
-                    <a:pt x="3505866" y="3128069"/>
-                  </a:lnTo>
-                  <a:lnTo>
-                    <a:pt x="3583500" y="3137347"/>
-                  </a:lnTo>
-                  <a:lnTo>
-                    <a:pt x="3661134" y="3146462"/>
-                  </a:lnTo>
-                  <a:lnTo>
-                    <a:pt x="3738768" y="3155415"/>
-                  </a:lnTo>
-                  <a:lnTo>
-                    <a:pt x="3816402" y="3164209"/>
-                  </a:lnTo>
-                  <a:lnTo>
-                    <a:pt x="3894036" y="3172848"/>
-                  </a:lnTo>
-                  <a:lnTo>
-                    <a:pt x="3971670" y="3181335"/>
-                  </a:lnTo>
-                  <a:lnTo>
-                    <a:pt x="4049304" y="3189671"/>
-                  </a:lnTo>
-                  <a:lnTo>
-                    <a:pt x="4126938" y="3197860"/>
-                  </a:lnTo>
-                  <a:lnTo>
-                    <a:pt x="4204572" y="3205904"/>
-                  </a:lnTo>
-                  <a:lnTo>
-                    <a:pt x="4282206" y="3213805"/>
-                  </a:lnTo>
-                  <a:lnTo>
-                    <a:pt x="4359840" y="3221567"/>
-                  </a:lnTo>
-                  <a:lnTo>
-                    <a:pt x="4437474" y="3229192"/>
-                  </a:lnTo>
-                  <a:lnTo>
-                    <a:pt x="4515108" y="3236681"/>
-                  </a:lnTo>
-                  <a:lnTo>
-                    <a:pt x="4592742" y="3244039"/>
-                  </a:lnTo>
-                  <a:lnTo>
-                    <a:pt x="4670376" y="3251266"/>
-                  </a:lnTo>
-                  <a:lnTo>
-                    <a:pt x="4748010" y="3258365"/>
-                  </a:lnTo>
-                  <a:lnTo>
-                    <a:pt x="4825644" y="3265339"/>
-                  </a:lnTo>
-                  <a:lnTo>
-                    <a:pt x="4903278" y="3272189"/>
-                  </a:lnTo>
-                  <a:lnTo>
-                    <a:pt x="4980912" y="3278918"/>
-                  </a:lnTo>
-                  <a:lnTo>
-                    <a:pt x="5058546" y="3285529"/>
-                  </a:lnTo>
-                  <a:lnTo>
-                    <a:pt x="5136180" y="3292022"/>
-                  </a:lnTo>
-                  <a:lnTo>
-                    <a:pt x="5213815" y="3298400"/>
-                  </a:lnTo>
-                  <a:lnTo>
-                    <a:pt x="5291449" y="3304666"/>
+                    <a:pt x="71537" y="239008"/>
+                  </a:lnTo>
+                  <a:lnTo>
+                    <a:pt x="149171" y="480068"/>
+                  </a:lnTo>
+                  <a:lnTo>
+                    <a:pt x="226805" y="704105"/>
+                  </a:lnTo>
+                  <a:lnTo>
+                    <a:pt x="304440" y="912321"/>
+                  </a:lnTo>
+                  <a:lnTo>
+                    <a:pt x="382074" y="1105834"/>
+                  </a:lnTo>
+                  <a:lnTo>
+                    <a:pt x="459708" y="1285682"/>
+                  </a:lnTo>
+                  <a:lnTo>
+                    <a:pt x="537342" y="1452829"/>
+                  </a:lnTo>
+                  <a:lnTo>
+                    <a:pt x="614976" y="1608172"/>
+                  </a:lnTo>
+                  <a:lnTo>
+                    <a:pt x="692610" y="1752546"/>
+                  </a:lnTo>
+                  <a:lnTo>
+                    <a:pt x="770244" y="1886725"/>
+                  </a:lnTo>
+                  <a:lnTo>
+                    <a:pt x="847878" y="2011429"/>
+                  </a:lnTo>
+                  <a:lnTo>
+                    <a:pt x="925512" y="2127326"/>
+                  </a:lnTo>
+                  <a:lnTo>
+                    <a:pt x="1003146" y="2235039"/>
+                  </a:lnTo>
+                  <a:lnTo>
+                    <a:pt x="1080780" y="2335145"/>
+                  </a:lnTo>
+                  <a:lnTo>
+                    <a:pt x="1158414" y="2428183"/>
+                  </a:lnTo>
+                  <a:lnTo>
+                    <a:pt x="1236048" y="2514650"/>
+                  </a:lnTo>
+                  <a:lnTo>
+                    <a:pt x="1313682" y="2595012"/>
+                  </a:lnTo>
+                  <a:lnTo>
+                    <a:pt x="1391316" y="2669698"/>
+                  </a:lnTo>
+                  <a:lnTo>
+                    <a:pt x="1468950" y="2739111"/>
+                  </a:lnTo>
+                  <a:lnTo>
+                    <a:pt x="1546584" y="2787903"/>
+                  </a:lnTo>
+                  <a:lnTo>
+                    <a:pt x="1624218" y="2802772"/>
+                  </a:lnTo>
+                  <a:lnTo>
+                    <a:pt x="1701852" y="2817386"/>
+                  </a:lnTo>
+                  <a:lnTo>
+                    <a:pt x="1779486" y="2831748"/>
+                  </a:lnTo>
+                  <a:lnTo>
+                    <a:pt x="1857120" y="2845863"/>
+                  </a:lnTo>
+                  <a:lnTo>
+                    <a:pt x="1934754" y="2859735"/>
+                  </a:lnTo>
+                  <a:lnTo>
+                    <a:pt x="2012388" y="2873369"/>
+                  </a:lnTo>
+                  <a:lnTo>
+                    <a:pt x="2090023" y="2886769"/>
+                  </a:lnTo>
+                  <a:lnTo>
+                    <a:pt x="2167657" y="2899938"/>
+                  </a:lnTo>
+                  <a:lnTo>
+                    <a:pt x="2245291" y="2912880"/>
+                  </a:lnTo>
+                  <a:lnTo>
+                    <a:pt x="2322925" y="2925601"/>
+                  </a:lnTo>
+                  <a:lnTo>
+                    <a:pt x="2400559" y="2938102"/>
+                  </a:lnTo>
+                  <a:lnTo>
+                    <a:pt x="2478193" y="2950388"/>
+                  </a:lnTo>
+                  <a:lnTo>
+                    <a:pt x="2555827" y="2962464"/>
+                  </a:lnTo>
+                  <a:lnTo>
+                    <a:pt x="2633461" y="2974331"/>
+                  </a:lnTo>
+                  <a:lnTo>
+                    <a:pt x="2711095" y="2985995"/>
+                  </a:lnTo>
+                  <a:lnTo>
+                    <a:pt x="2788729" y="2997457"/>
+                  </a:lnTo>
+                  <a:lnTo>
+                    <a:pt x="2866363" y="3008723"/>
+                  </a:lnTo>
+                  <a:lnTo>
+                    <a:pt x="2943997" y="3019795"/>
+                  </a:lnTo>
+                  <a:lnTo>
+                    <a:pt x="3021631" y="3030677"/>
+                  </a:lnTo>
+                  <a:lnTo>
+                    <a:pt x="3099265" y="3041372"/>
+                  </a:lnTo>
+                  <a:lnTo>
+                    <a:pt x="3176899" y="3051882"/>
+                  </a:lnTo>
+                  <a:lnTo>
+                    <a:pt x="3254533" y="3062212"/>
+                  </a:lnTo>
+                  <a:lnTo>
+                    <a:pt x="3332167" y="3072365"/>
+                  </a:lnTo>
+                  <a:lnTo>
+                    <a:pt x="3409801" y="3082343"/>
+                  </a:lnTo>
+                  <a:lnTo>
+                    <a:pt x="3487435" y="3092149"/>
+                  </a:lnTo>
+                  <a:lnTo>
+                    <a:pt x="3565069" y="3101786"/>
+                  </a:lnTo>
+                  <a:lnTo>
+                    <a:pt x="3642703" y="3111258"/>
+                  </a:lnTo>
+                  <a:lnTo>
+                    <a:pt x="3720337" y="3120567"/>
+                  </a:lnTo>
+                  <a:lnTo>
+                    <a:pt x="3797972" y="3129716"/>
+                  </a:lnTo>
+                  <a:lnTo>
+                    <a:pt x="3875606" y="3138708"/>
+                  </a:lnTo>
+                  <a:lnTo>
+                    <a:pt x="3953240" y="3147545"/>
+                  </a:lnTo>
+                  <a:lnTo>
+                    <a:pt x="4030874" y="3156230"/>
+                  </a:lnTo>
+                  <a:lnTo>
+                    <a:pt x="4108508" y="3164766"/>
+                  </a:lnTo>
+                  <a:lnTo>
+                    <a:pt x="4186142" y="3173155"/>
+                  </a:lnTo>
+                  <a:lnTo>
+                    <a:pt x="4263776" y="3181400"/>
+                  </a:lnTo>
+                  <a:lnTo>
+                    <a:pt x="4341410" y="3189503"/>
+                  </a:lnTo>
+                  <a:lnTo>
+                    <a:pt x="4419044" y="3197466"/>
+                  </a:lnTo>
+                  <a:lnTo>
+                    <a:pt x="4496678" y="3205293"/>
+                  </a:lnTo>
+                  <a:lnTo>
+                    <a:pt x="4574312" y="3212985"/>
+                  </a:lnTo>
+                  <a:lnTo>
+                    <a:pt x="4651946" y="3220545"/>
+                  </a:lnTo>
+                  <a:lnTo>
+                    <a:pt x="4729580" y="3227975"/>
+                  </a:lnTo>
+                  <a:lnTo>
+                    <a:pt x="4807214" y="3235277"/>
+                  </a:lnTo>
+                  <a:lnTo>
+                    <a:pt x="4884848" y="3242453"/>
+                  </a:lnTo>
+                  <a:lnTo>
+                    <a:pt x="4962482" y="3249507"/>
+                  </a:lnTo>
+                  <a:lnTo>
+                    <a:pt x="5040116" y="3256438"/>
+                  </a:lnTo>
+                  <a:lnTo>
+                    <a:pt x="5117750" y="3263251"/>
+                  </a:lnTo>
+                  <a:lnTo>
+                    <a:pt x="5195384" y="3269947"/>
+                  </a:lnTo>
+                  <a:lnTo>
+                    <a:pt x="5273018" y="3276527"/>
+                  </a:lnTo>
+                  <a:lnTo>
+                    <a:pt x="5350652" y="3282994"/>
+                  </a:lnTo>
+                  <a:lnTo>
+                    <a:pt x="5428286" y="3289350"/>
+                  </a:lnTo>
+                  <a:lnTo>
+                    <a:pt x="5505921" y="3295597"/>
                   </a:lnTo>
                 </a:path>
               </a:pathLst>
@@ -3769,297 +3778,297 @@
           </p:nvSpPr>
           <p:spPr>
             <a:xfrm>
-              <a:off x="817517" y="3655103"/>
-              <a:ext cx="7370972" cy="1883157"/>
+              <a:off x="817517" y="3696064"/>
+              <a:ext cx="7370972" cy="1832872"/>
             </a:xfrm>
             <a:custGeom>
               <a:avLst/>
               <a:pathLst>
-                <a:path w="7370972" h="1883157">
+                <a:path w="7370972" h="1832872">
                   <a:moveTo>
-                    <a:pt x="7370972" y="1883157"/>
+                    <a:pt x="7370972" y="1832872"/>
                   </a:moveTo>
                   <a:lnTo>
-                    <a:pt x="7293338" y="1882183"/>
-                  </a:lnTo>
-                  <a:lnTo>
-                    <a:pt x="7215704" y="1881122"/>
-                  </a:lnTo>
-                  <a:lnTo>
-                    <a:pt x="7138070" y="1879967"/>
-                  </a:lnTo>
-                  <a:lnTo>
-                    <a:pt x="7060436" y="1878709"/>
-                  </a:lnTo>
-                  <a:lnTo>
-                    <a:pt x="6982802" y="1877339"/>
-                  </a:lnTo>
-                  <a:lnTo>
-                    <a:pt x="6905168" y="1875848"/>
-                  </a:lnTo>
-                  <a:lnTo>
-                    <a:pt x="6827534" y="1874223"/>
-                  </a:lnTo>
-                  <a:lnTo>
-                    <a:pt x="6749900" y="1872454"/>
-                  </a:lnTo>
-                  <a:lnTo>
-                    <a:pt x="6672266" y="1870528"/>
-                  </a:lnTo>
-                  <a:lnTo>
-                    <a:pt x="6594632" y="1868431"/>
-                  </a:lnTo>
-                  <a:lnTo>
-                    <a:pt x="6516998" y="1866146"/>
-                  </a:lnTo>
-                  <a:lnTo>
-                    <a:pt x="6439364" y="1863659"/>
-                  </a:lnTo>
-                  <a:lnTo>
-                    <a:pt x="6361730" y="1860950"/>
-                  </a:lnTo>
-                  <a:lnTo>
-                    <a:pt x="6284096" y="1858000"/>
-                  </a:lnTo>
-                  <a:lnTo>
-                    <a:pt x="6206462" y="1854788"/>
-                  </a:lnTo>
-                  <a:lnTo>
-                    <a:pt x="6128827" y="1851290"/>
-                  </a:lnTo>
-                  <a:lnTo>
-                    <a:pt x="6051193" y="1847480"/>
-                  </a:lnTo>
-                  <a:lnTo>
-                    <a:pt x="5973559" y="1843332"/>
-                  </a:lnTo>
-                  <a:lnTo>
-                    <a:pt x="5895925" y="1838815"/>
-                  </a:lnTo>
-                  <a:lnTo>
-                    <a:pt x="5818291" y="1833896"/>
-                  </a:lnTo>
-                  <a:lnTo>
-                    <a:pt x="5740657" y="1828539"/>
-                  </a:lnTo>
-                  <a:lnTo>
-                    <a:pt x="5663023" y="1822705"/>
-                  </a:lnTo>
-                  <a:lnTo>
-                    <a:pt x="5585389" y="1816352"/>
-                  </a:lnTo>
-                  <a:lnTo>
-                    <a:pt x="5507755" y="1809434"/>
-                  </a:lnTo>
-                  <a:lnTo>
-                    <a:pt x="5430121" y="1801901"/>
-                  </a:lnTo>
-                  <a:lnTo>
-                    <a:pt x="5352487" y="1793697"/>
-                  </a:lnTo>
-                  <a:lnTo>
-                    <a:pt x="5274853" y="1784763"/>
-                  </a:lnTo>
-                  <a:lnTo>
-                    <a:pt x="5197219" y="1775035"/>
-                  </a:lnTo>
-                  <a:lnTo>
-                    <a:pt x="5119585" y="1764441"/>
-                  </a:lnTo>
-                  <a:lnTo>
-                    <a:pt x="5041951" y="1752904"/>
-                  </a:lnTo>
-                  <a:lnTo>
-                    <a:pt x="4964317" y="1740341"/>
-                  </a:lnTo>
-                  <a:lnTo>
-                    <a:pt x="4886683" y="1726660"/>
-                  </a:lnTo>
-                  <a:lnTo>
-                    <a:pt x="4809049" y="1711762"/>
-                  </a:lnTo>
-                  <a:lnTo>
-                    <a:pt x="4731415" y="1695538"/>
-                  </a:lnTo>
-                  <a:lnTo>
-                    <a:pt x="4653781" y="1677870"/>
-                  </a:lnTo>
-                  <a:lnTo>
-                    <a:pt x="4576147" y="1658631"/>
-                  </a:lnTo>
-                  <a:lnTo>
-                    <a:pt x="4498513" y="1637680"/>
-                  </a:lnTo>
-                  <a:lnTo>
-                    <a:pt x="4420879" y="1614865"/>
-                  </a:lnTo>
-                  <a:lnTo>
-                    <a:pt x="4343244" y="1590019"/>
-                  </a:lnTo>
-                  <a:lnTo>
-                    <a:pt x="4265610" y="1562964"/>
-                  </a:lnTo>
-                  <a:lnTo>
-                    <a:pt x="4187976" y="1533500"/>
-                  </a:lnTo>
-                  <a:lnTo>
-                    <a:pt x="4110342" y="1501416"/>
-                  </a:lnTo>
-                  <a:lnTo>
-                    <a:pt x="4032708" y="1466476"/>
-                  </a:lnTo>
-                  <a:lnTo>
-                    <a:pt x="3955074" y="1428428"/>
-                  </a:lnTo>
-                  <a:lnTo>
-                    <a:pt x="3877440" y="1386995"/>
-                  </a:lnTo>
-                  <a:lnTo>
-                    <a:pt x="3799806" y="1341875"/>
-                  </a:lnTo>
-                  <a:lnTo>
-                    <a:pt x="3722172" y="1292741"/>
-                  </a:lnTo>
-                  <a:lnTo>
-                    <a:pt x="3644538" y="1239235"/>
-                  </a:lnTo>
-                  <a:lnTo>
-                    <a:pt x="3566904" y="1180968"/>
-                  </a:lnTo>
-                  <a:lnTo>
-                    <a:pt x="3489270" y="1117517"/>
-                  </a:lnTo>
-                  <a:lnTo>
-                    <a:pt x="3411636" y="1048420"/>
-                  </a:lnTo>
-                  <a:lnTo>
-                    <a:pt x="3334002" y="1013938"/>
-                  </a:lnTo>
-                  <a:lnTo>
-                    <a:pt x="3256368" y="998090"/>
-                  </a:lnTo>
-                  <a:lnTo>
-                    <a:pt x="3178734" y="981956"/>
-                  </a:lnTo>
-                  <a:lnTo>
-                    <a:pt x="3101100" y="965532"/>
-                  </a:lnTo>
-                  <a:lnTo>
-                    <a:pt x="3023466" y="948813"/>
-                  </a:lnTo>
-                  <a:lnTo>
-                    <a:pt x="2945832" y="931792"/>
-                  </a:lnTo>
-                  <a:lnTo>
-                    <a:pt x="2868198" y="914465"/>
-                  </a:lnTo>
-                  <a:lnTo>
-                    <a:pt x="2790564" y="896825"/>
-                  </a:lnTo>
-                  <a:lnTo>
-                    <a:pt x="2712930" y="878869"/>
-                  </a:lnTo>
-                  <a:lnTo>
-                    <a:pt x="2635295" y="860588"/>
-                  </a:lnTo>
-                  <a:lnTo>
-                    <a:pt x="2557661" y="841979"/>
-                  </a:lnTo>
-                  <a:lnTo>
-                    <a:pt x="2480027" y="823035"/>
-                  </a:lnTo>
-                  <a:lnTo>
-                    <a:pt x="2402393" y="803749"/>
-                  </a:lnTo>
-                  <a:lnTo>
-                    <a:pt x="2324759" y="784117"/>
-                  </a:lnTo>
-                  <a:lnTo>
-                    <a:pt x="2247125" y="764130"/>
-                  </a:lnTo>
-                  <a:lnTo>
-                    <a:pt x="2169491" y="743784"/>
-                  </a:lnTo>
-                  <a:lnTo>
-                    <a:pt x="2091857" y="723072"/>
-                  </a:lnTo>
-                  <a:lnTo>
-                    <a:pt x="2014223" y="701986"/>
-                  </a:lnTo>
-                  <a:lnTo>
-                    <a:pt x="1936589" y="680521"/>
-                  </a:lnTo>
-                  <a:lnTo>
-                    <a:pt x="1858955" y="658670"/>
-                  </a:lnTo>
-                  <a:lnTo>
-                    <a:pt x="1781321" y="636425"/>
-                  </a:lnTo>
-                  <a:lnTo>
-                    <a:pt x="1703687" y="613779"/>
-                  </a:lnTo>
-                  <a:lnTo>
-                    <a:pt x="1626053" y="590726"/>
-                  </a:lnTo>
-                  <a:lnTo>
-                    <a:pt x="1548419" y="567258"/>
-                  </a:lnTo>
-                  <a:lnTo>
-                    <a:pt x="1470785" y="543367"/>
-                  </a:lnTo>
-                  <a:lnTo>
-                    <a:pt x="1393151" y="519046"/>
-                  </a:lnTo>
-                  <a:lnTo>
-                    <a:pt x="1315517" y="494287"/>
-                  </a:lnTo>
-                  <a:lnTo>
-                    <a:pt x="1237883" y="469082"/>
-                  </a:lnTo>
-                  <a:lnTo>
-                    <a:pt x="1160249" y="443423"/>
-                  </a:lnTo>
-                  <a:lnTo>
-                    <a:pt x="1082615" y="417302"/>
-                  </a:lnTo>
-                  <a:lnTo>
-                    <a:pt x="1004981" y="390711"/>
-                  </a:lnTo>
-                  <a:lnTo>
-                    <a:pt x="927346" y="363642"/>
-                  </a:lnTo>
-                  <a:lnTo>
-                    <a:pt x="849712" y="336084"/>
-                  </a:lnTo>
-                  <a:lnTo>
-                    <a:pt x="772078" y="308031"/>
-                  </a:lnTo>
-                  <a:lnTo>
-                    <a:pt x="694444" y="279472"/>
-                  </a:lnTo>
-                  <a:lnTo>
-                    <a:pt x="616810" y="250400"/>
-                  </a:lnTo>
-                  <a:lnTo>
-                    <a:pt x="539176" y="220803"/>
-                  </a:lnTo>
-                  <a:lnTo>
-                    <a:pt x="461542" y="190674"/>
-                  </a:lnTo>
-                  <a:lnTo>
-                    <a:pt x="383908" y="160003"/>
-                  </a:lnTo>
-                  <a:lnTo>
-                    <a:pt x="306274" y="128779"/>
-                  </a:lnTo>
-                  <a:lnTo>
-                    <a:pt x="228640" y="96993"/>
-                  </a:lnTo>
-                  <a:lnTo>
-                    <a:pt x="151006" y="64634"/>
-                  </a:lnTo>
-                  <a:lnTo>
-                    <a:pt x="73372" y="31693"/>
+                    <a:pt x="7293338" y="1831332"/>
+                  </a:lnTo>
+                  <a:lnTo>
+                    <a:pt x="7215704" y="1829675"/>
+                  </a:lnTo>
+                  <a:lnTo>
+                    <a:pt x="7138070" y="1827892"/>
+                  </a:lnTo>
+                  <a:lnTo>
+                    <a:pt x="7060436" y="1825973"/>
+                  </a:lnTo>
+                  <a:lnTo>
+                    <a:pt x="6982802" y="1823909"/>
+                  </a:lnTo>
+                  <a:lnTo>
+                    <a:pt x="6905168" y="1821687"/>
+                  </a:lnTo>
+                  <a:lnTo>
+                    <a:pt x="6827534" y="1819297"/>
+                  </a:lnTo>
+                  <a:lnTo>
+                    <a:pt x="6749900" y="1816726"/>
+                  </a:lnTo>
+                  <a:lnTo>
+                    <a:pt x="6672266" y="1813959"/>
+                  </a:lnTo>
+                  <a:lnTo>
+                    <a:pt x="6594632" y="1810982"/>
+                  </a:lnTo>
+                  <a:lnTo>
+                    <a:pt x="6516998" y="1807778"/>
+                  </a:lnTo>
+                  <a:lnTo>
+                    <a:pt x="6439364" y="1804331"/>
+                  </a:lnTo>
+                  <a:lnTo>
+                    <a:pt x="6361730" y="1800622"/>
+                  </a:lnTo>
+                  <a:lnTo>
+                    <a:pt x="6284096" y="1796632"/>
+                  </a:lnTo>
+                  <a:lnTo>
+                    <a:pt x="6206462" y="1792338"/>
+                  </a:lnTo>
+                  <a:lnTo>
+                    <a:pt x="6128827" y="1787718"/>
+                  </a:lnTo>
+                  <a:lnTo>
+                    <a:pt x="6051193" y="1782747"/>
+                  </a:lnTo>
+                  <a:lnTo>
+                    <a:pt x="5973559" y="1777398"/>
+                  </a:lnTo>
+                  <a:lnTo>
+                    <a:pt x="5895925" y="1771643"/>
+                  </a:lnTo>
+                  <a:lnTo>
+                    <a:pt x="5818291" y="1765450"/>
+                  </a:lnTo>
+                  <a:lnTo>
+                    <a:pt x="5740657" y="1758787"/>
+                  </a:lnTo>
+                  <a:lnTo>
+                    <a:pt x="5663023" y="1751618"/>
+                  </a:lnTo>
+                  <a:lnTo>
+                    <a:pt x="5585389" y="1743904"/>
+                  </a:lnTo>
+                  <a:lnTo>
+                    <a:pt x="5507755" y="1735604"/>
+                  </a:lnTo>
+                  <a:lnTo>
+                    <a:pt x="5430121" y="1726673"/>
+                  </a:lnTo>
+                  <a:lnTo>
+                    <a:pt x="5352487" y="1717064"/>
+                  </a:lnTo>
+                  <a:lnTo>
+                    <a:pt x="5274853" y="1706724"/>
+                  </a:lnTo>
+                  <a:lnTo>
+                    <a:pt x="5197219" y="1695599"/>
+                  </a:lnTo>
+                  <a:lnTo>
+                    <a:pt x="5119585" y="1683628"/>
+                  </a:lnTo>
+                  <a:lnTo>
+                    <a:pt x="5041951" y="1670748"/>
+                  </a:lnTo>
+                  <a:lnTo>
+                    <a:pt x="4964317" y="1656890"/>
+                  </a:lnTo>
+                  <a:lnTo>
+                    <a:pt x="4886683" y="1641978"/>
+                  </a:lnTo>
+                  <a:lnTo>
+                    <a:pt x="4809049" y="1625933"/>
+                  </a:lnTo>
+                  <a:lnTo>
+                    <a:pt x="4731415" y="1608669"/>
+                  </a:lnTo>
+                  <a:lnTo>
+                    <a:pt x="4653781" y="1590093"/>
+                  </a:lnTo>
+                  <a:lnTo>
+                    <a:pt x="4576147" y="1570106"/>
+                  </a:lnTo>
+                  <a:lnTo>
+                    <a:pt x="4498513" y="1548601"/>
+                  </a:lnTo>
+                  <a:lnTo>
+                    <a:pt x="4420879" y="1525461"/>
+                  </a:lnTo>
+                  <a:lnTo>
+                    <a:pt x="4343244" y="1500563"/>
+                  </a:lnTo>
+                  <a:lnTo>
+                    <a:pt x="4265610" y="1473773"/>
+                  </a:lnTo>
+                  <a:lnTo>
+                    <a:pt x="4187976" y="1444948"/>
+                  </a:lnTo>
+                  <a:lnTo>
+                    <a:pt x="4110342" y="1413932"/>
+                  </a:lnTo>
+                  <a:lnTo>
+                    <a:pt x="4032708" y="1380560"/>
+                  </a:lnTo>
+                  <a:lnTo>
+                    <a:pt x="3955074" y="1344652"/>
+                  </a:lnTo>
+                  <a:lnTo>
+                    <a:pt x="3877440" y="1306016"/>
+                  </a:lnTo>
+                  <a:lnTo>
+                    <a:pt x="3799806" y="1264444"/>
+                  </a:lnTo>
+                  <a:lnTo>
+                    <a:pt x="3722172" y="1219713"/>
+                  </a:lnTo>
+                  <a:lnTo>
+                    <a:pt x="3644538" y="1171583"/>
+                  </a:lnTo>
+                  <a:lnTo>
+                    <a:pt x="3566904" y="1119797"/>
+                  </a:lnTo>
+                  <a:lnTo>
+                    <a:pt x="3489270" y="1064075"/>
+                  </a:lnTo>
+                  <a:lnTo>
+                    <a:pt x="3411636" y="1004120"/>
+                  </a:lnTo>
+                  <a:lnTo>
+                    <a:pt x="3334002" y="973273"/>
+                  </a:lnTo>
+                  <a:lnTo>
+                    <a:pt x="3256368" y="957879"/>
+                  </a:lnTo>
+                  <a:lnTo>
+                    <a:pt x="3178734" y="942216"/>
+                  </a:lnTo>
+                  <a:lnTo>
+                    <a:pt x="3101100" y="926278"/>
+                  </a:lnTo>
+                  <a:lnTo>
+                    <a:pt x="3023466" y="910062"/>
+                  </a:lnTo>
+                  <a:lnTo>
+                    <a:pt x="2945832" y="893562"/>
+                  </a:lnTo>
+                  <a:lnTo>
+                    <a:pt x="2868198" y="876774"/>
+                  </a:lnTo>
+                  <a:lnTo>
+                    <a:pt x="2790564" y="859692"/>
+                  </a:lnTo>
+                  <a:lnTo>
+                    <a:pt x="2712930" y="842310"/>
+                  </a:lnTo>
+                  <a:lnTo>
+                    <a:pt x="2635295" y="824625"/>
+                  </a:lnTo>
+                  <a:lnTo>
+                    <a:pt x="2557661" y="806631"/>
+                  </a:lnTo>
+                  <a:lnTo>
+                    <a:pt x="2480027" y="788321"/>
+                  </a:lnTo>
+                  <a:lnTo>
+                    <a:pt x="2402393" y="769692"/>
+                  </a:lnTo>
+                  <a:lnTo>
+                    <a:pt x="2324759" y="750736"/>
+                  </a:lnTo>
+                  <a:lnTo>
+                    <a:pt x="2247125" y="731448"/>
+                  </a:lnTo>
+                  <a:lnTo>
+                    <a:pt x="2169491" y="711824"/>
+                  </a:lnTo>
+                  <a:lnTo>
+                    <a:pt x="2091857" y="691855"/>
+                  </a:lnTo>
+                  <a:lnTo>
+                    <a:pt x="2014223" y="671538"/>
+                  </a:lnTo>
+                  <a:lnTo>
+                    <a:pt x="1936589" y="650865"/>
+                  </a:lnTo>
+                  <a:lnTo>
+                    <a:pt x="1858955" y="629830"/>
+                  </a:lnTo>
+                  <a:lnTo>
+                    <a:pt x="1781321" y="608428"/>
+                  </a:lnTo>
+                  <a:lnTo>
+                    <a:pt x="1703687" y="586651"/>
+                  </a:lnTo>
+                  <a:lnTo>
+                    <a:pt x="1626053" y="564492"/>
+                  </a:lnTo>
+                  <a:lnTo>
+                    <a:pt x="1548419" y="541947"/>
+                  </a:lnTo>
+                  <a:lnTo>
+                    <a:pt x="1470785" y="519006"/>
+                  </a:lnTo>
+                  <a:lnTo>
+                    <a:pt x="1393151" y="495665"/>
+                  </a:lnTo>
+                  <a:lnTo>
+                    <a:pt x="1315517" y="471915"/>
+                  </a:lnTo>
+                  <a:lnTo>
+                    <a:pt x="1237883" y="447749"/>
+                  </a:lnTo>
+                  <a:lnTo>
+                    <a:pt x="1160249" y="423161"/>
+                  </a:lnTo>
+                  <a:lnTo>
+                    <a:pt x="1082615" y="398142"/>
+                  </a:lnTo>
+                  <a:lnTo>
+                    <a:pt x="1004981" y="372686"/>
+                  </a:lnTo>
+                  <a:lnTo>
+                    <a:pt x="927346" y="346785"/>
+                  </a:lnTo>
+                  <a:lnTo>
+                    <a:pt x="849712" y="320430"/>
+                  </a:lnTo>
+                  <a:lnTo>
+                    <a:pt x="772078" y="293614"/>
+                  </a:lnTo>
+                  <a:lnTo>
+                    <a:pt x="694444" y="266329"/>
+                  </a:lnTo>
+                  <a:lnTo>
+                    <a:pt x="616810" y="238567"/>
+                  </a:lnTo>
+                  <a:lnTo>
+                    <a:pt x="539176" y="210319"/>
+                  </a:lnTo>
+                  <a:lnTo>
+                    <a:pt x="461542" y="181576"/>
+                  </a:lnTo>
+                  <a:lnTo>
+                    <a:pt x="383908" y="152331"/>
+                  </a:lnTo>
+                  <a:lnTo>
+                    <a:pt x="306274" y="122574"/>
+                  </a:lnTo>
+                  <a:lnTo>
+                    <a:pt x="228640" y="92297"/>
+                  </a:lnTo>
+                  <a:lnTo>
+                    <a:pt x="151006" y="61490"/>
+                  </a:lnTo>
+                  <a:lnTo>
+                    <a:pt x="73372" y="30143"/>
                   </a:lnTo>
                   <a:lnTo>
                     <a:pt x="0" y="0"/>
@@ -4082,255 +4091,267 @@
           </p:nvSpPr>
           <p:spPr>
             <a:xfrm>
-              <a:off x="2042355" y="1896563"/>
-              <a:ext cx="6146134" cy="3590923"/>
+              <a:off x="1743702" y="1896563"/>
+              <a:ext cx="6444788" cy="3567571"/>
             </a:xfrm>
             <a:custGeom>
               <a:avLst/>
               <a:pathLst>
-                <a:path w="6146134" h="3590923">
+                <a:path w="6444788" h="3567571">
                   <a:moveTo>
                     <a:pt x="0" y="0"/>
                   </a:moveTo>
                   <a:lnTo>
-                    <a:pt x="13045" y="32177"/>
-                  </a:lnTo>
-                  <a:lnTo>
-                    <a:pt x="90679" y="214053"/>
-                  </a:lnTo>
-                  <a:lnTo>
-                    <a:pt x="168313" y="386792"/>
-                  </a:lnTo>
-                  <a:lnTo>
-                    <a:pt x="245947" y="550854"/>
-                  </a:lnTo>
-                  <a:lnTo>
-                    <a:pt x="323581" y="706673"/>
-                  </a:lnTo>
-                  <a:lnTo>
-                    <a:pt x="401215" y="854666"/>
-                  </a:lnTo>
-                  <a:lnTo>
-                    <a:pt x="478849" y="995223"/>
-                  </a:lnTo>
-                  <a:lnTo>
-                    <a:pt x="556483" y="1128720"/>
-                  </a:lnTo>
-                  <a:lnTo>
-                    <a:pt x="634117" y="1255510"/>
-                  </a:lnTo>
-                  <a:lnTo>
-                    <a:pt x="711751" y="1375932"/>
-                  </a:lnTo>
-                  <a:lnTo>
-                    <a:pt x="789385" y="1490303"/>
-                  </a:lnTo>
-                  <a:lnTo>
-                    <a:pt x="867019" y="1598929"/>
-                  </a:lnTo>
-                  <a:lnTo>
-                    <a:pt x="944653" y="1702099"/>
-                  </a:lnTo>
-                  <a:lnTo>
-                    <a:pt x="1022287" y="1800085"/>
-                  </a:lnTo>
-                  <a:lnTo>
-                    <a:pt x="1099921" y="1893149"/>
-                  </a:lnTo>
-                  <a:lnTo>
-                    <a:pt x="1177555" y="1981538"/>
-                  </a:lnTo>
-                  <a:lnTo>
-                    <a:pt x="1255189" y="2065487"/>
-                  </a:lnTo>
-                  <a:lnTo>
-                    <a:pt x="1332823" y="2145218"/>
-                  </a:lnTo>
-                  <a:lnTo>
-                    <a:pt x="1410457" y="2220945"/>
-                  </a:lnTo>
-                  <a:lnTo>
-                    <a:pt x="1488091" y="2292867"/>
-                  </a:lnTo>
-                  <a:lnTo>
-                    <a:pt x="1565726" y="2361176"/>
-                  </a:lnTo>
-                  <a:lnTo>
-                    <a:pt x="1643360" y="2426053"/>
-                  </a:lnTo>
-                  <a:lnTo>
-                    <a:pt x="1720994" y="2487671"/>
-                  </a:lnTo>
-                  <a:lnTo>
-                    <a:pt x="1798628" y="2546194"/>
-                  </a:lnTo>
-                  <a:lnTo>
-                    <a:pt x="1876262" y="2601777"/>
-                  </a:lnTo>
-                  <a:lnTo>
-                    <a:pt x="1953896" y="2654568"/>
-                  </a:lnTo>
-                  <a:lnTo>
-                    <a:pt x="2031530" y="2704707"/>
-                  </a:lnTo>
-                  <a:lnTo>
-                    <a:pt x="2109164" y="2752327"/>
-                  </a:lnTo>
-                  <a:lnTo>
-                    <a:pt x="2186798" y="2797555"/>
-                  </a:lnTo>
-                  <a:lnTo>
-                    <a:pt x="2264432" y="2840510"/>
-                  </a:lnTo>
-                  <a:lnTo>
-                    <a:pt x="2342066" y="2881308"/>
-                  </a:lnTo>
-                  <a:lnTo>
-                    <a:pt x="2419700" y="2920057"/>
-                  </a:lnTo>
-                  <a:lnTo>
-                    <a:pt x="2497334" y="2956859"/>
-                  </a:lnTo>
-                  <a:lnTo>
-                    <a:pt x="2574968" y="2991812"/>
-                  </a:lnTo>
-                  <a:lnTo>
-                    <a:pt x="2652602" y="3025009"/>
-                  </a:lnTo>
-                  <a:lnTo>
-                    <a:pt x="2730236" y="3056538"/>
-                  </a:lnTo>
-                  <a:lnTo>
-                    <a:pt x="2807870" y="3086484"/>
-                  </a:lnTo>
-                  <a:lnTo>
-                    <a:pt x="2885504" y="3114925"/>
-                  </a:lnTo>
-                  <a:lnTo>
-                    <a:pt x="2963138" y="3141938"/>
-                  </a:lnTo>
-                  <a:lnTo>
-                    <a:pt x="3040772" y="3167593"/>
-                  </a:lnTo>
-                  <a:lnTo>
-                    <a:pt x="3118406" y="3191960"/>
-                  </a:lnTo>
-                  <a:lnTo>
-                    <a:pt x="3196040" y="3215103"/>
-                  </a:lnTo>
-                  <a:lnTo>
-                    <a:pt x="3273675" y="3237083"/>
-                  </a:lnTo>
-                  <a:lnTo>
-                    <a:pt x="3351309" y="3257959"/>
-                  </a:lnTo>
-                  <a:lnTo>
-                    <a:pt x="3428943" y="3277786"/>
-                  </a:lnTo>
-                  <a:lnTo>
-                    <a:pt x="3506577" y="3296617"/>
-                  </a:lnTo>
-                  <a:lnTo>
-                    <a:pt x="3584211" y="3314502"/>
-                  </a:lnTo>
-                  <a:lnTo>
-                    <a:pt x="3661845" y="3331489"/>
-                  </a:lnTo>
-                  <a:lnTo>
-                    <a:pt x="3739479" y="3347622"/>
-                  </a:lnTo>
-                  <a:lnTo>
-                    <a:pt x="3817113" y="3362945"/>
-                  </a:lnTo>
-                  <a:lnTo>
-                    <a:pt x="3894747" y="3377498"/>
-                  </a:lnTo>
-                  <a:lnTo>
-                    <a:pt x="3972381" y="3391320"/>
-                  </a:lnTo>
-                  <a:lnTo>
-                    <a:pt x="4050015" y="3404448"/>
-                  </a:lnTo>
-                  <a:lnTo>
-                    <a:pt x="4127649" y="3416916"/>
-                  </a:lnTo>
-                  <a:lnTo>
-                    <a:pt x="4205283" y="3428758"/>
-                  </a:lnTo>
-                  <a:lnTo>
-                    <a:pt x="4282917" y="3440005"/>
-                  </a:lnTo>
-                  <a:lnTo>
-                    <a:pt x="4360551" y="3450687"/>
-                  </a:lnTo>
-                  <a:lnTo>
-                    <a:pt x="4438185" y="3460832"/>
-                  </a:lnTo>
-                  <a:lnTo>
-                    <a:pt x="4515819" y="3470468"/>
-                  </a:lnTo>
-                  <a:lnTo>
-                    <a:pt x="4593453" y="3479620"/>
-                  </a:lnTo>
-                  <a:lnTo>
-                    <a:pt x="4671087" y="3488312"/>
-                  </a:lnTo>
-                  <a:lnTo>
-                    <a:pt x="4748721" y="3496567"/>
-                  </a:lnTo>
-                  <a:lnTo>
-                    <a:pt x="4826355" y="3504407"/>
-                  </a:lnTo>
-                  <a:lnTo>
-                    <a:pt x="4903989" y="3511854"/>
-                  </a:lnTo>
-                  <a:lnTo>
-                    <a:pt x="4981623" y="3518927"/>
-                  </a:lnTo>
-                  <a:lnTo>
-                    <a:pt x="5059258" y="3525644"/>
-                  </a:lnTo>
-                  <a:lnTo>
-                    <a:pt x="5136892" y="3532024"/>
-                  </a:lnTo>
-                  <a:lnTo>
-                    <a:pt x="5214526" y="3538083"/>
-                  </a:lnTo>
-                  <a:lnTo>
-                    <a:pt x="5292160" y="3543838"/>
-                  </a:lnTo>
-                  <a:lnTo>
-                    <a:pt x="5369794" y="3549304"/>
-                  </a:lnTo>
-                  <a:lnTo>
-                    <a:pt x="5447428" y="3554495"/>
-                  </a:lnTo>
-                  <a:lnTo>
-                    <a:pt x="5525062" y="3559426"/>
-                  </a:lnTo>
-                  <a:lnTo>
-                    <a:pt x="5602696" y="3564109"/>
-                  </a:lnTo>
-                  <a:lnTo>
-                    <a:pt x="5680330" y="3568556"/>
-                  </a:lnTo>
-                  <a:lnTo>
-                    <a:pt x="5757964" y="3572780"/>
-                  </a:lnTo>
-                  <a:lnTo>
-                    <a:pt x="5835598" y="3576792"/>
-                  </a:lnTo>
-                  <a:lnTo>
-                    <a:pt x="5913232" y="3580603"/>
-                  </a:lnTo>
-                  <a:lnTo>
-                    <a:pt x="5990866" y="3584222"/>
-                  </a:lnTo>
-                  <a:lnTo>
-                    <a:pt x="6068500" y="3587659"/>
-                  </a:lnTo>
-                  <a:lnTo>
-                    <a:pt x="6146134" y="3590923"/>
+                    <a:pt x="1162" y="2532"/>
+                  </a:lnTo>
+                  <a:lnTo>
+                    <a:pt x="78796" y="164155"/>
+                  </a:lnTo>
+                  <a:lnTo>
+                    <a:pt x="156430" y="318622"/>
+                  </a:lnTo>
+                  <a:lnTo>
+                    <a:pt x="234064" y="466249"/>
+                  </a:lnTo>
+                  <a:lnTo>
+                    <a:pt x="311698" y="607339"/>
+                  </a:lnTo>
+                  <a:lnTo>
+                    <a:pt x="389332" y="742182"/>
+                  </a:lnTo>
+                  <a:lnTo>
+                    <a:pt x="466966" y="871054"/>
+                  </a:lnTo>
+                  <a:lnTo>
+                    <a:pt x="544600" y="994220"/>
+                  </a:lnTo>
+                  <a:lnTo>
+                    <a:pt x="622234" y="1111933"/>
+                  </a:lnTo>
+                  <a:lnTo>
+                    <a:pt x="699868" y="1224433"/>
+                  </a:lnTo>
+                  <a:lnTo>
+                    <a:pt x="777502" y="1331952"/>
+                  </a:lnTo>
+                  <a:lnTo>
+                    <a:pt x="855136" y="1434709"/>
+                  </a:lnTo>
+                  <a:lnTo>
+                    <a:pt x="932770" y="1532917"/>
+                  </a:lnTo>
+                  <a:lnTo>
+                    <a:pt x="1010404" y="1626777"/>
+                  </a:lnTo>
+                  <a:lnTo>
+                    <a:pt x="1088038" y="1716480"/>
+                  </a:lnTo>
+                  <a:lnTo>
+                    <a:pt x="1165673" y="1802211"/>
+                  </a:lnTo>
+                  <a:lnTo>
+                    <a:pt x="1243307" y="1884147"/>
+                  </a:lnTo>
+                  <a:lnTo>
+                    <a:pt x="1320941" y="1962454"/>
+                  </a:lnTo>
+                  <a:lnTo>
+                    <a:pt x="1398575" y="2037294"/>
+                  </a:lnTo>
+                  <a:lnTo>
+                    <a:pt x="1476209" y="2108820"/>
+                  </a:lnTo>
+                  <a:lnTo>
+                    <a:pt x="1553843" y="2177179"/>
+                  </a:lnTo>
+                  <a:lnTo>
+                    <a:pt x="1631477" y="2242511"/>
+                  </a:lnTo>
+                  <a:lnTo>
+                    <a:pt x="1709111" y="2304950"/>
+                  </a:lnTo>
+                  <a:lnTo>
+                    <a:pt x="1786745" y="2364625"/>
+                  </a:lnTo>
+                  <a:lnTo>
+                    <a:pt x="1864379" y="2421657"/>
+                  </a:lnTo>
+                  <a:lnTo>
+                    <a:pt x="1942013" y="2476164"/>
+                  </a:lnTo>
+                  <a:lnTo>
+                    <a:pt x="2019647" y="2528257"/>
+                  </a:lnTo>
+                  <a:lnTo>
+                    <a:pt x="2097281" y="2578044"/>
+                  </a:lnTo>
+                  <a:lnTo>
+                    <a:pt x="2174915" y="2625626"/>
+                  </a:lnTo>
+                  <a:lnTo>
+                    <a:pt x="2252549" y="2671101"/>
+                  </a:lnTo>
+                  <a:lnTo>
+                    <a:pt x="2330183" y="2714563"/>
+                  </a:lnTo>
+                  <a:lnTo>
+                    <a:pt x="2407817" y="2756100"/>
+                  </a:lnTo>
+                  <a:lnTo>
+                    <a:pt x="2485451" y="2795798"/>
+                  </a:lnTo>
+                  <a:lnTo>
+                    <a:pt x="2563085" y="2833738"/>
+                  </a:lnTo>
+                  <a:lnTo>
+                    <a:pt x="2640719" y="2869999"/>
+                  </a:lnTo>
+                  <a:lnTo>
+                    <a:pt x="2718353" y="2904653"/>
+                  </a:lnTo>
+                  <a:lnTo>
+                    <a:pt x="2795987" y="2937774"/>
+                  </a:lnTo>
+                  <a:lnTo>
+                    <a:pt x="2873622" y="2969427"/>
+                  </a:lnTo>
+                  <a:lnTo>
+                    <a:pt x="2951256" y="2999680"/>
+                  </a:lnTo>
+                  <a:lnTo>
+                    <a:pt x="3028890" y="3028592"/>
+                  </a:lnTo>
+                  <a:lnTo>
+                    <a:pt x="3106524" y="3056224"/>
+                  </a:lnTo>
+                  <a:lnTo>
+                    <a:pt x="3184158" y="3082633"/>
+                  </a:lnTo>
+                  <a:lnTo>
+                    <a:pt x="3261792" y="3107873"/>
+                  </a:lnTo>
+                  <a:lnTo>
+                    <a:pt x="3339426" y="3131995"/>
+                  </a:lnTo>
+                  <a:lnTo>
+                    <a:pt x="3417060" y="3155048"/>
+                  </a:lnTo>
+                  <a:lnTo>
+                    <a:pt x="3494694" y="3177081"/>
+                  </a:lnTo>
+                  <a:lnTo>
+                    <a:pt x="3572328" y="3198139"/>
+                  </a:lnTo>
+                  <a:lnTo>
+                    <a:pt x="3649962" y="3218264"/>
+                  </a:lnTo>
+                  <a:lnTo>
+                    <a:pt x="3727596" y="3237498"/>
+                  </a:lnTo>
+                  <a:lnTo>
+                    <a:pt x="3805230" y="3255880"/>
+                  </a:lnTo>
+                  <a:lnTo>
+                    <a:pt x="3882864" y="3273448"/>
+                  </a:lnTo>
+                  <a:lnTo>
+                    <a:pt x="3960498" y="3290239"/>
+                  </a:lnTo>
+                  <a:lnTo>
+                    <a:pt x="4038132" y="3306286"/>
+                  </a:lnTo>
+                  <a:lnTo>
+                    <a:pt x="4115766" y="3321622"/>
+                  </a:lnTo>
+                  <a:lnTo>
+                    <a:pt x="4193400" y="3336279"/>
+                  </a:lnTo>
+                  <a:lnTo>
+                    <a:pt x="4271034" y="3350288"/>
+                  </a:lnTo>
+                  <a:lnTo>
+                    <a:pt x="4348668" y="3363676"/>
+                  </a:lnTo>
+                  <a:lnTo>
+                    <a:pt x="4426302" y="3376471"/>
+                  </a:lnTo>
+                  <a:lnTo>
+                    <a:pt x="4503936" y="3388699"/>
+                  </a:lnTo>
+                  <a:lnTo>
+                    <a:pt x="4581571" y="3400387"/>
+                  </a:lnTo>
+                  <a:lnTo>
+                    <a:pt x="4659205" y="3411556"/>
+                  </a:lnTo>
+                  <a:lnTo>
+                    <a:pt x="4736839" y="3422231"/>
+                  </a:lnTo>
+                  <a:lnTo>
+                    <a:pt x="4814473" y="3432434"/>
+                  </a:lnTo>
+                  <a:lnTo>
+                    <a:pt x="4892107" y="3442184"/>
+                  </a:lnTo>
+                  <a:lnTo>
+                    <a:pt x="4969741" y="3451503"/>
+                  </a:lnTo>
+                  <a:lnTo>
+                    <a:pt x="5047375" y="3460410"/>
+                  </a:lnTo>
+                  <a:lnTo>
+                    <a:pt x="5125009" y="3468922"/>
+                  </a:lnTo>
+                  <a:lnTo>
+                    <a:pt x="5202643" y="3477057"/>
+                  </a:lnTo>
+                  <a:lnTo>
+                    <a:pt x="5280277" y="3484831"/>
+                  </a:lnTo>
+                  <a:lnTo>
+                    <a:pt x="5357911" y="3492262"/>
+                  </a:lnTo>
+                  <a:lnTo>
+                    <a:pt x="5435545" y="3499363"/>
+                  </a:lnTo>
+                  <a:lnTo>
+                    <a:pt x="5513179" y="3506150"/>
+                  </a:lnTo>
+                  <a:lnTo>
+                    <a:pt x="5590813" y="3512637"/>
+                  </a:lnTo>
+                  <a:lnTo>
+                    <a:pt x="5668447" y="3518836"/>
+                  </a:lnTo>
+                  <a:lnTo>
+                    <a:pt x="5746081" y="3524761"/>
+                  </a:lnTo>
+                  <a:lnTo>
+                    <a:pt x="5823715" y="3530424"/>
+                  </a:lnTo>
+                  <a:lnTo>
+                    <a:pt x="5901349" y="3535835"/>
+                  </a:lnTo>
+                  <a:lnTo>
+                    <a:pt x="5978983" y="3541008"/>
+                  </a:lnTo>
+                  <a:lnTo>
+                    <a:pt x="6056617" y="3545951"/>
+                  </a:lnTo>
+                  <a:lnTo>
+                    <a:pt x="6134251" y="3550675"/>
+                  </a:lnTo>
+                  <a:lnTo>
+                    <a:pt x="6211885" y="3555190"/>
+                  </a:lnTo>
+                  <a:lnTo>
+                    <a:pt x="6289520" y="3559505"/>
+                  </a:lnTo>
+                  <a:lnTo>
+                    <a:pt x="6367154" y="3563629"/>
+                  </a:lnTo>
+                  <a:lnTo>
+                    <a:pt x="6444788" y="3567571"/>
                   </a:lnTo>
                 </a:path>
               </a:pathLst>

--- a/docs/plots/carbo/jx_carbo_linsubhr_ratio_grade3.pptx
+++ b/docs/plots/carbo/jx_carbo_linsubhr_ratio_grade3.pptx
@@ -3003,515 +3003,512 @@
           <p:spPr>
             <a:xfrm>
               <a:off x="817517" y="1896563"/>
-              <a:ext cx="7370972" cy="3632373"/>
+              <a:ext cx="7370972" cy="3641696"/>
             </a:xfrm>
             <a:custGeom>
               <a:avLst/>
               <a:pathLst>
-                <a:path w="7370972" h="3632373">
+                <a:path w="7370972" h="3641696">
                   <a:moveTo>
-                    <a:pt x="1865051" y="0"/>
+                    <a:pt x="2079523" y="0"/>
                   </a:moveTo>
                   <a:lnTo>
-                    <a:pt x="1936589" y="239008"/>
-                  </a:lnTo>
-                  <a:lnTo>
-                    <a:pt x="2014223" y="480068"/>
-                  </a:lnTo>
-                  <a:lnTo>
-                    <a:pt x="2091857" y="704105"/>
-                  </a:lnTo>
-                  <a:lnTo>
-                    <a:pt x="2169491" y="912321"/>
-                  </a:lnTo>
-                  <a:lnTo>
-                    <a:pt x="2247125" y="1105834"/>
-                  </a:lnTo>
-                  <a:lnTo>
-                    <a:pt x="2324759" y="1285682"/>
-                  </a:lnTo>
-                  <a:lnTo>
-                    <a:pt x="2402393" y="1452829"/>
-                  </a:lnTo>
-                  <a:lnTo>
-                    <a:pt x="2480027" y="1608172"/>
-                  </a:lnTo>
-                  <a:lnTo>
-                    <a:pt x="2557661" y="1752546"/>
-                  </a:lnTo>
-                  <a:lnTo>
-                    <a:pt x="2635295" y="1886725"/>
-                  </a:lnTo>
-                  <a:lnTo>
-                    <a:pt x="2712930" y="2011429"/>
-                  </a:lnTo>
-                  <a:lnTo>
-                    <a:pt x="2790564" y="2127326"/>
-                  </a:lnTo>
-                  <a:lnTo>
-                    <a:pt x="2868198" y="2235039"/>
-                  </a:lnTo>
-                  <a:lnTo>
-                    <a:pt x="2945832" y="2335145"/>
-                  </a:lnTo>
-                  <a:lnTo>
-                    <a:pt x="3023466" y="2428183"/>
-                  </a:lnTo>
-                  <a:lnTo>
-                    <a:pt x="3101100" y="2514650"/>
-                  </a:lnTo>
-                  <a:lnTo>
-                    <a:pt x="3178734" y="2595012"/>
-                  </a:lnTo>
-                  <a:lnTo>
-                    <a:pt x="3256368" y="2669698"/>
-                  </a:lnTo>
-                  <a:lnTo>
-                    <a:pt x="3334002" y="2739111"/>
-                  </a:lnTo>
-                  <a:lnTo>
-                    <a:pt x="3411636" y="2787903"/>
-                  </a:lnTo>
-                  <a:lnTo>
-                    <a:pt x="3489270" y="2802772"/>
-                  </a:lnTo>
-                  <a:lnTo>
-                    <a:pt x="3566904" y="2817386"/>
-                  </a:lnTo>
-                  <a:lnTo>
-                    <a:pt x="3644538" y="2831748"/>
-                  </a:lnTo>
-                  <a:lnTo>
-                    <a:pt x="3722172" y="2845863"/>
-                  </a:lnTo>
-                  <a:lnTo>
-                    <a:pt x="3799806" y="2859735"/>
-                  </a:lnTo>
-                  <a:lnTo>
-                    <a:pt x="3877440" y="2873369"/>
-                  </a:lnTo>
-                  <a:lnTo>
-                    <a:pt x="3955074" y="2886769"/>
-                  </a:lnTo>
-                  <a:lnTo>
-                    <a:pt x="4032708" y="2899938"/>
-                  </a:lnTo>
-                  <a:lnTo>
-                    <a:pt x="4110342" y="2912880"/>
-                  </a:lnTo>
-                  <a:lnTo>
-                    <a:pt x="4187976" y="2925601"/>
-                  </a:lnTo>
-                  <a:lnTo>
-                    <a:pt x="4265610" y="2938102"/>
-                  </a:lnTo>
-                  <a:lnTo>
-                    <a:pt x="4343244" y="2950388"/>
-                  </a:lnTo>
-                  <a:lnTo>
-                    <a:pt x="4420879" y="2962464"/>
-                  </a:lnTo>
-                  <a:lnTo>
-                    <a:pt x="4498513" y="2974331"/>
-                  </a:lnTo>
-                  <a:lnTo>
-                    <a:pt x="4576147" y="2985995"/>
-                  </a:lnTo>
-                  <a:lnTo>
-                    <a:pt x="4653781" y="2997457"/>
-                  </a:lnTo>
-                  <a:lnTo>
-                    <a:pt x="4731415" y="3008723"/>
-                  </a:lnTo>
-                  <a:lnTo>
-                    <a:pt x="4809049" y="3019795"/>
-                  </a:lnTo>
-                  <a:lnTo>
-                    <a:pt x="4886683" y="3030677"/>
-                  </a:lnTo>
-                  <a:lnTo>
-                    <a:pt x="4964317" y="3041372"/>
-                  </a:lnTo>
-                  <a:lnTo>
-                    <a:pt x="5041951" y="3051882"/>
-                  </a:lnTo>
-                  <a:lnTo>
-                    <a:pt x="5119585" y="3062212"/>
-                  </a:lnTo>
-                  <a:lnTo>
-                    <a:pt x="5197219" y="3072365"/>
-                  </a:lnTo>
-                  <a:lnTo>
-                    <a:pt x="5274853" y="3082343"/>
-                  </a:lnTo>
-                  <a:lnTo>
-                    <a:pt x="5352487" y="3092149"/>
-                  </a:lnTo>
-                  <a:lnTo>
-                    <a:pt x="5430121" y="3101786"/>
-                  </a:lnTo>
-                  <a:lnTo>
-                    <a:pt x="5507755" y="3111258"/>
-                  </a:lnTo>
-                  <a:lnTo>
-                    <a:pt x="5585389" y="3120567"/>
-                  </a:lnTo>
-                  <a:lnTo>
-                    <a:pt x="5663023" y="3129716"/>
-                  </a:lnTo>
-                  <a:lnTo>
-                    <a:pt x="5740657" y="3138708"/>
-                  </a:lnTo>
-                  <a:lnTo>
-                    <a:pt x="5818291" y="3147545"/>
-                  </a:lnTo>
-                  <a:lnTo>
-                    <a:pt x="5895925" y="3156230"/>
-                  </a:lnTo>
-                  <a:lnTo>
-                    <a:pt x="5973559" y="3164766"/>
-                  </a:lnTo>
-                  <a:lnTo>
-                    <a:pt x="6051193" y="3173155"/>
-                  </a:lnTo>
-                  <a:lnTo>
-                    <a:pt x="6128827" y="3181400"/>
-                  </a:lnTo>
-                  <a:lnTo>
-                    <a:pt x="6206462" y="3189503"/>
-                  </a:lnTo>
-                  <a:lnTo>
-                    <a:pt x="6284096" y="3197466"/>
-                  </a:lnTo>
-                  <a:lnTo>
-                    <a:pt x="6361730" y="3205293"/>
-                  </a:lnTo>
-                  <a:lnTo>
-                    <a:pt x="6439364" y="3212985"/>
-                  </a:lnTo>
-                  <a:lnTo>
-                    <a:pt x="6516998" y="3220545"/>
-                  </a:lnTo>
-                  <a:lnTo>
-                    <a:pt x="6594632" y="3227975"/>
-                  </a:lnTo>
-                  <a:lnTo>
-                    <a:pt x="6672266" y="3235277"/>
-                  </a:lnTo>
-                  <a:lnTo>
-                    <a:pt x="6749900" y="3242453"/>
-                  </a:lnTo>
-                  <a:lnTo>
-                    <a:pt x="6827534" y="3249507"/>
-                  </a:lnTo>
-                  <a:lnTo>
-                    <a:pt x="6905168" y="3256438"/>
-                  </a:lnTo>
-                  <a:lnTo>
-                    <a:pt x="6982802" y="3263251"/>
-                  </a:lnTo>
-                  <a:lnTo>
-                    <a:pt x="7060436" y="3269947"/>
-                  </a:lnTo>
-                  <a:lnTo>
-                    <a:pt x="7138070" y="3276527"/>
-                  </a:lnTo>
-                  <a:lnTo>
-                    <a:pt x="7215704" y="3282994"/>
-                  </a:lnTo>
-                  <a:lnTo>
-                    <a:pt x="7293338" y="3289350"/>
-                  </a:lnTo>
-                  <a:lnTo>
-                    <a:pt x="7370972" y="3295597"/>
-                  </a:lnTo>
-                  <a:lnTo>
-                    <a:pt x="7370972" y="3632373"/>
-                  </a:lnTo>
-                  <a:lnTo>
-                    <a:pt x="7293338" y="3630833"/>
-                  </a:lnTo>
-                  <a:lnTo>
-                    <a:pt x="7215704" y="3629176"/>
-                  </a:lnTo>
-                  <a:lnTo>
-                    <a:pt x="7138070" y="3627393"/>
-                  </a:lnTo>
-                  <a:lnTo>
-                    <a:pt x="7060436" y="3625474"/>
-                  </a:lnTo>
-                  <a:lnTo>
-                    <a:pt x="6982802" y="3623410"/>
-                  </a:lnTo>
-                  <a:lnTo>
-                    <a:pt x="6905168" y="3621189"/>
-                  </a:lnTo>
-                  <a:lnTo>
-                    <a:pt x="6827534" y="3618799"/>
-                  </a:lnTo>
-                  <a:lnTo>
-                    <a:pt x="6749900" y="3616227"/>
-                  </a:lnTo>
-                  <a:lnTo>
-                    <a:pt x="6672266" y="3613460"/>
-                  </a:lnTo>
-                  <a:lnTo>
-                    <a:pt x="6594632" y="3610483"/>
-                  </a:lnTo>
-                  <a:lnTo>
-                    <a:pt x="6516998" y="3607279"/>
-                  </a:lnTo>
-                  <a:lnTo>
-                    <a:pt x="6439364" y="3603832"/>
-                  </a:lnTo>
-                  <a:lnTo>
-                    <a:pt x="6361730" y="3600124"/>
-                  </a:lnTo>
-                  <a:lnTo>
-                    <a:pt x="6284096" y="3596133"/>
-                  </a:lnTo>
-                  <a:lnTo>
-                    <a:pt x="6206462" y="3591839"/>
-                  </a:lnTo>
-                  <a:lnTo>
-                    <a:pt x="6128827" y="3587219"/>
-                  </a:lnTo>
-                  <a:lnTo>
-                    <a:pt x="6051193" y="3582248"/>
-                  </a:lnTo>
-                  <a:lnTo>
-                    <a:pt x="5973559" y="3576899"/>
-                  </a:lnTo>
-                  <a:lnTo>
-                    <a:pt x="5895925" y="3571144"/>
-                  </a:lnTo>
-                  <a:lnTo>
-                    <a:pt x="5818291" y="3564952"/>
-                  </a:lnTo>
-                  <a:lnTo>
-                    <a:pt x="5740657" y="3558289"/>
-                  </a:lnTo>
-                  <a:lnTo>
-                    <a:pt x="5663023" y="3551119"/>
-                  </a:lnTo>
-                  <a:lnTo>
-                    <a:pt x="5585389" y="3543405"/>
-                  </a:lnTo>
-                  <a:lnTo>
-                    <a:pt x="5507755" y="3535105"/>
-                  </a:lnTo>
-                  <a:lnTo>
-                    <a:pt x="5430121" y="3526174"/>
-                  </a:lnTo>
-                  <a:lnTo>
-                    <a:pt x="5352487" y="3516565"/>
-                  </a:lnTo>
-                  <a:lnTo>
-                    <a:pt x="5274853" y="3506225"/>
-                  </a:lnTo>
-                  <a:lnTo>
-                    <a:pt x="5197219" y="3495100"/>
-                  </a:lnTo>
-                  <a:lnTo>
-                    <a:pt x="5119585" y="3483129"/>
-                  </a:lnTo>
-                  <a:lnTo>
-                    <a:pt x="5041951" y="3470249"/>
-                  </a:lnTo>
-                  <a:lnTo>
-                    <a:pt x="4964317" y="3456391"/>
-                  </a:lnTo>
-                  <a:lnTo>
-                    <a:pt x="4886683" y="3441479"/>
-                  </a:lnTo>
-                  <a:lnTo>
-                    <a:pt x="4809049" y="3425434"/>
-                  </a:lnTo>
-                  <a:lnTo>
-                    <a:pt x="4731415" y="3408170"/>
-                  </a:lnTo>
-                  <a:lnTo>
-                    <a:pt x="4653781" y="3389595"/>
-                  </a:lnTo>
-                  <a:lnTo>
-                    <a:pt x="4576147" y="3369607"/>
-                  </a:lnTo>
-                  <a:lnTo>
-                    <a:pt x="4498513" y="3348102"/>
-                  </a:lnTo>
-                  <a:lnTo>
-                    <a:pt x="4420879" y="3324962"/>
-                  </a:lnTo>
-                  <a:lnTo>
-                    <a:pt x="4343244" y="3300064"/>
-                  </a:lnTo>
-                  <a:lnTo>
-                    <a:pt x="4265610" y="3273274"/>
-                  </a:lnTo>
-                  <a:lnTo>
-                    <a:pt x="4187976" y="3244449"/>
-                  </a:lnTo>
-                  <a:lnTo>
-                    <a:pt x="4110342" y="3213433"/>
-                  </a:lnTo>
-                  <a:lnTo>
-                    <a:pt x="4032708" y="3180061"/>
-                  </a:lnTo>
-                  <a:lnTo>
-                    <a:pt x="3955074" y="3144153"/>
-                  </a:lnTo>
-                  <a:lnTo>
-                    <a:pt x="3877440" y="3105517"/>
-                  </a:lnTo>
-                  <a:lnTo>
-                    <a:pt x="3799806" y="3063945"/>
-                  </a:lnTo>
-                  <a:lnTo>
-                    <a:pt x="3722172" y="3019214"/>
-                  </a:lnTo>
-                  <a:lnTo>
-                    <a:pt x="3644538" y="2971084"/>
-                  </a:lnTo>
-                  <a:lnTo>
-                    <a:pt x="3566904" y="2919298"/>
-                  </a:lnTo>
-                  <a:lnTo>
-                    <a:pt x="3489270" y="2863577"/>
-                  </a:lnTo>
-                  <a:lnTo>
-                    <a:pt x="3411636" y="2803621"/>
-                  </a:lnTo>
-                  <a:lnTo>
-                    <a:pt x="3334002" y="2772774"/>
-                  </a:lnTo>
-                  <a:lnTo>
-                    <a:pt x="3256368" y="2757380"/>
-                  </a:lnTo>
-                  <a:lnTo>
-                    <a:pt x="3178734" y="2741717"/>
-                  </a:lnTo>
-                  <a:lnTo>
-                    <a:pt x="3101100" y="2725779"/>
-                  </a:lnTo>
-                  <a:lnTo>
-                    <a:pt x="3023466" y="2709563"/>
-                  </a:lnTo>
-                  <a:lnTo>
-                    <a:pt x="2945832" y="2693063"/>
-                  </a:lnTo>
-                  <a:lnTo>
-                    <a:pt x="2868198" y="2676275"/>
-                  </a:lnTo>
-                  <a:lnTo>
-                    <a:pt x="2790564" y="2659193"/>
-                  </a:lnTo>
-                  <a:lnTo>
-                    <a:pt x="2712930" y="2641812"/>
-                  </a:lnTo>
-                  <a:lnTo>
-                    <a:pt x="2635295" y="2624126"/>
-                  </a:lnTo>
-                  <a:lnTo>
-                    <a:pt x="2557661" y="2606132"/>
-                  </a:lnTo>
-                  <a:lnTo>
-                    <a:pt x="2480027" y="2587822"/>
-                  </a:lnTo>
-                  <a:lnTo>
-                    <a:pt x="2402393" y="2569193"/>
-                  </a:lnTo>
-                  <a:lnTo>
-                    <a:pt x="2324759" y="2550237"/>
-                  </a:lnTo>
-                  <a:lnTo>
-                    <a:pt x="2247125" y="2530950"/>
-                  </a:lnTo>
-                  <a:lnTo>
-                    <a:pt x="2169491" y="2511325"/>
-                  </a:lnTo>
-                  <a:lnTo>
-                    <a:pt x="2091857" y="2491357"/>
-                  </a:lnTo>
-                  <a:lnTo>
-                    <a:pt x="2014223" y="2471039"/>
-                  </a:lnTo>
-                  <a:lnTo>
-                    <a:pt x="1936589" y="2450366"/>
-                  </a:lnTo>
-                  <a:lnTo>
-                    <a:pt x="1858955" y="2429331"/>
-                  </a:lnTo>
-                  <a:lnTo>
-                    <a:pt x="1781321" y="2407929"/>
-                  </a:lnTo>
-                  <a:lnTo>
-                    <a:pt x="1703687" y="2386152"/>
-                  </a:lnTo>
-                  <a:lnTo>
-                    <a:pt x="1626053" y="2363994"/>
-                  </a:lnTo>
-                  <a:lnTo>
-                    <a:pt x="1548419" y="2341448"/>
-                  </a:lnTo>
-                  <a:lnTo>
-                    <a:pt x="1470785" y="2318507"/>
-                  </a:lnTo>
-                  <a:lnTo>
-                    <a:pt x="1393151" y="2295166"/>
-                  </a:lnTo>
-                  <a:lnTo>
-                    <a:pt x="1315517" y="2271416"/>
-                  </a:lnTo>
-                  <a:lnTo>
-                    <a:pt x="1237883" y="2247250"/>
-                  </a:lnTo>
-                  <a:lnTo>
-                    <a:pt x="1160249" y="2222662"/>
-                  </a:lnTo>
-                  <a:lnTo>
-                    <a:pt x="1082615" y="2197644"/>
-                  </a:lnTo>
-                  <a:lnTo>
-                    <a:pt x="1004981" y="2172187"/>
-                  </a:lnTo>
-                  <a:lnTo>
-                    <a:pt x="927346" y="2146286"/>
-                  </a:lnTo>
-                  <a:lnTo>
-                    <a:pt x="849712" y="2119931"/>
-                  </a:lnTo>
-                  <a:lnTo>
-                    <a:pt x="772078" y="2093115"/>
-                  </a:lnTo>
-                  <a:lnTo>
-                    <a:pt x="694444" y="2065830"/>
-                  </a:lnTo>
-                  <a:lnTo>
-                    <a:pt x="616810" y="2038068"/>
-                  </a:lnTo>
-                  <a:lnTo>
-                    <a:pt x="539176" y="2009820"/>
-                  </a:lnTo>
-                  <a:lnTo>
-                    <a:pt x="461542" y="1981077"/>
-                  </a:lnTo>
-                  <a:lnTo>
-                    <a:pt x="383908" y="1951832"/>
-                  </a:lnTo>
-                  <a:lnTo>
-                    <a:pt x="306274" y="1922075"/>
-                  </a:lnTo>
-                  <a:lnTo>
-                    <a:pt x="228640" y="1891798"/>
-                  </a:lnTo>
-                  <a:lnTo>
-                    <a:pt x="151006" y="1860991"/>
-                  </a:lnTo>
-                  <a:lnTo>
-                    <a:pt x="73372" y="1829644"/>
-                  </a:lnTo>
-                  <a:lnTo>
-                    <a:pt x="0" y="1799501"/>
+                    <a:pt x="2091857" y="50913"/>
+                  </a:lnTo>
+                  <a:lnTo>
+                    <a:pt x="2169491" y="345192"/>
+                  </a:lnTo>
+                  <a:lnTo>
+                    <a:pt x="2247125" y="615428"/>
+                  </a:lnTo>
+                  <a:lnTo>
+                    <a:pt x="2324759" y="863584"/>
+                  </a:lnTo>
+                  <a:lnTo>
+                    <a:pt x="2402393" y="1091465"/>
+                  </a:lnTo>
+                  <a:lnTo>
+                    <a:pt x="2480027" y="1300726"/>
+                  </a:lnTo>
+                  <a:lnTo>
+                    <a:pt x="2557661" y="1492890"/>
+                  </a:lnTo>
+                  <a:lnTo>
+                    <a:pt x="2635295" y="1669353"/>
+                  </a:lnTo>
+                  <a:lnTo>
+                    <a:pt x="2712930" y="1831398"/>
+                  </a:lnTo>
+                  <a:lnTo>
+                    <a:pt x="2790564" y="1980203"/>
+                  </a:lnTo>
+                  <a:lnTo>
+                    <a:pt x="2868198" y="2116850"/>
+                  </a:lnTo>
+                  <a:lnTo>
+                    <a:pt x="2945832" y="2242332"/>
+                  </a:lnTo>
+                  <a:lnTo>
+                    <a:pt x="3023466" y="2357562"/>
+                  </a:lnTo>
+                  <a:lnTo>
+                    <a:pt x="3101100" y="2463376"/>
+                  </a:lnTo>
+                  <a:lnTo>
+                    <a:pt x="3178734" y="2560546"/>
+                  </a:lnTo>
+                  <a:lnTo>
+                    <a:pt x="3256368" y="2649776"/>
+                  </a:lnTo>
+                  <a:lnTo>
+                    <a:pt x="3334002" y="2731715"/>
+                  </a:lnTo>
+                  <a:lnTo>
+                    <a:pt x="3411636" y="2788045"/>
+                  </a:lnTo>
+                  <a:lnTo>
+                    <a:pt x="3489270" y="2803338"/>
+                  </a:lnTo>
+                  <a:lnTo>
+                    <a:pt x="3566904" y="2818360"/>
+                  </a:lnTo>
+                  <a:lnTo>
+                    <a:pt x="3644538" y="2833116"/>
+                  </a:lnTo>
+                  <a:lnTo>
+                    <a:pt x="3722172" y="2847611"/>
+                  </a:lnTo>
+                  <a:lnTo>
+                    <a:pt x="3799806" y="2861850"/>
+                  </a:lnTo>
+                  <a:lnTo>
+                    <a:pt x="3877440" y="2875837"/>
+                  </a:lnTo>
+                  <a:lnTo>
+                    <a:pt x="3955074" y="2889577"/>
+                  </a:lnTo>
+                  <a:lnTo>
+                    <a:pt x="4032708" y="2903073"/>
+                  </a:lnTo>
+                  <a:lnTo>
+                    <a:pt x="4110342" y="2916331"/>
+                  </a:lnTo>
+                  <a:lnTo>
+                    <a:pt x="4187976" y="2929355"/>
+                  </a:lnTo>
+                  <a:lnTo>
+                    <a:pt x="4265610" y="2942148"/>
+                  </a:lnTo>
+                  <a:lnTo>
+                    <a:pt x="4343244" y="2954715"/>
+                  </a:lnTo>
+                  <a:lnTo>
+                    <a:pt x="4420879" y="2967059"/>
+                  </a:lnTo>
+                  <a:lnTo>
+                    <a:pt x="4498513" y="2979185"/>
+                  </a:lnTo>
+                  <a:lnTo>
+                    <a:pt x="4576147" y="2991097"/>
+                  </a:lnTo>
+                  <a:lnTo>
+                    <a:pt x="4653781" y="3002798"/>
+                  </a:lnTo>
+                  <a:lnTo>
+                    <a:pt x="4731415" y="3014292"/>
+                  </a:lnTo>
+                  <a:lnTo>
+                    <a:pt x="4809049" y="3025583"/>
+                  </a:lnTo>
+                  <a:lnTo>
+                    <a:pt x="4886683" y="3036674"/>
+                  </a:lnTo>
+                  <a:lnTo>
+                    <a:pt x="4964317" y="3047569"/>
+                  </a:lnTo>
+                  <a:lnTo>
+                    <a:pt x="5041951" y="3058271"/>
+                  </a:lnTo>
+                  <a:lnTo>
+                    <a:pt x="5119585" y="3068784"/>
+                  </a:lnTo>
+                  <a:lnTo>
+                    <a:pt x="5197219" y="3079111"/>
+                  </a:lnTo>
+                  <a:lnTo>
+                    <a:pt x="5274853" y="3089255"/>
+                  </a:lnTo>
+                  <a:lnTo>
+                    <a:pt x="5352487" y="3099220"/>
+                  </a:lnTo>
+                  <a:lnTo>
+                    <a:pt x="5430121" y="3109008"/>
+                  </a:lnTo>
+                  <a:lnTo>
+                    <a:pt x="5507755" y="3118624"/>
+                  </a:lnTo>
+                  <a:lnTo>
+                    <a:pt x="5585389" y="3128069"/>
+                  </a:lnTo>
+                  <a:lnTo>
+                    <a:pt x="5663023" y="3137347"/>
+                  </a:lnTo>
+                  <a:lnTo>
+                    <a:pt x="5740657" y="3146462"/>
+                  </a:lnTo>
+                  <a:lnTo>
+                    <a:pt x="5818291" y="3155415"/>
+                  </a:lnTo>
+                  <a:lnTo>
+                    <a:pt x="5895925" y="3164209"/>
+                  </a:lnTo>
+                  <a:lnTo>
+                    <a:pt x="5973559" y="3172848"/>
+                  </a:lnTo>
+                  <a:lnTo>
+                    <a:pt x="6051193" y="3181335"/>
+                  </a:lnTo>
+                  <a:lnTo>
+                    <a:pt x="6128827" y="3189671"/>
+                  </a:lnTo>
+                  <a:lnTo>
+                    <a:pt x="6206462" y="3197860"/>
+                  </a:lnTo>
+                  <a:lnTo>
+                    <a:pt x="6284096" y="3205904"/>
+                  </a:lnTo>
+                  <a:lnTo>
+                    <a:pt x="6361730" y="3213805"/>
+                  </a:lnTo>
+                  <a:lnTo>
+                    <a:pt x="6439364" y="3221567"/>
+                  </a:lnTo>
+                  <a:lnTo>
+                    <a:pt x="6516998" y="3229192"/>
+                  </a:lnTo>
+                  <a:lnTo>
+                    <a:pt x="6594632" y="3236681"/>
+                  </a:lnTo>
+                  <a:lnTo>
+                    <a:pt x="6672266" y="3244039"/>
+                  </a:lnTo>
+                  <a:lnTo>
+                    <a:pt x="6749900" y="3251266"/>
+                  </a:lnTo>
+                  <a:lnTo>
+                    <a:pt x="6827534" y="3258365"/>
+                  </a:lnTo>
+                  <a:lnTo>
+                    <a:pt x="6905168" y="3265339"/>
+                  </a:lnTo>
+                  <a:lnTo>
+                    <a:pt x="6982802" y="3272189"/>
+                  </a:lnTo>
+                  <a:lnTo>
+                    <a:pt x="7060436" y="3278918"/>
+                  </a:lnTo>
+                  <a:lnTo>
+                    <a:pt x="7138070" y="3285529"/>
+                  </a:lnTo>
+                  <a:lnTo>
+                    <a:pt x="7215704" y="3292022"/>
+                  </a:lnTo>
+                  <a:lnTo>
+                    <a:pt x="7293338" y="3298400"/>
+                  </a:lnTo>
+                  <a:lnTo>
+                    <a:pt x="7370972" y="3304666"/>
+                  </a:lnTo>
+                  <a:lnTo>
+                    <a:pt x="7370972" y="3641696"/>
+                  </a:lnTo>
+                  <a:lnTo>
+                    <a:pt x="7293338" y="3640722"/>
+                  </a:lnTo>
+                  <a:lnTo>
+                    <a:pt x="7215704" y="3639662"/>
+                  </a:lnTo>
+                  <a:lnTo>
+                    <a:pt x="7138070" y="3638506"/>
+                  </a:lnTo>
+                  <a:lnTo>
+                    <a:pt x="7060436" y="3637249"/>
+                  </a:lnTo>
+                  <a:lnTo>
+                    <a:pt x="6982802" y="3635879"/>
+                  </a:lnTo>
+                  <a:lnTo>
+                    <a:pt x="6905168" y="3634387"/>
+                  </a:lnTo>
+                  <a:lnTo>
+                    <a:pt x="6827534" y="3632763"/>
+                  </a:lnTo>
+                  <a:lnTo>
+                    <a:pt x="6749900" y="3630994"/>
+                  </a:lnTo>
+                  <a:lnTo>
+                    <a:pt x="6672266" y="3629068"/>
+                  </a:lnTo>
+                  <a:lnTo>
+                    <a:pt x="6594632" y="3626970"/>
+                  </a:lnTo>
+                  <a:lnTo>
+                    <a:pt x="6516998" y="3624686"/>
+                  </a:lnTo>
+                  <a:lnTo>
+                    <a:pt x="6439364" y="3622199"/>
+                  </a:lnTo>
+                  <a:lnTo>
+                    <a:pt x="6361730" y="3619490"/>
+                  </a:lnTo>
+                  <a:lnTo>
+                    <a:pt x="6284096" y="3616540"/>
+                  </a:lnTo>
+                  <a:lnTo>
+                    <a:pt x="6206462" y="3613328"/>
+                  </a:lnTo>
+                  <a:lnTo>
+                    <a:pt x="6128827" y="3609830"/>
+                  </a:lnTo>
+                  <a:lnTo>
+                    <a:pt x="6051193" y="3606020"/>
+                  </a:lnTo>
+                  <a:lnTo>
+                    <a:pt x="5973559" y="3601872"/>
+                  </a:lnTo>
+                  <a:lnTo>
+                    <a:pt x="5895925" y="3597354"/>
+                  </a:lnTo>
+                  <a:lnTo>
+                    <a:pt x="5818291" y="3592435"/>
+                  </a:lnTo>
+                  <a:lnTo>
+                    <a:pt x="5740657" y="3587078"/>
+                  </a:lnTo>
+                  <a:lnTo>
+                    <a:pt x="5663023" y="3581245"/>
+                  </a:lnTo>
+                  <a:lnTo>
+                    <a:pt x="5585389" y="3574892"/>
+                  </a:lnTo>
+                  <a:lnTo>
+                    <a:pt x="5507755" y="3567974"/>
+                  </a:lnTo>
+                  <a:lnTo>
+                    <a:pt x="5430121" y="3560440"/>
+                  </a:lnTo>
+                  <a:lnTo>
+                    <a:pt x="5352487" y="3552237"/>
+                  </a:lnTo>
+                  <a:lnTo>
+                    <a:pt x="5274853" y="3543303"/>
+                  </a:lnTo>
+                  <a:lnTo>
+                    <a:pt x="5197219" y="3533575"/>
+                  </a:lnTo>
+                  <a:lnTo>
+                    <a:pt x="5119585" y="3522980"/>
+                  </a:lnTo>
+                  <a:lnTo>
+                    <a:pt x="5041951" y="3511444"/>
+                  </a:lnTo>
+                  <a:lnTo>
+                    <a:pt x="4964317" y="3498881"/>
+                  </a:lnTo>
+                  <a:lnTo>
+                    <a:pt x="4886683" y="3485199"/>
+                  </a:lnTo>
+                  <a:lnTo>
+                    <a:pt x="4809049" y="3470301"/>
+                  </a:lnTo>
+                  <a:lnTo>
+                    <a:pt x="4731415" y="3454077"/>
+                  </a:lnTo>
+                  <a:lnTo>
+                    <a:pt x="4653781" y="3436410"/>
+                  </a:lnTo>
+                  <a:lnTo>
+                    <a:pt x="4576147" y="3417171"/>
+                  </a:lnTo>
+                  <a:lnTo>
+                    <a:pt x="4498513" y="3396220"/>
+                  </a:lnTo>
+                  <a:lnTo>
+                    <a:pt x="4420879" y="3373404"/>
+                  </a:lnTo>
+                  <a:lnTo>
+                    <a:pt x="4343244" y="3348559"/>
+                  </a:lnTo>
+                  <a:lnTo>
+                    <a:pt x="4265610" y="3321503"/>
+                  </a:lnTo>
+                  <a:lnTo>
+                    <a:pt x="4187976" y="3292040"/>
+                  </a:lnTo>
+                  <a:lnTo>
+                    <a:pt x="4110342" y="3259955"/>
+                  </a:lnTo>
+                  <a:lnTo>
+                    <a:pt x="4032708" y="3225016"/>
+                  </a:lnTo>
+                  <a:lnTo>
+                    <a:pt x="3955074" y="3186968"/>
+                  </a:lnTo>
+                  <a:lnTo>
+                    <a:pt x="3877440" y="3145535"/>
+                  </a:lnTo>
+                  <a:lnTo>
+                    <a:pt x="3799806" y="3100415"/>
+                  </a:lnTo>
+                  <a:lnTo>
+                    <a:pt x="3722172" y="3051280"/>
+                  </a:lnTo>
+                  <a:lnTo>
+                    <a:pt x="3644538" y="2997774"/>
+                  </a:lnTo>
+                  <a:lnTo>
+                    <a:pt x="3566904" y="2939507"/>
+                  </a:lnTo>
+                  <a:lnTo>
+                    <a:pt x="3489270" y="2876056"/>
+                  </a:lnTo>
+                  <a:lnTo>
+                    <a:pt x="3411636" y="2806960"/>
+                  </a:lnTo>
+                  <a:lnTo>
+                    <a:pt x="3334002" y="2772477"/>
+                  </a:lnTo>
+                  <a:lnTo>
+                    <a:pt x="3256368" y="2756629"/>
+                  </a:lnTo>
+                  <a:lnTo>
+                    <a:pt x="3178734" y="2740496"/>
+                  </a:lnTo>
+                  <a:lnTo>
+                    <a:pt x="3101100" y="2724072"/>
+                  </a:lnTo>
+                  <a:lnTo>
+                    <a:pt x="3023466" y="2707352"/>
+                  </a:lnTo>
+                  <a:lnTo>
+                    <a:pt x="2945832" y="2690332"/>
+                  </a:lnTo>
+                  <a:lnTo>
+                    <a:pt x="2868198" y="2673004"/>
+                  </a:lnTo>
+                  <a:lnTo>
+                    <a:pt x="2790564" y="2655365"/>
+                  </a:lnTo>
+                  <a:lnTo>
+                    <a:pt x="2712930" y="2637408"/>
+                  </a:lnTo>
+                  <a:lnTo>
+                    <a:pt x="2635295" y="2619128"/>
+                  </a:lnTo>
+                  <a:lnTo>
+                    <a:pt x="2557661" y="2600519"/>
+                  </a:lnTo>
+                  <a:lnTo>
+                    <a:pt x="2480027" y="2581575"/>
+                  </a:lnTo>
+                  <a:lnTo>
+                    <a:pt x="2402393" y="2562289"/>
+                  </a:lnTo>
+                  <a:lnTo>
+                    <a:pt x="2324759" y="2542656"/>
+                  </a:lnTo>
+                  <a:lnTo>
+                    <a:pt x="2247125" y="2522670"/>
+                  </a:lnTo>
+                  <a:lnTo>
+                    <a:pt x="2169491" y="2502324"/>
+                  </a:lnTo>
+                  <a:lnTo>
+                    <a:pt x="2091857" y="2481612"/>
+                  </a:lnTo>
+                  <a:lnTo>
+                    <a:pt x="2014223" y="2460526"/>
+                  </a:lnTo>
+                  <a:lnTo>
+                    <a:pt x="1936589" y="2439061"/>
+                  </a:lnTo>
+                  <a:lnTo>
+                    <a:pt x="1858955" y="2417210"/>
+                  </a:lnTo>
+                  <a:lnTo>
+                    <a:pt x="1781321" y="2394965"/>
+                  </a:lnTo>
+                  <a:lnTo>
+                    <a:pt x="1703687" y="2372319"/>
+                  </a:lnTo>
+                  <a:lnTo>
+                    <a:pt x="1626053" y="2349266"/>
+                  </a:lnTo>
+                  <a:lnTo>
+                    <a:pt x="1548419" y="2325797"/>
+                  </a:lnTo>
+                  <a:lnTo>
+                    <a:pt x="1470785" y="2301906"/>
+                  </a:lnTo>
+                  <a:lnTo>
+                    <a:pt x="1393151" y="2277585"/>
+                  </a:lnTo>
+                  <a:lnTo>
+                    <a:pt x="1315517" y="2252826"/>
+                  </a:lnTo>
+                  <a:lnTo>
+                    <a:pt x="1237883" y="2227621"/>
+                  </a:lnTo>
+                  <a:lnTo>
+                    <a:pt x="1160249" y="2201963"/>
+                  </a:lnTo>
+                  <a:lnTo>
+                    <a:pt x="1082615" y="2175842"/>
+                  </a:lnTo>
+                  <a:lnTo>
+                    <a:pt x="1004981" y="2149251"/>
+                  </a:lnTo>
+                  <a:lnTo>
+                    <a:pt x="927346" y="2122181"/>
+                  </a:lnTo>
+                  <a:lnTo>
+                    <a:pt x="849712" y="2094624"/>
+                  </a:lnTo>
+                  <a:lnTo>
+                    <a:pt x="772078" y="2066571"/>
+                  </a:lnTo>
+                  <a:lnTo>
+                    <a:pt x="694444" y="2038012"/>
+                  </a:lnTo>
+                  <a:lnTo>
+                    <a:pt x="616810" y="2008939"/>
+                  </a:lnTo>
+                  <a:lnTo>
+                    <a:pt x="539176" y="1979343"/>
+                  </a:lnTo>
+                  <a:lnTo>
+                    <a:pt x="461542" y="1949214"/>
+                  </a:lnTo>
+                  <a:lnTo>
+                    <a:pt x="383908" y="1918542"/>
+                  </a:lnTo>
+                  <a:lnTo>
+                    <a:pt x="306274" y="1887318"/>
+                  </a:lnTo>
+                  <a:lnTo>
+                    <a:pt x="228640" y="1855532"/>
+                  </a:lnTo>
+                  <a:lnTo>
+                    <a:pt x="151006" y="1823174"/>
+                  </a:lnTo>
+                  <a:lnTo>
+                    <a:pt x="73372" y="1790233"/>
+                  </a:lnTo>
+                  <a:lnTo>
+                    <a:pt x="0" y="1758539"/>
+                  </a:lnTo>
+                  <a:lnTo>
+                    <a:pt x="0" y="0"/>
                   </a:lnTo>
                   <a:close/>
                 </a:path>
@@ -3537,228 +3534,222 @@
           </p:nvSpPr>
           <p:spPr>
             <a:xfrm>
-              <a:off x="2682569" y="1896563"/>
-              <a:ext cx="5505921" cy="3295597"/>
+              <a:off x="2897041" y="1896563"/>
+              <a:ext cx="5291449" cy="3304666"/>
             </a:xfrm>
             <a:custGeom>
               <a:avLst/>
               <a:pathLst>
-                <a:path w="5505921" h="3295597">
+                <a:path w="5291449" h="3304666">
                   <a:moveTo>
                     <a:pt x="0" y="0"/>
                   </a:moveTo>
                   <a:lnTo>
-                    <a:pt x="71537" y="239008"/>
-                  </a:lnTo>
-                  <a:lnTo>
-                    <a:pt x="149171" y="480068"/>
-                  </a:lnTo>
-                  <a:lnTo>
-                    <a:pt x="226805" y="704105"/>
-                  </a:lnTo>
-                  <a:lnTo>
-                    <a:pt x="304440" y="912321"/>
-                  </a:lnTo>
-                  <a:lnTo>
-                    <a:pt x="382074" y="1105834"/>
-                  </a:lnTo>
-                  <a:lnTo>
-                    <a:pt x="459708" y="1285682"/>
-                  </a:lnTo>
-                  <a:lnTo>
-                    <a:pt x="537342" y="1452829"/>
-                  </a:lnTo>
-                  <a:lnTo>
-                    <a:pt x="614976" y="1608172"/>
-                  </a:lnTo>
-                  <a:lnTo>
-                    <a:pt x="692610" y="1752546"/>
-                  </a:lnTo>
-                  <a:lnTo>
-                    <a:pt x="770244" y="1886725"/>
-                  </a:lnTo>
-                  <a:lnTo>
-                    <a:pt x="847878" y="2011429"/>
-                  </a:lnTo>
-                  <a:lnTo>
-                    <a:pt x="925512" y="2127326"/>
-                  </a:lnTo>
-                  <a:lnTo>
-                    <a:pt x="1003146" y="2235039"/>
-                  </a:lnTo>
-                  <a:lnTo>
-                    <a:pt x="1080780" y="2335145"/>
-                  </a:lnTo>
-                  <a:lnTo>
-                    <a:pt x="1158414" y="2428183"/>
-                  </a:lnTo>
-                  <a:lnTo>
-                    <a:pt x="1236048" y="2514650"/>
-                  </a:lnTo>
-                  <a:lnTo>
-                    <a:pt x="1313682" y="2595012"/>
-                  </a:lnTo>
-                  <a:lnTo>
-                    <a:pt x="1391316" y="2669698"/>
-                  </a:lnTo>
-                  <a:lnTo>
-                    <a:pt x="1468950" y="2739111"/>
-                  </a:lnTo>
-                  <a:lnTo>
-                    <a:pt x="1546584" y="2787903"/>
-                  </a:lnTo>
-                  <a:lnTo>
-                    <a:pt x="1624218" y="2802772"/>
-                  </a:lnTo>
-                  <a:lnTo>
-                    <a:pt x="1701852" y="2817386"/>
-                  </a:lnTo>
-                  <a:lnTo>
-                    <a:pt x="1779486" y="2831748"/>
-                  </a:lnTo>
-                  <a:lnTo>
-                    <a:pt x="1857120" y="2845863"/>
-                  </a:lnTo>
-                  <a:lnTo>
-                    <a:pt x="1934754" y="2859735"/>
-                  </a:lnTo>
-                  <a:lnTo>
-                    <a:pt x="2012388" y="2873369"/>
-                  </a:lnTo>
-                  <a:lnTo>
-                    <a:pt x="2090023" y="2886769"/>
-                  </a:lnTo>
-                  <a:lnTo>
-                    <a:pt x="2167657" y="2899938"/>
-                  </a:lnTo>
-                  <a:lnTo>
-                    <a:pt x="2245291" y="2912880"/>
-                  </a:lnTo>
-                  <a:lnTo>
-                    <a:pt x="2322925" y="2925601"/>
-                  </a:lnTo>
-                  <a:lnTo>
-                    <a:pt x="2400559" y="2938102"/>
-                  </a:lnTo>
-                  <a:lnTo>
-                    <a:pt x="2478193" y="2950388"/>
-                  </a:lnTo>
-                  <a:lnTo>
-                    <a:pt x="2555827" y="2962464"/>
-                  </a:lnTo>
-                  <a:lnTo>
-                    <a:pt x="2633461" y="2974331"/>
-                  </a:lnTo>
-                  <a:lnTo>
-                    <a:pt x="2711095" y="2985995"/>
-                  </a:lnTo>
-                  <a:lnTo>
-                    <a:pt x="2788729" y="2997457"/>
-                  </a:lnTo>
-                  <a:lnTo>
-                    <a:pt x="2866363" y="3008723"/>
-                  </a:lnTo>
-                  <a:lnTo>
-                    <a:pt x="2943997" y="3019795"/>
-                  </a:lnTo>
-                  <a:lnTo>
-                    <a:pt x="3021631" y="3030677"/>
-                  </a:lnTo>
-                  <a:lnTo>
-                    <a:pt x="3099265" y="3041372"/>
-                  </a:lnTo>
-                  <a:lnTo>
-                    <a:pt x="3176899" y="3051882"/>
-                  </a:lnTo>
-                  <a:lnTo>
-                    <a:pt x="3254533" y="3062212"/>
-                  </a:lnTo>
-                  <a:lnTo>
-                    <a:pt x="3332167" y="3072365"/>
-                  </a:lnTo>
-                  <a:lnTo>
-                    <a:pt x="3409801" y="3082343"/>
-                  </a:lnTo>
-                  <a:lnTo>
-                    <a:pt x="3487435" y="3092149"/>
-                  </a:lnTo>
-                  <a:lnTo>
-                    <a:pt x="3565069" y="3101786"/>
-                  </a:lnTo>
-                  <a:lnTo>
-                    <a:pt x="3642703" y="3111258"/>
-                  </a:lnTo>
-                  <a:lnTo>
-                    <a:pt x="3720337" y="3120567"/>
-                  </a:lnTo>
-                  <a:lnTo>
-                    <a:pt x="3797972" y="3129716"/>
-                  </a:lnTo>
-                  <a:lnTo>
-                    <a:pt x="3875606" y="3138708"/>
-                  </a:lnTo>
-                  <a:lnTo>
-                    <a:pt x="3953240" y="3147545"/>
-                  </a:lnTo>
-                  <a:lnTo>
-                    <a:pt x="4030874" y="3156230"/>
-                  </a:lnTo>
-                  <a:lnTo>
-                    <a:pt x="4108508" y="3164766"/>
-                  </a:lnTo>
-                  <a:lnTo>
-                    <a:pt x="4186142" y="3173155"/>
-                  </a:lnTo>
-                  <a:lnTo>
-                    <a:pt x="4263776" y="3181400"/>
-                  </a:lnTo>
-                  <a:lnTo>
-                    <a:pt x="4341410" y="3189503"/>
-                  </a:lnTo>
-                  <a:lnTo>
-                    <a:pt x="4419044" y="3197466"/>
-                  </a:lnTo>
-                  <a:lnTo>
-                    <a:pt x="4496678" y="3205293"/>
-                  </a:lnTo>
-                  <a:lnTo>
-                    <a:pt x="4574312" y="3212985"/>
-                  </a:lnTo>
-                  <a:lnTo>
-                    <a:pt x="4651946" y="3220545"/>
-                  </a:lnTo>
-                  <a:lnTo>
-                    <a:pt x="4729580" y="3227975"/>
-                  </a:lnTo>
-                  <a:lnTo>
-                    <a:pt x="4807214" y="3235277"/>
-                  </a:lnTo>
-                  <a:lnTo>
-                    <a:pt x="4884848" y="3242453"/>
-                  </a:lnTo>
-                  <a:lnTo>
-                    <a:pt x="4962482" y="3249507"/>
-                  </a:lnTo>
-                  <a:lnTo>
-                    <a:pt x="5040116" y="3256438"/>
-                  </a:lnTo>
-                  <a:lnTo>
-                    <a:pt x="5117750" y="3263251"/>
-                  </a:lnTo>
-                  <a:lnTo>
-                    <a:pt x="5195384" y="3269947"/>
-                  </a:lnTo>
-                  <a:lnTo>
-                    <a:pt x="5273018" y="3276527"/>
-                  </a:lnTo>
-                  <a:lnTo>
-                    <a:pt x="5350652" y="3282994"/>
-                  </a:lnTo>
-                  <a:lnTo>
-                    <a:pt x="5428286" y="3289350"/>
-                  </a:lnTo>
-                  <a:lnTo>
-                    <a:pt x="5505921" y="3295597"/>
+                    <a:pt x="12333" y="50913"/>
+                  </a:lnTo>
+                  <a:lnTo>
+                    <a:pt x="89968" y="345192"/>
+                  </a:lnTo>
+                  <a:lnTo>
+                    <a:pt x="167602" y="615428"/>
+                  </a:lnTo>
+                  <a:lnTo>
+                    <a:pt x="245236" y="863584"/>
+                  </a:lnTo>
+                  <a:lnTo>
+                    <a:pt x="322870" y="1091465"/>
+                  </a:lnTo>
+                  <a:lnTo>
+                    <a:pt x="400504" y="1300726"/>
+                  </a:lnTo>
+                  <a:lnTo>
+                    <a:pt x="478138" y="1492890"/>
+                  </a:lnTo>
+                  <a:lnTo>
+                    <a:pt x="555772" y="1669353"/>
+                  </a:lnTo>
+                  <a:lnTo>
+                    <a:pt x="633406" y="1831398"/>
+                  </a:lnTo>
+                  <a:lnTo>
+                    <a:pt x="711040" y="1980203"/>
+                  </a:lnTo>
+                  <a:lnTo>
+                    <a:pt x="788674" y="2116850"/>
+                  </a:lnTo>
+                  <a:lnTo>
+                    <a:pt x="866308" y="2242332"/>
+                  </a:lnTo>
+                  <a:lnTo>
+                    <a:pt x="943942" y="2357562"/>
+                  </a:lnTo>
+                  <a:lnTo>
+                    <a:pt x="1021576" y="2463376"/>
+                  </a:lnTo>
+                  <a:lnTo>
+                    <a:pt x="1099210" y="2560546"/>
+                  </a:lnTo>
+                  <a:lnTo>
+                    <a:pt x="1176844" y="2649776"/>
+                  </a:lnTo>
+                  <a:lnTo>
+                    <a:pt x="1254478" y="2731715"/>
+                  </a:lnTo>
+                  <a:lnTo>
+                    <a:pt x="1332112" y="2788045"/>
+                  </a:lnTo>
+                  <a:lnTo>
+                    <a:pt x="1409746" y="2803338"/>
+                  </a:lnTo>
+                  <a:lnTo>
+                    <a:pt x="1487380" y="2818360"/>
+                  </a:lnTo>
+                  <a:lnTo>
+                    <a:pt x="1565014" y="2833116"/>
+                  </a:lnTo>
+                  <a:lnTo>
+                    <a:pt x="1642648" y="2847611"/>
+                  </a:lnTo>
+                  <a:lnTo>
+                    <a:pt x="1720282" y="2861850"/>
+                  </a:lnTo>
+                  <a:lnTo>
+                    <a:pt x="1797917" y="2875837"/>
+                  </a:lnTo>
+                  <a:lnTo>
+                    <a:pt x="1875551" y="2889577"/>
+                  </a:lnTo>
+                  <a:lnTo>
+                    <a:pt x="1953185" y="2903073"/>
+                  </a:lnTo>
+                  <a:lnTo>
+                    <a:pt x="2030819" y="2916331"/>
+                  </a:lnTo>
+                  <a:lnTo>
+                    <a:pt x="2108453" y="2929355"/>
+                  </a:lnTo>
+                  <a:lnTo>
+                    <a:pt x="2186087" y="2942148"/>
+                  </a:lnTo>
+                  <a:lnTo>
+                    <a:pt x="2263721" y="2954715"/>
+                  </a:lnTo>
+                  <a:lnTo>
+                    <a:pt x="2341355" y="2967059"/>
+                  </a:lnTo>
+                  <a:lnTo>
+                    <a:pt x="2418989" y="2979185"/>
+                  </a:lnTo>
+                  <a:lnTo>
+                    <a:pt x="2496623" y="2991097"/>
+                  </a:lnTo>
+                  <a:lnTo>
+                    <a:pt x="2574257" y="3002798"/>
+                  </a:lnTo>
+                  <a:lnTo>
+                    <a:pt x="2651891" y="3014292"/>
+                  </a:lnTo>
+                  <a:lnTo>
+                    <a:pt x="2729525" y="3025583"/>
+                  </a:lnTo>
+                  <a:lnTo>
+                    <a:pt x="2807159" y="3036674"/>
+                  </a:lnTo>
+                  <a:lnTo>
+                    <a:pt x="2884793" y="3047569"/>
+                  </a:lnTo>
+                  <a:lnTo>
+                    <a:pt x="2962427" y="3058271"/>
+                  </a:lnTo>
+                  <a:lnTo>
+                    <a:pt x="3040061" y="3068784"/>
+                  </a:lnTo>
+                  <a:lnTo>
+                    <a:pt x="3117695" y="3079111"/>
+                  </a:lnTo>
+                  <a:lnTo>
+                    <a:pt x="3195329" y="3089255"/>
+                  </a:lnTo>
+                  <a:lnTo>
+                    <a:pt x="3272963" y="3099220"/>
+                  </a:lnTo>
+                  <a:lnTo>
+                    <a:pt x="3350597" y="3109008"/>
+                  </a:lnTo>
+                  <a:lnTo>
+                    <a:pt x="3428231" y="3118624"/>
+                  </a:lnTo>
+                  <a:lnTo>
+                    <a:pt x="3505866" y="3128069"/>
+                  </a:lnTo>
+                  <a:lnTo>
+                    <a:pt x="3583500" y="3137347"/>
+                  </a:lnTo>
+                  <a:lnTo>
+                    <a:pt x="3661134" y="3146462"/>
+                  </a:lnTo>
+                  <a:lnTo>
+                    <a:pt x="3738768" y="3155415"/>
+                  </a:lnTo>
+                  <a:lnTo>
+                    <a:pt x="3816402" y="3164209"/>
+                  </a:lnTo>
+                  <a:lnTo>
+                    <a:pt x="3894036" y="3172848"/>
+                  </a:lnTo>
+                  <a:lnTo>
+                    <a:pt x="3971670" y="3181335"/>
+                  </a:lnTo>
+                  <a:lnTo>
+                    <a:pt x="4049304" y="3189671"/>
+                  </a:lnTo>
+                  <a:lnTo>
+                    <a:pt x="4126938" y="3197860"/>
+                  </a:lnTo>
+                  <a:lnTo>
+                    <a:pt x="4204572" y="3205904"/>
+                  </a:lnTo>
+                  <a:lnTo>
+                    <a:pt x="4282206" y="3213805"/>
+                  </a:lnTo>
+                  <a:lnTo>
+                    <a:pt x="4359840" y="3221567"/>
+                  </a:lnTo>
+                  <a:lnTo>
+                    <a:pt x="4437474" y="3229192"/>
+                  </a:lnTo>
+                  <a:lnTo>
+                    <a:pt x="4515108" y="3236681"/>
+                  </a:lnTo>
+                  <a:lnTo>
+                    <a:pt x="4592742" y="3244039"/>
+                  </a:lnTo>
+                  <a:lnTo>
+                    <a:pt x="4670376" y="3251266"/>
+                  </a:lnTo>
+                  <a:lnTo>
+                    <a:pt x="4748010" y="3258365"/>
+                  </a:lnTo>
+                  <a:lnTo>
+                    <a:pt x="4825644" y="3265339"/>
+                  </a:lnTo>
+                  <a:lnTo>
+                    <a:pt x="4903278" y="3272189"/>
+                  </a:lnTo>
+                  <a:lnTo>
+                    <a:pt x="4980912" y="3278918"/>
+                  </a:lnTo>
+                  <a:lnTo>
+                    <a:pt x="5058546" y="3285529"/>
+                  </a:lnTo>
+                  <a:lnTo>
+                    <a:pt x="5136180" y="3292022"/>
+                  </a:lnTo>
+                  <a:lnTo>
+                    <a:pt x="5213815" y="3298400"/>
+                  </a:lnTo>
+                  <a:lnTo>
+                    <a:pt x="5291449" y="3304666"/>
                   </a:lnTo>
                 </a:path>
               </a:pathLst>
@@ -3778,297 +3769,297 @@
           </p:nvSpPr>
           <p:spPr>
             <a:xfrm>
-              <a:off x="817517" y="3696064"/>
-              <a:ext cx="7370972" cy="1832872"/>
+              <a:off x="817517" y="3655103"/>
+              <a:ext cx="7370972" cy="1883157"/>
             </a:xfrm>
             <a:custGeom>
               <a:avLst/>
               <a:pathLst>
-                <a:path w="7370972" h="1832872">
+                <a:path w="7370972" h="1883157">
                   <a:moveTo>
-                    <a:pt x="7370972" y="1832872"/>
+                    <a:pt x="7370972" y="1883157"/>
                   </a:moveTo>
                   <a:lnTo>
-                    <a:pt x="7293338" y="1831332"/>
-                  </a:lnTo>
-                  <a:lnTo>
-                    <a:pt x="7215704" y="1829675"/>
-                  </a:lnTo>
-                  <a:lnTo>
-                    <a:pt x="7138070" y="1827892"/>
-                  </a:lnTo>
-                  <a:lnTo>
-                    <a:pt x="7060436" y="1825973"/>
-                  </a:lnTo>
-                  <a:lnTo>
-                    <a:pt x="6982802" y="1823909"/>
-                  </a:lnTo>
-                  <a:lnTo>
-                    <a:pt x="6905168" y="1821687"/>
-                  </a:lnTo>
-                  <a:lnTo>
-                    <a:pt x="6827534" y="1819297"/>
-                  </a:lnTo>
-                  <a:lnTo>
-                    <a:pt x="6749900" y="1816726"/>
-                  </a:lnTo>
-                  <a:lnTo>
-                    <a:pt x="6672266" y="1813959"/>
-                  </a:lnTo>
-                  <a:lnTo>
-                    <a:pt x="6594632" y="1810982"/>
-                  </a:lnTo>
-                  <a:lnTo>
-                    <a:pt x="6516998" y="1807778"/>
-                  </a:lnTo>
-                  <a:lnTo>
-                    <a:pt x="6439364" y="1804331"/>
-                  </a:lnTo>
-                  <a:lnTo>
-                    <a:pt x="6361730" y="1800622"/>
-                  </a:lnTo>
-                  <a:lnTo>
-                    <a:pt x="6284096" y="1796632"/>
-                  </a:lnTo>
-                  <a:lnTo>
-                    <a:pt x="6206462" y="1792338"/>
-                  </a:lnTo>
-                  <a:lnTo>
-                    <a:pt x="6128827" y="1787718"/>
-                  </a:lnTo>
-                  <a:lnTo>
-                    <a:pt x="6051193" y="1782747"/>
-                  </a:lnTo>
-                  <a:lnTo>
-                    <a:pt x="5973559" y="1777398"/>
-                  </a:lnTo>
-                  <a:lnTo>
-                    <a:pt x="5895925" y="1771643"/>
-                  </a:lnTo>
-                  <a:lnTo>
-                    <a:pt x="5818291" y="1765450"/>
-                  </a:lnTo>
-                  <a:lnTo>
-                    <a:pt x="5740657" y="1758787"/>
-                  </a:lnTo>
-                  <a:lnTo>
-                    <a:pt x="5663023" y="1751618"/>
-                  </a:lnTo>
-                  <a:lnTo>
-                    <a:pt x="5585389" y="1743904"/>
-                  </a:lnTo>
-                  <a:lnTo>
-                    <a:pt x="5507755" y="1735604"/>
-                  </a:lnTo>
-                  <a:lnTo>
-                    <a:pt x="5430121" y="1726673"/>
-                  </a:lnTo>
-                  <a:lnTo>
-                    <a:pt x="5352487" y="1717064"/>
-                  </a:lnTo>
-                  <a:lnTo>
-                    <a:pt x="5274853" y="1706724"/>
-                  </a:lnTo>
-                  <a:lnTo>
-                    <a:pt x="5197219" y="1695599"/>
-                  </a:lnTo>
-                  <a:lnTo>
-                    <a:pt x="5119585" y="1683628"/>
-                  </a:lnTo>
-                  <a:lnTo>
-                    <a:pt x="5041951" y="1670748"/>
-                  </a:lnTo>
-                  <a:lnTo>
-                    <a:pt x="4964317" y="1656890"/>
-                  </a:lnTo>
-                  <a:lnTo>
-                    <a:pt x="4886683" y="1641978"/>
-                  </a:lnTo>
-                  <a:lnTo>
-                    <a:pt x="4809049" y="1625933"/>
-                  </a:lnTo>
-                  <a:lnTo>
-                    <a:pt x="4731415" y="1608669"/>
-                  </a:lnTo>
-                  <a:lnTo>
-                    <a:pt x="4653781" y="1590093"/>
-                  </a:lnTo>
-                  <a:lnTo>
-                    <a:pt x="4576147" y="1570106"/>
-                  </a:lnTo>
-                  <a:lnTo>
-                    <a:pt x="4498513" y="1548601"/>
-                  </a:lnTo>
-                  <a:lnTo>
-                    <a:pt x="4420879" y="1525461"/>
-                  </a:lnTo>
-                  <a:lnTo>
-                    <a:pt x="4343244" y="1500563"/>
-                  </a:lnTo>
-                  <a:lnTo>
-                    <a:pt x="4265610" y="1473773"/>
-                  </a:lnTo>
-                  <a:lnTo>
-                    <a:pt x="4187976" y="1444948"/>
-                  </a:lnTo>
-                  <a:lnTo>
-                    <a:pt x="4110342" y="1413932"/>
-                  </a:lnTo>
-                  <a:lnTo>
-                    <a:pt x="4032708" y="1380560"/>
-                  </a:lnTo>
-                  <a:lnTo>
-                    <a:pt x="3955074" y="1344652"/>
-                  </a:lnTo>
-                  <a:lnTo>
-                    <a:pt x="3877440" y="1306016"/>
-                  </a:lnTo>
-                  <a:lnTo>
-                    <a:pt x="3799806" y="1264444"/>
-                  </a:lnTo>
-                  <a:lnTo>
-                    <a:pt x="3722172" y="1219713"/>
-                  </a:lnTo>
-                  <a:lnTo>
-                    <a:pt x="3644538" y="1171583"/>
-                  </a:lnTo>
-                  <a:lnTo>
-                    <a:pt x="3566904" y="1119797"/>
-                  </a:lnTo>
-                  <a:lnTo>
-                    <a:pt x="3489270" y="1064075"/>
-                  </a:lnTo>
-                  <a:lnTo>
-                    <a:pt x="3411636" y="1004120"/>
-                  </a:lnTo>
-                  <a:lnTo>
-                    <a:pt x="3334002" y="973273"/>
-                  </a:lnTo>
-                  <a:lnTo>
-                    <a:pt x="3256368" y="957879"/>
-                  </a:lnTo>
-                  <a:lnTo>
-                    <a:pt x="3178734" y="942216"/>
-                  </a:lnTo>
-                  <a:lnTo>
-                    <a:pt x="3101100" y="926278"/>
-                  </a:lnTo>
-                  <a:lnTo>
-                    <a:pt x="3023466" y="910062"/>
-                  </a:lnTo>
-                  <a:lnTo>
-                    <a:pt x="2945832" y="893562"/>
-                  </a:lnTo>
-                  <a:lnTo>
-                    <a:pt x="2868198" y="876774"/>
-                  </a:lnTo>
-                  <a:lnTo>
-                    <a:pt x="2790564" y="859692"/>
-                  </a:lnTo>
-                  <a:lnTo>
-                    <a:pt x="2712930" y="842310"/>
-                  </a:lnTo>
-                  <a:lnTo>
-                    <a:pt x="2635295" y="824625"/>
-                  </a:lnTo>
-                  <a:lnTo>
-                    <a:pt x="2557661" y="806631"/>
-                  </a:lnTo>
-                  <a:lnTo>
-                    <a:pt x="2480027" y="788321"/>
-                  </a:lnTo>
-                  <a:lnTo>
-                    <a:pt x="2402393" y="769692"/>
-                  </a:lnTo>
-                  <a:lnTo>
-                    <a:pt x="2324759" y="750736"/>
-                  </a:lnTo>
-                  <a:lnTo>
-                    <a:pt x="2247125" y="731448"/>
-                  </a:lnTo>
-                  <a:lnTo>
-                    <a:pt x="2169491" y="711824"/>
-                  </a:lnTo>
-                  <a:lnTo>
-                    <a:pt x="2091857" y="691855"/>
-                  </a:lnTo>
-                  <a:lnTo>
-                    <a:pt x="2014223" y="671538"/>
-                  </a:lnTo>
-                  <a:lnTo>
-                    <a:pt x="1936589" y="650865"/>
-                  </a:lnTo>
-                  <a:lnTo>
-                    <a:pt x="1858955" y="629830"/>
-                  </a:lnTo>
-                  <a:lnTo>
-                    <a:pt x="1781321" y="608428"/>
-                  </a:lnTo>
-                  <a:lnTo>
-                    <a:pt x="1703687" y="586651"/>
-                  </a:lnTo>
-                  <a:lnTo>
-                    <a:pt x="1626053" y="564492"/>
-                  </a:lnTo>
-                  <a:lnTo>
-                    <a:pt x="1548419" y="541947"/>
-                  </a:lnTo>
-                  <a:lnTo>
-                    <a:pt x="1470785" y="519006"/>
-                  </a:lnTo>
-                  <a:lnTo>
-                    <a:pt x="1393151" y="495665"/>
-                  </a:lnTo>
-                  <a:lnTo>
-                    <a:pt x="1315517" y="471915"/>
-                  </a:lnTo>
-                  <a:lnTo>
-                    <a:pt x="1237883" y="447749"/>
-                  </a:lnTo>
-                  <a:lnTo>
-                    <a:pt x="1160249" y="423161"/>
-                  </a:lnTo>
-                  <a:lnTo>
-                    <a:pt x="1082615" y="398142"/>
-                  </a:lnTo>
-                  <a:lnTo>
-                    <a:pt x="1004981" y="372686"/>
-                  </a:lnTo>
-                  <a:lnTo>
-                    <a:pt x="927346" y="346785"/>
-                  </a:lnTo>
-                  <a:lnTo>
-                    <a:pt x="849712" y="320430"/>
-                  </a:lnTo>
-                  <a:lnTo>
-                    <a:pt x="772078" y="293614"/>
-                  </a:lnTo>
-                  <a:lnTo>
-                    <a:pt x="694444" y="266329"/>
-                  </a:lnTo>
-                  <a:lnTo>
-                    <a:pt x="616810" y="238567"/>
-                  </a:lnTo>
-                  <a:lnTo>
-                    <a:pt x="539176" y="210319"/>
-                  </a:lnTo>
-                  <a:lnTo>
-                    <a:pt x="461542" y="181576"/>
-                  </a:lnTo>
-                  <a:lnTo>
-                    <a:pt x="383908" y="152331"/>
-                  </a:lnTo>
-                  <a:lnTo>
-                    <a:pt x="306274" y="122574"/>
-                  </a:lnTo>
-                  <a:lnTo>
-                    <a:pt x="228640" y="92297"/>
-                  </a:lnTo>
-                  <a:lnTo>
-                    <a:pt x="151006" y="61490"/>
-                  </a:lnTo>
-                  <a:lnTo>
-                    <a:pt x="73372" y="30143"/>
+                    <a:pt x="7293338" y="1882183"/>
+                  </a:lnTo>
+                  <a:lnTo>
+                    <a:pt x="7215704" y="1881122"/>
+                  </a:lnTo>
+                  <a:lnTo>
+                    <a:pt x="7138070" y="1879967"/>
+                  </a:lnTo>
+                  <a:lnTo>
+                    <a:pt x="7060436" y="1878709"/>
+                  </a:lnTo>
+                  <a:lnTo>
+                    <a:pt x="6982802" y="1877339"/>
+                  </a:lnTo>
+                  <a:lnTo>
+                    <a:pt x="6905168" y="1875848"/>
+                  </a:lnTo>
+                  <a:lnTo>
+                    <a:pt x="6827534" y="1874223"/>
+                  </a:lnTo>
+                  <a:lnTo>
+                    <a:pt x="6749900" y="1872454"/>
+                  </a:lnTo>
+                  <a:lnTo>
+                    <a:pt x="6672266" y="1870528"/>
+                  </a:lnTo>
+                  <a:lnTo>
+                    <a:pt x="6594632" y="1868431"/>
+                  </a:lnTo>
+                  <a:lnTo>
+                    <a:pt x="6516998" y="1866146"/>
+                  </a:lnTo>
+                  <a:lnTo>
+                    <a:pt x="6439364" y="1863659"/>
+                  </a:lnTo>
+                  <a:lnTo>
+                    <a:pt x="6361730" y="1860950"/>
+                  </a:lnTo>
+                  <a:lnTo>
+                    <a:pt x="6284096" y="1858000"/>
+                  </a:lnTo>
+                  <a:lnTo>
+                    <a:pt x="6206462" y="1854788"/>
+                  </a:lnTo>
+                  <a:lnTo>
+                    <a:pt x="6128827" y="1851290"/>
+                  </a:lnTo>
+                  <a:lnTo>
+                    <a:pt x="6051193" y="1847480"/>
+                  </a:lnTo>
+                  <a:lnTo>
+                    <a:pt x="5973559" y="1843332"/>
+                  </a:lnTo>
+                  <a:lnTo>
+                    <a:pt x="5895925" y="1838815"/>
+                  </a:lnTo>
+                  <a:lnTo>
+                    <a:pt x="5818291" y="1833896"/>
+                  </a:lnTo>
+                  <a:lnTo>
+                    <a:pt x="5740657" y="1828539"/>
+                  </a:lnTo>
+                  <a:lnTo>
+                    <a:pt x="5663023" y="1822705"/>
+                  </a:lnTo>
+                  <a:lnTo>
+                    <a:pt x="5585389" y="1816352"/>
+                  </a:lnTo>
+                  <a:lnTo>
+                    <a:pt x="5507755" y="1809434"/>
+                  </a:lnTo>
+                  <a:lnTo>
+                    <a:pt x="5430121" y="1801901"/>
+                  </a:lnTo>
+                  <a:lnTo>
+                    <a:pt x="5352487" y="1793697"/>
+                  </a:lnTo>
+                  <a:lnTo>
+                    <a:pt x="5274853" y="1784763"/>
+                  </a:lnTo>
+                  <a:lnTo>
+                    <a:pt x="5197219" y="1775035"/>
+                  </a:lnTo>
+                  <a:lnTo>
+                    <a:pt x="5119585" y="1764441"/>
+                  </a:lnTo>
+                  <a:lnTo>
+                    <a:pt x="5041951" y="1752904"/>
+                  </a:lnTo>
+                  <a:lnTo>
+                    <a:pt x="4964317" y="1740341"/>
+                  </a:lnTo>
+                  <a:lnTo>
+                    <a:pt x="4886683" y="1726660"/>
+                  </a:lnTo>
+                  <a:lnTo>
+                    <a:pt x="4809049" y="1711762"/>
+                  </a:lnTo>
+                  <a:lnTo>
+                    <a:pt x="4731415" y="1695538"/>
+                  </a:lnTo>
+                  <a:lnTo>
+                    <a:pt x="4653781" y="1677870"/>
+                  </a:lnTo>
+                  <a:lnTo>
+                    <a:pt x="4576147" y="1658631"/>
+                  </a:lnTo>
+                  <a:lnTo>
+                    <a:pt x="4498513" y="1637680"/>
+                  </a:lnTo>
+                  <a:lnTo>
+                    <a:pt x="4420879" y="1614865"/>
+                  </a:lnTo>
+                  <a:lnTo>
+                    <a:pt x="4343244" y="1590019"/>
+                  </a:lnTo>
+                  <a:lnTo>
+                    <a:pt x="4265610" y="1562964"/>
+                  </a:lnTo>
+                  <a:lnTo>
+                    <a:pt x="4187976" y="1533500"/>
+                  </a:lnTo>
+                  <a:lnTo>
+                    <a:pt x="4110342" y="1501416"/>
+                  </a:lnTo>
+                  <a:lnTo>
+                    <a:pt x="4032708" y="1466476"/>
+                  </a:lnTo>
+                  <a:lnTo>
+                    <a:pt x="3955074" y="1428428"/>
+                  </a:lnTo>
+                  <a:lnTo>
+                    <a:pt x="3877440" y="1386995"/>
+                  </a:lnTo>
+                  <a:lnTo>
+                    <a:pt x="3799806" y="1341875"/>
+                  </a:lnTo>
+                  <a:lnTo>
+                    <a:pt x="3722172" y="1292741"/>
+                  </a:lnTo>
+                  <a:lnTo>
+                    <a:pt x="3644538" y="1239235"/>
+                  </a:lnTo>
+                  <a:lnTo>
+                    <a:pt x="3566904" y="1180968"/>
+                  </a:lnTo>
+                  <a:lnTo>
+                    <a:pt x="3489270" y="1117517"/>
+                  </a:lnTo>
+                  <a:lnTo>
+                    <a:pt x="3411636" y="1048420"/>
+                  </a:lnTo>
+                  <a:lnTo>
+                    <a:pt x="3334002" y="1013938"/>
+                  </a:lnTo>
+                  <a:lnTo>
+                    <a:pt x="3256368" y="998090"/>
+                  </a:lnTo>
+                  <a:lnTo>
+                    <a:pt x="3178734" y="981956"/>
+                  </a:lnTo>
+                  <a:lnTo>
+                    <a:pt x="3101100" y="965532"/>
+                  </a:lnTo>
+                  <a:lnTo>
+                    <a:pt x="3023466" y="948813"/>
+                  </a:lnTo>
+                  <a:lnTo>
+                    <a:pt x="2945832" y="931792"/>
+                  </a:lnTo>
+                  <a:lnTo>
+                    <a:pt x="2868198" y="914465"/>
+                  </a:lnTo>
+                  <a:lnTo>
+                    <a:pt x="2790564" y="896825"/>
+                  </a:lnTo>
+                  <a:lnTo>
+                    <a:pt x="2712930" y="878869"/>
+                  </a:lnTo>
+                  <a:lnTo>
+                    <a:pt x="2635295" y="860588"/>
+                  </a:lnTo>
+                  <a:lnTo>
+                    <a:pt x="2557661" y="841979"/>
+                  </a:lnTo>
+                  <a:lnTo>
+                    <a:pt x="2480027" y="823035"/>
+                  </a:lnTo>
+                  <a:lnTo>
+                    <a:pt x="2402393" y="803749"/>
+                  </a:lnTo>
+                  <a:lnTo>
+                    <a:pt x="2324759" y="784117"/>
+                  </a:lnTo>
+                  <a:lnTo>
+                    <a:pt x="2247125" y="764130"/>
+                  </a:lnTo>
+                  <a:lnTo>
+                    <a:pt x="2169491" y="743784"/>
+                  </a:lnTo>
+                  <a:lnTo>
+                    <a:pt x="2091857" y="723072"/>
+                  </a:lnTo>
+                  <a:lnTo>
+                    <a:pt x="2014223" y="701986"/>
+                  </a:lnTo>
+                  <a:lnTo>
+                    <a:pt x="1936589" y="680521"/>
+                  </a:lnTo>
+                  <a:lnTo>
+                    <a:pt x="1858955" y="658670"/>
+                  </a:lnTo>
+                  <a:lnTo>
+                    <a:pt x="1781321" y="636425"/>
+                  </a:lnTo>
+                  <a:lnTo>
+                    <a:pt x="1703687" y="613779"/>
+                  </a:lnTo>
+                  <a:lnTo>
+                    <a:pt x="1626053" y="590726"/>
+                  </a:lnTo>
+                  <a:lnTo>
+                    <a:pt x="1548419" y="567258"/>
+                  </a:lnTo>
+                  <a:lnTo>
+                    <a:pt x="1470785" y="543367"/>
+                  </a:lnTo>
+                  <a:lnTo>
+                    <a:pt x="1393151" y="519046"/>
+                  </a:lnTo>
+                  <a:lnTo>
+                    <a:pt x="1315517" y="494287"/>
+                  </a:lnTo>
+                  <a:lnTo>
+                    <a:pt x="1237883" y="469082"/>
+                  </a:lnTo>
+                  <a:lnTo>
+                    <a:pt x="1160249" y="443423"/>
+                  </a:lnTo>
+                  <a:lnTo>
+                    <a:pt x="1082615" y="417302"/>
+                  </a:lnTo>
+                  <a:lnTo>
+                    <a:pt x="1004981" y="390711"/>
+                  </a:lnTo>
+                  <a:lnTo>
+                    <a:pt x="927346" y="363642"/>
+                  </a:lnTo>
+                  <a:lnTo>
+                    <a:pt x="849712" y="336084"/>
+                  </a:lnTo>
+                  <a:lnTo>
+                    <a:pt x="772078" y="308031"/>
+                  </a:lnTo>
+                  <a:lnTo>
+                    <a:pt x="694444" y="279472"/>
+                  </a:lnTo>
+                  <a:lnTo>
+                    <a:pt x="616810" y="250400"/>
+                  </a:lnTo>
+                  <a:lnTo>
+                    <a:pt x="539176" y="220803"/>
+                  </a:lnTo>
+                  <a:lnTo>
+                    <a:pt x="461542" y="190674"/>
+                  </a:lnTo>
+                  <a:lnTo>
+                    <a:pt x="383908" y="160003"/>
+                  </a:lnTo>
+                  <a:lnTo>
+                    <a:pt x="306274" y="128779"/>
+                  </a:lnTo>
+                  <a:lnTo>
+                    <a:pt x="228640" y="96993"/>
+                  </a:lnTo>
+                  <a:lnTo>
+                    <a:pt x="151006" y="64634"/>
+                  </a:lnTo>
+                  <a:lnTo>
+                    <a:pt x="73372" y="31693"/>
                   </a:lnTo>
                   <a:lnTo>
                     <a:pt x="0" y="0"/>
@@ -4091,267 +4082,255 @@
           </p:nvSpPr>
           <p:spPr>
             <a:xfrm>
-              <a:off x="1743702" y="1896563"/>
-              <a:ext cx="6444788" cy="3567571"/>
+              <a:off x="2042355" y="1896563"/>
+              <a:ext cx="6146134" cy="3590923"/>
             </a:xfrm>
             <a:custGeom>
               <a:avLst/>
               <a:pathLst>
-                <a:path w="6444788" h="3567571">
+                <a:path w="6146134" h="3590923">
                   <a:moveTo>
                     <a:pt x="0" y="0"/>
                   </a:moveTo>
                   <a:lnTo>
-                    <a:pt x="1162" y="2532"/>
-                  </a:lnTo>
-                  <a:lnTo>
-                    <a:pt x="78796" y="164155"/>
-                  </a:lnTo>
-                  <a:lnTo>
-                    <a:pt x="156430" y="318622"/>
-                  </a:lnTo>
-                  <a:lnTo>
-                    <a:pt x="234064" y="466249"/>
-                  </a:lnTo>
-                  <a:lnTo>
-                    <a:pt x="311698" y="607339"/>
-                  </a:lnTo>
-                  <a:lnTo>
-                    <a:pt x="389332" y="742182"/>
-                  </a:lnTo>
-                  <a:lnTo>
-                    <a:pt x="466966" y="871054"/>
-                  </a:lnTo>
-                  <a:lnTo>
-                    <a:pt x="544600" y="994220"/>
-                  </a:lnTo>
-                  <a:lnTo>
-                    <a:pt x="622234" y="1111933"/>
-                  </a:lnTo>
-                  <a:lnTo>
-                    <a:pt x="699868" y="1224433"/>
-                  </a:lnTo>
-                  <a:lnTo>
-                    <a:pt x="777502" y="1331952"/>
-                  </a:lnTo>
-                  <a:lnTo>
-                    <a:pt x="855136" y="1434709"/>
-                  </a:lnTo>
-                  <a:lnTo>
-                    <a:pt x="932770" y="1532917"/>
-                  </a:lnTo>
-                  <a:lnTo>
-                    <a:pt x="1010404" y="1626777"/>
-                  </a:lnTo>
-                  <a:lnTo>
-                    <a:pt x="1088038" y="1716480"/>
-                  </a:lnTo>
-                  <a:lnTo>
-                    <a:pt x="1165673" y="1802211"/>
-                  </a:lnTo>
-                  <a:lnTo>
-                    <a:pt x="1243307" y="1884147"/>
-                  </a:lnTo>
-                  <a:lnTo>
-                    <a:pt x="1320941" y="1962454"/>
-                  </a:lnTo>
-                  <a:lnTo>
-                    <a:pt x="1398575" y="2037294"/>
-                  </a:lnTo>
-                  <a:lnTo>
-                    <a:pt x="1476209" y="2108820"/>
-                  </a:lnTo>
-                  <a:lnTo>
-                    <a:pt x="1553843" y="2177179"/>
-                  </a:lnTo>
-                  <a:lnTo>
-                    <a:pt x="1631477" y="2242511"/>
-                  </a:lnTo>
-                  <a:lnTo>
-                    <a:pt x="1709111" y="2304950"/>
-                  </a:lnTo>
-                  <a:lnTo>
-                    <a:pt x="1786745" y="2364625"/>
-                  </a:lnTo>
-                  <a:lnTo>
-                    <a:pt x="1864379" y="2421657"/>
-                  </a:lnTo>
-                  <a:lnTo>
-                    <a:pt x="1942013" y="2476164"/>
-                  </a:lnTo>
-                  <a:lnTo>
-                    <a:pt x="2019647" y="2528257"/>
-                  </a:lnTo>
-                  <a:lnTo>
-                    <a:pt x="2097281" y="2578044"/>
-                  </a:lnTo>
-                  <a:lnTo>
-                    <a:pt x="2174915" y="2625626"/>
-                  </a:lnTo>
-                  <a:lnTo>
-                    <a:pt x="2252549" y="2671101"/>
-                  </a:lnTo>
-                  <a:lnTo>
-                    <a:pt x="2330183" y="2714563"/>
-                  </a:lnTo>
-                  <a:lnTo>
-                    <a:pt x="2407817" y="2756100"/>
-                  </a:lnTo>
-                  <a:lnTo>
-                    <a:pt x="2485451" y="2795798"/>
-                  </a:lnTo>
-                  <a:lnTo>
-                    <a:pt x="2563085" y="2833738"/>
-                  </a:lnTo>
-                  <a:lnTo>
-                    <a:pt x="2640719" y="2869999"/>
-                  </a:lnTo>
-                  <a:lnTo>
-                    <a:pt x="2718353" y="2904653"/>
-                  </a:lnTo>
-                  <a:lnTo>
-                    <a:pt x="2795987" y="2937774"/>
-                  </a:lnTo>
-                  <a:lnTo>
-                    <a:pt x="2873622" y="2969427"/>
-                  </a:lnTo>
-                  <a:lnTo>
-                    <a:pt x="2951256" y="2999680"/>
-                  </a:lnTo>
-                  <a:lnTo>
-                    <a:pt x="3028890" y="3028592"/>
-                  </a:lnTo>
-                  <a:lnTo>
-                    <a:pt x="3106524" y="3056224"/>
-                  </a:lnTo>
-                  <a:lnTo>
-                    <a:pt x="3184158" y="3082633"/>
-                  </a:lnTo>
-                  <a:lnTo>
-                    <a:pt x="3261792" y="3107873"/>
-                  </a:lnTo>
-                  <a:lnTo>
-                    <a:pt x="3339426" y="3131995"/>
-                  </a:lnTo>
-                  <a:lnTo>
-                    <a:pt x="3417060" y="3155048"/>
-                  </a:lnTo>
-                  <a:lnTo>
-                    <a:pt x="3494694" y="3177081"/>
-                  </a:lnTo>
-                  <a:lnTo>
-                    <a:pt x="3572328" y="3198139"/>
-                  </a:lnTo>
-                  <a:lnTo>
-                    <a:pt x="3649962" y="3218264"/>
-                  </a:lnTo>
-                  <a:lnTo>
-                    <a:pt x="3727596" y="3237498"/>
-                  </a:lnTo>
-                  <a:lnTo>
-                    <a:pt x="3805230" y="3255880"/>
-                  </a:lnTo>
-                  <a:lnTo>
-                    <a:pt x="3882864" y="3273448"/>
-                  </a:lnTo>
-                  <a:lnTo>
-                    <a:pt x="3960498" y="3290239"/>
-                  </a:lnTo>
-                  <a:lnTo>
-                    <a:pt x="4038132" y="3306286"/>
-                  </a:lnTo>
-                  <a:lnTo>
-                    <a:pt x="4115766" y="3321622"/>
-                  </a:lnTo>
-                  <a:lnTo>
-                    <a:pt x="4193400" y="3336279"/>
-                  </a:lnTo>
-                  <a:lnTo>
-                    <a:pt x="4271034" y="3350288"/>
-                  </a:lnTo>
-                  <a:lnTo>
-                    <a:pt x="4348668" y="3363676"/>
-                  </a:lnTo>
-                  <a:lnTo>
-                    <a:pt x="4426302" y="3376471"/>
-                  </a:lnTo>
-                  <a:lnTo>
-                    <a:pt x="4503936" y="3388699"/>
-                  </a:lnTo>
-                  <a:lnTo>
-                    <a:pt x="4581571" y="3400387"/>
-                  </a:lnTo>
-                  <a:lnTo>
-                    <a:pt x="4659205" y="3411556"/>
-                  </a:lnTo>
-                  <a:lnTo>
-                    <a:pt x="4736839" y="3422231"/>
-                  </a:lnTo>
-                  <a:lnTo>
-                    <a:pt x="4814473" y="3432434"/>
-                  </a:lnTo>
-                  <a:lnTo>
-                    <a:pt x="4892107" y="3442184"/>
-                  </a:lnTo>
-                  <a:lnTo>
-                    <a:pt x="4969741" y="3451503"/>
-                  </a:lnTo>
-                  <a:lnTo>
-                    <a:pt x="5047375" y="3460410"/>
-                  </a:lnTo>
-                  <a:lnTo>
-                    <a:pt x="5125009" y="3468922"/>
-                  </a:lnTo>
-                  <a:lnTo>
-                    <a:pt x="5202643" y="3477057"/>
-                  </a:lnTo>
-                  <a:lnTo>
-                    <a:pt x="5280277" y="3484831"/>
-                  </a:lnTo>
-                  <a:lnTo>
-                    <a:pt x="5357911" y="3492262"/>
-                  </a:lnTo>
-                  <a:lnTo>
-                    <a:pt x="5435545" y="3499363"/>
-                  </a:lnTo>
-                  <a:lnTo>
-                    <a:pt x="5513179" y="3506150"/>
-                  </a:lnTo>
-                  <a:lnTo>
-                    <a:pt x="5590813" y="3512637"/>
-                  </a:lnTo>
-                  <a:lnTo>
-                    <a:pt x="5668447" y="3518836"/>
-                  </a:lnTo>
-                  <a:lnTo>
-                    <a:pt x="5746081" y="3524761"/>
-                  </a:lnTo>
-                  <a:lnTo>
-                    <a:pt x="5823715" y="3530424"/>
-                  </a:lnTo>
-                  <a:lnTo>
-                    <a:pt x="5901349" y="3535835"/>
-                  </a:lnTo>
-                  <a:lnTo>
-                    <a:pt x="5978983" y="3541008"/>
-                  </a:lnTo>
-                  <a:lnTo>
-                    <a:pt x="6056617" y="3545951"/>
-                  </a:lnTo>
-                  <a:lnTo>
-                    <a:pt x="6134251" y="3550675"/>
-                  </a:lnTo>
-                  <a:lnTo>
-                    <a:pt x="6211885" y="3555190"/>
-                  </a:lnTo>
-                  <a:lnTo>
-                    <a:pt x="6289520" y="3559505"/>
-                  </a:lnTo>
-                  <a:lnTo>
-                    <a:pt x="6367154" y="3563629"/>
-                  </a:lnTo>
-                  <a:lnTo>
-                    <a:pt x="6444788" y="3567571"/>
+                    <a:pt x="13045" y="32177"/>
+                  </a:lnTo>
+                  <a:lnTo>
+                    <a:pt x="90679" y="214053"/>
+                  </a:lnTo>
+                  <a:lnTo>
+                    <a:pt x="168313" y="386792"/>
+                  </a:lnTo>
+                  <a:lnTo>
+                    <a:pt x="245947" y="550854"/>
+                  </a:lnTo>
+                  <a:lnTo>
+                    <a:pt x="323581" y="706673"/>
+                  </a:lnTo>
+                  <a:lnTo>
+                    <a:pt x="401215" y="854666"/>
+                  </a:lnTo>
+                  <a:lnTo>
+                    <a:pt x="478849" y="995223"/>
+                  </a:lnTo>
+                  <a:lnTo>
+                    <a:pt x="556483" y="1128720"/>
+                  </a:lnTo>
+                  <a:lnTo>
+                    <a:pt x="634117" y="1255510"/>
+                  </a:lnTo>
+                  <a:lnTo>
+                    <a:pt x="711751" y="1375932"/>
+                  </a:lnTo>
+                  <a:lnTo>
+                    <a:pt x="789385" y="1490303"/>
+                  </a:lnTo>
+                  <a:lnTo>
+                    <a:pt x="867019" y="1598929"/>
+                  </a:lnTo>
+                  <a:lnTo>
+                    <a:pt x="944653" y="1702099"/>
+                  </a:lnTo>
+                  <a:lnTo>
+                    <a:pt x="1022287" y="1800085"/>
+                  </a:lnTo>
+                  <a:lnTo>
+                    <a:pt x="1099921" y="1893149"/>
+                  </a:lnTo>
+                  <a:lnTo>
+                    <a:pt x="1177555" y="1981538"/>
+                  </a:lnTo>
+                  <a:lnTo>
+                    <a:pt x="1255189" y="2065487"/>
+                  </a:lnTo>
+                  <a:lnTo>
+                    <a:pt x="1332823" y="2145218"/>
+                  </a:lnTo>
+                  <a:lnTo>
+                    <a:pt x="1410457" y="2220945"/>
+                  </a:lnTo>
+                  <a:lnTo>
+                    <a:pt x="1488091" y="2292867"/>
+                  </a:lnTo>
+                  <a:lnTo>
+                    <a:pt x="1565726" y="2361176"/>
+                  </a:lnTo>
+                  <a:lnTo>
+                    <a:pt x="1643360" y="2426053"/>
+                  </a:lnTo>
+                  <a:lnTo>
+                    <a:pt x="1720994" y="2487671"/>
+                  </a:lnTo>
+                  <a:lnTo>
+                    <a:pt x="1798628" y="2546194"/>
+                  </a:lnTo>
+                  <a:lnTo>
+                    <a:pt x="1876262" y="2601777"/>
+                  </a:lnTo>
+                  <a:lnTo>
+                    <a:pt x="1953896" y="2654568"/>
+                  </a:lnTo>
+                  <a:lnTo>
+                    <a:pt x="2031530" y="2704707"/>
+                  </a:lnTo>
+                  <a:lnTo>
+                    <a:pt x="2109164" y="2752327"/>
+                  </a:lnTo>
+                  <a:lnTo>
+                    <a:pt x="2186798" y="2797555"/>
+                  </a:lnTo>
+                  <a:lnTo>
+                    <a:pt x="2264432" y="2840510"/>
+                  </a:lnTo>
+                  <a:lnTo>
+                    <a:pt x="2342066" y="2881308"/>
+                  </a:lnTo>
+                  <a:lnTo>
+                    <a:pt x="2419700" y="2920057"/>
+                  </a:lnTo>
+                  <a:lnTo>
+                    <a:pt x="2497334" y="2956859"/>
+                  </a:lnTo>
+                  <a:lnTo>
+                    <a:pt x="2574968" y="2991812"/>
+                  </a:lnTo>
+                  <a:lnTo>
+                    <a:pt x="2652602" y="3025009"/>
+                  </a:lnTo>
+                  <a:lnTo>
+                    <a:pt x="2730236" y="3056538"/>
+                  </a:lnTo>
+                  <a:lnTo>
+                    <a:pt x="2807870" y="3086484"/>
+                  </a:lnTo>
+                  <a:lnTo>
+                    <a:pt x="2885504" y="3114925"/>
+                  </a:lnTo>
+                  <a:lnTo>
+                    <a:pt x="2963138" y="3141938"/>
+                  </a:lnTo>
+                  <a:lnTo>
+                    <a:pt x="3040772" y="3167593"/>
+                  </a:lnTo>
+                  <a:lnTo>
+                    <a:pt x="3118406" y="3191960"/>
+                  </a:lnTo>
+                  <a:lnTo>
+                    <a:pt x="3196040" y="3215103"/>
+                  </a:lnTo>
+                  <a:lnTo>
+                    <a:pt x="3273675" y="3237083"/>
+                  </a:lnTo>
+                  <a:lnTo>
+                    <a:pt x="3351309" y="3257959"/>
+                  </a:lnTo>
+                  <a:lnTo>
+                    <a:pt x="3428943" y="3277786"/>
+                  </a:lnTo>
+                  <a:lnTo>
+                    <a:pt x="3506577" y="3296617"/>
+                  </a:lnTo>
+                  <a:lnTo>
+                    <a:pt x="3584211" y="3314502"/>
+                  </a:lnTo>
+                  <a:lnTo>
+                    <a:pt x="3661845" y="3331489"/>
+                  </a:lnTo>
+                  <a:lnTo>
+                    <a:pt x="3739479" y="3347622"/>
+                  </a:lnTo>
+                  <a:lnTo>
+                    <a:pt x="3817113" y="3362945"/>
+                  </a:lnTo>
+                  <a:lnTo>
+                    <a:pt x="3894747" y="3377498"/>
+                  </a:lnTo>
+                  <a:lnTo>
+                    <a:pt x="3972381" y="3391320"/>
+                  </a:lnTo>
+                  <a:lnTo>
+                    <a:pt x="4050015" y="3404448"/>
+                  </a:lnTo>
+                  <a:lnTo>
+                    <a:pt x="4127649" y="3416916"/>
+                  </a:lnTo>
+                  <a:lnTo>
+                    <a:pt x="4205283" y="3428758"/>
+                  </a:lnTo>
+                  <a:lnTo>
+                    <a:pt x="4282917" y="3440005"/>
+                  </a:lnTo>
+                  <a:lnTo>
+                    <a:pt x="4360551" y="3450687"/>
+                  </a:lnTo>
+                  <a:lnTo>
+                    <a:pt x="4438185" y="3460832"/>
+                  </a:lnTo>
+                  <a:lnTo>
+                    <a:pt x="4515819" y="3470468"/>
+                  </a:lnTo>
+                  <a:lnTo>
+                    <a:pt x="4593453" y="3479620"/>
+                  </a:lnTo>
+                  <a:lnTo>
+                    <a:pt x="4671087" y="3488312"/>
+                  </a:lnTo>
+                  <a:lnTo>
+                    <a:pt x="4748721" y="3496567"/>
+                  </a:lnTo>
+                  <a:lnTo>
+                    <a:pt x="4826355" y="3504407"/>
+                  </a:lnTo>
+                  <a:lnTo>
+                    <a:pt x="4903989" y="3511854"/>
+                  </a:lnTo>
+                  <a:lnTo>
+                    <a:pt x="4981623" y="3518927"/>
+                  </a:lnTo>
+                  <a:lnTo>
+                    <a:pt x="5059258" y="3525644"/>
+                  </a:lnTo>
+                  <a:lnTo>
+                    <a:pt x="5136892" y="3532024"/>
+                  </a:lnTo>
+                  <a:lnTo>
+                    <a:pt x="5214526" y="3538083"/>
+                  </a:lnTo>
+                  <a:lnTo>
+                    <a:pt x="5292160" y="3543838"/>
+                  </a:lnTo>
+                  <a:lnTo>
+                    <a:pt x="5369794" y="3549304"/>
+                  </a:lnTo>
+                  <a:lnTo>
+                    <a:pt x="5447428" y="3554495"/>
+                  </a:lnTo>
+                  <a:lnTo>
+                    <a:pt x="5525062" y="3559426"/>
+                  </a:lnTo>
+                  <a:lnTo>
+                    <a:pt x="5602696" y="3564109"/>
+                  </a:lnTo>
+                  <a:lnTo>
+                    <a:pt x="5680330" y="3568556"/>
+                  </a:lnTo>
+                  <a:lnTo>
+                    <a:pt x="5757964" y="3572780"/>
+                  </a:lnTo>
+                  <a:lnTo>
+                    <a:pt x="5835598" y="3576792"/>
+                  </a:lnTo>
+                  <a:lnTo>
+                    <a:pt x="5913232" y="3580603"/>
+                  </a:lnTo>
+                  <a:lnTo>
+                    <a:pt x="5990866" y="3584222"/>
+                  </a:lnTo>
+                  <a:lnTo>
+                    <a:pt x="6068500" y="3587659"/>
+                  </a:lnTo>
+                  <a:lnTo>
+                    <a:pt x="6146134" y="3590923"/>
                   </a:lnTo>
                 </a:path>
               </a:pathLst>

--- a/docs/plots/carbo/jx_carbo_linsubhr_ratio_grade3.pptx
+++ b/docs/plots/carbo/jx_carbo_linsubhr_ratio_grade3.pptx
@@ -3016,7 +3016,7 @@
                     <a:pt x="2091857" y="50913"/>
                   </a:lnTo>
                   <a:lnTo>
-                    <a:pt x="2169491" y="345192"/>
+                    <a:pt x="2169491" y="345193"/>
                   </a:lnTo>
                   <a:lnTo>
                     <a:pt x="2247125" y="615428"/>
@@ -3151,7 +3151,7 @@
                     <a:pt x="5585389" y="3128069"/>
                   </a:lnTo>
                   <a:lnTo>
-                    <a:pt x="5663023" y="3137347"/>
+                    <a:pt x="5663023" y="3137348"/>
                   </a:lnTo>
                   <a:lnTo>
                     <a:pt x="5740657" y="3146462"/>
@@ -3163,7 +3163,7 @@
                     <a:pt x="5895925" y="3164209"/>
                   </a:lnTo>
                   <a:lnTo>
-                    <a:pt x="5973559" y="3172848"/>
+                    <a:pt x="5973559" y="3172849"/>
                   </a:lnTo>
                   <a:lnTo>
                     <a:pt x="6051193" y="3181335"/>
@@ -3187,7 +3187,7 @@
                     <a:pt x="6516998" y="3229192"/>
                   </a:lnTo>
                   <a:lnTo>
-                    <a:pt x="6594632" y="3236681"/>
+                    <a:pt x="6594632" y="3236682"/>
                   </a:lnTo>
                   <a:lnTo>
                     <a:pt x="6672266" y="3244039"/>
@@ -3205,7 +3205,7 @@
                     <a:pt x="6982802" y="3272189"/>
                   </a:lnTo>
                   <a:lnTo>
-                    <a:pt x="7060436" y="3278918"/>
+                    <a:pt x="7060436" y="3278919"/>
                   </a:lnTo>
                   <a:lnTo>
                     <a:pt x="7138070" y="3285529"/>
@@ -3268,7 +3268,7 @@
                     <a:pt x="6206462" y="3613328"/>
                   </a:lnTo>
                   <a:lnTo>
-                    <a:pt x="6128827" y="3609830"/>
+                    <a:pt x="6128827" y="3609829"/>
                   </a:lnTo>
                   <a:lnTo>
                     <a:pt x="6051193" y="3606020"/>
@@ -3313,7 +3313,7 @@
                     <a:pt x="5041951" y="3511444"/>
                   </a:lnTo>
                   <a:lnTo>
-                    <a:pt x="4964317" y="3498881"/>
+                    <a:pt x="4964317" y="3498880"/>
                   </a:lnTo>
                   <a:lnTo>
                     <a:pt x="4886683" y="3485199"/>
@@ -3331,7 +3331,7 @@
                     <a:pt x="4576147" y="3417171"/>
                   </a:lnTo>
                   <a:lnTo>
-                    <a:pt x="4498513" y="3396220"/>
+                    <a:pt x="4498513" y="3396219"/>
                   </a:lnTo>
                   <a:lnTo>
                     <a:pt x="4420879" y="3373404"/>
@@ -3391,7 +3391,7 @@
                     <a:pt x="3023466" y="2707352"/>
                   </a:lnTo>
                   <a:lnTo>
-                    <a:pt x="2945832" y="2690332"/>
+                    <a:pt x="2945832" y="2690331"/>
                   </a:lnTo>
                   <a:lnTo>
                     <a:pt x="2868198" y="2673004"/>
@@ -3409,7 +3409,7 @@
                     <a:pt x="2557661" y="2600519"/>
                   </a:lnTo>
                   <a:lnTo>
-                    <a:pt x="2480027" y="2581575"/>
+                    <a:pt x="2480027" y="2581574"/>
                   </a:lnTo>
                   <a:lnTo>
                     <a:pt x="2402393" y="2562289"/>
@@ -3424,7 +3424,7 @@
                     <a:pt x="2169491" y="2502324"/>
                   </a:lnTo>
                   <a:lnTo>
-                    <a:pt x="2091857" y="2481612"/>
+                    <a:pt x="2091857" y="2481611"/>
                   </a:lnTo>
                   <a:lnTo>
                     <a:pt x="2014223" y="2460526"/>
@@ -3433,10 +3433,10 @@
                     <a:pt x="1936589" y="2439061"/>
                   </a:lnTo>
                   <a:lnTo>
-                    <a:pt x="1858955" y="2417210"/>
-                  </a:lnTo>
-                  <a:lnTo>
-                    <a:pt x="1781321" y="2394965"/>
+                    <a:pt x="1858955" y="2417209"/>
+                  </a:lnTo>
+                  <a:lnTo>
+                    <a:pt x="1781321" y="2394964"/>
                   </a:lnTo>
                   <a:lnTo>
                     <a:pt x="1703687" y="2372319"/>
@@ -3460,7 +3460,7 @@
                     <a:pt x="1237883" y="2227621"/>
                   </a:lnTo>
                   <a:lnTo>
-                    <a:pt x="1160249" y="2201963"/>
+                    <a:pt x="1160249" y="2201962"/>
                   </a:lnTo>
                   <a:lnTo>
                     <a:pt x="1082615" y="2175842"/>
@@ -3475,7 +3475,7 @@
                     <a:pt x="849712" y="2094624"/>
                   </a:lnTo>
                   <a:lnTo>
-                    <a:pt x="772078" y="2066571"/>
+                    <a:pt x="772078" y="2066570"/>
                   </a:lnTo>
                   <a:lnTo>
                     <a:pt x="694444" y="2038012"/>
@@ -3487,7 +3487,7 @@
                     <a:pt x="539176" y="1979343"/>
                   </a:lnTo>
                   <a:lnTo>
-                    <a:pt x="461542" y="1949214"/>
+                    <a:pt x="461542" y="1949213"/>
                   </a:lnTo>
                   <a:lnTo>
                     <a:pt x="383908" y="1918542"/>
@@ -3499,10 +3499,10 @@
                     <a:pt x="228640" y="1855532"/>
                   </a:lnTo>
                   <a:lnTo>
-                    <a:pt x="151006" y="1823174"/>
-                  </a:lnTo>
-                  <a:lnTo>
-                    <a:pt x="73372" y="1790233"/>
+                    <a:pt x="151006" y="1823173"/>
+                  </a:lnTo>
+                  <a:lnTo>
+                    <a:pt x="73372" y="1790232"/>
                   </a:lnTo>
                   <a:lnTo>
                     <a:pt x="0" y="1758539"/>
@@ -3545,10 +3545,10 @@
                     <a:pt x="0" y="0"/>
                   </a:moveTo>
                   <a:lnTo>
-                    <a:pt x="12333" y="50913"/>
-                  </a:lnTo>
-                  <a:lnTo>
-                    <a:pt x="89968" y="345192"/>
+                    <a:pt x="12334" y="50913"/>
+                  </a:lnTo>
+                  <a:lnTo>
+                    <a:pt x="89968" y="345193"/>
                   </a:lnTo>
                   <a:lnTo>
                     <a:pt x="167602" y="615428"/>
@@ -3605,13 +3605,13 @@
                     <a:pt x="1487380" y="2818360"/>
                   </a:lnTo>
                   <a:lnTo>
-                    <a:pt x="1565014" y="2833116"/>
-                  </a:lnTo>
-                  <a:lnTo>
-                    <a:pt x="1642648" y="2847611"/>
-                  </a:lnTo>
-                  <a:lnTo>
-                    <a:pt x="1720282" y="2861850"/>
+                    <a:pt x="1565015" y="2833116"/>
+                  </a:lnTo>
+                  <a:lnTo>
+                    <a:pt x="1642649" y="2847611"/>
+                  </a:lnTo>
+                  <a:lnTo>
+                    <a:pt x="1720283" y="2861850"/>
                   </a:lnTo>
                   <a:lnTo>
                     <a:pt x="1797917" y="2875837"/>
@@ -3674,16 +3674,16 @@
                     <a:pt x="3272963" y="3099220"/>
                   </a:lnTo>
                   <a:lnTo>
-                    <a:pt x="3350597" y="3109008"/>
-                  </a:lnTo>
-                  <a:lnTo>
-                    <a:pt x="3428231" y="3118624"/>
+                    <a:pt x="3350598" y="3109008"/>
+                  </a:lnTo>
+                  <a:lnTo>
+                    <a:pt x="3428232" y="3118624"/>
                   </a:lnTo>
                   <a:lnTo>
                     <a:pt x="3505866" y="3128069"/>
                   </a:lnTo>
                   <a:lnTo>
-                    <a:pt x="3583500" y="3137347"/>
+                    <a:pt x="3583500" y="3137348"/>
                   </a:lnTo>
                   <a:lnTo>
                     <a:pt x="3661134" y="3146462"/>
@@ -3695,7 +3695,7 @@
                     <a:pt x="3816402" y="3164209"/>
                   </a:lnTo>
                   <a:lnTo>
-                    <a:pt x="3894036" y="3172848"/>
+                    <a:pt x="3894036" y="3172849"/>
                   </a:lnTo>
                   <a:lnTo>
                     <a:pt x="3971670" y="3181335"/>
@@ -3719,7 +3719,7 @@
                     <a:pt x="4437474" y="3229192"/>
                   </a:lnTo>
                   <a:lnTo>
-                    <a:pt x="4515108" y="3236681"/>
+                    <a:pt x="4515108" y="3236682"/>
                   </a:lnTo>
                   <a:lnTo>
                     <a:pt x="4592742" y="3244039"/>
@@ -3737,13 +3737,13 @@
                     <a:pt x="4903278" y="3272189"/>
                   </a:lnTo>
                   <a:lnTo>
-                    <a:pt x="4980912" y="3278918"/>
-                  </a:lnTo>
-                  <a:lnTo>
-                    <a:pt x="5058546" y="3285529"/>
-                  </a:lnTo>
-                  <a:lnTo>
-                    <a:pt x="5136180" y="3292022"/>
+                    <a:pt x="4980912" y="3278919"/>
+                  </a:lnTo>
+                  <a:lnTo>
+                    <a:pt x="5058547" y="3285529"/>
+                  </a:lnTo>
+                  <a:lnTo>
+                    <a:pt x="5136181" y="3292022"/>
                   </a:lnTo>
                   <a:lnTo>
                     <a:pt x="5213815" y="3298400"/>
@@ -3769,7 +3769,7 @@
           </p:nvSpPr>
           <p:spPr>
             <a:xfrm>
-              <a:off x="817517" y="3655103"/>
+              <a:off x="817517" y="3655102"/>
               <a:ext cx="7370972" cy="1883157"/>
             </a:xfrm>
             <a:custGeom>
@@ -3789,37 +3789,37 @@
                     <a:pt x="7138070" y="1879967"/>
                   </a:lnTo>
                   <a:lnTo>
-                    <a:pt x="7060436" y="1878709"/>
-                  </a:lnTo>
-                  <a:lnTo>
-                    <a:pt x="6982802" y="1877339"/>
+                    <a:pt x="7060436" y="1878710"/>
+                  </a:lnTo>
+                  <a:lnTo>
+                    <a:pt x="6982802" y="1877340"/>
                   </a:lnTo>
                   <a:lnTo>
                     <a:pt x="6905168" y="1875848"/>
                   </a:lnTo>
                   <a:lnTo>
-                    <a:pt x="6827534" y="1874223"/>
-                  </a:lnTo>
-                  <a:lnTo>
-                    <a:pt x="6749900" y="1872454"/>
-                  </a:lnTo>
-                  <a:lnTo>
-                    <a:pt x="6672266" y="1870528"/>
+                    <a:pt x="6827534" y="1874224"/>
+                  </a:lnTo>
+                  <a:lnTo>
+                    <a:pt x="6749900" y="1872455"/>
+                  </a:lnTo>
+                  <a:lnTo>
+                    <a:pt x="6672266" y="1870529"/>
                   </a:lnTo>
                   <a:lnTo>
                     <a:pt x="6594632" y="1868431"/>
                   </a:lnTo>
                   <a:lnTo>
-                    <a:pt x="6516998" y="1866146"/>
+                    <a:pt x="6516998" y="1866147"/>
                   </a:lnTo>
                   <a:lnTo>
                     <a:pt x="6439364" y="1863659"/>
                   </a:lnTo>
                   <a:lnTo>
-                    <a:pt x="6361730" y="1860950"/>
-                  </a:lnTo>
-                  <a:lnTo>
-                    <a:pt x="6284096" y="1858000"/>
+                    <a:pt x="6361730" y="1860951"/>
+                  </a:lnTo>
+                  <a:lnTo>
+                    <a:pt x="6284096" y="1858001"/>
                   </a:lnTo>
                   <a:lnTo>
                     <a:pt x="6206462" y="1854788"/>
@@ -3828,10 +3828,10 @@
                     <a:pt x="6128827" y="1851290"/>
                   </a:lnTo>
                   <a:lnTo>
-                    <a:pt x="6051193" y="1847480"/>
-                  </a:lnTo>
-                  <a:lnTo>
-                    <a:pt x="5973559" y="1843332"/>
+                    <a:pt x="6051193" y="1847481"/>
+                  </a:lnTo>
+                  <a:lnTo>
+                    <a:pt x="5973559" y="1843333"/>
                   </a:lnTo>
                   <a:lnTo>
                     <a:pt x="5895925" y="1838815"/>
@@ -3846,19 +3846,19 @@
                     <a:pt x="5663023" y="1822705"/>
                   </a:lnTo>
                   <a:lnTo>
-                    <a:pt x="5585389" y="1816352"/>
-                  </a:lnTo>
-                  <a:lnTo>
-                    <a:pt x="5507755" y="1809434"/>
+                    <a:pt x="5585389" y="1816353"/>
+                  </a:lnTo>
+                  <a:lnTo>
+                    <a:pt x="5507755" y="1809435"/>
                   </a:lnTo>
                   <a:lnTo>
                     <a:pt x="5430121" y="1801901"/>
                   </a:lnTo>
                   <a:lnTo>
-                    <a:pt x="5352487" y="1793697"/>
-                  </a:lnTo>
-                  <a:lnTo>
-                    <a:pt x="5274853" y="1784763"/>
+                    <a:pt x="5352487" y="1793698"/>
+                  </a:lnTo>
+                  <a:lnTo>
+                    <a:pt x="5274853" y="1784764"/>
                   </a:lnTo>
                   <a:lnTo>
                     <a:pt x="5197219" y="1775035"/>
@@ -3867,7 +3867,7 @@
                     <a:pt x="5119585" y="1764441"/>
                   </a:lnTo>
                   <a:lnTo>
-                    <a:pt x="5041951" y="1752904"/>
+                    <a:pt x="5041951" y="1752905"/>
                   </a:lnTo>
                   <a:lnTo>
                     <a:pt x="4964317" y="1740341"/>
@@ -3882,10 +3882,10 @@
                     <a:pt x="4731415" y="1695538"/>
                   </a:lnTo>
                   <a:lnTo>
-                    <a:pt x="4653781" y="1677870"/>
-                  </a:lnTo>
-                  <a:lnTo>
-                    <a:pt x="4576147" y="1658631"/>
+                    <a:pt x="4653781" y="1677871"/>
+                  </a:lnTo>
+                  <a:lnTo>
+                    <a:pt x="4576147" y="1658632"/>
                   </a:lnTo>
                   <a:lnTo>
                     <a:pt x="4498513" y="1637680"/>
@@ -3894,28 +3894,28 @@
                     <a:pt x="4420879" y="1614865"/>
                   </a:lnTo>
                   <a:lnTo>
-                    <a:pt x="4343244" y="1590019"/>
+                    <a:pt x="4343244" y="1590020"/>
                   </a:lnTo>
                   <a:lnTo>
                     <a:pt x="4265610" y="1562964"/>
                   </a:lnTo>
                   <a:lnTo>
-                    <a:pt x="4187976" y="1533500"/>
+                    <a:pt x="4187976" y="1533501"/>
                   </a:lnTo>
                   <a:lnTo>
                     <a:pt x="4110342" y="1501416"/>
                   </a:lnTo>
                   <a:lnTo>
-                    <a:pt x="4032708" y="1466476"/>
-                  </a:lnTo>
-                  <a:lnTo>
-                    <a:pt x="3955074" y="1428428"/>
-                  </a:lnTo>
-                  <a:lnTo>
-                    <a:pt x="3877440" y="1386995"/>
-                  </a:lnTo>
-                  <a:lnTo>
-                    <a:pt x="3799806" y="1341875"/>
+                    <a:pt x="4032708" y="1466477"/>
+                  </a:lnTo>
+                  <a:lnTo>
+                    <a:pt x="3955074" y="1428429"/>
+                  </a:lnTo>
+                  <a:lnTo>
+                    <a:pt x="3877440" y="1386996"/>
+                  </a:lnTo>
+                  <a:lnTo>
+                    <a:pt x="3799806" y="1341876"/>
                   </a:lnTo>
                   <a:lnTo>
                     <a:pt x="3722172" y="1292741"/>
@@ -3939,10 +3939,10 @@
                     <a:pt x="3256368" y="998090"/>
                   </a:lnTo>
                   <a:lnTo>
-                    <a:pt x="3178734" y="981956"/>
-                  </a:lnTo>
-                  <a:lnTo>
-                    <a:pt x="3101100" y="965532"/>
+                    <a:pt x="3178734" y="981957"/>
+                  </a:lnTo>
+                  <a:lnTo>
+                    <a:pt x="3101100" y="965533"/>
                   </a:lnTo>
                   <a:lnTo>
                     <a:pt x="3023466" y="948813"/>
@@ -3954,40 +3954,40 @@
                     <a:pt x="2868198" y="914465"/>
                   </a:lnTo>
                   <a:lnTo>
-                    <a:pt x="2790564" y="896825"/>
+                    <a:pt x="2790564" y="896826"/>
                   </a:lnTo>
                   <a:lnTo>
                     <a:pt x="2712930" y="878869"/>
                   </a:lnTo>
                   <a:lnTo>
-                    <a:pt x="2635295" y="860588"/>
-                  </a:lnTo>
-                  <a:lnTo>
-                    <a:pt x="2557661" y="841979"/>
+                    <a:pt x="2635295" y="860589"/>
+                  </a:lnTo>
+                  <a:lnTo>
+                    <a:pt x="2557661" y="841980"/>
                   </a:lnTo>
                   <a:lnTo>
                     <a:pt x="2480027" y="823035"/>
                   </a:lnTo>
                   <a:lnTo>
-                    <a:pt x="2402393" y="803749"/>
+                    <a:pt x="2402393" y="803750"/>
                   </a:lnTo>
                   <a:lnTo>
                     <a:pt x="2324759" y="784117"/>
                   </a:lnTo>
                   <a:lnTo>
-                    <a:pt x="2247125" y="764130"/>
-                  </a:lnTo>
-                  <a:lnTo>
-                    <a:pt x="2169491" y="743784"/>
+                    <a:pt x="2247125" y="764131"/>
+                  </a:lnTo>
+                  <a:lnTo>
+                    <a:pt x="2169491" y="743785"/>
                   </a:lnTo>
                   <a:lnTo>
                     <a:pt x="2091857" y="723072"/>
                   </a:lnTo>
                   <a:lnTo>
-                    <a:pt x="2014223" y="701986"/>
-                  </a:lnTo>
-                  <a:lnTo>
-                    <a:pt x="1936589" y="680521"/>
+                    <a:pt x="2014223" y="701987"/>
+                  </a:lnTo>
+                  <a:lnTo>
+                    <a:pt x="1936589" y="680522"/>
                   </a:lnTo>
                   <a:lnTo>
                     <a:pt x="1858955" y="658670"/>
@@ -3996,7 +3996,7 @@
                     <a:pt x="1781321" y="636425"/>
                   </a:lnTo>
                   <a:lnTo>
-                    <a:pt x="1703687" y="613779"/>
+                    <a:pt x="1703687" y="613780"/>
                   </a:lnTo>
                   <a:lnTo>
                     <a:pt x="1626053" y="590726"/>
@@ -4020,22 +4020,22 @@
                     <a:pt x="1160249" y="443423"/>
                   </a:lnTo>
                   <a:lnTo>
-                    <a:pt x="1082615" y="417302"/>
-                  </a:lnTo>
-                  <a:lnTo>
-                    <a:pt x="1004981" y="390711"/>
+                    <a:pt x="1082615" y="417303"/>
+                  </a:lnTo>
+                  <a:lnTo>
+                    <a:pt x="1004981" y="390712"/>
                   </a:lnTo>
                   <a:lnTo>
                     <a:pt x="927346" y="363642"/>
                   </a:lnTo>
                   <a:lnTo>
-                    <a:pt x="849712" y="336084"/>
+                    <a:pt x="849712" y="336085"/>
                   </a:lnTo>
                   <a:lnTo>
                     <a:pt x="772078" y="308031"/>
                   </a:lnTo>
                   <a:lnTo>
-                    <a:pt x="694444" y="279472"/>
+                    <a:pt x="694444" y="279473"/>
                   </a:lnTo>
                   <a:lnTo>
                     <a:pt x="616810" y="250400"/>
@@ -4105,7 +4105,7 @@
                     <a:pt x="245947" y="550854"/>
                   </a:lnTo>
                   <a:lnTo>
-                    <a:pt x="323581" y="706673"/>
+                    <a:pt x="323581" y="706674"/>
                   </a:lnTo>
                   <a:lnTo>
                     <a:pt x="401215" y="854666"/>
@@ -4117,7 +4117,7 @@
                     <a:pt x="556483" y="1128720"/>
                   </a:lnTo>
                   <a:lnTo>
-                    <a:pt x="634117" y="1255510"/>
+                    <a:pt x="634117" y="1255511"/>
                   </a:lnTo>
                   <a:lnTo>
                     <a:pt x="711751" y="1375932"/>
@@ -4144,7 +4144,7 @@
                     <a:pt x="1255189" y="2065487"/>
                   </a:lnTo>
                   <a:lnTo>
-                    <a:pt x="1332823" y="2145218"/>
+                    <a:pt x="1332823" y="2145219"/>
                   </a:lnTo>
                   <a:lnTo>
                     <a:pt x="1410457" y="2220945"/>
@@ -4159,7 +4159,7 @@
                     <a:pt x="1643360" y="2426053"/>
                   </a:lnTo>
                   <a:lnTo>
-                    <a:pt x="1720994" y="2487671"/>
+                    <a:pt x="1720994" y="2487672"/>
                   </a:lnTo>
                   <a:lnTo>
                     <a:pt x="1798628" y="2546194"/>
@@ -4285,7 +4285,7 @@
                     <a:pt x="4903989" y="3511854"/>
                   </a:lnTo>
                   <a:lnTo>
-                    <a:pt x="4981623" y="3518927"/>
+                    <a:pt x="4981624" y="3518927"/>
                   </a:lnTo>
                   <a:lnTo>
                     <a:pt x="5059258" y="3525644"/>

--- a/docs/plots/carbo/jx_carbo_linsubhr_ratio_grade3.pptx
+++ b/docs/plots/carbo/jx_carbo_linsubhr_ratio_grade3.pptx
@@ -3003,512 +3003,515 @@
           <p:spPr>
             <a:xfrm>
               <a:off x="817517" y="1896563"/>
-              <a:ext cx="7370972" cy="3641696"/>
+              <a:ext cx="7370972" cy="3635765"/>
             </a:xfrm>
             <a:custGeom>
               <a:avLst/>
               <a:pathLst>
-                <a:path w="7370972" h="3641696">
+                <a:path w="7370972" h="3635765">
                   <a:moveTo>
-                    <a:pt x="2079523" y="0"/>
+                    <a:pt x="1935558" y="0"/>
                   </a:moveTo>
                   <a:lnTo>
-                    <a:pt x="2091857" y="50913"/>
-                  </a:lnTo>
-                  <a:lnTo>
-                    <a:pt x="2169491" y="345193"/>
-                  </a:lnTo>
-                  <a:lnTo>
-                    <a:pt x="2247125" y="615428"/>
-                  </a:lnTo>
-                  <a:lnTo>
-                    <a:pt x="2324759" y="863584"/>
-                  </a:lnTo>
-                  <a:lnTo>
-                    <a:pt x="2402393" y="1091465"/>
-                  </a:lnTo>
-                  <a:lnTo>
-                    <a:pt x="2480027" y="1300726"/>
-                  </a:lnTo>
-                  <a:lnTo>
-                    <a:pt x="2557661" y="1492890"/>
-                  </a:lnTo>
-                  <a:lnTo>
-                    <a:pt x="2635295" y="1669353"/>
-                  </a:lnTo>
-                  <a:lnTo>
-                    <a:pt x="2712930" y="1831398"/>
-                  </a:lnTo>
-                  <a:lnTo>
-                    <a:pt x="2790564" y="1980203"/>
-                  </a:lnTo>
-                  <a:lnTo>
-                    <a:pt x="2868198" y="2116850"/>
-                  </a:lnTo>
-                  <a:lnTo>
-                    <a:pt x="2945832" y="2242332"/>
-                  </a:lnTo>
-                  <a:lnTo>
-                    <a:pt x="3023466" y="2357562"/>
-                  </a:lnTo>
-                  <a:lnTo>
-                    <a:pt x="3101100" y="2463376"/>
-                  </a:lnTo>
-                  <a:lnTo>
-                    <a:pt x="3178734" y="2560546"/>
-                  </a:lnTo>
-                  <a:lnTo>
-                    <a:pt x="3256368" y="2649776"/>
-                  </a:lnTo>
-                  <a:lnTo>
-                    <a:pt x="3334002" y="2731715"/>
-                  </a:lnTo>
-                  <a:lnTo>
-                    <a:pt x="3411636" y="2788045"/>
-                  </a:lnTo>
-                  <a:lnTo>
-                    <a:pt x="3489270" y="2803338"/>
-                  </a:lnTo>
-                  <a:lnTo>
-                    <a:pt x="3566904" y="2818360"/>
-                  </a:lnTo>
-                  <a:lnTo>
-                    <a:pt x="3644538" y="2833116"/>
-                  </a:lnTo>
-                  <a:lnTo>
-                    <a:pt x="3722172" y="2847611"/>
-                  </a:lnTo>
-                  <a:lnTo>
-                    <a:pt x="3799806" y="2861850"/>
-                  </a:lnTo>
-                  <a:lnTo>
-                    <a:pt x="3877440" y="2875837"/>
-                  </a:lnTo>
-                  <a:lnTo>
-                    <a:pt x="3955074" y="2889577"/>
-                  </a:lnTo>
-                  <a:lnTo>
-                    <a:pt x="4032708" y="2903073"/>
-                  </a:lnTo>
-                  <a:lnTo>
-                    <a:pt x="4110342" y="2916331"/>
-                  </a:lnTo>
-                  <a:lnTo>
-                    <a:pt x="4187976" y="2929355"/>
-                  </a:lnTo>
-                  <a:lnTo>
-                    <a:pt x="4265610" y="2942148"/>
-                  </a:lnTo>
-                  <a:lnTo>
-                    <a:pt x="4343244" y="2954715"/>
-                  </a:lnTo>
-                  <a:lnTo>
-                    <a:pt x="4420879" y="2967059"/>
-                  </a:lnTo>
-                  <a:lnTo>
-                    <a:pt x="4498513" y="2979185"/>
-                  </a:lnTo>
-                  <a:lnTo>
-                    <a:pt x="4576147" y="2991097"/>
-                  </a:lnTo>
-                  <a:lnTo>
-                    <a:pt x="4653781" y="3002798"/>
-                  </a:lnTo>
-                  <a:lnTo>
-                    <a:pt x="4731415" y="3014292"/>
-                  </a:lnTo>
-                  <a:lnTo>
-                    <a:pt x="4809049" y="3025583"/>
-                  </a:lnTo>
-                  <a:lnTo>
-                    <a:pt x="4886683" y="3036674"/>
-                  </a:lnTo>
-                  <a:lnTo>
-                    <a:pt x="4964317" y="3047569"/>
-                  </a:lnTo>
-                  <a:lnTo>
-                    <a:pt x="5041951" y="3058271"/>
-                  </a:lnTo>
-                  <a:lnTo>
-                    <a:pt x="5119585" y="3068784"/>
-                  </a:lnTo>
-                  <a:lnTo>
-                    <a:pt x="5197219" y="3079111"/>
-                  </a:lnTo>
-                  <a:lnTo>
-                    <a:pt x="5274853" y="3089255"/>
-                  </a:lnTo>
-                  <a:lnTo>
-                    <a:pt x="5352487" y="3099220"/>
-                  </a:lnTo>
-                  <a:lnTo>
-                    <a:pt x="5430121" y="3109008"/>
-                  </a:lnTo>
-                  <a:lnTo>
-                    <a:pt x="5507755" y="3118624"/>
-                  </a:lnTo>
-                  <a:lnTo>
-                    <a:pt x="5585389" y="3128069"/>
-                  </a:lnTo>
-                  <a:lnTo>
-                    <a:pt x="5663023" y="3137348"/>
-                  </a:lnTo>
-                  <a:lnTo>
-                    <a:pt x="5740657" y="3146462"/>
-                  </a:lnTo>
-                  <a:lnTo>
-                    <a:pt x="5818291" y="3155415"/>
-                  </a:lnTo>
-                  <a:lnTo>
-                    <a:pt x="5895925" y="3164209"/>
-                  </a:lnTo>
-                  <a:lnTo>
-                    <a:pt x="5973559" y="3172849"/>
-                  </a:lnTo>
-                  <a:lnTo>
-                    <a:pt x="6051193" y="3181335"/>
-                  </a:lnTo>
-                  <a:lnTo>
-                    <a:pt x="6128827" y="3189671"/>
-                  </a:lnTo>
-                  <a:lnTo>
-                    <a:pt x="6206462" y="3197860"/>
-                  </a:lnTo>
-                  <a:lnTo>
-                    <a:pt x="6284096" y="3205904"/>
-                  </a:lnTo>
-                  <a:lnTo>
-                    <a:pt x="6361730" y="3213805"/>
-                  </a:lnTo>
-                  <a:lnTo>
-                    <a:pt x="6439364" y="3221567"/>
-                  </a:lnTo>
-                  <a:lnTo>
-                    <a:pt x="6516998" y="3229192"/>
-                  </a:lnTo>
-                  <a:lnTo>
-                    <a:pt x="6594632" y="3236682"/>
-                  </a:lnTo>
-                  <a:lnTo>
-                    <a:pt x="6672266" y="3244039"/>
-                  </a:lnTo>
-                  <a:lnTo>
-                    <a:pt x="6749900" y="3251266"/>
-                  </a:lnTo>
-                  <a:lnTo>
-                    <a:pt x="6827534" y="3258365"/>
-                  </a:lnTo>
-                  <a:lnTo>
-                    <a:pt x="6905168" y="3265339"/>
-                  </a:lnTo>
-                  <a:lnTo>
-                    <a:pt x="6982802" y="3272189"/>
-                  </a:lnTo>
-                  <a:lnTo>
-                    <a:pt x="7060436" y="3278919"/>
-                  </a:lnTo>
-                  <a:lnTo>
-                    <a:pt x="7138070" y="3285529"/>
-                  </a:lnTo>
-                  <a:lnTo>
-                    <a:pt x="7215704" y="3292022"/>
-                  </a:lnTo>
-                  <a:lnTo>
-                    <a:pt x="7293338" y="3298400"/>
-                  </a:lnTo>
-                  <a:lnTo>
-                    <a:pt x="7370972" y="3304666"/>
-                  </a:lnTo>
-                  <a:lnTo>
-                    <a:pt x="7370972" y="3641696"/>
-                  </a:lnTo>
-                  <a:lnTo>
-                    <a:pt x="7293338" y="3640722"/>
-                  </a:lnTo>
-                  <a:lnTo>
-                    <a:pt x="7215704" y="3639662"/>
-                  </a:lnTo>
-                  <a:lnTo>
-                    <a:pt x="7138070" y="3638506"/>
-                  </a:lnTo>
-                  <a:lnTo>
-                    <a:pt x="7060436" y="3637249"/>
-                  </a:lnTo>
-                  <a:lnTo>
-                    <a:pt x="6982802" y="3635879"/>
-                  </a:lnTo>
-                  <a:lnTo>
-                    <a:pt x="6905168" y="3634387"/>
-                  </a:lnTo>
-                  <a:lnTo>
-                    <a:pt x="6827534" y="3632763"/>
-                  </a:lnTo>
-                  <a:lnTo>
-                    <a:pt x="6749900" y="3630994"/>
-                  </a:lnTo>
-                  <a:lnTo>
-                    <a:pt x="6672266" y="3629068"/>
-                  </a:lnTo>
-                  <a:lnTo>
-                    <a:pt x="6594632" y="3626970"/>
-                  </a:lnTo>
-                  <a:lnTo>
-                    <a:pt x="6516998" y="3624686"/>
-                  </a:lnTo>
-                  <a:lnTo>
-                    <a:pt x="6439364" y="3622199"/>
-                  </a:lnTo>
-                  <a:lnTo>
-                    <a:pt x="6361730" y="3619490"/>
-                  </a:lnTo>
-                  <a:lnTo>
-                    <a:pt x="6284096" y="3616540"/>
-                  </a:lnTo>
-                  <a:lnTo>
-                    <a:pt x="6206462" y="3613328"/>
-                  </a:lnTo>
-                  <a:lnTo>
-                    <a:pt x="6128827" y="3609829"/>
-                  </a:lnTo>
-                  <a:lnTo>
-                    <a:pt x="6051193" y="3606020"/>
-                  </a:lnTo>
-                  <a:lnTo>
-                    <a:pt x="5973559" y="3601872"/>
-                  </a:lnTo>
-                  <a:lnTo>
-                    <a:pt x="5895925" y="3597354"/>
-                  </a:lnTo>
-                  <a:lnTo>
-                    <a:pt x="5818291" y="3592435"/>
-                  </a:lnTo>
-                  <a:lnTo>
-                    <a:pt x="5740657" y="3587078"/>
-                  </a:lnTo>
-                  <a:lnTo>
-                    <a:pt x="5663023" y="3581245"/>
-                  </a:lnTo>
-                  <a:lnTo>
-                    <a:pt x="5585389" y="3574892"/>
-                  </a:lnTo>
-                  <a:lnTo>
-                    <a:pt x="5507755" y="3567974"/>
-                  </a:lnTo>
-                  <a:lnTo>
-                    <a:pt x="5430121" y="3560440"/>
-                  </a:lnTo>
-                  <a:lnTo>
-                    <a:pt x="5352487" y="3552237"/>
-                  </a:lnTo>
-                  <a:lnTo>
-                    <a:pt x="5274853" y="3543303"/>
-                  </a:lnTo>
-                  <a:lnTo>
-                    <a:pt x="5197219" y="3533575"/>
-                  </a:lnTo>
-                  <a:lnTo>
-                    <a:pt x="5119585" y="3522980"/>
-                  </a:lnTo>
-                  <a:lnTo>
-                    <a:pt x="5041951" y="3511444"/>
-                  </a:lnTo>
-                  <a:lnTo>
-                    <a:pt x="4964317" y="3498880"/>
-                  </a:lnTo>
-                  <a:lnTo>
-                    <a:pt x="4886683" y="3485199"/>
-                  </a:lnTo>
-                  <a:lnTo>
-                    <a:pt x="4809049" y="3470301"/>
-                  </a:lnTo>
-                  <a:lnTo>
-                    <a:pt x="4731415" y="3454077"/>
-                  </a:lnTo>
-                  <a:lnTo>
-                    <a:pt x="4653781" y="3436410"/>
-                  </a:lnTo>
-                  <a:lnTo>
-                    <a:pt x="4576147" y="3417171"/>
-                  </a:lnTo>
-                  <a:lnTo>
-                    <a:pt x="4498513" y="3396219"/>
-                  </a:lnTo>
-                  <a:lnTo>
-                    <a:pt x="4420879" y="3373404"/>
-                  </a:lnTo>
-                  <a:lnTo>
-                    <a:pt x="4343244" y="3348559"/>
-                  </a:lnTo>
-                  <a:lnTo>
-                    <a:pt x="4265610" y="3321503"/>
-                  </a:lnTo>
-                  <a:lnTo>
-                    <a:pt x="4187976" y="3292040"/>
-                  </a:lnTo>
-                  <a:lnTo>
-                    <a:pt x="4110342" y="3259955"/>
-                  </a:lnTo>
-                  <a:lnTo>
-                    <a:pt x="4032708" y="3225016"/>
-                  </a:lnTo>
-                  <a:lnTo>
-                    <a:pt x="3955074" y="3186968"/>
-                  </a:lnTo>
-                  <a:lnTo>
-                    <a:pt x="3877440" y="3145535"/>
-                  </a:lnTo>
-                  <a:lnTo>
-                    <a:pt x="3799806" y="3100415"/>
-                  </a:lnTo>
-                  <a:lnTo>
-                    <a:pt x="3722172" y="3051280"/>
-                  </a:lnTo>
-                  <a:lnTo>
-                    <a:pt x="3644538" y="2997774"/>
-                  </a:lnTo>
-                  <a:lnTo>
-                    <a:pt x="3566904" y="2939507"/>
-                  </a:lnTo>
-                  <a:lnTo>
-                    <a:pt x="3489270" y="2876056"/>
-                  </a:lnTo>
-                  <a:lnTo>
-                    <a:pt x="3411636" y="2806960"/>
-                  </a:lnTo>
-                  <a:lnTo>
-                    <a:pt x="3334002" y="2772477"/>
-                  </a:lnTo>
-                  <a:lnTo>
-                    <a:pt x="3256368" y="2756629"/>
-                  </a:lnTo>
-                  <a:lnTo>
-                    <a:pt x="3178734" y="2740496"/>
-                  </a:lnTo>
-                  <a:lnTo>
-                    <a:pt x="3101100" y="2724072"/>
-                  </a:lnTo>
-                  <a:lnTo>
-                    <a:pt x="3023466" y="2707352"/>
-                  </a:lnTo>
-                  <a:lnTo>
-                    <a:pt x="2945832" y="2690331"/>
-                  </a:lnTo>
-                  <a:lnTo>
-                    <a:pt x="2868198" y="2673004"/>
-                  </a:lnTo>
-                  <a:lnTo>
-                    <a:pt x="2790564" y="2655365"/>
-                  </a:lnTo>
-                  <a:lnTo>
-                    <a:pt x="2712930" y="2637408"/>
-                  </a:lnTo>
-                  <a:lnTo>
-                    <a:pt x="2635295" y="2619128"/>
-                  </a:lnTo>
-                  <a:lnTo>
-                    <a:pt x="2557661" y="2600519"/>
-                  </a:lnTo>
-                  <a:lnTo>
-                    <a:pt x="2480027" y="2581574"/>
-                  </a:lnTo>
-                  <a:lnTo>
-                    <a:pt x="2402393" y="2562289"/>
-                  </a:lnTo>
-                  <a:lnTo>
-                    <a:pt x="2324759" y="2542656"/>
-                  </a:lnTo>
-                  <a:lnTo>
-                    <a:pt x="2247125" y="2522670"/>
-                  </a:lnTo>
-                  <a:lnTo>
-                    <a:pt x="2169491" y="2502324"/>
-                  </a:lnTo>
-                  <a:lnTo>
-                    <a:pt x="2091857" y="2481611"/>
-                  </a:lnTo>
-                  <a:lnTo>
-                    <a:pt x="2014223" y="2460526"/>
-                  </a:lnTo>
-                  <a:lnTo>
-                    <a:pt x="1936589" y="2439061"/>
-                  </a:lnTo>
-                  <a:lnTo>
-                    <a:pt x="1858955" y="2417209"/>
-                  </a:lnTo>
-                  <a:lnTo>
-                    <a:pt x="1781321" y="2394964"/>
-                  </a:lnTo>
-                  <a:lnTo>
-                    <a:pt x="1703687" y="2372319"/>
-                  </a:lnTo>
-                  <a:lnTo>
-                    <a:pt x="1626053" y="2349266"/>
-                  </a:lnTo>
-                  <a:lnTo>
-                    <a:pt x="1548419" y="2325797"/>
-                  </a:lnTo>
-                  <a:lnTo>
-                    <a:pt x="1470785" y="2301906"/>
-                  </a:lnTo>
-                  <a:lnTo>
-                    <a:pt x="1393151" y="2277585"/>
-                  </a:lnTo>
-                  <a:lnTo>
-                    <a:pt x="1315517" y="2252826"/>
-                  </a:lnTo>
-                  <a:lnTo>
-                    <a:pt x="1237883" y="2227621"/>
-                  </a:lnTo>
-                  <a:lnTo>
-                    <a:pt x="1160249" y="2201962"/>
-                  </a:lnTo>
-                  <a:lnTo>
-                    <a:pt x="1082615" y="2175842"/>
-                  </a:lnTo>
-                  <a:lnTo>
-                    <a:pt x="1004981" y="2149251"/>
-                  </a:lnTo>
-                  <a:lnTo>
-                    <a:pt x="927346" y="2122181"/>
-                  </a:lnTo>
-                  <a:lnTo>
-                    <a:pt x="849712" y="2094624"/>
-                  </a:lnTo>
-                  <a:lnTo>
-                    <a:pt x="772078" y="2066570"/>
-                  </a:lnTo>
-                  <a:lnTo>
-                    <a:pt x="694444" y="2038012"/>
-                  </a:lnTo>
-                  <a:lnTo>
-                    <a:pt x="616810" y="2008939"/>
-                  </a:lnTo>
-                  <a:lnTo>
-                    <a:pt x="539176" y="1979343"/>
-                  </a:lnTo>
-                  <a:lnTo>
-                    <a:pt x="461542" y="1949213"/>
-                  </a:lnTo>
-                  <a:lnTo>
-                    <a:pt x="383908" y="1918542"/>
-                  </a:lnTo>
-                  <a:lnTo>
-                    <a:pt x="306274" y="1887318"/>
-                  </a:lnTo>
-                  <a:lnTo>
-                    <a:pt x="228640" y="1855532"/>
-                  </a:lnTo>
-                  <a:lnTo>
-                    <a:pt x="151006" y="1823173"/>
-                  </a:lnTo>
-                  <a:lnTo>
-                    <a:pt x="73372" y="1790232"/>
-                  </a:lnTo>
-                  <a:lnTo>
-                    <a:pt x="0" y="1758539"/>
-                  </a:lnTo>
-                  <a:lnTo>
-                    <a:pt x="0" y="0"/>
+                    <a:pt x="1936589" y="3867"/>
+                  </a:lnTo>
+                  <a:lnTo>
+                    <a:pt x="2014223" y="273608"/>
+                  </a:lnTo>
+                  <a:lnTo>
+                    <a:pt x="2091857" y="523409"/>
+                  </a:lnTo>
+                  <a:lnTo>
+                    <a:pt x="2169491" y="754742"/>
+                  </a:lnTo>
+                  <a:lnTo>
+                    <a:pt x="2247125" y="968974"/>
+                  </a:lnTo>
+                  <a:lnTo>
+                    <a:pt x="2324759" y="1167369"/>
+                  </a:lnTo>
+                  <a:lnTo>
+                    <a:pt x="2402393" y="1351096"/>
+                  </a:lnTo>
+                  <a:lnTo>
+                    <a:pt x="2480027" y="1521242"/>
+                  </a:lnTo>
+                  <a:lnTo>
+                    <a:pt x="2557661" y="1678809"/>
+                  </a:lnTo>
+                  <a:lnTo>
+                    <a:pt x="2635295" y="1824728"/>
+                  </a:lnTo>
+                  <a:lnTo>
+                    <a:pt x="2712930" y="1959859"/>
+                  </a:lnTo>
+                  <a:lnTo>
+                    <a:pt x="2790564" y="2085001"/>
+                  </a:lnTo>
+                  <a:lnTo>
+                    <a:pt x="2868198" y="2200891"/>
+                  </a:lnTo>
+                  <a:lnTo>
+                    <a:pt x="2945832" y="2308214"/>
+                  </a:lnTo>
+                  <a:lnTo>
+                    <a:pt x="3023466" y="2407604"/>
+                  </a:lnTo>
+                  <a:lnTo>
+                    <a:pt x="3101100" y="2499645"/>
+                  </a:lnTo>
+                  <a:lnTo>
+                    <a:pt x="3178734" y="2584882"/>
+                  </a:lnTo>
+                  <a:lnTo>
+                    <a:pt x="3256368" y="2663818"/>
+                  </a:lnTo>
+                  <a:lnTo>
+                    <a:pt x="3334002" y="2736919"/>
+                  </a:lnTo>
+                  <a:lnTo>
+                    <a:pt x="3411636" y="2780633"/>
+                  </a:lnTo>
+                  <a:lnTo>
+                    <a:pt x="3489270" y="2773484"/>
+                  </a:lnTo>
+                  <a:lnTo>
+                    <a:pt x="3566904" y="2766276"/>
+                  </a:lnTo>
+                  <a:lnTo>
+                    <a:pt x="3644538" y="2759010"/>
+                  </a:lnTo>
+                  <a:lnTo>
+                    <a:pt x="3722172" y="2751684"/>
+                  </a:lnTo>
+                  <a:lnTo>
+                    <a:pt x="3799806" y="2744298"/>
+                  </a:lnTo>
+                  <a:lnTo>
+                    <a:pt x="3877440" y="2736851"/>
+                  </a:lnTo>
+                  <a:lnTo>
+                    <a:pt x="3955074" y="2729343"/>
+                  </a:lnTo>
+                  <a:lnTo>
+                    <a:pt x="4032708" y="2721774"/>
+                  </a:lnTo>
+                  <a:lnTo>
+                    <a:pt x="4110342" y="2714143"/>
+                  </a:lnTo>
+                  <a:lnTo>
+                    <a:pt x="4187976" y="2706449"/>
+                  </a:lnTo>
+                  <a:lnTo>
+                    <a:pt x="4265610" y="2698692"/>
+                  </a:lnTo>
+                  <a:lnTo>
+                    <a:pt x="4343244" y="2690871"/>
+                  </a:lnTo>
+                  <a:lnTo>
+                    <a:pt x="4420879" y="2682987"/>
+                  </a:lnTo>
+                  <a:lnTo>
+                    <a:pt x="4498513" y="2675037"/>
+                  </a:lnTo>
+                  <a:lnTo>
+                    <a:pt x="4576147" y="2667023"/>
+                  </a:lnTo>
+                  <a:lnTo>
+                    <a:pt x="4653781" y="2658943"/>
+                  </a:lnTo>
+                  <a:lnTo>
+                    <a:pt x="4731415" y="2650796"/>
+                  </a:lnTo>
+                  <a:lnTo>
+                    <a:pt x="4809049" y="2642583"/>
+                  </a:lnTo>
+                  <a:lnTo>
+                    <a:pt x="4886683" y="2634303"/>
+                  </a:lnTo>
+                  <a:lnTo>
+                    <a:pt x="4964317" y="2625954"/>
+                  </a:lnTo>
+                  <a:lnTo>
+                    <a:pt x="5041951" y="2617537"/>
+                  </a:lnTo>
+                  <a:lnTo>
+                    <a:pt x="5119585" y="2609051"/>
+                  </a:lnTo>
+                  <a:lnTo>
+                    <a:pt x="5197219" y="2600496"/>
+                  </a:lnTo>
+                  <a:lnTo>
+                    <a:pt x="5274853" y="2591870"/>
+                  </a:lnTo>
+                  <a:lnTo>
+                    <a:pt x="5352487" y="2583174"/>
+                  </a:lnTo>
+                  <a:lnTo>
+                    <a:pt x="5430121" y="2574407"/>
+                  </a:lnTo>
+                  <a:lnTo>
+                    <a:pt x="5507755" y="2565567"/>
+                  </a:lnTo>
+                  <a:lnTo>
+                    <a:pt x="5585389" y="2556655"/>
+                  </a:lnTo>
+                  <a:lnTo>
+                    <a:pt x="5663023" y="2547670"/>
+                  </a:lnTo>
+                  <a:lnTo>
+                    <a:pt x="5740657" y="2538612"/>
+                  </a:lnTo>
+                  <a:lnTo>
+                    <a:pt x="5818291" y="2529479"/>
+                  </a:lnTo>
+                  <a:lnTo>
+                    <a:pt x="5895925" y="2520271"/>
+                  </a:lnTo>
+                  <a:lnTo>
+                    <a:pt x="5973559" y="2510988"/>
+                  </a:lnTo>
+                  <a:lnTo>
+                    <a:pt x="6051193" y="2501628"/>
+                  </a:lnTo>
+                  <a:lnTo>
+                    <a:pt x="6128827" y="2492192"/>
+                  </a:lnTo>
+                  <a:lnTo>
+                    <a:pt x="6206462" y="2482679"/>
+                  </a:lnTo>
+                  <a:lnTo>
+                    <a:pt x="6284096" y="2473087"/>
+                  </a:lnTo>
+                  <a:lnTo>
+                    <a:pt x="6361730" y="2463417"/>
+                  </a:lnTo>
+                  <a:lnTo>
+                    <a:pt x="6439364" y="2453668"/>
+                  </a:lnTo>
+                  <a:lnTo>
+                    <a:pt x="6516998" y="2443839"/>
+                  </a:lnTo>
+                  <a:lnTo>
+                    <a:pt x="6594632" y="2433929"/>
+                  </a:lnTo>
+                  <a:lnTo>
+                    <a:pt x="6672266" y="2423938"/>
+                  </a:lnTo>
+                  <a:lnTo>
+                    <a:pt x="6749900" y="2413865"/>
+                  </a:lnTo>
+                  <a:lnTo>
+                    <a:pt x="6827534" y="2403709"/>
+                  </a:lnTo>
+                  <a:lnTo>
+                    <a:pt x="6905168" y="2393470"/>
+                  </a:lnTo>
+                  <a:lnTo>
+                    <a:pt x="6982802" y="2383147"/>
+                  </a:lnTo>
+                  <a:lnTo>
+                    <a:pt x="7060436" y="2372740"/>
+                  </a:lnTo>
+                  <a:lnTo>
+                    <a:pt x="7138070" y="2362247"/>
+                  </a:lnTo>
+                  <a:lnTo>
+                    <a:pt x="7215704" y="2351669"/>
+                  </a:lnTo>
+                  <a:lnTo>
+                    <a:pt x="7293338" y="2341003"/>
+                  </a:lnTo>
+                  <a:lnTo>
+                    <a:pt x="7370972" y="2330250"/>
+                  </a:lnTo>
+                  <a:lnTo>
+                    <a:pt x="7370972" y="3635765"/>
+                  </a:lnTo>
+                  <a:lnTo>
+                    <a:pt x="7293338" y="3634418"/>
+                  </a:lnTo>
+                  <a:lnTo>
+                    <a:pt x="7215704" y="3632963"/>
+                  </a:lnTo>
+                  <a:lnTo>
+                    <a:pt x="7138070" y="3631392"/>
+                  </a:lnTo>
+                  <a:lnTo>
+                    <a:pt x="7060436" y="3629695"/>
+                  </a:lnTo>
+                  <a:lnTo>
+                    <a:pt x="6982802" y="3627863"/>
+                  </a:lnTo>
+                  <a:lnTo>
+                    <a:pt x="6905168" y="3625885"/>
+                  </a:lnTo>
+                  <a:lnTo>
+                    <a:pt x="6827534" y="3623749"/>
+                  </a:lnTo>
+                  <a:lnTo>
+                    <a:pt x="6749900" y="3621443"/>
+                  </a:lnTo>
+                  <a:lnTo>
+                    <a:pt x="6672266" y="3618952"/>
+                  </a:lnTo>
+                  <a:lnTo>
+                    <a:pt x="6594632" y="3616262"/>
+                  </a:lnTo>
+                  <a:lnTo>
+                    <a:pt x="6516998" y="3613358"/>
+                  </a:lnTo>
+                  <a:lnTo>
+                    <a:pt x="6439364" y="3610222"/>
+                  </a:lnTo>
+                  <a:lnTo>
+                    <a:pt x="6361730" y="3606836"/>
+                  </a:lnTo>
+                  <a:lnTo>
+                    <a:pt x="6284096" y="3603179"/>
+                  </a:lnTo>
+                  <a:lnTo>
+                    <a:pt x="6206462" y="3599230"/>
+                  </a:lnTo>
+                  <a:lnTo>
+                    <a:pt x="6128827" y="3594967"/>
+                  </a:lnTo>
+                  <a:lnTo>
+                    <a:pt x="6051193" y="3590362"/>
+                  </a:lnTo>
+                  <a:lnTo>
+                    <a:pt x="5973559" y="3585391"/>
+                  </a:lnTo>
+                  <a:lnTo>
+                    <a:pt x="5895925" y="3580022"/>
+                  </a:lnTo>
+                  <a:lnTo>
+                    <a:pt x="5818291" y="3574225"/>
+                  </a:lnTo>
+                  <a:lnTo>
+                    <a:pt x="5740657" y="3567965"/>
+                  </a:lnTo>
+                  <a:lnTo>
+                    <a:pt x="5663023" y="3561205"/>
+                  </a:lnTo>
+                  <a:lnTo>
+                    <a:pt x="5585389" y="3553906"/>
+                  </a:lnTo>
+                  <a:lnTo>
+                    <a:pt x="5507755" y="3546024"/>
+                  </a:lnTo>
+                  <a:lnTo>
+                    <a:pt x="5430121" y="3537513"/>
+                  </a:lnTo>
+                  <a:lnTo>
+                    <a:pt x="5352487" y="3528322"/>
+                  </a:lnTo>
+                  <a:lnTo>
+                    <a:pt x="5274853" y="3518398"/>
+                  </a:lnTo>
+                  <a:lnTo>
+                    <a:pt x="5197219" y="3507681"/>
+                  </a:lnTo>
+                  <a:lnTo>
+                    <a:pt x="5119585" y="3496109"/>
+                  </a:lnTo>
+                  <a:lnTo>
+                    <a:pt x="5041951" y="3483613"/>
+                  </a:lnTo>
+                  <a:lnTo>
+                    <a:pt x="4964317" y="3470120"/>
+                  </a:lnTo>
+                  <a:lnTo>
+                    <a:pt x="4886683" y="3455549"/>
+                  </a:lnTo>
+                  <a:lnTo>
+                    <a:pt x="4809049" y="3439816"/>
+                  </a:lnTo>
+                  <a:lnTo>
+                    <a:pt x="4731415" y="3422826"/>
+                  </a:lnTo>
+                  <a:lnTo>
+                    <a:pt x="4653781" y="3404480"/>
+                  </a:lnTo>
+                  <a:lnTo>
+                    <a:pt x="4576147" y="3384670"/>
+                  </a:lnTo>
+                  <a:lnTo>
+                    <a:pt x="4498513" y="3363278"/>
+                  </a:lnTo>
+                  <a:lnTo>
+                    <a:pt x="4420879" y="3340179"/>
+                  </a:lnTo>
+                  <a:lnTo>
+                    <a:pt x="4343244" y="3315235"/>
+                  </a:lnTo>
+                  <a:lnTo>
+                    <a:pt x="4265610" y="3288301"/>
+                  </a:lnTo>
+                  <a:lnTo>
+                    <a:pt x="4187976" y="3259216"/>
+                  </a:lnTo>
+                  <a:lnTo>
+                    <a:pt x="4110342" y="3227809"/>
+                  </a:lnTo>
+                  <a:lnTo>
+                    <a:pt x="4032708" y="3193896"/>
+                  </a:lnTo>
+                  <a:lnTo>
+                    <a:pt x="3955074" y="3157275"/>
+                  </a:lnTo>
+                  <a:lnTo>
+                    <a:pt x="3877440" y="3117731"/>
+                  </a:lnTo>
+                  <a:lnTo>
+                    <a:pt x="3799806" y="3075030"/>
+                  </a:lnTo>
+                  <a:lnTo>
+                    <a:pt x="3722172" y="3028920"/>
+                  </a:lnTo>
+                  <a:lnTo>
+                    <a:pt x="3644538" y="2979129"/>
+                  </a:lnTo>
+                  <a:lnTo>
+                    <a:pt x="3566904" y="2925364"/>
+                  </a:lnTo>
+                  <a:lnTo>
+                    <a:pt x="3489270" y="2867307"/>
+                  </a:lnTo>
+                  <a:lnTo>
+                    <a:pt x="3411636" y="2804615"/>
+                  </a:lnTo>
+                  <a:lnTo>
+                    <a:pt x="3334002" y="2787723"/>
+                  </a:lnTo>
+                  <a:lnTo>
+                    <a:pt x="3256368" y="2794756"/>
+                  </a:lnTo>
+                  <a:lnTo>
+                    <a:pt x="3178734" y="2801732"/>
+                  </a:lnTo>
+                  <a:lnTo>
+                    <a:pt x="3101100" y="2808651"/>
+                  </a:lnTo>
+                  <a:lnTo>
+                    <a:pt x="3023466" y="2815514"/>
+                  </a:lnTo>
+                  <a:lnTo>
+                    <a:pt x="2945832" y="2822321"/>
+                  </a:lnTo>
+                  <a:lnTo>
+                    <a:pt x="2868198" y="2829073"/>
+                  </a:lnTo>
+                  <a:lnTo>
+                    <a:pt x="2790564" y="2835769"/>
+                  </a:lnTo>
+                  <a:lnTo>
+                    <a:pt x="2712930" y="2842412"/>
+                  </a:lnTo>
+                  <a:lnTo>
+                    <a:pt x="2635295" y="2849000"/>
+                  </a:lnTo>
+                  <a:lnTo>
+                    <a:pt x="2557661" y="2855535"/>
+                  </a:lnTo>
+                  <a:lnTo>
+                    <a:pt x="2480027" y="2862016"/>
+                  </a:lnTo>
+                  <a:lnTo>
+                    <a:pt x="2402393" y="2868445"/>
+                  </a:lnTo>
+                  <a:lnTo>
+                    <a:pt x="2324759" y="2874822"/>
+                  </a:lnTo>
+                  <a:lnTo>
+                    <a:pt x="2247125" y="2881147"/>
+                  </a:lnTo>
+                  <a:lnTo>
+                    <a:pt x="2169491" y="2887420"/>
+                  </a:lnTo>
+                  <a:lnTo>
+                    <a:pt x="2091857" y="2893642"/>
+                  </a:lnTo>
+                  <a:lnTo>
+                    <a:pt x="2014223" y="2899814"/>
+                  </a:lnTo>
+                  <a:lnTo>
+                    <a:pt x="1936589" y="2905936"/>
+                  </a:lnTo>
+                  <a:lnTo>
+                    <a:pt x="1858955" y="2912007"/>
+                  </a:lnTo>
+                  <a:lnTo>
+                    <a:pt x="1781321" y="2918030"/>
+                  </a:lnTo>
+                  <a:lnTo>
+                    <a:pt x="1703687" y="2924003"/>
+                  </a:lnTo>
+                  <a:lnTo>
+                    <a:pt x="1626053" y="2929928"/>
+                  </a:lnTo>
+                  <a:lnTo>
+                    <a:pt x="1548419" y="2935805"/>
+                  </a:lnTo>
+                  <a:lnTo>
+                    <a:pt x="1470785" y="2941634"/>
+                  </a:lnTo>
+                  <a:lnTo>
+                    <a:pt x="1393151" y="2947415"/>
+                  </a:lnTo>
+                  <a:lnTo>
+                    <a:pt x="1315517" y="2953150"/>
+                  </a:lnTo>
+                  <a:lnTo>
+                    <a:pt x="1237883" y="2958838"/>
+                  </a:lnTo>
+                  <a:lnTo>
+                    <a:pt x="1160249" y="2964479"/>
+                  </a:lnTo>
+                  <a:lnTo>
+                    <a:pt x="1082615" y="2970075"/>
+                  </a:lnTo>
+                  <a:lnTo>
+                    <a:pt x="1004981" y="2975625"/>
+                  </a:lnTo>
+                  <a:lnTo>
+                    <a:pt x="927346" y="2981130"/>
+                  </a:lnTo>
+                  <a:lnTo>
+                    <a:pt x="849712" y="2986591"/>
+                  </a:lnTo>
+                  <a:lnTo>
+                    <a:pt x="772078" y="2992007"/>
+                  </a:lnTo>
+                  <a:lnTo>
+                    <a:pt x="694444" y="2997378"/>
+                  </a:lnTo>
+                  <a:lnTo>
+                    <a:pt x="616810" y="3002707"/>
+                  </a:lnTo>
+                  <a:lnTo>
+                    <a:pt x="539176" y="3007992"/>
+                  </a:lnTo>
+                  <a:lnTo>
+                    <a:pt x="461542" y="3013234"/>
+                  </a:lnTo>
+                  <a:lnTo>
+                    <a:pt x="383908" y="3018433"/>
+                  </a:lnTo>
+                  <a:lnTo>
+                    <a:pt x="306274" y="3023590"/>
+                  </a:lnTo>
+                  <a:lnTo>
+                    <a:pt x="228640" y="3028705"/>
+                  </a:lnTo>
+                  <a:lnTo>
+                    <a:pt x="151006" y="3033778"/>
+                  </a:lnTo>
+                  <a:lnTo>
+                    <a:pt x="73372" y="3038811"/>
+                  </a:lnTo>
+                  <a:lnTo>
+                    <a:pt x="0" y="3043528"/>
                   </a:lnTo>
                   <a:close/>
                 </a:path>
@@ -3534,222 +3537,228 @@
           </p:nvSpPr>
           <p:spPr>
             <a:xfrm>
-              <a:off x="2897041" y="1896563"/>
-              <a:ext cx="5291449" cy="3304666"/>
+              <a:off x="2753076" y="1896563"/>
+              <a:ext cx="5435413" cy="2780633"/>
             </a:xfrm>
             <a:custGeom>
               <a:avLst/>
               <a:pathLst>
-                <a:path w="5291449" h="3304666">
+                <a:path w="5435413" h="2780633">
                   <a:moveTo>
                     <a:pt x="0" y="0"/>
                   </a:moveTo>
                   <a:lnTo>
-                    <a:pt x="12334" y="50913"/>
-                  </a:lnTo>
-                  <a:lnTo>
-                    <a:pt x="89968" y="345193"/>
-                  </a:lnTo>
-                  <a:lnTo>
-                    <a:pt x="167602" y="615428"/>
-                  </a:lnTo>
-                  <a:lnTo>
-                    <a:pt x="245236" y="863584"/>
-                  </a:lnTo>
-                  <a:lnTo>
-                    <a:pt x="322870" y="1091465"/>
-                  </a:lnTo>
-                  <a:lnTo>
-                    <a:pt x="400504" y="1300726"/>
-                  </a:lnTo>
-                  <a:lnTo>
-                    <a:pt x="478138" y="1492890"/>
-                  </a:lnTo>
-                  <a:lnTo>
-                    <a:pt x="555772" y="1669353"/>
-                  </a:lnTo>
-                  <a:lnTo>
-                    <a:pt x="633406" y="1831398"/>
-                  </a:lnTo>
-                  <a:lnTo>
-                    <a:pt x="711040" y="1980203"/>
-                  </a:lnTo>
-                  <a:lnTo>
-                    <a:pt x="788674" y="2116850"/>
-                  </a:lnTo>
-                  <a:lnTo>
-                    <a:pt x="866308" y="2242332"/>
-                  </a:lnTo>
-                  <a:lnTo>
-                    <a:pt x="943942" y="2357562"/>
-                  </a:lnTo>
-                  <a:lnTo>
-                    <a:pt x="1021576" y="2463376"/>
-                  </a:lnTo>
-                  <a:lnTo>
-                    <a:pt x="1099210" y="2560546"/>
-                  </a:lnTo>
-                  <a:lnTo>
-                    <a:pt x="1176844" y="2649776"/>
-                  </a:lnTo>
-                  <a:lnTo>
-                    <a:pt x="1254478" y="2731715"/>
-                  </a:lnTo>
-                  <a:lnTo>
-                    <a:pt x="1332112" y="2788045"/>
-                  </a:lnTo>
-                  <a:lnTo>
-                    <a:pt x="1409746" y="2803338"/>
-                  </a:lnTo>
-                  <a:lnTo>
-                    <a:pt x="1487380" y="2818360"/>
-                  </a:lnTo>
-                  <a:lnTo>
-                    <a:pt x="1565015" y="2833116"/>
-                  </a:lnTo>
-                  <a:lnTo>
-                    <a:pt x="1642649" y="2847611"/>
-                  </a:lnTo>
-                  <a:lnTo>
-                    <a:pt x="1720283" y="2861850"/>
-                  </a:lnTo>
-                  <a:lnTo>
-                    <a:pt x="1797917" y="2875837"/>
-                  </a:lnTo>
-                  <a:lnTo>
-                    <a:pt x="1875551" y="2889577"/>
-                  </a:lnTo>
-                  <a:lnTo>
-                    <a:pt x="1953185" y="2903073"/>
-                  </a:lnTo>
-                  <a:lnTo>
-                    <a:pt x="2030819" y="2916331"/>
-                  </a:lnTo>
-                  <a:lnTo>
-                    <a:pt x="2108453" y="2929355"/>
-                  </a:lnTo>
-                  <a:lnTo>
-                    <a:pt x="2186087" y="2942148"/>
-                  </a:lnTo>
-                  <a:lnTo>
-                    <a:pt x="2263721" y="2954715"/>
-                  </a:lnTo>
-                  <a:lnTo>
-                    <a:pt x="2341355" y="2967059"/>
-                  </a:lnTo>
-                  <a:lnTo>
-                    <a:pt x="2418989" y="2979185"/>
-                  </a:lnTo>
-                  <a:lnTo>
-                    <a:pt x="2496623" y="2991097"/>
-                  </a:lnTo>
-                  <a:lnTo>
-                    <a:pt x="2574257" y="3002798"/>
-                  </a:lnTo>
-                  <a:lnTo>
-                    <a:pt x="2651891" y="3014292"/>
-                  </a:lnTo>
-                  <a:lnTo>
-                    <a:pt x="2729525" y="3025583"/>
-                  </a:lnTo>
-                  <a:lnTo>
-                    <a:pt x="2807159" y="3036674"/>
-                  </a:lnTo>
-                  <a:lnTo>
-                    <a:pt x="2884793" y="3047569"/>
-                  </a:lnTo>
-                  <a:lnTo>
-                    <a:pt x="2962427" y="3058271"/>
-                  </a:lnTo>
-                  <a:lnTo>
-                    <a:pt x="3040061" y="3068784"/>
-                  </a:lnTo>
-                  <a:lnTo>
-                    <a:pt x="3117695" y="3079111"/>
-                  </a:lnTo>
-                  <a:lnTo>
-                    <a:pt x="3195329" y="3089255"/>
-                  </a:lnTo>
-                  <a:lnTo>
-                    <a:pt x="3272963" y="3099220"/>
-                  </a:lnTo>
-                  <a:lnTo>
-                    <a:pt x="3350598" y="3109008"/>
-                  </a:lnTo>
-                  <a:lnTo>
-                    <a:pt x="3428232" y="3118624"/>
-                  </a:lnTo>
-                  <a:lnTo>
-                    <a:pt x="3505866" y="3128069"/>
-                  </a:lnTo>
-                  <a:lnTo>
-                    <a:pt x="3583500" y="3137348"/>
-                  </a:lnTo>
-                  <a:lnTo>
-                    <a:pt x="3661134" y="3146462"/>
-                  </a:lnTo>
-                  <a:lnTo>
-                    <a:pt x="3738768" y="3155415"/>
-                  </a:lnTo>
-                  <a:lnTo>
-                    <a:pt x="3816402" y="3164209"/>
-                  </a:lnTo>
-                  <a:lnTo>
-                    <a:pt x="3894036" y="3172849"/>
-                  </a:lnTo>
-                  <a:lnTo>
-                    <a:pt x="3971670" y="3181335"/>
-                  </a:lnTo>
-                  <a:lnTo>
-                    <a:pt x="4049304" y="3189671"/>
-                  </a:lnTo>
-                  <a:lnTo>
-                    <a:pt x="4126938" y="3197860"/>
-                  </a:lnTo>
-                  <a:lnTo>
-                    <a:pt x="4204572" y="3205904"/>
-                  </a:lnTo>
-                  <a:lnTo>
-                    <a:pt x="4282206" y="3213805"/>
-                  </a:lnTo>
-                  <a:lnTo>
-                    <a:pt x="4359840" y="3221567"/>
-                  </a:lnTo>
-                  <a:lnTo>
-                    <a:pt x="4437474" y="3229192"/>
-                  </a:lnTo>
-                  <a:lnTo>
-                    <a:pt x="4515108" y="3236682"/>
-                  </a:lnTo>
-                  <a:lnTo>
-                    <a:pt x="4592742" y="3244039"/>
-                  </a:lnTo>
-                  <a:lnTo>
-                    <a:pt x="4670376" y="3251266"/>
-                  </a:lnTo>
-                  <a:lnTo>
-                    <a:pt x="4748010" y="3258365"/>
-                  </a:lnTo>
-                  <a:lnTo>
-                    <a:pt x="4825644" y="3265339"/>
-                  </a:lnTo>
-                  <a:lnTo>
-                    <a:pt x="4903278" y="3272189"/>
-                  </a:lnTo>
-                  <a:lnTo>
-                    <a:pt x="4980912" y="3278919"/>
-                  </a:lnTo>
-                  <a:lnTo>
-                    <a:pt x="5058547" y="3285529"/>
-                  </a:lnTo>
-                  <a:lnTo>
-                    <a:pt x="5136181" y="3292022"/>
-                  </a:lnTo>
-                  <a:lnTo>
-                    <a:pt x="5213815" y="3298400"/>
-                  </a:lnTo>
-                  <a:lnTo>
-                    <a:pt x="5291449" y="3304666"/>
+                    <a:pt x="1030" y="3867"/>
+                  </a:lnTo>
+                  <a:lnTo>
+                    <a:pt x="78664" y="273608"/>
+                  </a:lnTo>
+                  <a:lnTo>
+                    <a:pt x="156298" y="523409"/>
+                  </a:lnTo>
+                  <a:lnTo>
+                    <a:pt x="233932" y="754742"/>
+                  </a:lnTo>
+                  <a:lnTo>
+                    <a:pt x="311566" y="968974"/>
+                  </a:lnTo>
+                  <a:lnTo>
+                    <a:pt x="389200" y="1167369"/>
+                  </a:lnTo>
+                  <a:lnTo>
+                    <a:pt x="466835" y="1351096"/>
+                  </a:lnTo>
+                  <a:lnTo>
+                    <a:pt x="544469" y="1521242"/>
+                  </a:lnTo>
+                  <a:lnTo>
+                    <a:pt x="622103" y="1678809"/>
+                  </a:lnTo>
+                  <a:lnTo>
+                    <a:pt x="699737" y="1824728"/>
+                  </a:lnTo>
+                  <a:lnTo>
+                    <a:pt x="777371" y="1959859"/>
+                  </a:lnTo>
+                  <a:lnTo>
+                    <a:pt x="855005" y="2085001"/>
+                  </a:lnTo>
+                  <a:lnTo>
+                    <a:pt x="932639" y="2200891"/>
+                  </a:lnTo>
+                  <a:lnTo>
+                    <a:pt x="1010273" y="2308214"/>
+                  </a:lnTo>
+                  <a:lnTo>
+                    <a:pt x="1087907" y="2407604"/>
+                  </a:lnTo>
+                  <a:lnTo>
+                    <a:pt x="1165541" y="2499645"/>
+                  </a:lnTo>
+                  <a:lnTo>
+                    <a:pt x="1243175" y="2584882"/>
+                  </a:lnTo>
+                  <a:lnTo>
+                    <a:pt x="1320809" y="2663818"/>
+                  </a:lnTo>
+                  <a:lnTo>
+                    <a:pt x="1398443" y="2736919"/>
+                  </a:lnTo>
+                  <a:lnTo>
+                    <a:pt x="1476077" y="2780633"/>
+                  </a:lnTo>
+                  <a:lnTo>
+                    <a:pt x="1553711" y="2773484"/>
+                  </a:lnTo>
+                  <a:lnTo>
+                    <a:pt x="1631345" y="2766276"/>
+                  </a:lnTo>
+                  <a:lnTo>
+                    <a:pt x="1708979" y="2759010"/>
+                  </a:lnTo>
+                  <a:lnTo>
+                    <a:pt x="1786613" y="2751684"/>
+                  </a:lnTo>
+                  <a:lnTo>
+                    <a:pt x="1864247" y="2744298"/>
+                  </a:lnTo>
+                  <a:lnTo>
+                    <a:pt x="1941881" y="2736851"/>
+                  </a:lnTo>
+                  <a:lnTo>
+                    <a:pt x="2019515" y="2729343"/>
+                  </a:lnTo>
+                  <a:lnTo>
+                    <a:pt x="2097149" y="2721774"/>
+                  </a:lnTo>
+                  <a:lnTo>
+                    <a:pt x="2174784" y="2714143"/>
+                  </a:lnTo>
+                  <a:lnTo>
+                    <a:pt x="2252418" y="2706449"/>
+                  </a:lnTo>
+                  <a:lnTo>
+                    <a:pt x="2330052" y="2698692"/>
+                  </a:lnTo>
+                  <a:lnTo>
+                    <a:pt x="2407686" y="2690871"/>
+                  </a:lnTo>
+                  <a:lnTo>
+                    <a:pt x="2485320" y="2682987"/>
+                  </a:lnTo>
+                  <a:lnTo>
+                    <a:pt x="2562954" y="2675037"/>
+                  </a:lnTo>
+                  <a:lnTo>
+                    <a:pt x="2640588" y="2667023"/>
+                  </a:lnTo>
+                  <a:lnTo>
+                    <a:pt x="2718222" y="2658943"/>
+                  </a:lnTo>
+                  <a:lnTo>
+                    <a:pt x="2795856" y="2650796"/>
+                  </a:lnTo>
+                  <a:lnTo>
+                    <a:pt x="2873490" y="2642583"/>
+                  </a:lnTo>
+                  <a:lnTo>
+                    <a:pt x="2951124" y="2634303"/>
+                  </a:lnTo>
+                  <a:lnTo>
+                    <a:pt x="3028758" y="2625954"/>
+                  </a:lnTo>
+                  <a:lnTo>
+                    <a:pt x="3106392" y="2617537"/>
+                  </a:lnTo>
+                  <a:lnTo>
+                    <a:pt x="3184026" y="2609051"/>
+                  </a:lnTo>
+                  <a:lnTo>
+                    <a:pt x="3261660" y="2600496"/>
+                  </a:lnTo>
+                  <a:lnTo>
+                    <a:pt x="3339294" y="2591870"/>
+                  </a:lnTo>
+                  <a:lnTo>
+                    <a:pt x="3416928" y="2583174"/>
+                  </a:lnTo>
+                  <a:lnTo>
+                    <a:pt x="3494562" y="2574407"/>
+                  </a:lnTo>
+                  <a:lnTo>
+                    <a:pt x="3572196" y="2565567"/>
+                  </a:lnTo>
+                  <a:lnTo>
+                    <a:pt x="3649830" y="2556655"/>
+                  </a:lnTo>
+                  <a:lnTo>
+                    <a:pt x="3727464" y="2547670"/>
+                  </a:lnTo>
+                  <a:lnTo>
+                    <a:pt x="3805098" y="2538612"/>
+                  </a:lnTo>
+                  <a:lnTo>
+                    <a:pt x="3882732" y="2529479"/>
+                  </a:lnTo>
+                  <a:lnTo>
+                    <a:pt x="3960367" y="2520271"/>
+                  </a:lnTo>
+                  <a:lnTo>
+                    <a:pt x="4038001" y="2510988"/>
+                  </a:lnTo>
+                  <a:lnTo>
+                    <a:pt x="4115635" y="2501628"/>
+                  </a:lnTo>
+                  <a:lnTo>
+                    <a:pt x="4193269" y="2492192"/>
+                  </a:lnTo>
+                  <a:lnTo>
+                    <a:pt x="4270903" y="2482679"/>
+                  </a:lnTo>
+                  <a:lnTo>
+                    <a:pt x="4348537" y="2473087"/>
+                  </a:lnTo>
+                  <a:lnTo>
+                    <a:pt x="4426171" y="2463417"/>
+                  </a:lnTo>
+                  <a:lnTo>
+                    <a:pt x="4503805" y="2453668"/>
+                  </a:lnTo>
+                  <a:lnTo>
+                    <a:pt x="4581439" y="2443839"/>
+                  </a:lnTo>
+                  <a:lnTo>
+                    <a:pt x="4659073" y="2433929"/>
+                  </a:lnTo>
+                  <a:lnTo>
+                    <a:pt x="4736707" y="2423938"/>
+                  </a:lnTo>
+                  <a:lnTo>
+                    <a:pt x="4814341" y="2413865"/>
+                  </a:lnTo>
+                  <a:lnTo>
+                    <a:pt x="4891975" y="2403709"/>
+                  </a:lnTo>
+                  <a:lnTo>
+                    <a:pt x="4969609" y="2393470"/>
+                  </a:lnTo>
+                  <a:lnTo>
+                    <a:pt x="5047243" y="2383147"/>
+                  </a:lnTo>
+                  <a:lnTo>
+                    <a:pt x="5124877" y="2372740"/>
+                  </a:lnTo>
+                  <a:lnTo>
+                    <a:pt x="5202511" y="2362247"/>
+                  </a:lnTo>
+                  <a:lnTo>
+                    <a:pt x="5280145" y="2351669"/>
+                  </a:lnTo>
+                  <a:lnTo>
+                    <a:pt x="5357779" y="2341003"/>
+                  </a:lnTo>
+                  <a:lnTo>
+                    <a:pt x="5435413" y="2330250"/>
                   </a:lnTo>
                 </a:path>
               </a:pathLst>
@@ -3769,300 +3778,300 @@
           </p:nvSpPr>
           <p:spPr>
             <a:xfrm>
-              <a:off x="817517" y="3655102"/>
-              <a:ext cx="7370972" cy="1883157"/>
+              <a:off x="817517" y="4684287"/>
+              <a:ext cx="7370972" cy="848041"/>
             </a:xfrm>
             <a:custGeom>
               <a:avLst/>
               <a:pathLst>
-                <a:path w="7370972" h="1883157">
+                <a:path w="7370972" h="848041">
                   <a:moveTo>
-                    <a:pt x="7370972" y="1883157"/>
+                    <a:pt x="7370972" y="848041"/>
                   </a:moveTo>
                   <a:lnTo>
-                    <a:pt x="7293338" y="1882183"/>
-                  </a:lnTo>
-                  <a:lnTo>
-                    <a:pt x="7215704" y="1881122"/>
-                  </a:lnTo>
-                  <a:lnTo>
-                    <a:pt x="7138070" y="1879967"/>
-                  </a:lnTo>
-                  <a:lnTo>
-                    <a:pt x="7060436" y="1878710"/>
-                  </a:lnTo>
-                  <a:lnTo>
-                    <a:pt x="6982802" y="1877340"/>
-                  </a:lnTo>
-                  <a:lnTo>
-                    <a:pt x="6905168" y="1875848"/>
-                  </a:lnTo>
-                  <a:lnTo>
-                    <a:pt x="6827534" y="1874224"/>
-                  </a:lnTo>
-                  <a:lnTo>
-                    <a:pt x="6749900" y="1872455"/>
-                  </a:lnTo>
-                  <a:lnTo>
-                    <a:pt x="6672266" y="1870529"/>
-                  </a:lnTo>
-                  <a:lnTo>
-                    <a:pt x="6594632" y="1868431"/>
-                  </a:lnTo>
-                  <a:lnTo>
-                    <a:pt x="6516998" y="1866147"/>
-                  </a:lnTo>
-                  <a:lnTo>
-                    <a:pt x="6439364" y="1863659"/>
-                  </a:lnTo>
-                  <a:lnTo>
-                    <a:pt x="6361730" y="1860951"/>
-                  </a:lnTo>
-                  <a:lnTo>
-                    <a:pt x="6284096" y="1858001"/>
-                  </a:lnTo>
-                  <a:lnTo>
-                    <a:pt x="6206462" y="1854788"/>
-                  </a:lnTo>
-                  <a:lnTo>
-                    <a:pt x="6128827" y="1851290"/>
-                  </a:lnTo>
-                  <a:lnTo>
-                    <a:pt x="6051193" y="1847481"/>
-                  </a:lnTo>
-                  <a:lnTo>
-                    <a:pt x="5973559" y="1843333"/>
-                  </a:lnTo>
-                  <a:lnTo>
-                    <a:pt x="5895925" y="1838815"/>
-                  </a:lnTo>
-                  <a:lnTo>
-                    <a:pt x="5818291" y="1833896"/>
-                  </a:lnTo>
-                  <a:lnTo>
-                    <a:pt x="5740657" y="1828539"/>
-                  </a:lnTo>
-                  <a:lnTo>
-                    <a:pt x="5663023" y="1822705"/>
-                  </a:lnTo>
-                  <a:lnTo>
-                    <a:pt x="5585389" y="1816353"/>
-                  </a:lnTo>
-                  <a:lnTo>
-                    <a:pt x="5507755" y="1809435"/>
-                  </a:lnTo>
-                  <a:lnTo>
-                    <a:pt x="5430121" y="1801901"/>
-                  </a:lnTo>
-                  <a:lnTo>
-                    <a:pt x="5352487" y="1793698"/>
-                  </a:lnTo>
-                  <a:lnTo>
-                    <a:pt x="5274853" y="1784764"/>
-                  </a:lnTo>
-                  <a:lnTo>
-                    <a:pt x="5197219" y="1775035"/>
-                  </a:lnTo>
-                  <a:lnTo>
-                    <a:pt x="5119585" y="1764441"/>
-                  </a:lnTo>
-                  <a:lnTo>
-                    <a:pt x="5041951" y="1752905"/>
-                  </a:lnTo>
-                  <a:lnTo>
-                    <a:pt x="4964317" y="1740341"/>
-                  </a:lnTo>
-                  <a:lnTo>
-                    <a:pt x="4886683" y="1726660"/>
-                  </a:lnTo>
-                  <a:lnTo>
-                    <a:pt x="4809049" y="1711762"/>
-                  </a:lnTo>
-                  <a:lnTo>
-                    <a:pt x="4731415" y="1695538"/>
-                  </a:lnTo>
-                  <a:lnTo>
-                    <a:pt x="4653781" y="1677871"/>
-                  </a:lnTo>
-                  <a:lnTo>
-                    <a:pt x="4576147" y="1658632"/>
-                  </a:lnTo>
-                  <a:lnTo>
-                    <a:pt x="4498513" y="1637680"/>
-                  </a:lnTo>
-                  <a:lnTo>
-                    <a:pt x="4420879" y="1614865"/>
-                  </a:lnTo>
-                  <a:lnTo>
-                    <a:pt x="4343244" y="1590020"/>
-                  </a:lnTo>
-                  <a:lnTo>
-                    <a:pt x="4265610" y="1562964"/>
-                  </a:lnTo>
-                  <a:lnTo>
-                    <a:pt x="4187976" y="1533501"/>
-                  </a:lnTo>
-                  <a:lnTo>
-                    <a:pt x="4110342" y="1501416"/>
-                  </a:lnTo>
-                  <a:lnTo>
-                    <a:pt x="4032708" y="1466477"/>
-                  </a:lnTo>
-                  <a:lnTo>
-                    <a:pt x="3955074" y="1428429"/>
-                  </a:lnTo>
-                  <a:lnTo>
-                    <a:pt x="3877440" y="1386996"/>
-                  </a:lnTo>
-                  <a:lnTo>
-                    <a:pt x="3799806" y="1341876"/>
-                  </a:lnTo>
-                  <a:lnTo>
-                    <a:pt x="3722172" y="1292741"/>
-                  </a:lnTo>
-                  <a:lnTo>
-                    <a:pt x="3644538" y="1239235"/>
-                  </a:lnTo>
-                  <a:lnTo>
-                    <a:pt x="3566904" y="1180968"/>
-                  </a:lnTo>
-                  <a:lnTo>
-                    <a:pt x="3489270" y="1117517"/>
-                  </a:lnTo>
-                  <a:lnTo>
-                    <a:pt x="3411636" y="1048420"/>
-                  </a:lnTo>
-                  <a:lnTo>
-                    <a:pt x="3334002" y="1013938"/>
-                  </a:lnTo>
-                  <a:lnTo>
-                    <a:pt x="3256368" y="998090"/>
-                  </a:lnTo>
-                  <a:lnTo>
-                    <a:pt x="3178734" y="981957"/>
-                  </a:lnTo>
-                  <a:lnTo>
-                    <a:pt x="3101100" y="965533"/>
-                  </a:lnTo>
-                  <a:lnTo>
-                    <a:pt x="3023466" y="948813"/>
-                  </a:lnTo>
-                  <a:lnTo>
-                    <a:pt x="2945832" y="931792"/>
-                  </a:lnTo>
-                  <a:lnTo>
-                    <a:pt x="2868198" y="914465"/>
-                  </a:lnTo>
-                  <a:lnTo>
-                    <a:pt x="2790564" y="896826"/>
-                  </a:lnTo>
-                  <a:lnTo>
-                    <a:pt x="2712930" y="878869"/>
-                  </a:lnTo>
-                  <a:lnTo>
-                    <a:pt x="2635295" y="860589"/>
-                  </a:lnTo>
-                  <a:lnTo>
-                    <a:pt x="2557661" y="841980"/>
-                  </a:lnTo>
-                  <a:lnTo>
-                    <a:pt x="2480027" y="823035"/>
-                  </a:lnTo>
-                  <a:lnTo>
-                    <a:pt x="2402393" y="803750"/>
-                  </a:lnTo>
-                  <a:lnTo>
-                    <a:pt x="2324759" y="784117"/>
-                  </a:lnTo>
-                  <a:lnTo>
-                    <a:pt x="2247125" y="764131"/>
-                  </a:lnTo>
-                  <a:lnTo>
-                    <a:pt x="2169491" y="743785"/>
-                  </a:lnTo>
-                  <a:lnTo>
-                    <a:pt x="2091857" y="723072"/>
-                  </a:lnTo>
-                  <a:lnTo>
-                    <a:pt x="2014223" y="701987"/>
-                  </a:lnTo>
-                  <a:lnTo>
-                    <a:pt x="1936589" y="680522"/>
-                  </a:lnTo>
-                  <a:lnTo>
-                    <a:pt x="1858955" y="658670"/>
-                  </a:lnTo>
-                  <a:lnTo>
-                    <a:pt x="1781321" y="636425"/>
-                  </a:lnTo>
-                  <a:lnTo>
-                    <a:pt x="1703687" y="613780"/>
-                  </a:lnTo>
-                  <a:lnTo>
-                    <a:pt x="1626053" y="590726"/>
-                  </a:lnTo>
-                  <a:lnTo>
-                    <a:pt x="1548419" y="567258"/>
-                  </a:lnTo>
-                  <a:lnTo>
-                    <a:pt x="1470785" y="543367"/>
-                  </a:lnTo>
-                  <a:lnTo>
-                    <a:pt x="1393151" y="519046"/>
-                  </a:lnTo>
-                  <a:lnTo>
-                    <a:pt x="1315517" y="494287"/>
-                  </a:lnTo>
-                  <a:lnTo>
-                    <a:pt x="1237883" y="469082"/>
-                  </a:lnTo>
-                  <a:lnTo>
-                    <a:pt x="1160249" y="443423"/>
-                  </a:lnTo>
-                  <a:lnTo>
-                    <a:pt x="1082615" y="417303"/>
-                  </a:lnTo>
-                  <a:lnTo>
-                    <a:pt x="1004981" y="390712"/>
-                  </a:lnTo>
-                  <a:lnTo>
-                    <a:pt x="927346" y="363642"/>
-                  </a:lnTo>
-                  <a:lnTo>
-                    <a:pt x="849712" y="336085"/>
-                  </a:lnTo>
-                  <a:lnTo>
-                    <a:pt x="772078" y="308031"/>
-                  </a:lnTo>
-                  <a:lnTo>
-                    <a:pt x="694444" y="279473"/>
-                  </a:lnTo>
-                  <a:lnTo>
-                    <a:pt x="616810" y="250400"/>
-                  </a:lnTo>
-                  <a:lnTo>
-                    <a:pt x="539176" y="220803"/>
-                  </a:lnTo>
-                  <a:lnTo>
-                    <a:pt x="461542" y="190674"/>
-                  </a:lnTo>
-                  <a:lnTo>
-                    <a:pt x="383908" y="160003"/>
-                  </a:lnTo>
-                  <a:lnTo>
-                    <a:pt x="306274" y="128779"/>
-                  </a:lnTo>
-                  <a:lnTo>
-                    <a:pt x="228640" y="96993"/>
-                  </a:lnTo>
-                  <a:lnTo>
-                    <a:pt x="151006" y="64634"/>
-                  </a:lnTo>
-                  <a:lnTo>
-                    <a:pt x="73372" y="31693"/>
-                  </a:lnTo>
-                  <a:lnTo>
-                    <a:pt x="0" y="0"/>
+                    <a:pt x="7293338" y="846694"/>
+                  </a:lnTo>
+                  <a:lnTo>
+                    <a:pt x="7215704" y="845239"/>
+                  </a:lnTo>
+                  <a:lnTo>
+                    <a:pt x="7138070" y="843668"/>
+                  </a:lnTo>
+                  <a:lnTo>
+                    <a:pt x="7060436" y="841972"/>
+                  </a:lnTo>
+                  <a:lnTo>
+                    <a:pt x="6982802" y="840140"/>
+                  </a:lnTo>
+                  <a:lnTo>
+                    <a:pt x="6905168" y="838162"/>
+                  </a:lnTo>
+                  <a:lnTo>
+                    <a:pt x="6827534" y="836026"/>
+                  </a:lnTo>
+                  <a:lnTo>
+                    <a:pt x="6749900" y="833719"/>
+                  </a:lnTo>
+                  <a:lnTo>
+                    <a:pt x="6672266" y="831228"/>
+                  </a:lnTo>
+                  <a:lnTo>
+                    <a:pt x="6594632" y="828539"/>
+                  </a:lnTo>
+                  <a:lnTo>
+                    <a:pt x="6516998" y="825635"/>
+                  </a:lnTo>
+                  <a:lnTo>
+                    <a:pt x="6439364" y="822499"/>
+                  </a:lnTo>
+                  <a:lnTo>
+                    <a:pt x="6361730" y="819112"/>
+                  </a:lnTo>
+                  <a:lnTo>
+                    <a:pt x="6284096" y="815455"/>
+                  </a:lnTo>
+                  <a:lnTo>
+                    <a:pt x="6206462" y="811507"/>
+                  </a:lnTo>
+                  <a:lnTo>
+                    <a:pt x="6128827" y="807243"/>
+                  </a:lnTo>
+                  <a:lnTo>
+                    <a:pt x="6051193" y="802639"/>
+                  </a:lnTo>
+                  <a:lnTo>
+                    <a:pt x="5973559" y="797667"/>
+                  </a:lnTo>
+                  <a:lnTo>
+                    <a:pt x="5895925" y="792298"/>
+                  </a:lnTo>
+                  <a:lnTo>
+                    <a:pt x="5818291" y="786501"/>
+                  </a:lnTo>
+                  <a:lnTo>
+                    <a:pt x="5740657" y="780241"/>
+                  </a:lnTo>
+                  <a:lnTo>
+                    <a:pt x="5663023" y="773481"/>
+                  </a:lnTo>
+                  <a:lnTo>
+                    <a:pt x="5585389" y="766182"/>
+                  </a:lnTo>
+                  <a:lnTo>
+                    <a:pt x="5507755" y="758300"/>
+                  </a:lnTo>
+                  <a:lnTo>
+                    <a:pt x="5430121" y="749789"/>
+                  </a:lnTo>
+                  <a:lnTo>
+                    <a:pt x="5352487" y="740598"/>
+                  </a:lnTo>
+                  <a:lnTo>
+                    <a:pt x="5274853" y="730674"/>
+                  </a:lnTo>
+                  <a:lnTo>
+                    <a:pt x="5197219" y="719957"/>
+                  </a:lnTo>
+                  <a:lnTo>
+                    <a:pt x="5119585" y="708385"/>
+                  </a:lnTo>
+                  <a:lnTo>
+                    <a:pt x="5041951" y="695889"/>
+                  </a:lnTo>
+                  <a:lnTo>
+                    <a:pt x="4964317" y="682396"/>
+                  </a:lnTo>
+                  <a:lnTo>
+                    <a:pt x="4886683" y="667826"/>
+                  </a:lnTo>
+                  <a:lnTo>
+                    <a:pt x="4809049" y="652092"/>
+                  </a:lnTo>
+                  <a:lnTo>
+                    <a:pt x="4731415" y="635102"/>
+                  </a:lnTo>
+                  <a:lnTo>
+                    <a:pt x="4653781" y="616757"/>
+                  </a:lnTo>
+                  <a:lnTo>
+                    <a:pt x="4576147" y="596946"/>
+                  </a:lnTo>
+                  <a:lnTo>
+                    <a:pt x="4498513" y="575554"/>
+                  </a:lnTo>
+                  <a:lnTo>
+                    <a:pt x="4420879" y="552455"/>
+                  </a:lnTo>
+                  <a:lnTo>
+                    <a:pt x="4343244" y="527512"/>
+                  </a:lnTo>
+                  <a:lnTo>
+                    <a:pt x="4265610" y="500577"/>
+                  </a:lnTo>
+                  <a:lnTo>
+                    <a:pt x="4187976" y="471492"/>
+                  </a:lnTo>
+                  <a:lnTo>
+                    <a:pt x="4110342" y="440086"/>
+                  </a:lnTo>
+                  <a:lnTo>
+                    <a:pt x="4032708" y="406172"/>
+                  </a:lnTo>
+                  <a:lnTo>
+                    <a:pt x="3955074" y="369551"/>
+                  </a:lnTo>
+                  <a:lnTo>
+                    <a:pt x="3877440" y="330007"/>
+                  </a:lnTo>
+                  <a:lnTo>
+                    <a:pt x="3799806" y="287306"/>
+                  </a:lnTo>
+                  <a:lnTo>
+                    <a:pt x="3722172" y="241196"/>
+                  </a:lnTo>
+                  <a:lnTo>
+                    <a:pt x="3644538" y="191406"/>
+                  </a:lnTo>
+                  <a:lnTo>
+                    <a:pt x="3566904" y="137640"/>
+                  </a:lnTo>
+                  <a:lnTo>
+                    <a:pt x="3489270" y="79583"/>
+                  </a:lnTo>
+                  <a:lnTo>
+                    <a:pt x="3411636" y="16891"/>
+                  </a:lnTo>
+                  <a:lnTo>
+                    <a:pt x="3334002" y="0"/>
+                  </a:lnTo>
+                  <a:lnTo>
+                    <a:pt x="3256368" y="7033"/>
+                  </a:lnTo>
+                  <a:lnTo>
+                    <a:pt x="3178734" y="14008"/>
+                  </a:lnTo>
+                  <a:lnTo>
+                    <a:pt x="3101100" y="20927"/>
+                  </a:lnTo>
+                  <a:lnTo>
+                    <a:pt x="3023466" y="27790"/>
+                  </a:lnTo>
+                  <a:lnTo>
+                    <a:pt x="2945832" y="34597"/>
+                  </a:lnTo>
+                  <a:lnTo>
+                    <a:pt x="2868198" y="41349"/>
+                  </a:lnTo>
+                  <a:lnTo>
+                    <a:pt x="2790564" y="48046"/>
+                  </a:lnTo>
+                  <a:lnTo>
+                    <a:pt x="2712930" y="54688"/>
+                  </a:lnTo>
+                  <a:lnTo>
+                    <a:pt x="2635295" y="61276"/>
+                  </a:lnTo>
+                  <a:lnTo>
+                    <a:pt x="2557661" y="67811"/>
+                  </a:lnTo>
+                  <a:lnTo>
+                    <a:pt x="2480027" y="74293"/>
+                  </a:lnTo>
+                  <a:lnTo>
+                    <a:pt x="2402393" y="80722"/>
+                  </a:lnTo>
+                  <a:lnTo>
+                    <a:pt x="2324759" y="87098"/>
+                  </a:lnTo>
+                  <a:lnTo>
+                    <a:pt x="2247125" y="93423"/>
+                  </a:lnTo>
+                  <a:lnTo>
+                    <a:pt x="2169491" y="99696"/>
+                  </a:lnTo>
+                  <a:lnTo>
+                    <a:pt x="2091857" y="105919"/>
+                  </a:lnTo>
+                  <a:lnTo>
+                    <a:pt x="2014223" y="112090"/>
+                  </a:lnTo>
+                  <a:lnTo>
+                    <a:pt x="1936589" y="118212"/>
+                  </a:lnTo>
+                  <a:lnTo>
+                    <a:pt x="1858955" y="124284"/>
+                  </a:lnTo>
+                  <a:lnTo>
+                    <a:pt x="1781321" y="130306"/>
+                  </a:lnTo>
+                  <a:lnTo>
+                    <a:pt x="1703687" y="136280"/>
+                  </a:lnTo>
+                  <a:lnTo>
+                    <a:pt x="1626053" y="142204"/>
+                  </a:lnTo>
+                  <a:lnTo>
+                    <a:pt x="1548419" y="148081"/>
+                  </a:lnTo>
+                  <a:lnTo>
+                    <a:pt x="1470785" y="153910"/>
+                  </a:lnTo>
+                  <a:lnTo>
+                    <a:pt x="1393151" y="159692"/>
+                  </a:lnTo>
+                  <a:lnTo>
+                    <a:pt x="1315517" y="165426"/>
+                  </a:lnTo>
+                  <a:lnTo>
+                    <a:pt x="1237883" y="171114"/>
+                  </a:lnTo>
+                  <a:lnTo>
+                    <a:pt x="1160249" y="176756"/>
+                  </a:lnTo>
+                  <a:lnTo>
+                    <a:pt x="1082615" y="182351"/>
+                  </a:lnTo>
+                  <a:lnTo>
+                    <a:pt x="1004981" y="187902"/>
+                  </a:lnTo>
+                  <a:lnTo>
+                    <a:pt x="927346" y="193407"/>
+                  </a:lnTo>
+                  <a:lnTo>
+                    <a:pt x="849712" y="198867"/>
+                  </a:lnTo>
+                  <a:lnTo>
+                    <a:pt x="772078" y="204283"/>
+                  </a:lnTo>
+                  <a:lnTo>
+                    <a:pt x="694444" y="209655"/>
+                  </a:lnTo>
+                  <a:lnTo>
+                    <a:pt x="616810" y="214983"/>
+                  </a:lnTo>
+                  <a:lnTo>
+                    <a:pt x="539176" y="220268"/>
+                  </a:lnTo>
+                  <a:lnTo>
+                    <a:pt x="461542" y="225510"/>
+                  </a:lnTo>
+                  <a:lnTo>
+                    <a:pt x="383908" y="230709"/>
+                  </a:lnTo>
+                  <a:lnTo>
+                    <a:pt x="306274" y="235866"/>
+                  </a:lnTo>
+                  <a:lnTo>
+                    <a:pt x="228640" y="240981"/>
+                  </a:lnTo>
+                  <a:lnTo>
+                    <a:pt x="151006" y="246055"/>
+                  </a:lnTo>
+                  <a:lnTo>
+                    <a:pt x="73372" y="251087"/>
+                  </a:lnTo>
+                  <a:lnTo>
+                    <a:pt x="0" y="255804"/>
                   </a:lnTo>
                 </a:path>
               </a:pathLst>
@@ -4082,255 +4091,297 @@
           </p:nvSpPr>
           <p:spPr>
             <a:xfrm>
-              <a:off x="2042355" y="1896563"/>
-              <a:ext cx="6146134" cy="3590923"/>
+              <a:off x="957447" y="1896563"/>
+              <a:ext cx="7231043" cy="3503246"/>
             </a:xfrm>
             <a:custGeom>
               <a:avLst/>
               <a:pathLst>
-                <a:path w="6146134" h="3590923">
+                <a:path w="7231043" h="3503246">
                   <a:moveTo>
                     <a:pt x="0" y="0"/>
                   </a:moveTo>
                   <a:lnTo>
-                    <a:pt x="13045" y="32177"/>
-                  </a:lnTo>
-                  <a:lnTo>
-                    <a:pt x="90679" y="214053"/>
-                  </a:lnTo>
-                  <a:lnTo>
-                    <a:pt x="168313" y="386792"/>
-                  </a:lnTo>
-                  <a:lnTo>
-                    <a:pt x="245947" y="550854"/>
-                  </a:lnTo>
-                  <a:lnTo>
-                    <a:pt x="323581" y="706674"/>
-                  </a:lnTo>
-                  <a:lnTo>
-                    <a:pt x="401215" y="854666"/>
-                  </a:lnTo>
-                  <a:lnTo>
-                    <a:pt x="478849" y="995223"/>
-                  </a:lnTo>
-                  <a:lnTo>
-                    <a:pt x="556483" y="1128720"/>
-                  </a:lnTo>
-                  <a:lnTo>
-                    <a:pt x="634117" y="1255511"/>
-                  </a:lnTo>
-                  <a:lnTo>
-                    <a:pt x="711751" y="1375932"/>
-                  </a:lnTo>
-                  <a:lnTo>
-                    <a:pt x="789385" y="1490303"/>
-                  </a:lnTo>
-                  <a:lnTo>
-                    <a:pt x="867019" y="1598929"/>
-                  </a:lnTo>
-                  <a:lnTo>
-                    <a:pt x="944653" y="1702099"/>
-                  </a:lnTo>
-                  <a:lnTo>
-                    <a:pt x="1022287" y="1800085"/>
-                  </a:lnTo>
-                  <a:lnTo>
-                    <a:pt x="1099921" y="1893149"/>
-                  </a:lnTo>
-                  <a:lnTo>
-                    <a:pt x="1177555" y="1981538"/>
-                  </a:lnTo>
-                  <a:lnTo>
-                    <a:pt x="1255189" y="2065487"/>
-                  </a:lnTo>
-                  <a:lnTo>
-                    <a:pt x="1332823" y="2145219"/>
-                  </a:lnTo>
-                  <a:lnTo>
-                    <a:pt x="1410457" y="2220945"/>
-                  </a:lnTo>
-                  <a:lnTo>
-                    <a:pt x="1488091" y="2292867"/>
-                  </a:lnTo>
-                  <a:lnTo>
-                    <a:pt x="1565726" y="2361176"/>
-                  </a:lnTo>
-                  <a:lnTo>
-                    <a:pt x="1643360" y="2426053"/>
-                  </a:lnTo>
-                  <a:lnTo>
-                    <a:pt x="1720994" y="2487672"/>
-                  </a:lnTo>
-                  <a:lnTo>
-                    <a:pt x="1798628" y="2546194"/>
-                  </a:lnTo>
-                  <a:lnTo>
-                    <a:pt x="1876262" y="2601777"/>
-                  </a:lnTo>
-                  <a:lnTo>
-                    <a:pt x="1953896" y="2654568"/>
-                  </a:lnTo>
-                  <a:lnTo>
-                    <a:pt x="2031530" y="2704707"/>
-                  </a:lnTo>
-                  <a:lnTo>
-                    <a:pt x="2109164" y="2752327"/>
-                  </a:lnTo>
-                  <a:lnTo>
-                    <a:pt x="2186798" y="2797555"/>
-                  </a:lnTo>
-                  <a:lnTo>
-                    <a:pt x="2264432" y="2840510"/>
-                  </a:lnTo>
-                  <a:lnTo>
-                    <a:pt x="2342066" y="2881308"/>
-                  </a:lnTo>
-                  <a:lnTo>
-                    <a:pt x="2419700" y="2920057"/>
-                  </a:lnTo>
-                  <a:lnTo>
-                    <a:pt x="2497334" y="2956859"/>
-                  </a:lnTo>
-                  <a:lnTo>
-                    <a:pt x="2574968" y="2991812"/>
-                  </a:lnTo>
-                  <a:lnTo>
-                    <a:pt x="2652602" y="3025009"/>
-                  </a:lnTo>
-                  <a:lnTo>
-                    <a:pt x="2730236" y="3056538"/>
-                  </a:lnTo>
-                  <a:lnTo>
-                    <a:pt x="2807870" y="3086484"/>
-                  </a:lnTo>
-                  <a:lnTo>
-                    <a:pt x="2885504" y="3114925"/>
-                  </a:lnTo>
-                  <a:lnTo>
-                    <a:pt x="2963138" y="3141938"/>
-                  </a:lnTo>
-                  <a:lnTo>
-                    <a:pt x="3040772" y="3167593"/>
-                  </a:lnTo>
-                  <a:lnTo>
-                    <a:pt x="3118406" y="3191960"/>
-                  </a:lnTo>
-                  <a:lnTo>
-                    <a:pt x="3196040" y="3215103"/>
-                  </a:lnTo>
-                  <a:lnTo>
-                    <a:pt x="3273675" y="3237083"/>
-                  </a:lnTo>
-                  <a:lnTo>
-                    <a:pt x="3351309" y="3257959"/>
-                  </a:lnTo>
-                  <a:lnTo>
-                    <a:pt x="3428943" y="3277786"/>
-                  </a:lnTo>
-                  <a:lnTo>
-                    <a:pt x="3506577" y="3296617"/>
-                  </a:lnTo>
-                  <a:lnTo>
-                    <a:pt x="3584211" y="3314502"/>
-                  </a:lnTo>
-                  <a:lnTo>
-                    <a:pt x="3661845" y="3331489"/>
-                  </a:lnTo>
-                  <a:lnTo>
-                    <a:pt x="3739479" y="3347622"/>
-                  </a:lnTo>
-                  <a:lnTo>
-                    <a:pt x="3817113" y="3362945"/>
-                  </a:lnTo>
-                  <a:lnTo>
-                    <a:pt x="3894747" y="3377498"/>
-                  </a:lnTo>
-                  <a:lnTo>
-                    <a:pt x="3972381" y="3391320"/>
-                  </a:lnTo>
-                  <a:lnTo>
-                    <a:pt x="4050015" y="3404448"/>
-                  </a:lnTo>
-                  <a:lnTo>
-                    <a:pt x="4127649" y="3416916"/>
-                  </a:lnTo>
-                  <a:lnTo>
-                    <a:pt x="4205283" y="3428758"/>
-                  </a:lnTo>
-                  <a:lnTo>
-                    <a:pt x="4282917" y="3440005"/>
-                  </a:lnTo>
-                  <a:lnTo>
-                    <a:pt x="4360551" y="3450687"/>
-                  </a:lnTo>
-                  <a:lnTo>
-                    <a:pt x="4438185" y="3460832"/>
-                  </a:lnTo>
-                  <a:lnTo>
-                    <a:pt x="4515819" y="3470468"/>
-                  </a:lnTo>
-                  <a:lnTo>
-                    <a:pt x="4593453" y="3479620"/>
-                  </a:lnTo>
-                  <a:lnTo>
-                    <a:pt x="4671087" y="3488312"/>
-                  </a:lnTo>
-                  <a:lnTo>
-                    <a:pt x="4748721" y="3496567"/>
-                  </a:lnTo>
-                  <a:lnTo>
-                    <a:pt x="4826355" y="3504407"/>
-                  </a:lnTo>
-                  <a:lnTo>
-                    <a:pt x="4903989" y="3511854"/>
-                  </a:lnTo>
-                  <a:lnTo>
-                    <a:pt x="4981624" y="3518927"/>
-                  </a:lnTo>
-                  <a:lnTo>
-                    <a:pt x="5059258" y="3525644"/>
-                  </a:lnTo>
-                  <a:lnTo>
-                    <a:pt x="5136892" y="3532024"/>
-                  </a:lnTo>
-                  <a:lnTo>
-                    <a:pt x="5214526" y="3538083"/>
-                  </a:lnTo>
-                  <a:lnTo>
-                    <a:pt x="5292160" y="3543838"/>
-                  </a:lnTo>
-                  <a:lnTo>
-                    <a:pt x="5369794" y="3549304"/>
-                  </a:lnTo>
-                  <a:lnTo>
-                    <a:pt x="5447428" y="3554495"/>
-                  </a:lnTo>
-                  <a:lnTo>
-                    <a:pt x="5525062" y="3559426"/>
-                  </a:lnTo>
-                  <a:lnTo>
-                    <a:pt x="5602696" y="3564109"/>
-                  </a:lnTo>
-                  <a:lnTo>
-                    <a:pt x="5680330" y="3568556"/>
-                  </a:lnTo>
-                  <a:lnTo>
-                    <a:pt x="5757964" y="3572780"/>
-                  </a:lnTo>
-                  <a:lnTo>
-                    <a:pt x="5835598" y="3576792"/>
-                  </a:lnTo>
-                  <a:lnTo>
-                    <a:pt x="5913232" y="3580603"/>
-                  </a:lnTo>
-                  <a:lnTo>
-                    <a:pt x="5990866" y="3584222"/>
-                  </a:lnTo>
-                  <a:lnTo>
-                    <a:pt x="6068500" y="3587659"/>
-                  </a:lnTo>
-                  <a:lnTo>
-                    <a:pt x="6146134" y="3590923"/>
+                    <a:pt x="11077" y="18106"/>
+                  </a:lnTo>
+                  <a:lnTo>
+                    <a:pt x="88711" y="140722"/>
+                  </a:lnTo>
+                  <a:lnTo>
+                    <a:pt x="166345" y="259201"/>
+                  </a:lnTo>
+                  <a:lnTo>
+                    <a:pt x="243979" y="373684"/>
+                  </a:lnTo>
+                  <a:lnTo>
+                    <a:pt x="321613" y="484304"/>
+                  </a:lnTo>
+                  <a:lnTo>
+                    <a:pt x="399247" y="591192"/>
+                  </a:lnTo>
+                  <a:lnTo>
+                    <a:pt x="476881" y="694474"/>
+                  </a:lnTo>
+                  <a:lnTo>
+                    <a:pt x="554515" y="794272"/>
+                  </a:lnTo>
+                  <a:lnTo>
+                    <a:pt x="632149" y="890703"/>
+                  </a:lnTo>
+                  <a:lnTo>
+                    <a:pt x="709783" y="983881"/>
+                  </a:lnTo>
+                  <a:lnTo>
+                    <a:pt x="787417" y="1073915"/>
+                  </a:lnTo>
+                  <a:lnTo>
+                    <a:pt x="865051" y="1160912"/>
+                  </a:lnTo>
+                  <a:lnTo>
+                    <a:pt x="942685" y="1244974"/>
+                  </a:lnTo>
+                  <a:lnTo>
+                    <a:pt x="1020319" y="1326200"/>
+                  </a:lnTo>
+                  <a:lnTo>
+                    <a:pt x="1097953" y="1404686"/>
+                  </a:lnTo>
+                  <a:lnTo>
+                    <a:pt x="1175587" y="1480523"/>
+                  </a:lnTo>
+                  <a:lnTo>
+                    <a:pt x="1253221" y="1553803"/>
+                  </a:lnTo>
+                  <a:lnTo>
+                    <a:pt x="1330855" y="1624610"/>
+                  </a:lnTo>
+                  <a:lnTo>
+                    <a:pt x="1408489" y="1693029"/>
+                  </a:lnTo>
+                  <a:lnTo>
+                    <a:pt x="1486124" y="1759139"/>
+                  </a:lnTo>
+                  <a:lnTo>
+                    <a:pt x="1563758" y="1823019"/>
+                  </a:lnTo>
+                  <a:lnTo>
+                    <a:pt x="1641392" y="1884744"/>
+                  </a:lnTo>
+                  <a:lnTo>
+                    <a:pt x="1719026" y="1944386"/>
+                  </a:lnTo>
+                  <a:lnTo>
+                    <a:pt x="1796660" y="2002016"/>
+                  </a:lnTo>
+                  <a:lnTo>
+                    <a:pt x="1874294" y="2057703"/>
+                  </a:lnTo>
+                  <a:lnTo>
+                    <a:pt x="1951928" y="2111510"/>
+                  </a:lnTo>
+                  <a:lnTo>
+                    <a:pt x="2029562" y="2163502"/>
+                  </a:lnTo>
+                  <a:lnTo>
+                    <a:pt x="2107196" y="2213740"/>
+                  </a:lnTo>
+                  <a:lnTo>
+                    <a:pt x="2184830" y="2262284"/>
+                  </a:lnTo>
+                  <a:lnTo>
+                    <a:pt x="2262464" y="2309189"/>
+                  </a:lnTo>
+                  <a:lnTo>
+                    <a:pt x="2340098" y="2354513"/>
+                  </a:lnTo>
+                  <a:lnTo>
+                    <a:pt x="2417732" y="2398307"/>
+                  </a:lnTo>
+                  <a:lnTo>
+                    <a:pt x="2495366" y="2440624"/>
+                  </a:lnTo>
+                  <a:lnTo>
+                    <a:pt x="2573000" y="2481513"/>
+                  </a:lnTo>
+                  <a:lnTo>
+                    <a:pt x="2650634" y="2521022"/>
+                  </a:lnTo>
+                  <a:lnTo>
+                    <a:pt x="2728268" y="2559199"/>
+                  </a:lnTo>
+                  <a:lnTo>
+                    <a:pt x="2805902" y="2596088"/>
+                  </a:lnTo>
+                  <a:lnTo>
+                    <a:pt x="2883536" y="2631732"/>
+                  </a:lnTo>
+                  <a:lnTo>
+                    <a:pt x="2961170" y="2666174"/>
+                  </a:lnTo>
+                  <a:lnTo>
+                    <a:pt x="3038804" y="2699454"/>
+                  </a:lnTo>
+                  <a:lnTo>
+                    <a:pt x="3116438" y="2731611"/>
+                  </a:lnTo>
+                  <a:lnTo>
+                    <a:pt x="3194073" y="2762683"/>
+                  </a:lnTo>
+                  <a:lnTo>
+                    <a:pt x="3271707" y="2792707"/>
+                  </a:lnTo>
+                  <a:lnTo>
+                    <a:pt x="3349341" y="2821718"/>
+                  </a:lnTo>
+                  <a:lnTo>
+                    <a:pt x="3426975" y="2849751"/>
+                  </a:lnTo>
+                  <a:lnTo>
+                    <a:pt x="3504609" y="2876837"/>
+                  </a:lnTo>
+                  <a:lnTo>
+                    <a:pt x="3582243" y="2903010"/>
+                  </a:lnTo>
+                  <a:lnTo>
+                    <a:pt x="3659877" y="2928300"/>
+                  </a:lnTo>
+                  <a:lnTo>
+                    <a:pt x="3737511" y="2952737"/>
+                  </a:lnTo>
+                  <a:lnTo>
+                    <a:pt x="3815145" y="2976349"/>
+                  </a:lnTo>
+                  <a:lnTo>
+                    <a:pt x="3892779" y="2999165"/>
+                  </a:lnTo>
+                  <a:lnTo>
+                    <a:pt x="3970413" y="3021211"/>
+                  </a:lnTo>
+                  <a:lnTo>
+                    <a:pt x="4048047" y="3042513"/>
+                  </a:lnTo>
+                  <a:lnTo>
+                    <a:pt x="4125681" y="3063097"/>
+                  </a:lnTo>
+                  <a:lnTo>
+                    <a:pt x="4203315" y="3082986"/>
+                  </a:lnTo>
+                  <a:lnTo>
+                    <a:pt x="4280949" y="3102204"/>
+                  </a:lnTo>
+                  <a:lnTo>
+                    <a:pt x="4358583" y="3120774"/>
+                  </a:lnTo>
+                  <a:lnTo>
+                    <a:pt x="4436217" y="3138717"/>
+                  </a:lnTo>
+                  <a:lnTo>
+                    <a:pt x="4513851" y="3156055"/>
+                  </a:lnTo>
+                  <a:lnTo>
+                    <a:pt x="4591485" y="3172808"/>
+                  </a:lnTo>
+                  <a:lnTo>
+                    <a:pt x="4669119" y="3188996"/>
+                  </a:lnTo>
+                  <a:lnTo>
+                    <a:pt x="4746753" y="3204638"/>
+                  </a:lnTo>
+                  <a:lnTo>
+                    <a:pt x="4824387" y="3219752"/>
+                  </a:lnTo>
+                  <a:lnTo>
+                    <a:pt x="4902022" y="3234356"/>
+                  </a:lnTo>
+                  <a:lnTo>
+                    <a:pt x="4979656" y="3248468"/>
+                  </a:lnTo>
+                  <a:lnTo>
+                    <a:pt x="5057290" y="3262103"/>
+                  </a:lnTo>
+                  <a:lnTo>
+                    <a:pt x="5134924" y="3275278"/>
+                  </a:lnTo>
+                  <a:lnTo>
+                    <a:pt x="5212558" y="3288009"/>
+                  </a:lnTo>
+                  <a:lnTo>
+                    <a:pt x="5290192" y="3300311"/>
+                  </a:lnTo>
+                  <a:lnTo>
+                    <a:pt x="5367826" y="3312197"/>
+                  </a:lnTo>
+                  <a:lnTo>
+                    <a:pt x="5445460" y="3323683"/>
+                  </a:lnTo>
+                  <a:lnTo>
+                    <a:pt x="5523094" y="3334780"/>
+                  </a:lnTo>
+                  <a:lnTo>
+                    <a:pt x="5600728" y="3345504"/>
+                  </a:lnTo>
+                  <a:lnTo>
+                    <a:pt x="5678362" y="3355866"/>
+                  </a:lnTo>
+                  <a:lnTo>
+                    <a:pt x="5755996" y="3365878"/>
+                  </a:lnTo>
+                  <a:lnTo>
+                    <a:pt x="5833630" y="3375552"/>
+                  </a:lnTo>
+                  <a:lnTo>
+                    <a:pt x="5911264" y="3384900"/>
+                  </a:lnTo>
+                  <a:lnTo>
+                    <a:pt x="5988898" y="3393933"/>
+                  </a:lnTo>
+                  <a:lnTo>
+                    <a:pt x="6066532" y="3402661"/>
+                  </a:lnTo>
+                  <a:lnTo>
+                    <a:pt x="6144166" y="3411095"/>
+                  </a:lnTo>
+                  <a:lnTo>
+                    <a:pt x="6221800" y="3419243"/>
+                  </a:lnTo>
+                  <a:lnTo>
+                    <a:pt x="6299434" y="3427118"/>
+                  </a:lnTo>
+                  <a:lnTo>
+                    <a:pt x="6377068" y="3434726"/>
+                  </a:lnTo>
+                  <a:lnTo>
+                    <a:pt x="6454702" y="3442078"/>
+                  </a:lnTo>
+                  <a:lnTo>
+                    <a:pt x="6532336" y="3449181"/>
+                  </a:lnTo>
+                  <a:lnTo>
+                    <a:pt x="6609971" y="3456045"/>
+                  </a:lnTo>
+                  <a:lnTo>
+                    <a:pt x="6687605" y="3462678"/>
+                  </a:lnTo>
+                  <a:lnTo>
+                    <a:pt x="6765239" y="3469087"/>
+                  </a:lnTo>
+                  <a:lnTo>
+                    <a:pt x="6842873" y="3475279"/>
+                  </a:lnTo>
+                  <a:lnTo>
+                    <a:pt x="6920507" y="3481263"/>
+                  </a:lnTo>
+                  <a:lnTo>
+                    <a:pt x="6998141" y="3487045"/>
+                  </a:lnTo>
+                  <a:lnTo>
+                    <a:pt x="7075775" y="3492631"/>
+                  </a:lnTo>
+                  <a:lnTo>
+                    <a:pt x="7153409" y="3498030"/>
+                  </a:lnTo>
+                  <a:lnTo>
+                    <a:pt x="7231043" y="3503246"/>
                   </a:lnTo>
                 </a:path>
               </a:pathLst>

--- a/docs/plots/carbo/jx_carbo_linsubhr_ratio_grade3.pptx
+++ b/docs/plots/carbo/jx_carbo_linsubhr_ratio_grade3.pptx
@@ -2271,7 +2271,7 @@
           </p:nvSpPr>
           <p:spPr>
             <a:xfrm>
-              <a:off x="817517" y="5114368"/>
+              <a:off x="817517" y="5142518"/>
               <a:ext cx="7799693" cy="0"/>
             </a:xfrm>
             <a:custGeom>
@@ -2314,7 +2314,7 @@
           </p:nvSpPr>
           <p:spPr>
             <a:xfrm>
-              <a:off x="817517" y="4244691"/>
+              <a:off x="817517" y="4313054"/>
               <a:ext cx="7799693" cy="0"/>
             </a:xfrm>
             <a:custGeom>
@@ -2357,7 +2357,7 @@
           </p:nvSpPr>
           <p:spPr>
             <a:xfrm>
-              <a:off x="817517" y="3375014"/>
+              <a:off x="817517" y="3483591"/>
               <a:ext cx="7799693" cy="0"/>
             </a:xfrm>
             <a:custGeom>
@@ -2400,7 +2400,7 @@
           </p:nvSpPr>
           <p:spPr>
             <a:xfrm>
-              <a:off x="817517" y="2505337"/>
+              <a:off x="817517" y="2654127"/>
               <a:ext cx="7799693" cy="0"/>
             </a:xfrm>
             <a:custGeom>
@@ -2443,15 +2443,15 @@
           </p:nvSpPr>
           <p:spPr>
             <a:xfrm>
-              <a:off x="1615213" y="1896563"/>
-              <a:ext cx="0" cy="3826579"/>
+              <a:off x="1615213" y="2073503"/>
+              <a:ext cx="0" cy="3649639"/>
             </a:xfrm>
             <a:custGeom>
               <a:avLst/>
               <a:pathLst>
-                <a:path w="0" h="3826579">
+                <a:path w="0" h="3649639">
                   <a:moveTo>
-                    <a:pt x="0" y="3826579"/>
+                    <a:pt x="0" y="3649639"/>
                   </a:moveTo>
                   <a:lnTo>
                     <a:pt x="0" y="0"/>
@@ -2486,15 +2486,15 @@
           </p:nvSpPr>
           <p:spPr>
             <a:xfrm>
-              <a:off x="3387871" y="1896563"/>
-              <a:ext cx="0" cy="3826579"/>
+              <a:off x="3387871" y="2073503"/>
+              <a:ext cx="0" cy="3649639"/>
             </a:xfrm>
             <a:custGeom>
               <a:avLst/>
               <a:pathLst>
-                <a:path w="0" h="3826579">
+                <a:path w="0" h="3649639">
                   <a:moveTo>
-                    <a:pt x="0" y="3826579"/>
+                    <a:pt x="0" y="3649639"/>
                   </a:moveTo>
                   <a:lnTo>
                     <a:pt x="0" y="0"/>
@@ -2529,15 +2529,15 @@
           </p:nvSpPr>
           <p:spPr>
             <a:xfrm>
-              <a:off x="5160528" y="1896563"/>
-              <a:ext cx="0" cy="3826579"/>
+              <a:off x="5160528" y="2073503"/>
+              <a:ext cx="0" cy="3649639"/>
             </a:xfrm>
             <a:custGeom>
               <a:avLst/>
               <a:pathLst>
-                <a:path w="0" h="3826579">
+                <a:path w="0" h="3649639">
                   <a:moveTo>
-                    <a:pt x="0" y="3826579"/>
+                    <a:pt x="0" y="3649639"/>
                   </a:moveTo>
                   <a:lnTo>
                     <a:pt x="0" y="0"/>
@@ -2572,15 +2572,15 @@
           </p:nvSpPr>
           <p:spPr>
             <a:xfrm>
-              <a:off x="6933186" y="1896563"/>
-              <a:ext cx="0" cy="3826579"/>
+              <a:off x="6933186" y="2073503"/>
+              <a:ext cx="0" cy="3649639"/>
             </a:xfrm>
             <a:custGeom>
               <a:avLst/>
               <a:pathLst>
-                <a:path w="0" h="3826579">
+                <a:path w="0" h="3649639">
                   <a:moveTo>
-                    <a:pt x="0" y="3826579"/>
+                    <a:pt x="0" y="3649639"/>
                   </a:moveTo>
                   <a:lnTo>
                     <a:pt x="0" y="0"/>
@@ -2615,7 +2615,7 @@
           </p:nvSpPr>
           <p:spPr>
             <a:xfrm>
-              <a:off x="817517" y="5549207"/>
+              <a:off x="817517" y="5557249"/>
               <a:ext cx="7799693" cy="0"/>
             </a:xfrm>
             <a:custGeom>
@@ -2658,7 +2658,7 @@
           </p:nvSpPr>
           <p:spPr>
             <a:xfrm>
-              <a:off x="817517" y="4679530"/>
+              <a:off x="817517" y="4727786"/>
               <a:ext cx="7799693" cy="0"/>
             </a:xfrm>
             <a:custGeom>
@@ -2701,7 +2701,7 @@
           </p:nvSpPr>
           <p:spPr>
             <a:xfrm>
-              <a:off x="817517" y="3809853"/>
+              <a:off x="817517" y="3898322"/>
               <a:ext cx="7799693" cy="0"/>
             </a:xfrm>
             <a:custGeom>
@@ -2744,7 +2744,7 @@
           </p:nvSpPr>
           <p:spPr>
             <a:xfrm>
-              <a:off x="817517" y="2940175"/>
+              <a:off x="817517" y="3068859"/>
               <a:ext cx="7799693" cy="0"/>
             </a:xfrm>
             <a:custGeom>
@@ -2787,7 +2787,7 @@
           </p:nvSpPr>
           <p:spPr>
             <a:xfrm>
-              <a:off x="817517" y="2070498"/>
+              <a:off x="817517" y="2239395"/>
               <a:ext cx="7799693" cy="0"/>
             </a:xfrm>
             <a:custGeom>
@@ -2830,15 +2830,15 @@
           </p:nvSpPr>
           <p:spPr>
             <a:xfrm>
-              <a:off x="2501542" y="1896563"/>
-              <a:ext cx="0" cy="3826579"/>
+              <a:off x="2501542" y="2073503"/>
+              <a:ext cx="0" cy="3649639"/>
             </a:xfrm>
             <a:custGeom>
               <a:avLst/>
               <a:pathLst>
-                <a:path w="0" h="3826579">
+                <a:path w="0" h="3649639">
                   <a:moveTo>
-                    <a:pt x="0" y="3826579"/>
+                    <a:pt x="0" y="3649639"/>
                   </a:moveTo>
                   <a:lnTo>
                     <a:pt x="0" y="0"/>
@@ -2873,15 +2873,15 @@
           </p:nvSpPr>
           <p:spPr>
             <a:xfrm>
-              <a:off x="4274200" y="1896563"/>
-              <a:ext cx="0" cy="3826579"/>
+              <a:off x="4274200" y="2073503"/>
+              <a:ext cx="0" cy="3649639"/>
             </a:xfrm>
             <a:custGeom>
               <a:avLst/>
               <a:pathLst>
-                <a:path w="0" h="3826579">
+                <a:path w="0" h="3649639">
                   <a:moveTo>
-                    <a:pt x="0" y="3826579"/>
+                    <a:pt x="0" y="3649639"/>
                   </a:moveTo>
                   <a:lnTo>
                     <a:pt x="0" y="0"/>
@@ -2916,15 +2916,15 @@
           </p:nvSpPr>
           <p:spPr>
             <a:xfrm>
-              <a:off x="6046857" y="1896563"/>
-              <a:ext cx="0" cy="3826579"/>
+              <a:off x="6046857" y="2073503"/>
+              <a:ext cx="0" cy="3649639"/>
             </a:xfrm>
             <a:custGeom>
               <a:avLst/>
               <a:pathLst>
-                <a:path w="0" h="3826579">
+                <a:path w="0" h="3649639">
                   <a:moveTo>
-                    <a:pt x="0" y="3826579"/>
+                    <a:pt x="0" y="3649639"/>
                   </a:moveTo>
                   <a:lnTo>
                     <a:pt x="0" y="0"/>
@@ -2959,15 +2959,15 @@
           </p:nvSpPr>
           <p:spPr>
             <a:xfrm>
-              <a:off x="7819515" y="1896563"/>
-              <a:ext cx="0" cy="3826579"/>
+              <a:off x="7819515" y="2073503"/>
+              <a:ext cx="0" cy="3649639"/>
             </a:xfrm>
             <a:custGeom>
               <a:avLst/>
               <a:pathLst>
-                <a:path w="0" h="3826579">
+                <a:path w="0" h="3649639">
                   <a:moveTo>
-                    <a:pt x="0" y="3826579"/>
+                    <a:pt x="0" y="3649639"/>
                   </a:moveTo>
                   <a:lnTo>
                     <a:pt x="0" y="0"/>
@@ -3002,516 +3002,516 @@
           </p:nvSpPr>
           <p:spPr>
             <a:xfrm>
-              <a:off x="817517" y="1896563"/>
-              <a:ext cx="7370972" cy="3635765"/>
+              <a:off x="817517" y="2073503"/>
+              <a:ext cx="7370972" cy="3467649"/>
             </a:xfrm>
             <a:custGeom>
               <a:avLst/>
               <a:pathLst>
-                <a:path w="7370972" h="3635765">
+                <a:path w="7370972" h="3467649">
                   <a:moveTo>
                     <a:pt x="1935558" y="0"/>
                   </a:moveTo>
                   <a:lnTo>
-                    <a:pt x="1936589" y="3867"/>
-                  </a:lnTo>
-                  <a:lnTo>
-                    <a:pt x="2014223" y="273608"/>
-                  </a:lnTo>
-                  <a:lnTo>
-                    <a:pt x="2091857" y="523409"/>
-                  </a:lnTo>
-                  <a:lnTo>
-                    <a:pt x="2169491" y="754742"/>
-                  </a:lnTo>
-                  <a:lnTo>
-                    <a:pt x="2247125" y="968974"/>
-                  </a:lnTo>
-                  <a:lnTo>
-                    <a:pt x="2324759" y="1167369"/>
-                  </a:lnTo>
-                  <a:lnTo>
-                    <a:pt x="2402393" y="1351096"/>
-                  </a:lnTo>
-                  <a:lnTo>
-                    <a:pt x="2480027" y="1521242"/>
-                  </a:lnTo>
-                  <a:lnTo>
-                    <a:pt x="2557661" y="1678809"/>
-                  </a:lnTo>
-                  <a:lnTo>
-                    <a:pt x="2635295" y="1824728"/>
-                  </a:lnTo>
-                  <a:lnTo>
-                    <a:pt x="2712930" y="1959859"/>
-                  </a:lnTo>
-                  <a:lnTo>
-                    <a:pt x="2790564" y="2085001"/>
-                  </a:lnTo>
-                  <a:lnTo>
-                    <a:pt x="2868198" y="2200891"/>
-                  </a:lnTo>
-                  <a:lnTo>
-                    <a:pt x="2945832" y="2308214"/>
-                  </a:lnTo>
-                  <a:lnTo>
-                    <a:pt x="3023466" y="2407604"/>
-                  </a:lnTo>
-                  <a:lnTo>
-                    <a:pt x="3101100" y="2499645"/>
-                  </a:lnTo>
-                  <a:lnTo>
-                    <a:pt x="3178734" y="2584882"/>
-                  </a:lnTo>
-                  <a:lnTo>
-                    <a:pt x="3256368" y="2663818"/>
-                  </a:lnTo>
-                  <a:lnTo>
-                    <a:pt x="3334002" y="2736919"/>
-                  </a:lnTo>
-                  <a:lnTo>
-                    <a:pt x="3411636" y="2780633"/>
-                  </a:lnTo>
-                  <a:lnTo>
-                    <a:pt x="3489270" y="2773484"/>
-                  </a:lnTo>
-                  <a:lnTo>
-                    <a:pt x="3566904" y="2766276"/>
-                  </a:lnTo>
-                  <a:lnTo>
-                    <a:pt x="3644538" y="2759010"/>
-                  </a:lnTo>
-                  <a:lnTo>
-                    <a:pt x="3722172" y="2751684"/>
-                  </a:lnTo>
-                  <a:lnTo>
-                    <a:pt x="3799806" y="2744298"/>
-                  </a:lnTo>
-                  <a:lnTo>
-                    <a:pt x="3877440" y="2736851"/>
-                  </a:lnTo>
-                  <a:lnTo>
-                    <a:pt x="3955074" y="2729343"/>
-                  </a:lnTo>
-                  <a:lnTo>
-                    <a:pt x="4032708" y="2721774"/>
-                  </a:lnTo>
-                  <a:lnTo>
-                    <a:pt x="4110342" y="2714143"/>
-                  </a:lnTo>
-                  <a:lnTo>
-                    <a:pt x="4187976" y="2706449"/>
-                  </a:lnTo>
-                  <a:lnTo>
-                    <a:pt x="4265610" y="2698692"/>
-                  </a:lnTo>
-                  <a:lnTo>
-                    <a:pt x="4343244" y="2690871"/>
-                  </a:lnTo>
-                  <a:lnTo>
-                    <a:pt x="4420879" y="2682987"/>
-                  </a:lnTo>
-                  <a:lnTo>
-                    <a:pt x="4498513" y="2675037"/>
-                  </a:lnTo>
-                  <a:lnTo>
-                    <a:pt x="4576147" y="2667023"/>
-                  </a:lnTo>
-                  <a:lnTo>
-                    <a:pt x="4653781" y="2658943"/>
-                  </a:lnTo>
-                  <a:lnTo>
-                    <a:pt x="4731415" y="2650796"/>
-                  </a:lnTo>
-                  <a:lnTo>
-                    <a:pt x="4809049" y="2642583"/>
-                  </a:lnTo>
-                  <a:lnTo>
-                    <a:pt x="4886683" y="2634303"/>
-                  </a:lnTo>
-                  <a:lnTo>
-                    <a:pt x="4964317" y="2625954"/>
-                  </a:lnTo>
-                  <a:lnTo>
-                    <a:pt x="5041951" y="2617537"/>
-                  </a:lnTo>
-                  <a:lnTo>
-                    <a:pt x="5119585" y="2609051"/>
-                  </a:lnTo>
-                  <a:lnTo>
-                    <a:pt x="5197219" y="2600496"/>
-                  </a:lnTo>
-                  <a:lnTo>
-                    <a:pt x="5274853" y="2591870"/>
-                  </a:lnTo>
-                  <a:lnTo>
-                    <a:pt x="5352487" y="2583174"/>
-                  </a:lnTo>
-                  <a:lnTo>
-                    <a:pt x="5430121" y="2574407"/>
-                  </a:lnTo>
-                  <a:lnTo>
-                    <a:pt x="5507755" y="2565567"/>
-                  </a:lnTo>
-                  <a:lnTo>
-                    <a:pt x="5585389" y="2556655"/>
-                  </a:lnTo>
-                  <a:lnTo>
-                    <a:pt x="5663023" y="2547670"/>
-                  </a:lnTo>
-                  <a:lnTo>
-                    <a:pt x="5740657" y="2538612"/>
-                  </a:lnTo>
-                  <a:lnTo>
-                    <a:pt x="5818291" y="2529479"/>
-                  </a:lnTo>
-                  <a:lnTo>
-                    <a:pt x="5895925" y="2520271"/>
-                  </a:lnTo>
-                  <a:lnTo>
-                    <a:pt x="5973559" y="2510988"/>
-                  </a:lnTo>
-                  <a:lnTo>
-                    <a:pt x="6051193" y="2501628"/>
-                  </a:lnTo>
-                  <a:lnTo>
-                    <a:pt x="6128827" y="2492192"/>
-                  </a:lnTo>
-                  <a:lnTo>
-                    <a:pt x="6206462" y="2482679"/>
-                  </a:lnTo>
-                  <a:lnTo>
-                    <a:pt x="6284096" y="2473087"/>
-                  </a:lnTo>
-                  <a:lnTo>
-                    <a:pt x="6361730" y="2463417"/>
-                  </a:lnTo>
-                  <a:lnTo>
-                    <a:pt x="6439364" y="2453668"/>
-                  </a:lnTo>
-                  <a:lnTo>
-                    <a:pt x="6516998" y="2443839"/>
-                  </a:lnTo>
-                  <a:lnTo>
-                    <a:pt x="6594632" y="2433929"/>
-                  </a:lnTo>
-                  <a:lnTo>
-                    <a:pt x="6672266" y="2423938"/>
-                  </a:lnTo>
-                  <a:lnTo>
-                    <a:pt x="6749900" y="2413865"/>
-                  </a:lnTo>
-                  <a:lnTo>
-                    <a:pt x="6827534" y="2403709"/>
-                  </a:lnTo>
-                  <a:lnTo>
-                    <a:pt x="6905168" y="2393470"/>
-                  </a:lnTo>
-                  <a:lnTo>
-                    <a:pt x="6982802" y="2383147"/>
-                  </a:lnTo>
-                  <a:lnTo>
-                    <a:pt x="7060436" y="2372740"/>
-                  </a:lnTo>
-                  <a:lnTo>
-                    <a:pt x="7138070" y="2362247"/>
-                  </a:lnTo>
-                  <a:lnTo>
-                    <a:pt x="7215704" y="2351669"/>
-                  </a:lnTo>
-                  <a:lnTo>
-                    <a:pt x="7293338" y="2341003"/>
-                  </a:lnTo>
-                  <a:lnTo>
-                    <a:pt x="7370972" y="2330250"/>
-                  </a:lnTo>
-                  <a:lnTo>
-                    <a:pt x="7370972" y="3635765"/>
-                  </a:lnTo>
-                  <a:lnTo>
-                    <a:pt x="7293338" y="3634418"/>
-                  </a:lnTo>
-                  <a:lnTo>
-                    <a:pt x="7215704" y="3632963"/>
-                  </a:lnTo>
-                  <a:lnTo>
-                    <a:pt x="7138070" y="3631392"/>
-                  </a:lnTo>
-                  <a:lnTo>
-                    <a:pt x="7060436" y="3629695"/>
-                  </a:lnTo>
-                  <a:lnTo>
-                    <a:pt x="6982802" y="3627863"/>
-                  </a:lnTo>
-                  <a:lnTo>
-                    <a:pt x="6905168" y="3625885"/>
-                  </a:lnTo>
-                  <a:lnTo>
-                    <a:pt x="6827534" y="3623749"/>
-                  </a:lnTo>
-                  <a:lnTo>
-                    <a:pt x="6749900" y="3621443"/>
-                  </a:lnTo>
-                  <a:lnTo>
-                    <a:pt x="6672266" y="3618952"/>
-                  </a:lnTo>
-                  <a:lnTo>
-                    <a:pt x="6594632" y="3616262"/>
-                  </a:lnTo>
-                  <a:lnTo>
-                    <a:pt x="6516998" y="3613358"/>
-                  </a:lnTo>
-                  <a:lnTo>
-                    <a:pt x="6439364" y="3610222"/>
-                  </a:lnTo>
-                  <a:lnTo>
-                    <a:pt x="6361730" y="3606836"/>
-                  </a:lnTo>
-                  <a:lnTo>
-                    <a:pt x="6284096" y="3603179"/>
-                  </a:lnTo>
-                  <a:lnTo>
-                    <a:pt x="6206462" y="3599230"/>
-                  </a:lnTo>
-                  <a:lnTo>
-                    <a:pt x="6128827" y="3594967"/>
-                  </a:lnTo>
-                  <a:lnTo>
-                    <a:pt x="6051193" y="3590362"/>
-                  </a:lnTo>
-                  <a:lnTo>
-                    <a:pt x="5973559" y="3585391"/>
-                  </a:lnTo>
-                  <a:lnTo>
-                    <a:pt x="5895925" y="3580022"/>
-                  </a:lnTo>
-                  <a:lnTo>
-                    <a:pt x="5818291" y="3574225"/>
-                  </a:lnTo>
-                  <a:lnTo>
-                    <a:pt x="5740657" y="3567965"/>
-                  </a:lnTo>
-                  <a:lnTo>
-                    <a:pt x="5663023" y="3561205"/>
-                  </a:lnTo>
-                  <a:lnTo>
-                    <a:pt x="5585389" y="3553906"/>
-                  </a:lnTo>
-                  <a:lnTo>
-                    <a:pt x="5507755" y="3546024"/>
-                  </a:lnTo>
-                  <a:lnTo>
-                    <a:pt x="5430121" y="3537513"/>
-                  </a:lnTo>
-                  <a:lnTo>
-                    <a:pt x="5352487" y="3528322"/>
-                  </a:lnTo>
-                  <a:lnTo>
-                    <a:pt x="5274853" y="3518398"/>
-                  </a:lnTo>
-                  <a:lnTo>
-                    <a:pt x="5197219" y="3507681"/>
-                  </a:lnTo>
-                  <a:lnTo>
-                    <a:pt x="5119585" y="3496109"/>
-                  </a:lnTo>
-                  <a:lnTo>
-                    <a:pt x="5041951" y="3483613"/>
-                  </a:lnTo>
-                  <a:lnTo>
-                    <a:pt x="4964317" y="3470120"/>
-                  </a:lnTo>
-                  <a:lnTo>
-                    <a:pt x="4886683" y="3455549"/>
-                  </a:lnTo>
-                  <a:lnTo>
-                    <a:pt x="4809049" y="3439816"/>
-                  </a:lnTo>
-                  <a:lnTo>
-                    <a:pt x="4731415" y="3422826"/>
-                  </a:lnTo>
-                  <a:lnTo>
-                    <a:pt x="4653781" y="3404480"/>
-                  </a:lnTo>
-                  <a:lnTo>
-                    <a:pt x="4576147" y="3384670"/>
-                  </a:lnTo>
-                  <a:lnTo>
-                    <a:pt x="4498513" y="3363278"/>
-                  </a:lnTo>
-                  <a:lnTo>
-                    <a:pt x="4420879" y="3340179"/>
-                  </a:lnTo>
-                  <a:lnTo>
-                    <a:pt x="4343244" y="3315235"/>
-                  </a:lnTo>
-                  <a:lnTo>
-                    <a:pt x="4265610" y="3288301"/>
-                  </a:lnTo>
-                  <a:lnTo>
-                    <a:pt x="4187976" y="3259216"/>
-                  </a:lnTo>
-                  <a:lnTo>
-                    <a:pt x="4110342" y="3227809"/>
-                  </a:lnTo>
-                  <a:lnTo>
-                    <a:pt x="4032708" y="3193896"/>
-                  </a:lnTo>
-                  <a:lnTo>
-                    <a:pt x="3955074" y="3157275"/>
-                  </a:lnTo>
-                  <a:lnTo>
-                    <a:pt x="3877440" y="3117731"/>
-                  </a:lnTo>
-                  <a:lnTo>
-                    <a:pt x="3799806" y="3075030"/>
-                  </a:lnTo>
-                  <a:lnTo>
-                    <a:pt x="3722172" y="3028920"/>
-                  </a:lnTo>
-                  <a:lnTo>
-                    <a:pt x="3644538" y="2979129"/>
-                  </a:lnTo>
-                  <a:lnTo>
-                    <a:pt x="3566904" y="2925364"/>
-                  </a:lnTo>
-                  <a:lnTo>
-                    <a:pt x="3489270" y="2867307"/>
-                  </a:lnTo>
-                  <a:lnTo>
-                    <a:pt x="3411636" y="2804615"/>
-                  </a:lnTo>
-                  <a:lnTo>
-                    <a:pt x="3334002" y="2787723"/>
-                  </a:lnTo>
-                  <a:lnTo>
-                    <a:pt x="3256368" y="2794756"/>
-                  </a:lnTo>
-                  <a:lnTo>
-                    <a:pt x="3178734" y="2801732"/>
-                  </a:lnTo>
-                  <a:lnTo>
-                    <a:pt x="3101100" y="2808651"/>
-                  </a:lnTo>
-                  <a:lnTo>
-                    <a:pt x="3023466" y="2815514"/>
-                  </a:lnTo>
-                  <a:lnTo>
-                    <a:pt x="2945832" y="2822321"/>
-                  </a:lnTo>
-                  <a:lnTo>
-                    <a:pt x="2868198" y="2829073"/>
-                  </a:lnTo>
-                  <a:lnTo>
-                    <a:pt x="2790564" y="2835769"/>
-                  </a:lnTo>
-                  <a:lnTo>
-                    <a:pt x="2712930" y="2842412"/>
-                  </a:lnTo>
-                  <a:lnTo>
-                    <a:pt x="2635295" y="2849000"/>
-                  </a:lnTo>
-                  <a:lnTo>
-                    <a:pt x="2557661" y="2855535"/>
-                  </a:lnTo>
-                  <a:lnTo>
-                    <a:pt x="2480027" y="2862016"/>
-                  </a:lnTo>
-                  <a:lnTo>
-                    <a:pt x="2402393" y="2868445"/>
-                  </a:lnTo>
-                  <a:lnTo>
-                    <a:pt x="2324759" y="2874822"/>
-                  </a:lnTo>
-                  <a:lnTo>
-                    <a:pt x="2247125" y="2881147"/>
-                  </a:lnTo>
-                  <a:lnTo>
-                    <a:pt x="2169491" y="2887420"/>
-                  </a:lnTo>
-                  <a:lnTo>
-                    <a:pt x="2091857" y="2893642"/>
-                  </a:lnTo>
-                  <a:lnTo>
-                    <a:pt x="2014223" y="2899814"/>
-                  </a:lnTo>
-                  <a:lnTo>
-                    <a:pt x="1936589" y="2905936"/>
-                  </a:lnTo>
-                  <a:lnTo>
-                    <a:pt x="1858955" y="2912007"/>
-                  </a:lnTo>
-                  <a:lnTo>
-                    <a:pt x="1781321" y="2918030"/>
-                  </a:lnTo>
-                  <a:lnTo>
-                    <a:pt x="1703687" y="2924003"/>
-                  </a:lnTo>
-                  <a:lnTo>
-                    <a:pt x="1626053" y="2929928"/>
-                  </a:lnTo>
-                  <a:lnTo>
-                    <a:pt x="1548419" y="2935805"/>
-                  </a:lnTo>
-                  <a:lnTo>
-                    <a:pt x="1470785" y="2941634"/>
-                  </a:lnTo>
-                  <a:lnTo>
-                    <a:pt x="1393151" y="2947415"/>
-                  </a:lnTo>
-                  <a:lnTo>
-                    <a:pt x="1315517" y="2953150"/>
-                  </a:lnTo>
-                  <a:lnTo>
-                    <a:pt x="1237883" y="2958838"/>
-                  </a:lnTo>
-                  <a:lnTo>
-                    <a:pt x="1160249" y="2964479"/>
-                  </a:lnTo>
-                  <a:lnTo>
-                    <a:pt x="1082615" y="2970075"/>
-                  </a:lnTo>
-                  <a:lnTo>
-                    <a:pt x="1004981" y="2975625"/>
-                  </a:lnTo>
-                  <a:lnTo>
-                    <a:pt x="927346" y="2981130"/>
-                  </a:lnTo>
-                  <a:lnTo>
-                    <a:pt x="849712" y="2986591"/>
-                  </a:lnTo>
-                  <a:lnTo>
-                    <a:pt x="772078" y="2992007"/>
-                  </a:lnTo>
-                  <a:lnTo>
-                    <a:pt x="694444" y="2997378"/>
-                  </a:lnTo>
-                  <a:lnTo>
-                    <a:pt x="616810" y="3002707"/>
-                  </a:lnTo>
-                  <a:lnTo>
-                    <a:pt x="539176" y="3007992"/>
-                  </a:lnTo>
-                  <a:lnTo>
-                    <a:pt x="461542" y="3013234"/>
-                  </a:lnTo>
-                  <a:lnTo>
-                    <a:pt x="383908" y="3018433"/>
-                  </a:lnTo>
-                  <a:lnTo>
-                    <a:pt x="306274" y="3023590"/>
-                  </a:lnTo>
-                  <a:lnTo>
-                    <a:pt x="228640" y="3028705"/>
-                  </a:lnTo>
-                  <a:lnTo>
-                    <a:pt x="151006" y="3033778"/>
-                  </a:lnTo>
-                  <a:lnTo>
-                    <a:pt x="73372" y="3038811"/>
-                  </a:lnTo>
-                  <a:lnTo>
-                    <a:pt x="0" y="3043528"/>
+                    <a:pt x="1936589" y="3688"/>
+                  </a:lnTo>
+                  <a:lnTo>
+                    <a:pt x="2014223" y="260957"/>
+                  </a:lnTo>
+                  <a:lnTo>
+                    <a:pt x="2091857" y="499206"/>
+                  </a:lnTo>
+                  <a:lnTo>
+                    <a:pt x="2169491" y="719843"/>
+                  </a:lnTo>
+                  <a:lnTo>
+                    <a:pt x="2247125" y="924169"/>
+                  </a:lnTo>
+                  <a:lnTo>
+                    <a:pt x="2324759" y="1113390"/>
+                  </a:lnTo>
+                  <a:lnTo>
+                    <a:pt x="2402393" y="1288622"/>
+                  </a:lnTo>
+                  <a:lnTo>
+                    <a:pt x="2480027" y="1450900"/>
+                  </a:lnTo>
+                  <a:lnTo>
+                    <a:pt x="2557661" y="1601182"/>
+                  </a:lnTo>
+                  <a:lnTo>
+                    <a:pt x="2635295" y="1740353"/>
+                  </a:lnTo>
+                  <a:lnTo>
+                    <a:pt x="2712930" y="1869236"/>
+                  </a:lnTo>
+                  <a:lnTo>
+                    <a:pt x="2790564" y="1988591"/>
+                  </a:lnTo>
+                  <a:lnTo>
+                    <a:pt x="2868198" y="2099123"/>
+                  </a:lnTo>
+                  <a:lnTo>
+                    <a:pt x="2945832" y="2201483"/>
+                  </a:lnTo>
+                  <a:lnTo>
+                    <a:pt x="3023466" y="2296277"/>
+                  </a:lnTo>
+                  <a:lnTo>
+                    <a:pt x="3101100" y="2384062"/>
+                  </a:lnTo>
+                  <a:lnTo>
+                    <a:pt x="3178734" y="2465358"/>
+                  </a:lnTo>
+                  <a:lnTo>
+                    <a:pt x="3256368" y="2540644"/>
+                  </a:lnTo>
+                  <a:lnTo>
+                    <a:pt x="3334002" y="2610364"/>
+                  </a:lnTo>
+                  <a:lnTo>
+                    <a:pt x="3411636" y="2652057"/>
+                  </a:lnTo>
+                  <a:lnTo>
+                    <a:pt x="3489270" y="2645239"/>
+                  </a:lnTo>
+                  <a:lnTo>
+                    <a:pt x="3566904" y="2638365"/>
+                  </a:lnTo>
+                  <a:lnTo>
+                    <a:pt x="3644538" y="2631434"/>
+                  </a:lnTo>
+                  <a:lnTo>
+                    <a:pt x="3722172" y="2624447"/>
+                  </a:lnTo>
+                  <a:lnTo>
+                    <a:pt x="3799806" y="2617402"/>
+                  </a:lnTo>
+                  <a:lnTo>
+                    <a:pt x="3877440" y="2610300"/>
+                  </a:lnTo>
+                  <a:lnTo>
+                    <a:pt x="3955074" y="2603139"/>
+                  </a:lnTo>
+                  <a:lnTo>
+                    <a:pt x="4032708" y="2595920"/>
+                  </a:lnTo>
+                  <a:lnTo>
+                    <a:pt x="4110342" y="2588642"/>
+                  </a:lnTo>
+                  <a:lnTo>
+                    <a:pt x="4187976" y="2581304"/>
+                  </a:lnTo>
+                  <a:lnTo>
+                    <a:pt x="4265610" y="2573905"/>
+                  </a:lnTo>
+                  <a:lnTo>
+                    <a:pt x="4343244" y="2566446"/>
+                  </a:lnTo>
+                  <a:lnTo>
+                    <a:pt x="4420879" y="2558926"/>
+                  </a:lnTo>
+                  <a:lnTo>
+                    <a:pt x="4498513" y="2551345"/>
+                  </a:lnTo>
+                  <a:lnTo>
+                    <a:pt x="4576147" y="2543701"/>
+                  </a:lnTo>
+                  <a:lnTo>
+                    <a:pt x="4653781" y="2535994"/>
+                  </a:lnTo>
+                  <a:lnTo>
+                    <a:pt x="4731415" y="2528224"/>
+                  </a:lnTo>
+                  <a:lnTo>
+                    <a:pt x="4809049" y="2520391"/>
+                  </a:lnTo>
+                  <a:lnTo>
+                    <a:pt x="4886683" y="2512493"/>
+                  </a:lnTo>
+                  <a:lnTo>
+                    <a:pt x="4964317" y="2504531"/>
+                  </a:lnTo>
+                  <a:lnTo>
+                    <a:pt x="5041951" y="2496503"/>
+                  </a:lnTo>
+                  <a:lnTo>
+                    <a:pt x="5119585" y="2488410"/>
+                  </a:lnTo>
+                  <a:lnTo>
+                    <a:pt x="5197219" y="2480250"/>
+                  </a:lnTo>
+                  <a:lnTo>
+                    <a:pt x="5274853" y="2472023"/>
+                  </a:lnTo>
+                  <a:lnTo>
+                    <a:pt x="5352487" y="2463729"/>
+                  </a:lnTo>
+                  <a:lnTo>
+                    <a:pt x="5430121" y="2455367"/>
+                  </a:lnTo>
+                  <a:lnTo>
+                    <a:pt x="5507755" y="2446936"/>
+                  </a:lnTo>
+                  <a:lnTo>
+                    <a:pt x="5585389" y="2438436"/>
+                  </a:lnTo>
+                  <a:lnTo>
+                    <a:pt x="5663023" y="2429867"/>
+                  </a:lnTo>
+                  <a:lnTo>
+                    <a:pt x="5740657" y="2421227"/>
+                  </a:lnTo>
+                  <a:lnTo>
+                    <a:pt x="5818291" y="2412516"/>
+                  </a:lnTo>
+                  <a:lnTo>
+                    <a:pt x="5895925" y="2403734"/>
+                  </a:lnTo>
+                  <a:lnTo>
+                    <a:pt x="5973559" y="2394880"/>
+                  </a:lnTo>
+                  <a:lnTo>
+                    <a:pt x="6051193" y="2385954"/>
+                  </a:lnTo>
+                  <a:lnTo>
+                    <a:pt x="6128827" y="2376954"/>
+                  </a:lnTo>
+                  <a:lnTo>
+                    <a:pt x="6206462" y="2367881"/>
+                  </a:lnTo>
+                  <a:lnTo>
+                    <a:pt x="6284096" y="2358733"/>
+                  </a:lnTo>
+                  <a:lnTo>
+                    <a:pt x="6361730" y="2349510"/>
+                  </a:lnTo>
+                  <a:lnTo>
+                    <a:pt x="6439364" y="2340211"/>
+                  </a:lnTo>
+                  <a:lnTo>
+                    <a:pt x="6516998" y="2330836"/>
+                  </a:lnTo>
+                  <a:lnTo>
+                    <a:pt x="6594632" y="2321385"/>
+                  </a:lnTo>
+                  <a:lnTo>
+                    <a:pt x="6672266" y="2311856"/>
+                  </a:lnTo>
+                  <a:lnTo>
+                    <a:pt x="6749900" y="2302248"/>
+                  </a:lnTo>
+                  <a:lnTo>
+                    <a:pt x="6827534" y="2292562"/>
+                  </a:lnTo>
+                  <a:lnTo>
+                    <a:pt x="6905168" y="2282797"/>
+                  </a:lnTo>
+                  <a:lnTo>
+                    <a:pt x="6982802" y="2272952"/>
+                  </a:lnTo>
+                  <a:lnTo>
+                    <a:pt x="7060436" y="2263025"/>
+                  </a:lnTo>
+                  <a:lnTo>
+                    <a:pt x="7138070" y="2253018"/>
+                  </a:lnTo>
+                  <a:lnTo>
+                    <a:pt x="7215704" y="2242928"/>
+                  </a:lnTo>
+                  <a:lnTo>
+                    <a:pt x="7293338" y="2232756"/>
+                  </a:lnTo>
+                  <a:lnTo>
+                    <a:pt x="7370972" y="2222500"/>
+                  </a:lnTo>
+                  <a:lnTo>
+                    <a:pt x="7370972" y="3467649"/>
+                  </a:lnTo>
+                  <a:lnTo>
+                    <a:pt x="7293338" y="3466364"/>
+                  </a:lnTo>
+                  <a:lnTo>
+                    <a:pt x="7215704" y="3464976"/>
+                  </a:lnTo>
+                  <a:lnTo>
+                    <a:pt x="7138070" y="3463478"/>
+                  </a:lnTo>
+                  <a:lnTo>
+                    <a:pt x="7060436" y="3461859"/>
+                  </a:lnTo>
+                  <a:lnTo>
+                    <a:pt x="6982802" y="3460112"/>
+                  </a:lnTo>
+                  <a:lnTo>
+                    <a:pt x="6905168" y="3458226"/>
+                  </a:lnTo>
+                  <a:lnTo>
+                    <a:pt x="6827534" y="3456188"/>
+                  </a:lnTo>
+                  <a:lnTo>
+                    <a:pt x="6749900" y="3453988"/>
+                  </a:lnTo>
+                  <a:lnTo>
+                    <a:pt x="6672266" y="3451613"/>
+                  </a:lnTo>
+                  <a:lnTo>
+                    <a:pt x="6594632" y="3449048"/>
+                  </a:lnTo>
+                  <a:lnTo>
+                    <a:pt x="6516998" y="3446278"/>
+                  </a:lnTo>
+                  <a:lnTo>
+                    <a:pt x="6439364" y="3443287"/>
+                  </a:lnTo>
+                  <a:lnTo>
+                    <a:pt x="6361730" y="3440057"/>
+                  </a:lnTo>
+                  <a:lnTo>
+                    <a:pt x="6284096" y="3436569"/>
+                  </a:lnTo>
+                  <a:lnTo>
+                    <a:pt x="6206462" y="3432803"/>
+                  </a:lnTo>
+                  <a:lnTo>
+                    <a:pt x="6128827" y="3428737"/>
+                  </a:lnTo>
+                  <a:lnTo>
+                    <a:pt x="6051193" y="3424345"/>
+                  </a:lnTo>
+                  <a:lnTo>
+                    <a:pt x="5973559" y="3419603"/>
+                  </a:lnTo>
+                  <a:lnTo>
+                    <a:pt x="5895925" y="3414483"/>
+                  </a:lnTo>
+                  <a:lnTo>
+                    <a:pt x="5818291" y="3408954"/>
+                  </a:lnTo>
+                  <a:lnTo>
+                    <a:pt x="5740657" y="3402983"/>
+                  </a:lnTo>
+                  <a:lnTo>
+                    <a:pt x="5663023" y="3396536"/>
+                  </a:lnTo>
+                  <a:lnTo>
+                    <a:pt x="5585389" y="3389574"/>
+                  </a:lnTo>
+                  <a:lnTo>
+                    <a:pt x="5507755" y="3382057"/>
+                  </a:lnTo>
+                  <a:lnTo>
+                    <a:pt x="5430121" y="3373939"/>
+                  </a:lnTo>
+                  <a:lnTo>
+                    <a:pt x="5352487" y="3365174"/>
+                  </a:lnTo>
+                  <a:lnTo>
+                    <a:pt x="5274853" y="3355708"/>
+                  </a:lnTo>
+                  <a:lnTo>
+                    <a:pt x="5197219" y="3345487"/>
+                  </a:lnTo>
+                  <a:lnTo>
+                    <a:pt x="5119585" y="3334450"/>
+                  </a:lnTo>
+                  <a:lnTo>
+                    <a:pt x="5041951" y="3322532"/>
+                  </a:lnTo>
+                  <a:lnTo>
+                    <a:pt x="4964317" y="3309663"/>
+                  </a:lnTo>
+                  <a:lnTo>
+                    <a:pt x="4886683" y="3295766"/>
+                  </a:lnTo>
+                  <a:lnTo>
+                    <a:pt x="4809049" y="3280760"/>
+                  </a:lnTo>
+                  <a:lnTo>
+                    <a:pt x="4731415" y="3264556"/>
+                  </a:lnTo>
+                  <a:lnTo>
+                    <a:pt x="4653781" y="3247058"/>
+                  </a:lnTo>
+                  <a:lnTo>
+                    <a:pt x="4576147" y="3228164"/>
+                  </a:lnTo>
+                  <a:lnTo>
+                    <a:pt x="4498513" y="3207761"/>
+                  </a:lnTo>
+                  <a:lnTo>
+                    <a:pt x="4420879" y="3185730"/>
+                  </a:lnTo>
+                  <a:lnTo>
+                    <a:pt x="4343244" y="3161940"/>
+                  </a:lnTo>
+                  <a:lnTo>
+                    <a:pt x="4265610" y="3136251"/>
+                  </a:lnTo>
+                  <a:lnTo>
+                    <a:pt x="4187976" y="3108511"/>
+                  </a:lnTo>
+                  <a:lnTo>
+                    <a:pt x="4110342" y="3078557"/>
+                  </a:lnTo>
+                  <a:lnTo>
+                    <a:pt x="4032708" y="3046211"/>
+                  </a:lnTo>
+                  <a:lnTo>
+                    <a:pt x="3955074" y="3011284"/>
+                  </a:lnTo>
+                  <a:lnTo>
+                    <a:pt x="3877440" y="2973568"/>
+                  </a:lnTo>
+                  <a:lnTo>
+                    <a:pt x="3799806" y="2932841"/>
+                  </a:lnTo>
+                  <a:lnTo>
+                    <a:pt x="3722172" y="2888864"/>
+                  </a:lnTo>
+                  <a:lnTo>
+                    <a:pt x="3644538" y="2841375"/>
+                  </a:lnTo>
+                  <a:lnTo>
+                    <a:pt x="3566904" y="2790096"/>
+                  </a:lnTo>
+                  <a:lnTo>
+                    <a:pt x="3489270" y="2734724"/>
+                  </a:lnTo>
+                  <a:lnTo>
+                    <a:pt x="3411636" y="2674931"/>
+                  </a:lnTo>
+                  <a:lnTo>
+                    <a:pt x="3334002" y="2658820"/>
+                  </a:lnTo>
+                  <a:lnTo>
+                    <a:pt x="3256368" y="2665528"/>
+                  </a:lnTo>
+                  <a:lnTo>
+                    <a:pt x="3178734" y="2672181"/>
+                  </a:lnTo>
+                  <a:lnTo>
+                    <a:pt x="3101100" y="2678780"/>
+                  </a:lnTo>
+                  <a:lnTo>
+                    <a:pt x="3023466" y="2685326"/>
+                  </a:lnTo>
+                  <a:lnTo>
+                    <a:pt x="2945832" y="2691818"/>
+                  </a:lnTo>
+                  <a:lnTo>
+                    <a:pt x="2868198" y="2698257"/>
+                  </a:lnTo>
+                  <a:lnTo>
+                    <a:pt x="2790564" y="2704644"/>
+                  </a:lnTo>
+                  <a:lnTo>
+                    <a:pt x="2712930" y="2710980"/>
+                  </a:lnTo>
+                  <a:lnTo>
+                    <a:pt x="2635295" y="2717263"/>
+                  </a:lnTo>
+                  <a:lnTo>
+                    <a:pt x="2557661" y="2723496"/>
+                  </a:lnTo>
+                  <a:lnTo>
+                    <a:pt x="2480027" y="2729678"/>
+                  </a:lnTo>
+                  <a:lnTo>
+                    <a:pt x="2402393" y="2735809"/>
+                  </a:lnTo>
+                  <a:lnTo>
+                    <a:pt x="2324759" y="2741891"/>
+                  </a:lnTo>
+                  <a:lnTo>
+                    <a:pt x="2247125" y="2747924"/>
+                  </a:lnTo>
+                  <a:lnTo>
+                    <a:pt x="2169491" y="2753907"/>
+                  </a:lnTo>
+                  <a:lnTo>
+                    <a:pt x="2091857" y="2759841"/>
+                  </a:lnTo>
+                  <a:lnTo>
+                    <a:pt x="2014223" y="2765728"/>
+                  </a:lnTo>
+                  <a:lnTo>
+                    <a:pt x="1936589" y="2771566"/>
+                  </a:lnTo>
+                  <a:lnTo>
+                    <a:pt x="1858955" y="2777357"/>
+                  </a:lnTo>
+                  <a:lnTo>
+                    <a:pt x="1781321" y="2783101"/>
+                  </a:lnTo>
+                  <a:lnTo>
+                    <a:pt x="1703687" y="2788798"/>
+                  </a:lnTo>
+                  <a:lnTo>
+                    <a:pt x="1626053" y="2794449"/>
+                  </a:lnTo>
+                  <a:lnTo>
+                    <a:pt x="1548419" y="2800054"/>
+                  </a:lnTo>
+                  <a:lnTo>
+                    <a:pt x="1470785" y="2805614"/>
+                  </a:lnTo>
+                  <a:lnTo>
+                    <a:pt x="1393151" y="2811128"/>
+                  </a:lnTo>
+                  <a:lnTo>
+                    <a:pt x="1315517" y="2816597"/>
+                  </a:lnTo>
+                  <a:lnTo>
+                    <a:pt x="1237883" y="2822022"/>
+                  </a:lnTo>
+                  <a:lnTo>
+                    <a:pt x="1160249" y="2827403"/>
+                  </a:lnTo>
+                  <a:lnTo>
+                    <a:pt x="1082615" y="2832740"/>
+                  </a:lnTo>
+                  <a:lnTo>
+                    <a:pt x="1004981" y="2838033"/>
+                  </a:lnTo>
+                  <a:lnTo>
+                    <a:pt x="927346" y="2843284"/>
+                  </a:lnTo>
+                  <a:lnTo>
+                    <a:pt x="849712" y="2848492"/>
+                  </a:lnTo>
+                  <a:lnTo>
+                    <a:pt x="772078" y="2853657"/>
+                  </a:lnTo>
+                  <a:lnTo>
+                    <a:pt x="694444" y="2858781"/>
+                  </a:lnTo>
+                  <a:lnTo>
+                    <a:pt x="616810" y="2863863"/>
+                  </a:lnTo>
+                  <a:lnTo>
+                    <a:pt x="539176" y="2868903"/>
+                  </a:lnTo>
+                  <a:lnTo>
+                    <a:pt x="461542" y="2873903"/>
+                  </a:lnTo>
+                  <a:lnTo>
+                    <a:pt x="383908" y="2878862"/>
+                  </a:lnTo>
+                  <a:lnTo>
+                    <a:pt x="306274" y="2883780"/>
+                  </a:lnTo>
+                  <a:lnTo>
+                    <a:pt x="228640" y="2888659"/>
+                  </a:lnTo>
+                  <a:lnTo>
+                    <a:pt x="151006" y="2893498"/>
+                  </a:lnTo>
+                  <a:lnTo>
+                    <a:pt x="73372" y="2898297"/>
+                  </a:lnTo>
+                  <a:lnTo>
+                    <a:pt x="0" y="2902796"/>
                   </a:lnTo>
                   <a:close/>
                 </a:path>
@@ -3537,228 +3537,228 @@
           </p:nvSpPr>
           <p:spPr>
             <a:xfrm>
-              <a:off x="2753076" y="1896563"/>
-              <a:ext cx="5435413" cy="2780633"/>
+              <a:off x="2753076" y="2073503"/>
+              <a:ext cx="5435413" cy="2652057"/>
             </a:xfrm>
             <a:custGeom>
               <a:avLst/>
               <a:pathLst>
-                <a:path w="5435413" h="2780633">
+                <a:path w="5435413" h="2652057">
                   <a:moveTo>
                     <a:pt x="0" y="0"/>
                   </a:moveTo>
                   <a:lnTo>
-                    <a:pt x="1030" y="3867"/>
-                  </a:lnTo>
-                  <a:lnTo>
-                    <a:pt x="78664" y="273608"/>
-                  </a:lnTo>
-                  <a:lnTo>
-                    <a:pt x="156298" y="523409"/>
-                  </a:lnTo>
-                  <a:lnTo>
-                    <a:pt x="233932" y="754742"/>
-                  </a:lnTo>
-                  <a:lnTo>
-                    <a:pt x="311566" y="968974"/>
-                  </a:lnTo>
-                  <a:lnTo>
-                    <a:pt x="389200" y="1167369"/>
-                  </a:lnTo>
-                  <a:lnTo>
-                    <a:pt x="466835" y="1351096"/>
-                  </a:lnTo>
-                  <a:lnTo>
-                    <a:pt x="544469" y="1521242"/>
-                  </a:lnTo>
-                  <a:lnTo>
-                    <a:pt x="622103" y="1678809"/>
-                  </a:lnTo>
-                  <a:lnTo>
-                    <a:pt x="699737" y="1824728"/>
-                  </a:lnTo>
-                  <a:lnTo>
-                    <a:pt x="777371" y="1959859"/>
-                  </a:lnTo>
-                  <a:lnTo>
-                    <a:pt x="855005" y="2085001"/>
-                  </a:lnTo>
-                  <a:lnTo>
-                    <a:pt x="932639" y="2200891"/>
-                  </a:lnTo>
-                  <a:lnTo>
-                    <a:pt x="1010273" y="2308214"/>
-                  </a:lnTo>
-                  <a:lnTo>
-                    <a:pt x="1087907" y="2407604"/>
-                  </a:lnTo>
-                  <a:lnTo>
-                    <a:pt x="1165541" y="2499645"/>
-                  </a:lnTo>
-                  <a:lnTo>
-                    <a:pt x="1243175" y="2584882"/>
-                  </a:lnTo>
-                  <a:lnTo>
-                    <a:pt x="1320809" y="2663818"/>
-                  </a:lnTo>
-                  <a:lnTo>
-                    <a:pt x="1398443" y="2736919"/>
-                  </a:lnTo>
-                  <a:lnTo>
-                    <a:pt x="1476077" y="2780633"/>
-                  </a:lnTo>
-                  <a:lnTo>
-                    <a:pt x="1553711" y="2773484"/>
-                  </a:lnTo>
-                  <a:lnTo>
-                    <a:pt x="1631345" y="2766276"/>
-                  </a:lnTo>
-                  <a:lnTo>
-                    <a:pt x="1708979" y="2759010"/>
-                  </a:lnTo>
-                  <a:lnTo>
-                    <a:pt x="1786613" y="2751684"/>
-                  </a:lnTo>
-                  <a:lnTo>
-                    <a:pt x="1864247" y="2744298"/>
-                  </a:lnTo>
-                  <a:lnTo>
-                    <a:pt x="1941881" y="2736851"/>
-                  </a:lnTo>
-                  <a:lnTo>
-                    <a:pt x="2019515" y="2729343"/>
-                  </a:lnTo>
-                  <a:lnTo>
-                    <a:pt x="2097149" y="2721774"/>
-                  </a:lnTo>
-                  <a:lnTo>
-                    <a:pt x="2174784" y="2714143"/>
-                  </a:lnTo>
-                  <a:lnTo>
-                    <a:pt x="2252418" y="2706449"/>
-                  </a:lnTo>
-                  <a:lnTo>
-                    <a:pt x="2330052" y="2698692"/>
-                  </a:lnTo>
-                  <a:lnTo>
-                    <a:pt x="2407686" y="2690871"/>
-                  </a:lnTo>
-                  <a:lnTo>
-                    <a:pt x="2485320" y="2682987"/>
-                  </a:lnTo>
-                  <a:lnTo>
-                    <a:pt x="2562954" y="2675037"/>
-                  </a:lnTo>
-                  <a:lnTo>
-                    <a:pt x="2640588" y="2667023"/>
-                  </a:lnTo>
-                  <a:lnTo>
-                    <a:pt x="2718222" y="2658943"/>
-                  </a:lnTo>
-                  <a:lnTo>
-                    <a:pt x="2795856" y="2650796"/>
-                  </a:lnTo>
-                  <a:lnTo>
-                    <a:pt x="2873490" y="2642583"/>
-                  </a:lnTo>
-                  <a:lnTo>
-                    <a:pt x="2951124" y="2634303"/>
-                  </a:lnTo>
-                  <a:lnTo>
-                    <a:pt x="3028758" y="2625954"/>
-                  </a:lnTo>
-                  <a:lnTo>
-                    <a:pt x="3106392" y="2617537"/>
-                  </a:lnTo>
-                  <a:lnTo>
-                    <a:pt x="3184026" y="2609051"/>
-                  </a:lnTo>
-                  <a:lnTo>
-                    <a:pt x="3261660" y="2600496"/>
-                  </a:lnTo>
-                  <a:lnTo>
-                    <a:pt x="3339294" y="2591870"/>
-                  </a:lnTo>
-                  <a:lnTo>
-                    <a:pt x="3416928" y="2583174"/>
-                  </a:lnTo>
-                  <a:lnTo>
-                    <a:pt x="3494562" y="2574407"/>
-                  </a:lnTo>
-                  <a:lnTo>
-                    <a:pt x="3572196" y="2565567"/>
-                  </a:lnTo>
-                  <a:lnTo>
-                    <a:pt x="3649830" y="2556655"/>
-                  </a:lnTo>
-                  <a:lnTo>
-                    <a:pt x="3727464" y="2547670"/>
-                  </a:lnTo>
-                  <a:lnTo>
-                    <a:pt x="3805098" y="2538612"/>
-                  </a:lnTo>
-                  <a:lnTo>
-                    <a:pt x="3882732" y="2529479"/>
-                  </a:lnTo>
-                  <a:lnTo>
-                    <a:pt x="3960367" y="2520271"/>
-                  </a:lnTo>
-                  <a:lnTo>
-                    <a:pt x="4038001" y="2510988"/>
-                  </a:lnTo>
-                  <a:lnTo>
-                    <a:pt x="4115635" y="2501628"/>
-                  </a:lnTo>
-                  <a:lnTo>
-                    <a:pt x="4193269" y="2492192"/>
-                  </a:lnTo>
-                  <a:lnTo>
-                    <a:pt x="4270903" y="2482679"/>
-                  </a:lnTo>
-                  <a:lnTo>
-                    <a:pt x="4348537" y="2473087"/>
-                  </a:lnTo>
-                  <a:lnTo>
-                    <a:pt x="4426171" y="2463417"/>
-                  </a:lnTo>
-                  <a:lnTo>
-                    <a:pt x="4503805" y="2453668"/>
-                  </a:lnTo>
-                  <a:lnTo>
-                    <a:pt x="4581439" y="2443839"/>
-                  </a:lnTo>
-                  <a:lnTo>
-                    <a:pt x="4659073" y="2433929"/>
-                  </a:lnTo>
-                  <a:lnTo>
-                    <a:pt x="4736707" y="2423938"/>
-                  </a:lnTo>
-                  <a:lnTo>
-                    <a:pt x="4814341" y="2413865"/>
-                  </a:lnTo>
-                  <a:lnTo>
-                    <a:pt x="4891975" y="2403709"/>
-                  </a:lnTo>
-                  <a:lnTo>
-                    <a:pt x="4969609" y="2393470"/>
-                  </a:lnTo>
-                  <a:lnTo>
-                    <a:pt x="5047243" y="2383147"/>
-                  </a:lnTo>
-                  <a:lnTo>
-                    <a:pt x="5124877" y="2372740"/>
-                  </a:lnTo>
-                  <a:lnTo>
-                    <a:pt x="5202511" y="2362247"/>
-                  </a:lnTo>
-                  <a:lnTo>
-                    <a:pt x="5280145" y="2351669"/>
-                  </a:lnTo>
-                  <a:lnTo>
-                    <a:pt x="5357779" y="2341003"/>
-                  </a:lnTo>
-                  <a:lnTo>
-                    <a:pt x="5435413" y="2330250"/>
+                    <a:pt x="1030" y="3688"/>
+                  </a:lnTo>
+                  <a:lnTo>
+                    <a:pt x="78664" y="260957"/>
+                  </a:lnTo>
+                  <a:lnTo>
+                    <a:pt x="156298" y="499206"/>
+                  </a:lnTo>
+                  <a:lnTo>
+                    <a:pt x="233932" y="719843"/>
+                  </a:lnTo>
+                  <a:lnTo>
+                    <a:pt x="311566" y="924169"/>
+                  </a:lnTo>
+                  <a:lnTo>
+                    <a:pt x="389200" y="1113390"/>
+                  </a:lnTo>
+                  <a:lnTo>
+                    <a:pt x="466835" y="1288622"/>
+                  </a:lnTo>
+                  <a:lnTo>
+                    <a:pt x="544469" y="1450900"/>
+                  </a:lnTo>
+                  <a:lnTo>
+                    <a:pt x="622103" y="1601182"/>
+                  </a:lnTo>
+                  <a:lnTo>
+                    <a:pt x="699737" y="1740353"/>
+                  </a:lnTo>
+                  <a:lnTo>
+                    <a:pt x="777371" y="1869236"/>
+                  </a:lnTo>
+                  <a:lnTo>
+                    <a:pt x="855005" y="1988591"/>
+                  </a:lnTo>
+                  <a:lnTo>
+                    <a:pt x="932639" y="2099123"/>
+                  </a:lnTo>
+                  <a:lnTo>
+                    <a:pt x="1010273" y="2201483"/>
+                  </a:lnTo>
+                  <a:lnTo>
+                    <a:pt x="1087907" y="2296277"/>
+                  </a:lnTo>
+                  <a:lnTo>
+                    <a:pt x="1165541" y="2384062"/>
+                  </a:lnTo>
+                  <a:lnTo>
+                    <a:pt x="1243175" y="2465358"/>
+                  </a:lnTo>
+                  <a:lnTo>
+                    <a:pt x="1320809" y="2540644"/>
+                  </a:lnTo>
+                  <a:lnTo>
+                    <a:pt x="1398443" y="2610364"/>
+                  </a:lnTo>
+                  <a:lnTo>
+                    <a:pt x="1476077" y="2652057"/>
+                  </a:lnTo>
+                  <a:lnTo>
+                    <a:pt x="1553711" y="2645239"/>
+                  </a:lnTo>
+                  <a:lnTo>
+                    <a:pt x="1631345" y="2638365"/>
+                  </a:lnTo>
+                  <a:lnTo>
+                    <a:pt x="1708979" y="2631434"/>
+                  </a:lnTo>
+                  <a:lnTo>
+                    <a:pt x="1786613" y="2624447"/>
+                  </a:lnTo>
+                  <a:lnTo>
+                    <a:pt x="1864247" y="2617402"/>
+                  </a:lnTo>
+                  <a:lnTo>
+                    <a:pt x="1941881" y="2610300"/>
+                  </a:lnTo>
+                  <a:lnTo>
+                    <a:pt x="2019515" y="2603139"/>
+                  </a:lnTo>
+                  <a:lnTo>
+                    <a:pt x="2097149" y="2595920"/>
+                  </a:lnTo>
+                  <a:lnTo>
+                    <a:pt x="2174784" y="2588642"/>
+                  </a:lnTo>
+                  <a:lnTo>
+                    <a:pt x="2252418" y="2581304"/>
+                  </a:lnTo>
+                  <a:lnTo>
+                    <a:pt x="2330052" y="2573905"/>
+                  </a:lnTo>
+                  <a:lnTo>
+                    <a:pt x="2407686" y="2566446"/>
+                  </a:lnTo>
+                  <a:lnTo>
+                    <a:pt x="2485320" y="2558926"/>
+                  </a:lnTo>
+                  <a:lnTo>
+                    <a:pt x="2562954" y="2551345"/>
+                  </a:lnTo>
+                  <a:lnTo>
+                    <a:pt x="2640588" y="2543701"/>
+                  </a:lnTo>
+                  <a:lnTo>
+                    <a:pt x="2718222" y="2535994"/>
+                  </a:lnTo>
+                  <a:lnTo>
+                    <a:pt x="2795856" y="2528224"/>
+                  </a:lnTo>
+                  <a:lnTo>
+                    <a:pt x="2873490" y="2520391"/>
+                  </a:lnTo>
+                  <a:lnTo>
+                    <a:pt x="2951124" y="2512493"/>
+                  </a:lnTo>
+                  <a:lnTo>
+                    <a:pt x="3028758" y="2504531"/>
+                  </a:lnTo>
+                  <a:lnTo>
+                    <a:pt x="3106392" y="2496503"/>
+                  </a:lnTo>
+                  <a:lnTo>
+                    <a:pt x="3184026" y="2488410"/>
+                  </a:lnTo>
+                  <a:lnTo>
+                    <a:pt x="3261660" y="2480250"/>
+                  </a:lnTo>
+                  <a:lnTo>
+                    <a:pt x="3339294" y="2472023"/>
+                  </a:lnTo>
+                  <a:lnTo>
+                    <a:pt x="3416928" y="2463729"/>
+                  </a:lnTo>
+                  <a:lnTo>
+                    <a:pt x="3494562" y="2455367"/>
+                  </a:lnTo>
+                  <a:lnTo>
+                    <a:pt x="3572196" y="2446936"/>
+                  </a:lnTo>
+                  <a:lnTo>
+                    <a:pt x="3649830" y="2438436"/>
+                  </a:lnTo>
+                  <a:lnTo>
+                    <a:pt x="3727464" y="2429867"/>
+                  </a:lnTo>
+                  <a:lnTo>
+                    <a:pt x="3805098" y="2421227"/>
+                  </a:lnTo>
+                  <a:lnTo>
+                    <a:pt x="3882732" y="2412516"/>
+                  </a:lnTo>
+                  <a:lnTo>
+                    <a:pt x="3960367" y="2403734"/>
+                  </a:lnTo>
+                  <a:lnTo>
+                    <a:pt x="4038001" y="2394880"/>
+                  </a:lnTo>
+                  <a:lnTo>
+                    <a:pt x="4115635" y="2385954"/>
+                  </a:lnTo>
+                  <a:lnTo>
+                    <a:pt x="4193269" y="2376954"/>
+                  </a:lnTo>
+                  <a:lnTo>
+                    <a:pt x="4270903" y="2367881"/>
+                  </a:lnTo>
+                  <a:lnTo>
+                    <a:pt x="4348537" y="2358733"/>
+                  </a:lnTo>
+                  <a:lnTo>
+                    <a:pt x="4426171" y="2349510"/>
+                  </a:lnTo>
+                  <a:lnTo>
+                    <a:pt x="4503805" y="2340211"/>
+                  </a:lnTo>
+                  <a:lnTo>
+                    <a:pt x="4581439" y="2330836"/>
+                  </a:lnTo>
+                  <a:lnTo>
+                    <a:pt x="4659073" y="2321385"/>
+                  </a:lnTo>
+                  <a:lnTo>
+                    <a:pt x="4736707" y="2311856"/>
+                  </a:lnTo>
+                  <a:lnTo>
+                    <a:pt x="4814341" y="2302248"/>
+                  </a:lnTo>
+                  <a:lnTo>
+                    <a:pt x="4891975" y="2292562"/>
+                  </a:lnTo>
+                  <a:lnTo>
+                    <a:pt x="4969609" y="2282797"/>
+                  </a:lnTo>
+                  <a:lnTo>
+                    <a:pt x="5047243" y="2272952"/>
+                  </a:lnTo>
+                  <a:lnTo>
+                    <a:pt x="5124877" y="2263025"/>
+                  </a:lnTo>
+                  <a:lnTo>
+                    <a:pt x="5202511" y="2253018"/>
+                  </a:lnTo>
+                  <a:lnTo>
+                    <a:pt x="5280145" y="2242928"/>
+                  </a:lnTo>
+                  <a:lnTo>
+                    <a:pt x="5357779" y="2232756"/>
+                  </a:lnTo>
+                  <a:lnTo>
+                    <a:pt x="5435413" y="2222500"/>
                   </a:lnTo>
                 </a:path>
               </a:pathLst>
@@ -3778,300 +3778,300 @@
           </p:nvSpPr>
           <p:spPr>
             <a:xfrm>
-              <a:off x="817517" y="4684287"/>
-              <a:ext cx="7370972" cy="848041"/>
+              <a:off x="817517" y="4732323"/>
+              <a:ext cx="7370972" cy="808828"/>
             </a:xfrm>
             <a:custGeom>
               <a:avLst/>
               <a:pathLst>
-                <a:path w="7370972" h="848041">
+                <a:path w="7370972" h="808828">
                   <a:moveTo>
-                    <a:pt x="7370972" y="848041"/>
+                    <a:pt x="7370972" y="808828"/>
                   </a:moveTo>
                   <a:lnTo>
-                    <a:pt x="7293338" y="846694"/>
-                  </a:lnTo>
-                  <a:lnTo>
-                    <a:pt x="7215704" y="845239"/>
-                  </a:lnTo>
-                  <a:lnTo>
-                    <a:pt x="7138070" y="843668"/>
-                  </a:lnTo>
-                  <a:lnTo>
-                    <a:pt x="7060436" y="841972"/>
-                  </a:lnTo>
-                  <a:lnTo>
-                    <a:pt x="6982802" y="840140"/>
-                  </a:lnTo>
-                  <a:lnTo>
-                    <a:pt x="6905168" y="838162"/>
-                  </a:lnTo>
-                  <a:lnTo>
-                    <a:pt x="6827534" y="836026"/>
-                  </a:lnTo>
-                  <a:lnTo>
-                    <a:pt x="6749900" y="833719"/>
-                  </a:lnTo>
-                  <a:lnTo>
-                    <a:pt x="6672266" y="831228"/>
-                  </a:lnTo>
-                  <a:lnTo>
-                    <a:pt x="6594632" y="828539"/>
-                  </a:lnTo>
-                  <a:lnTo>
-                    <a:pt x="6516998" y="825635"/>
-                  </a:lnTo>
-                  <a:lnTo>
-                    <a:pt x="6439364" y="822499"/>
-                  </a:lnTo>
-                  <a:lnTo>
-                    <a:pt x="6361730" y="819112"/>
-                  </a:lnTo>
-                  <a:lnTo>
-                    <a:pt x="6284096" y="815455"/>
-                  </a:lnTo>
-                  <a:lnTo>
-                    <a:pt x="6206462" y="811507"/>
-                  </a:lnTo>
-                  <a:lnTo>
-                    <a:pt x="6128827" y="807243"/>
-                  </a:lnTo>
-                  <a:lnTo>
-                    <a:pt x="6051193" y="802639"/>
-                  </a:lnTo>
-                  <a:lnTo>
-                    <a:pt x="5973559" y="797667"/>
-                  </a:lnTo>
-                  <a:lnTo>
-                    <a:pt x="5895925" y="792298"/>
-                  </a:lnTo>
-                  <a:lnTo>
-                    <a:pt x="5818291" y="786501"/>
-                  </a:lnTo>
-                  <a:lnTo>
-                    <a:pt x="5740657" y="780241"/>
-                  </a:lnTo>
-                  <a:lnTo>
-                    <a:pt x="5663023" y="773481"/>
-                  </a:lnTo>
-                  <a:lnTo>
-                    <a:pt x="5585389" y="766182"/>
-                  </a:lnTo>
-                  <a:lnTo>
-                    <a:pt x="5507755" y="758300"/>
-                  </a:lnTo>
-                  <a:lnTo>
-                    <a:pt x="5430121" y="749789"/>
-                  </a:lnTo>
-                  <a:lnTo>
-                    <a:pt x="5352487" y="740598"/>
-                  </a:lnTo>
-                  <a:lnTo>
-                    <a:pt x="5274853" y="730674"/>
-                  </a:lnTo>
-                  <a:lnTo>
-                    <a:pt x="5197219" y="719957"/>
-                  </a:lnTo>
-                  <a:lnTo>
-                    <a:pt x="5119585" y="708385"/>
-                  </a:lnTo>
-                  <a:lnTo>
-                    <a:pt x="5041951" y="695889"/>
-                  </a:lnTo>
-                  <a:lnTo>
-                    <a:pt x="4964317" y="682396"/>
-                  </a:lnTo>
-                  <a:lnTo>
-                    <a:pt x="4886683" y="667826"/>
-                  </a:lnTo>
-                  <a:lnTo>
-                    <a:pt x="4809049" y="652092"/>
-                  </a:lnTo>
-                  <a:lnTo>
-                    <a:pt x="4731415" y="635102"/>
-                  </a:lnTo>
-                  <a:lnTo>
-                    <a:pt x="4653781" y="616757"/>
-                  </a:lnTo>
-                  <a:lnTo>
-                    <a:pt x="4576147" y="596946"/>
-                  </a:lnTo>
-                  <a:lnTo>
-                    <a:pt x="4498513" y="575554"/>
-                  </a:lnTo>
-                  <a:lnTo>
-                    <a:pt x="4420879" y="552455"/>
-                  </a:lnTo>
-                  <a:lnTo>
-                    <a:pt x="4343244" y="527512"/>
-                  </a:lnTo>
-                  <a:lnTo>
-                    <a:pt x="4265610" y="500577"/>
-                  </a:lnTo>
-                  <a:lnTo>
-                    <a:pt x="4187976" y="471492"/>
-                  </a:lnTo>
-                  <a:lnTo>
-                    <a:pt x="4110342" y="440086"/>
-                  </a:lnTo>
-                  <a:lnTo>
-                    <a:pt x="4032708" y="406172"/>
-                  </a:lnTo>
-                  <a:lnTo>
-                    <a:pt x="3955074" y="369551"/>
-                  </a:lnTo>
-                  <a:lnTo>
-                    <a:pt x="3877440" y="330007"/>
-                  </a:lnTo>
-                  <a:lnTo>
-                    <a:pt x="3799806" y="287306"/>
-                  </a:lnTo>
-                  <a:lnTo>
-                    <a:pt x="3722172" y="241196"/>
-                  </a:lnTo>
-                  <a:lnTo>
-                    <a:pt x="3644538" y="191406"/>
-                  </a:lnTo>
-                  <a:lnTo>
-                    <a:pt x="3566904" y="137640"/>
-                  </a:lnTo>
-                  <a:lnTo>
-                    <a:pt x="3489270" y="79583"/>
-                  </a:lnTo>
-                  <a:lnTo>
-                    <a:pt x="3411636" y="16891"/>
+                    <a:pt x="7293338" y="807543"/>
+                  </a:lnTo>
+                  <a:lnTo>
+                    <a:pt x="7215704" y="806156"/>
+                  </a:lnTo>
+                  <a:lnTo>
+                    <a:pt x="7138070" y="804657"/>
+                  </a:lnTo>
+                  <a:lnTo>
+                    <a:pt x="7060436" y="803039"/>
+                  </a:lnTo>
+                  <a:lnTo>
+                    <a:pt x="6982802" y="801292"/>
+                  </a:lnTo>
+                  <a:lnTo>
+                    <a:pt x="6905168" y="799405"/>
+                  </a:lnTo>
+                  <a:lnTo>
+                    <a:pt x="6827534" y="797368"/>
+                  </a:lnTo>
+                  <a:lnTo>
+                    <a:pt x="6749900" y="795168"/>
+                  </a:lnTo>
+                  <a:lnTo>
+                    <a:pt x="6672266" y="792793"/>
+                  </a:lnTo>
+                  <a:lnTo>
+                    <a:pt x="6594632" y="790227"/>
+                  </a:lnTo>
+                  <a:lnTo>
+                    <a:pt x="6516998" y="787458"/>
+                  </a:lnTo>
+                  <a:lnTo>
+                    <a:pt x="6439364" y="784466"/>
+                  </a:lnTo>
+                  <a:lnTo>
+                    <a:pt x="6361730" y="781237"/>
+                  </a:lnTo>
+                  <a:lnTo>
+                    <a:pt x="6284096" y="777749"/>
+                  </a:lnTo>
+                  <a:lnTo>
+                    <a:pt x="6206462" y="773983"/>
+                  </a:lnTo>
+                  <a:lnTo>
+                    <a:pt x="6128827" y="769916"/>
+                  </a:lnTo>
+                  <a:lnTo>
+                    <a:pt x="6051193" y="765525"/>
+                  </a:lnTo>
+                  <a:lnTo>
+                    <a:pt x="5973559" y="760783"/>
+                  </a:lnTo>
+                  <a:lnTo>
+                    <a:pt x="5895925" y="755663"/>
+                  </a:lnTo>
+                  <a:lnTo>
+                    <a:pt x="5818291" y="750134"/>
+                  </a:lnTo>
+                  <a:lnTo>
+                    <a:pt x="5740657" y="744163"/>
+                  </a:lnTo>
+                  <a:lnTo>
+                    <a:pt x="5663023" y="737716"/>
+                  </a:lnTo>
+                  <a:lnTo>
+                    <a:pt x="5585389" y="730754"/>
+                  </a:lnTo>
+                  <a:lnTo>
+                    <a:pt x="5507755" y="723237"/>
+                  </a:lnTo>
+                  <a:lnTo>
+                    <a:pt x="5430121" y="715119"/>
+                  </a:lnTo>
+                  <a:lnTo>
+                    <a:pt x="5352487" y="706353"/>
+                  </a:lnTo>
+                  <a:lnTo>
+                    <a:pt x="5274853" y="696888"/>
+                  </a:lnTo>
+                  <a:lnTo>
+                    <a:pt x="5197219" y="686667"/>
+                  </a:lnTo>
+                  <a:lnTo>
+                    <a:pt x="5119585" y="675630"/>
+                  </a:lnTo>
+                  <a:lnTo>
+                    <a:pt x="5041951" y="663712"/>
+                  </a:lnTo>
+                  <a:lnTo>
+                    <a:pt x="4964317" y="650842"/>
+                  </a:lnTo>
+                  <a:lnTo>
+                    <a:pt x="4886683" y="636946"/>
+                  </a:lnTo>
+                  <a:lnTo>
+                    <a:pt x="4809049" y="621939"/>
+                  </a:lnTo>
+                  <a:lnTo>
+                    <a:pt x="4731415" y="605735"/>
+                  </a:lnTo>
+                  <a:lnTo>
+                    <a:pt x="4653781" y="588238"/>
+                  </a:lnTo>
+                  <a:lnTo>
+                    <a:pt x="4576147" y="569344"/>
+                  </a:lnTo>
+                  <a:lnTo>
+                    <a:pt x="4498513" y="548941"/>
+                  </a:lnTo>
+                  <a:lnTo>
+                    <a:pt x="4420879" y="526910"/>
+                  </a:lnTo>
+                  <a:lnTo>
+                    <a:pt x="4343244" y="503120"/>
+                  </a:lnTo>
+                  <a:lnTo>
+                    <a:pt x="4265610" y="477430"/>
+                  </a:lnTo>
+                  <a:lnTo>
+                    <a:pt x="4187976" y="449691"/>
+                  </a:lnTo>
+                  <a:lnTo>
+                    <a:pt x="4110342" y="419736"/>
+                  </a:lnTo>
+                  <a:lnTo>
+                    <a:pt x="4032708" y="387391"/>
+                  </a:lnTo>
+                  <a:lnTo>
+                    <a:pt x="3955074" y="352463"/>
+                  </a:lnTo>
+                  <a:lnTo>
+                    <a:pt x="3877440" y="314747"/>
+                  </a:lnTo>
+                  <a:lnTo>
+                    <a:pt x="3799806" y="274021"/>
+                  </a:lnTo>
+                  <a:lnTo>
+                    <a:pt x="3722172" y="230043"/>
+                  </a:lnTo>
+                  <a:lnTo>
+                    <a:pt x="3644538" y="182555"/>
+                  </a:lnTo>
+                  <a:lnTo>
+                    <a:pt x="3566904" y="131276"/>
+                  </a:lnTo>
+                  <a:lnTo>
+                    <a:pt x="3489270" y="75903"/>
+                  </a:lnTo>
+                  <a:lnTo>
+                    <a:pt x="3411636" y="16110"/>
                   </a:lnTo>
                   <a:lnTo>
                     <a:pt x="3334002" y="0"/>
                   </a:lnTo>
                   <a:lnTo>
-                    <a:pt x="3256368" y="7033"/>
-                  </a:lnTo>
-                  <a:lnTo>
-                    <a:pt x="3178734" y="14008"/>
-                  </a:lnTo>
-                  <a:lnTo>
-                    <a:pt x="3101100" y="20927"/>
-                  </a:lnTo>
-                  <a:lnTo>
-                    <a:pt x="3023466" y="27790"/>
-                  </a:lnTo>
-                  <a:lnTo>
-                    <a:pt x="2945832" y="34597"/>
-                  </a:lnTo>
-                  <a:lnTo>
-                    <a:pt x="2868198" y="41349"/>
-                  </a:lnTo>
-                  <a:lnTo>
-                    <a:pt x="2790564" y="48046"/>
-                  </a:lnTo>
-                  <a:lnTo>
-                    <a:pt x="2712930" y="54688"/>
-                  </a:lnTo>
-                  <a:lnTo>
-                    <a:pt x="2635295" y="61276"/>
-                  </a:lnTo>
-                  <a:lnTo>
-                    <a:pt x="2557661" y="67811"/>
-                  </a:lnTo>
-                  <a:lnTo>
-                    <a:pt x="2480027" y="74293"/>
-                  </a:lnTo>
-                  <a:lnTo>
-                    <a:pt x="2402393" y="80722"/>
-                  </a:lnTo>
-                  <a:lnTo>
-                    <a:pt x="2324759" y="87098"/>
-                  </a:lnTo>
-                  <a:lnTo>
-                    <a:pt x="2247125" y="93423"/>
-                  </a:lnTo>
-                  <a:lnTo>
-                    <a:pt x="2169491" y="99696"/>
-                  </a:lnTo>
-                  <a:lnTo>
-                    <a:pt x="2091857" y="105919"/>
-                  </a:lnTo>
-                  <a:lnTo>
-                    <a:pt x="2014223" y="112090"/>
-                  </a:lnTo>
-                  <a:lnTo>
-                    <a:pt x="1936589" y="118212"/>
-                  </a:lnTo>
-                  <a:lnTo>
-                    <a:pt x="1858955" y="124284"/>
-                  </a:lnTo>
-                  <a:lnTo>
-                    <a:pt x="1781321" y="130306"/>
-                  </a:lnTo>
-                  <a:lnTo>
-                    <a:pt x="1703687" y="136280"/>
-                  </a:lnTo>
-                  <a:lnTo>
-                    <a:pt x="1626053" y="142204"/>
-                  </a:lnTo>
-                  <a:lnTo>
-                    <a:pt x="1548419" y="148081"/>
-                  </a:lnTo>
-                  <a:lnTo>
-                    <a:pt x="1470785" y="153910"/>
-                  </a:lnTo>
-                  <a:lnTo>
-                    <a:pt x="1393151" y="159692"/>
-                  </a:lnTo>
-                  <a:lnTo>
-                    <a:pt x="1315517" y="165426"/>
-                  </a:lnTo>
-                  <a:lnTo>
-                    <a:pt x="1237883" y="171114"/>
-                  </a:lnTo>
-                  <a:lnTo>
-                    <a:pt x="1160249" y="176756"/>
-                  </a:lnTo>
-                  <a:lnTo>
-                    <a:pt x="1082615" y="182351"/>
-                  </a:lnTo>
-                  <a:lnTo>
-                    <a:pt x="1004981" y="187902"/>
-                  </a:lnTo>
-                  <a:lnTo>
-                    <a:pt x="927346" y="193407"/>
-                  </a:lnTo>
-                  <a:lnTo>
-                    <a:pt x="849712" y="198867"/>
-                  </a:lnTo>
-                  <a:lnTo>
-                    <a:pt x="772078" y="204283"/>
-                  </a:lnTo>
-                  <a:lnTo>
-                    <a:pt x="694444" y="209655"/>
-                  </a:lnTo>
-                  <a:lnTo>
-                    <a:pt x="616810" y="214983"/>
-                  </a:lnTo>
-                  <a:lnTo>
-                    <a:pt x="539176" y="220268"/>
-                  </a:lnTo>
-                  <a:lnTo>
-                    <a:pt x="461542" y="225510"/>
-                  </a:lnTo>
-                  <a:lnTo>
-                    <a:pt x="383908" y="230709"/>
-                  </a:lnTo>
-                  <a:lnTo>
-                    <a:pt x="306274" y="235866"/>
-                  </a:lnTo>
-                  <a:lnTo>
-                    <a:pt x="228640" y="240981"/>
-                  </a:lnTo>
-                  <a:lnTo>
-                    <a:pt x="151006" y="246055"/>
-                  </a:lnTo>
-                  <a:lnTo>
-                    <a:pt x="73372" y="251087"/>
-                  </a:lnTo>
-                  <a:lnTo>
-                    <a:pt x="0" y="255804"/>
+                    <a:pt x="3256368" y="6707"/>
+                  </a:lnTo>
+                  <a:lnTo>
+                    <a:pt x="3178734" y="13361"/>
+                  </a:lnTo>
+                  <a:lnTo>
+                    <a:pt x="3101100" y="19960"/>
+                  </a:lnTo>
+                  <a:lnTo>
+                    <a:pt x="3023466" y="26505"/>
+                  </a:lnTo>
+                  <a:lnTo>
+                    <a:pt x="2945832" y="32998"/>
+                  </a:lnTo>
+                  <a:lnTo>
+                    <a:pt x="2868198" y="39437"/>
+                  </a:lnTo>
+                  <a:lnTo>
+                    <a:pt x="2790564" y="45824"/>
+                  </a:lnTo>
+                  <a:lnTo>
+                    <a:pt x="2712930" y="52159"/>
+                  </a:lnTo>
+                  <a:lnTo>
+                    <a:pt x="2635295" y="58443"/>
+                  </a:lnTo>
+                  <a:lnTo>
+                    <a:pt x="2557661" y="64676"/>
+                  </a:lnTo>
+                  <a:lnTo>
+                    <a:pt x="2480027" y="70857"/>
+                  </a:lnTo>
+                  <a:lnTo>
+                    <a:pt x="2402393" y="76989"/>
+                  </a:lnTo>
+                  <a:lnTo>
+                    <a:pt x="2324759" y="83071"/>
+                  </a:lnTo>
+                  <a:lnTo>
+                    <a:pt x="2247125" y="89103"/>
+                  </a:lnTo>
+                  <a:lnTo>
+                    <a:pt x="2169491" y="95086"/>
+                  </a:lnTo>
+                  <a:lnTo>
+                    <a:pt x="2091857" y="101021"/>
+                  </a:lnTo>
+                  <a:lnTo>
+                    <a:pt x="2014223" y="106907"/>
+                  </a:lnTo>
+                  <a:lnTo>
+                    <a:pt x="1936589" y="112746"/>
+                  </a:lnTo>
+                  <a:lnTo>
+                    <a:pt x="1858955" y="118537"/>
+                  </a:lnTo>
+                  <a:lnTo>
+                    <a:pt x="1781321" y="124281"/>
+                  </a:lnTo>
+                  <a:lnTo>
+                    <a:pt x="1703687" y="129978"/>
+                  </a:lnTo>
+                  <a:lnTo>
+                    <a:pt x="1626053" y="135629"/>
+                  </a:lnTo>
+                  <a:lnTo>
+                    <a:pt x="1548419" y="141234"/>
+                  </a:lnTo>
+                  <a:lnTo>
+                    <a:pt x="1470785" y="146793"/>
+                  </a:lnTo>
+                  <a:lnTo>
+                    <a:pt x="1393151" y="152307"/>
+                  </a:lnTo>
+                  <a:lnTo>
+                    <a:pt x="1315517" y="157777"/>
+                  </a:lnTo>
+                  <a:lnTo>
+                    <a:pt x="1237883" y="163202"/>
+                  </a:lnTo>
+                  <a:lnTo>
+                    <a:pt x="1160249" y="168582"/>
+                  </a:lnTo>
+                  <a:lnTo>
+                    <a:pt x="1082615" y="173919"/>
+                  </a:lnTo>
+                  <a:lnTo>
+                    <a:pt x="1004981" y="179213"/>
+                  </a:lnTo>
+                  <a:lnTo>
+                    <a:pt x="927346" y="184464"/>
+                  </a:lnTo>
+                  <a:lnTo>
+                    <a:pt x="849712" y="189671"/>
+                  </a:lnTo>
+                  <a:lnTo>
+                    <a:pt x="772078" y="194837"/>
+                  </a:lnTo>
+                  <a:lnTo>
+                    <a:pt x="694444" y="199960"/>
+                  </a:lnTo>
+                  <a:lnTo>
+                    <a:pt x="616810" y="205042"/>
+                  </a:lnTo>
+                  <a:lnTo>
+                    <a:pt x="539176" y="210083"/>
+                  </a:lnTo>
+                  <a:lnTo>
+                    <a:pt x="461542" y="215082"/>
+                  </a:lnTo>
+                  <a:lnTo>
+                    <a:pt x="383908" y="220041"/>
+                  </a:lnTo>
+                  <a:lnTo>
+                    <a:pt x="306274" y="224960"/>
+                  </a:lnTo>
+                  <a:lnTo>
+                    <a:pt x="228640" y="229838"/>
+                  </a:lnTo>
+                  <a:lnTo>
+                    <a:pt x="151006" y="234677"/>
+                  </a:lnTo>
+                  <a:lnTo>
+                    <a:pt x="73372" y="239477"/>
+                  </a:lnTo>
+                  <a:lnTo>
+                    <a:pt x="0" y="243976"/>
                   </a:lnTo>
                 </a:path>
               </a:pathLst>
@@ -4091,297 +4091,297 @@
           </p:nvSpPr>
           <p:spPr>
             <a:xfrm>
-              <a:off x="957447" y="1896563"/>
-              <a:ext cx="7231043" cy="3503246"/>
+              <a:off x="957447" y="2073503"/>
+              <a:ext cx="7231043" cy="3341257"/>
             </a:xfrm>
             <a:custGeom>
               <a:avLst/>
               <a:pathLst>
-                <a:path w="7231043" h="3503246">
+                <a:path w="7231043" h="3341257">
                   <a:moveTo>
                     <a:pt x="0" y="0"/>
                   </a:moveTo>
                   <a:lnTo>
-                    <a:pt x="11077" y="18106"/>
-                  </a:lnTo>
-                  <a:lnTo>
-                    <a:pt x="88711" y="140722"/>
-                  </a:lnTo>
-                  <a:lnTo>
-                    <a:pt x="166345" y="259201"/>
-                  </a:lnTo>
-                  <a:lnTo>
-                    <a:pt x="243979" y="373684"/>
-                  </a:lnTo>
-                  <a:lnTo>
-                    <a:pt x="321613" y="484304"/>
-                  </a:lnTo>
-                  <a:lnTo>
-                    <a:pt x="399247" y="591192"/>
-                  </a:lnTo>
-                  <a:lnTo>
-                    <a:pt x="476881" y="694474"/>
-                  </a:lnTo>
-                  <a:lnTo>
-                    <a:pt x="554515" y="794272"/>
-                  </a:lnTo>
-                  <a:lnTo>
-                    <a:pt x="632149" y="890703"/>
-                  </a:lnTo>
-                  <a:lnTo>
-                    <a:pt x="709783" y="983881"/>
-                  </a:lnTo>
-                  <a:lnTo>
-                    <a:pt x="787417" y="1073915"/>
-                  </a:lnTo>
-                  <a:lnTo>
-                    <a:pt x="865051" y="1160912"/>
-                  </a:lnTo>
-                  <a:lnTo>
-                    <a:pt x="942685" y="1244974"/>
-                  </a:lnTo>
-                  <a:lnTo>
-                    <a:pt x="1020319" y="1326200"/>
-                  </a:lnTo>
-                  <a:lnTo>
-                    <a:pt x="1097953" y="1404686"/>
-                  </a:lnTo>
-                  <a:lnTo>
-                    <a:pt x="1175587" y="1480523"/>
-                  </a:lnTo>
-                  <a:lnTo>
-                    <a:pt x="1253221" y="1553803"/>
-                  </a:lnTo>
-                  <a:lnTo>
-                    <a:pt x="1330855" y="1624610"/>
-                  </a:lnTo>
-                  <a:lnTo>
-                    <a:pt x="1408489" y="1693029"/>
-                  </a:lnTo>
-                  <a:lnTo>
-                    <a:pt x="1486124" y="1759139"/>
-                  </a:lnTo>
-                  <a:lnTo>
-                    <a:pt x="1563758" y="1823019"/>
-                  </a:lnTo>
-                  <a:lnTo>
-                    <a:pt x="1641392" y="1884744"/>
-                  </a:lnTo>
-                  <a:lnTo>
-                    <a:pt x="1719026" y="1944386"/>
-                  </a:lnTo>
-                  <a:lnTo>
-                    <a:pt x="1796660" y="2002016"/>
-                  </a:lnTo>
-                  <a:lnTo>
-                    <a:pt x="1874294" y="2057703"/>
-                  </a:lnTo>
-                  <a:lnTo>
-                    <a:pt x="1951928" y="2111510"/>
-                  </a:lnTo>
-                  <a:lnTo>
-                    <a:pt x="2029562" y="2163502"/>
-                  </a:lnTo>
-                  <a:lnTo>
-                    <a:pt x="2107196" y="2213740"/>
-                  </a:lnTo>
-                  <a:lnTo>
-                    <a:pt x="2184830" y="2262284"/>
-                  </a:lnTo>
-                  <a:lnTo>
-                    <a:pt x="2262464" y="2309189"/>
-                  </a:lnTo>
-                  <a:lnTo>
-                    <a:pt x="2340098" y="2354513"/>
-                  </a:lnTo>
-                  <a:lnTo>
-                    <a:pt x="2417732" y="2398307"/>
-                  </a:lnTo>
-                  <a:lnTo>
-                    <a:pt x="2495366" y="2440624"/>
-                  </a:lnTo>
-                  <a:lnTo>
-                    <a:pt x="2573000" y="2481513"/>
-                  </a:lnTo>
-                  <a:lnTo>
-                    <a:pt x="2650634" y="2521022"/>
-                  </a:lnTo>
-                  <a:lnTo>
-                    <a:pt x="2728268" y="2559199"/>
-                  </a:lnTo>
-                  <a:lnTo>
-                    <a:pt x="2805902" y="2596088"/>
-                  </a:lnTo>
-                  <a:lnTo>
-                    <a:pt x="2883536" y="2631732"/>
-                  </a:lnTo>
-                  <a:lnTo>
-                    <a:pt x="2961170" y="2666174"/>
-                  </a:lnTo>
-                  <a:lnTo>
-                    <a:pt x="3038804" y="2699454"/>
-                  </a:lnTo>
-                  <a:lnTo>
-                    <a:pt x="3116438" y="2731611"/>
-                  </a:lnTo>
-                  <a:lnTo>
-                    <a:pt x="3194073" y="2762683"/>
-                  </a:lnTo>
-                  <a:lnTo>
-                    <a:pt x="3271707" y="2792707"/>
-                  </a:lnTo>
-                  <a:lnTo>
-                    <a:pt x="3349341" y="2821718"/>
-                  </a:lnTo>
-                  <a:lnTo>
-                    <a:pt x="3426975" y="2849751"/>
-                  </a:lnTo>
-                  <a:lnTo>
-                    <a:pt x="3504609" y="2876837"/>
-                  </a:lnTo>
-                  <a:lnTo>
-                    <a:pt x="3582243" y="2903010"/>
-                  </a:lnTo>
-                  <a:lnTo>
-                    <a:pt x="3659877" y="2928300"/>
-                  </a:lnTo>
-                  <a:lnTo>
-                    <a:pt x="3737511" y="2952737"/>
-                  </a:lnTo>
-                  <a:lnTo>
-                    <a:pt x="3815145" y="2976349"/>
-                  </a:lnTo>
-                  <a:lnTo>
-                    <a:pt x="3892779" y="2999165"/>
-                  </a:lnTo>
-                  <a:lnTo>
-                    <a:pt x="3970413" y="3021211"/>
-                  </a:lnTo>
-                  <a:lnTo>
-                    <a:pt x="4048047" y="3042513"/>
-                  </a:lnTo>
-                  <a:lnTo>
-                    <a:pt x="4125681" y="3063097"/>
-                  </a:lnTo>
-                  <a:lnTo>
-                    <a:pt x="4203315" y="3082986"/>
-                  </a:lnTo>
-                  <a:lnTo>
-                    <a:pt x="4280949" y="3102204"/>
-                  </a:lnTo>
-                  <a:lnTo>
-                    <a:pt x="4358583" y="3120774"/>
-                  </a:lnTo>
-                  <a:lnTo>
-                    <a:pt x="4436217" y="3138717"/>
-                  </a:lnTo>
-                  <a:lnTo>
-                    <a:pt x="4513851" y="3156055"/>
-                  </a:lnTo>
-                  <a:lnTo>
-                    <a:pt x="4591485" y="3172808"/>
-                  </a:lnTo>
-                  <a:lnTo>
-                    <a:pt x="4669119" y="3188996"/>
-                  </a:lnTo>
-                  <a:lnTo>
-                    <a:pt x="4746753" y="3204638"/>
-                  </a:lnTo>
-                  <a:lnTo>
-                    <a:pt x="4824387" y="3219752"/>
-                  </a:lnTo>
-                  <a:lnTo>
-                    <a:pt x="4902022" y="3234356"/>
-                  </a:lnTo>
-                  <a:lnTo>
-                    <a:pt x="4979656" y="3248468"/>
-                  </a:lnTo>
-                  <a:lnTo>
-                    <a:pt x="5057290" y="3262103"/>
-                  </a:lnTo>
-                  <a:lnTo>
-                    <a:pt x="5134924" y="3275278"/>
-                  </a:lnTo>
-                  <a:lnTo>
-                    <a:pt x="5212558" y="3288009"/>
-                  </a:lnTo>
-                  <a:lnTo>
-                    <a:pt x="5290192" y="3300311"/>
-                  </a:lnTo>
-                  <a:lnTo>
-                    <a:pt x="5367826" y="3312197"/>
-                  </a:lnTo>
-                  <a:lnTo>
-                    <a:pt x="5445460" y="3323683"/>
-                  </a:lnTo>
-                  <a:lnTo>
-                    <a:pt x="5523094" y="3334780"/>
-                  </a:lnTo>
-                  <a:lnTo>
-                    <a:pt x="5600728" y="3345504"/>
-                  </a:lnTo>
-                  <a:lnTo>
-                    <a:pt x="5678362" y="3355866"/>
-                  </a:lnTo>
-                  <a:lnTo>
-                    <a:pt x="5755996" y="3365878"/>
-                  </a:lnTo>
-                  <a:lnTo>
-                    <a:pt x="5833630" y="3375552"/>
-                  </a:lnTo>
-                  <a:lnTo>
-                    <a:pt x="5911264" y="3384900"/>
-                  </a:lnTo>
-                  <a:lnTo>
-                    <a:pt x="5988898" y="3393933"/>
-                  </a:lnTo>
-                  <a:lnTo>
-                    <a:pt x="6066532" y="3402661"/>
-                  </a:lnTo>
-                  <a:lnTo>
-                    <a:pt x="6144166" y="3411095"/>
-                  </a:lnTo>
-                  <a:lnTo>
-                    <a:pt x="6221800" y="3419243"/>
-                  </a:lnTo>
-                  <a:lnTo>
-                    <a:pt x="6299434" y="3427118"/>
-                  </a:lnTo>
-                  <a:lnTo>
-                    <a:pt x="6377068" y="3434726"/>
-                  </a:lnTo>
-                  <a:lnTo>
-                    <a:pt x="6454702" y="3442078"/>
-                  </a:lnTo>
-                  <a:lnTo>
-                    <a:pt x="6532336" y="3449181"/>
-                  </a:lnTo>
-                  <a:lnTo>
-                    <a:pt x="6609971" y="3456045"/>
-                  </a:lnTo>
-                  <a:lnTo>
-                    <a:pt x="6687605" y="3462678"/>
-                  </a:lnTo>
-                  <a:lnTo>
-                    <a:pt x="6765239" y="3469087"/>
-                  </a:lnTo>
-                  <a:lnTo>
-                    <a:pt x="6842873" y="3475279"/>
-                  </a:lnTo>
-                  <a:lnTo>
-                    <a:pt x="6920507" y="3481263"/>
-                  </a:lnTo>
-                  <a:lnTo>
-                    <a:pt x="6998141" y="3487045"/>
-                  </a:lnTo>
-                  <a:lnTo>
-                    <a:pt x="7075775" y="3492631"/>
-                  </a:lnTo>
-                  <a:lnTo>
-                    <a:pt x="7153409" y="3498030"/>
-                  </a:lnTo>
-                  <a:lnTo>
-                    <a:pt x="7231043" y="3503246"/>
+                    <a:pt x="11077" y="17269"/>
+                  </a:lnTo>
+                  <a:lnTo>
+                    <a:pt x="88711" y="134215"/>
+                  </a:lnTo>
+                  <a:lnTo>
+                    <a:pt x="166345" y="247216"/>
+                  </a:lnTo>
+                  <a:lnTo>
+                    <a:pt x="243979" y="356405"/>
+                  </a:lnTo>
+                  <a:lnTo>
+                    <a:pt x="321613" y="461910"/>
+                  </a:lnTo>
+                  <a:lnTo>
+                    <a:pt x="399247" y="563855"/>
+                  </a:lnTo>
+                  <a:lnTo>
+                    <a:pt x="476881" y="662362"/>
+                  </a:lnTo>
+                  <a:lnTo>
+                    <a:pt x="554515" y="757545"/>
+                  </a:lnTo>
+                  <a:lnTo>
+                    <a:pt x="632149" y="849517"/>
+                  </a:lnTo>
+                  <a:lnTo>
+                    <a:pt x="709783" y="938386"/>
+                  </a:lnTo>
+                  <a:lnTo>
+                    <a:pt x="787417" y="1024258"/>
+                  </a:lnTo>
+                  <a:lnTo>
+                    <a:pt x="865051" y="1107232"/>
+                  </a:lnTo>
+                  <a:lnTo>
+                    <a:pt x="942685" y="1187407"/>
+                  </a:lnTo>
+                  <a:lnTo>
+                    <a:pt x="1020319" y="1264877"/>
+                  </a:lnTo>
+                  <a:lnTo>
+                    <a:pt x="1097953" y="1339733"/>
+                  </a:lnTo>
+                  <a:lnTo>
+                    <a:pt x="1175587" y="1412065"/>
+                  </a:lnTo>
+                  <a:lnTo>
+                    <a:pt x="1253221" y="1481956"/>
+                  </a:lnTo>
+                  <a:lnTo>
+                    <a:pt x="1330855" y="1549489"/>
+                  </a:lnTo>
+                  <a:lnTo>
+                    <a:pt x="1408489" y="1614743"/>
+                  </a:lnTo>
+                  <a:lnTo>
+                    <a:pt x="1486124" y="1677797"/>
+                  </a:lnTo>
+                  <a:lnTo>
+                    <a:pt x="1563758" y="1738723"/>
+                  </a:lnTo>
+                  <a:lnTo>
+                    <a:pt x="1641392" y="1797594"/>
+                  </a:lnTo>
+                  <a:lnTo>
+                    <a:pt x="1719026" y="1854478"/>
+                  </a:lnTo>
+                  <a:lnTo>
+                    <a:pt x="1796660" y="1909444"/>
+                  </a:lnTo>
+                  <a:lnTo>
+                    <a:pt x="1874294" y="1962555"/>
+                  </a:lnTo>
+                  <a:lnTo>
+                    <a:pt x="1951928" y="2013875"/>
+                  </a:lnTo>
+                  <a:lnTo>
+                    <a:pt x="2029562" y="2063463"/>
+                  </a:lnTo>
+                  <a:lnTo>
+                    <a:pt x="2107196" y="2111378"/>
+                  </a:lnTo>
+                  <a:lnTo>
+                    <a:pt x="2184830" y="2157677"/>
+                  </a:lnTo>
+                  <a:lnTo>
+                    <a:pt x="2262464" y="2202413"/>
+                  </a:lnTo>
+                  <a:lnTo>
+                    <a:pt x="2340098" y="2245641"/>
+                  </a:lnTo>
+                  <a:lnTo>
+                    <a:pt x="2417732" y="2287410"/>
+                  </a:lnTo>
+                  <a:lnTo>
+                    <a:pt x="2495366" y="2327770"/>
+                  </a:lnTo>
+                  <a:lnTo>
+                    <a:pt x="2573000" y="2366768"/>
+                  </a:lnTo>
+                  <a:lnTo>
+                    <a:pt x="2650634" y="2404451"/>
+                  </a:lnTo>
+                  <a:lnTo>
+                    <a:pt x="2728268" y="2440863"/>
+                  </a:lnTo>
+                  <a:lnTo>
+                    <a:pt x="2805902" y="2476046"/>
+                  </a:lnTo>
+                  <a:lnTo>
+                    <a:pt x="2883536" y="2510042"/>
+                  </a:lnTo>
+                  <a:lnTo>
+                    <a:pt x="2961170" y="2542891"/>
+                  </a:lnTo>
+                  <a:lnTo>
+                    <a:pt x="3038804" y="2574632"/>
+                  </a:lnTo>
+                  <a:lnTo>
+                    <a:pt x="3116438" y="2605302"/>
+                  </a:lnTo>
+                  <a:lnTo>
+                    <a:pt x="3194073" y="2634938"/>
+                  </a:lnTo>
+                  <a:lnTo>
+                    <a:pt x="3271707" y="2663574"/>
+                  </a:lnTo>
+                  <a:lnTo>
+                    <a:pt x="3349341" y="2691243"/>
+                  </a:lnTo>
+                  <a:lnTo>
+                    <a:pt x="3426975" y="2717979"/>
+                  </a:lnTo>
+                  <a:lnTo>
+                    <a:pt x="3504609" y="2743814"/>
+                  </a:lnTo>
+                  <a:lnTo>
+                    <a:pt x="3582243" y="2768776"/>
+                  </a:lnTo>
+                  <a:lnTo>
+                    <a:pt x="3659877" y="2792897"/>
+                  </a:lnTo>
+                  <a:lnTo>
+                    <a:pt x="3737511" y="2816203"/>
+                  </a:lnTo>
+                  <a:lnTo>
+                    <a:pt x="3815145" y="2838724"/>
+                  </a:lnTo>
+                  <a:lnTo>
+                    <a:pt x="3892779" y="2860485"/>
+                  </a:lnTo>
+                  <a:lnTo>
+                    <a:pt x="3970413" y="2881511"/>
+                  </a:lnTo>
+                  <a:lnTo>
+                    <a:pt x="4048047" y="2901828"/>
+                  </a:lnTo>
+                  <a:lnTo>
+                    <a:pt x="4125681" y="2921460"/>
+                  </a:lnTo>
+                  <a:lnTo>
+                    <a:pt x="4203315" y="2940430"/>
+                  </a:lnTo>
+                  <a:lnTo>
+                    <a:pt x="4280949" y="2958759"/>
+                  </a:lnTo>
+                  <a:lnTo>
+                    <a:pt x="4358583" y="2976470"/>
+                  </a:lnTo>
+                  <a:lnTo>
+                    <a:pt x="4436217" y="2993584"/>
+                  </a:lnTo>
+                  <a:lnTo>
+                    <a:pt x="4513851" y="3010120"/>
+                  </a:lnTo>
+                  <a:lnTo>
+                    <a:pt x="4591485" y="3026099"/>
+                  </a:lnTo>
+                  <a:lnTo>
+                    <a:pt x="4669119" y="3041538"/>
+                  </a:lnTo>
+                  <a:lnTo>
+                    <a:pt x="4746753" y="3056457"/>
+                  </a:lnTo>
+                  <a:lnTo>
+                    <a:pt x="4824387" y="3070872"/>
+                  </a:lnTo>
+                  <a:lnTo>
+                    <a:pt x="4902022" y="3084801"/>
+                  </a:lnTo>
+                  <a:lnTo>
+                    <a:pt x="4979656" y="3098260"/>
+                  </a:lnTo>
+                  <a:lnTo>
+                    <a:pt x="5057290" y="3111265"/>
+                  </a:lnTo>
+                  <a:lnTo>
+                    <a:pt x="5134924" y="3123831"/>
+                  </a:lnTo>
+                  <a:lnTo>
+                    <a:pt x="5212558" y="3135973"/>
+                  </a:lnTo>
+                  <a:lnTo>
+                    <a:pt x="5290192" y="3147706"/>
+                  </a:lnTo>
+                  <a:lnTo>
+                    <a:pt x="5367826" y="3159042"/>
+                  </a:lnTo>
+                  <a:lnTo>
+                    <a:pt x="5445460" y="3169997"/>
+                  </a:lnTo>
+                  <a:lnTo>
+                    <a:pt x="5523094" y="3180581"/>
+                  </a:lnTo>
+                  <a:lnTo>
+                    <a:pt x="5600728" y="3190809"/>
+                  </a:lnTo>
+                  <a:lnTo>
+                    <a:pt x="5678362" y="3200692"/>
+                  </a:lnTo>
+                  <a:lnTo>
+                    <a:pt x="5755996" y="3210241"/>
+                  </a:lnTo>
+                  <a:lnTo>
+                    <a:pt x="5833630" y="3219468"/>
+                  </a:lnTo>
+                  <a:lnTo>
+                    <a:pt x="5911264" y="3228384"/>
+                  </a:lnTo>
+                  <a:lnTo>
+                    <a:pt x="5988898" y="3236999"/>
+                  </a:lnTo>
+                  <a:lnTo>
+                    <a:pt x="6066532" y="3245323"/>
+                  </a:lnTo>
+                  <a:lnTo>
+                    <a:pt x="6144166" y="3253367"/>
+                  </a:lnTo>
+                  <a:lnTo>
+                    <a:pt x="6221800" y="3261139"/>
+                  </a:lnTo>
+                  <a:lnTo>
+                    <a:pt x="6299434" y="3268649"/>
+                  </a:lnTo>
+                  <a:lnTo>
+                    <a:pt x="6377068" y="3275905"/>
+                  </a:lnTo>
+                  <a:lnTo>
+                    <a:pt x="6454702" y="3282917"/>
+                  </a:lnTo>
+                  <a:lnTo>
+                    <a:pt x="6532336" y="3289693"/>
+                  </a:lnTo>
+                  <a:lnTo>
+                    <a:pt x="6609971" y="3296239"/>
+                  </a:lnTo>
+                  <a:lnTo>
+                    <a:pt x="6687605" y="3302565"/>
+                  </a:lnTo>
+                  <a:lnTo>
+                    <a:pt x="6765239" y="3308677"/>
+                  </a:lnTo>
+                  <a:lnTo>
+                    <a:pt x="6842873" y="3314584"/>
+                  </a:lnTo>
+                  <a:lnTo>
+                    <a:pt x="6920507" y="3320291"/>
+                  </a:lnTo>
+                  <a:lnTo>
+                    <a:pt x="6998141" y="3325805"/>
+                  </a:lnTo>
+                  <a:lnTo>
+                    <a:pt x="7075775" y="3331133"/>
+                  </a:lnTo>
+                  <a:lnTo>
+                    <a:pt x="7153409" y="3336282"/>
+                  </a:lnTo>
+                  <a:lnTo>
+                    <a:pt x="7231043" y="3341257"/>
                   </a:lnTo>
                 </a:path>
               </a:pathLst>
@@ -4410,7 +4410,7 @@
           </p:nvSpPr>
           <p:spPr>
             <a:xfrm>
-              <a:off x="817517" y="4679530"/>
+              <a:off x="817517" y="4727786"/>
               <a:ext cx="7799693" cy="0"/>
             </a:xfrm>
             <a:custGeom>
@@ -4453,15 +4453,15 @@
           </p:nvSpPr>
           <p:spPr>
             <a:xfrm>
-              <a:off x="4203673" y="1896563"/>
-              <a:ext cx="0" cy="3826579"/>
+              <a:off x="4203673" y="2073503"/>
+              <a:ext cx="0" cy="3649639"/>
             </a:xfrm>
             <a:custGeom>
               <a:avLst/>
               <a:pathLst>
-                <a:path w="0" h="3826579">
+                <a:path w="0" h="3649639">
                   <a:moveTo>
-                    <a:pt x="0" y="3826579"/>
+                    <a:pt x="0" y="3649639"/>
                   </a:moveTo>
                   <a:lnTo>
                     <a:pt x="0" y="0"/>
@@ -4496,7 +4496,7 @@
           </p:nvSpPr>
           <p:spPr>
             <a:xfrm>
-              <a:off x="692708" y="5509156"/>
+              <a:off x="692708" y="5517199"/>
               <a:ext cx="62179" cy="80101"/>
             </a:xfrm>
             <a:prstGeom prst="rect">
@@ -4542,7 +4542,7 @@
           </p:nvSpPr>
           <p:spPr>
             <a:xfrm>
-              <a:off x="692708" y="4639479"/>
+              <a:off x="692708" y="4687735"/>
               <a:ext cx="62179" cy="80101"/>
             </a:xfrm>
             <a:prstGeom prst="rect">
@@ -4588,7 +4588,7 @@
           </p:nvSpPr>
           <p:spPr>
             <a:xfrm>
-              <a:off x="692708" y="3769802"/>
+              <a:off x="692708" y="3858272"/>
               <a:ext cx="62179" cy="80101"/>
             </a:xfrm>
             <a:prstGeom prst="rect">
@@ -4634,7 +4634,7 @@
           </p:nvSpPr>
           <p:spPr>
             <a:xfrm>
-              <a:off x="692708" y="2900125"/>
+              <a:off x="692708" y="3028808"/>
               <a:ext cx="62179" cy="80101"/>
             </a:xfrm>
             <a:prstGeom prst="rect">
@@ -4680,7 +4680,7 @@
           </p:nvSpPr>
           <p:spPr>
             <a:xfrm>
-              <a:off x="692708" y="2030448"/>
+              <a:off x="692708" y="2199345"/>
               <a:ext cx="62179" cy="80101"/>
             </a:xfrm>
             <a:prstGeom prst="rect">
@@ -4956,7 +4956,7 @@
           </p:nvSpPr>
           <p:spPr>
             <a:xfrm rot="-5400000">
-              <a:off x="68446" y="3759743"/>
+              <a:off x="68446" y="3848213"/>
               <a:ext cx="1016904" cy="100218"/>
             </a:xfrm>
             <a:prstGeom prst="rect">
@@ -4997,6 +4997,52 @@
         <p:sp>
           <p:nvSpPr>
             <p:cNvPr id="38" name="tx38"/>
+            <p:cNvSpPr/>
+            <p:nvPr/>
+          </p:nvSpPr>
+          <p:spPr>
+            <a:xfrm>
+              <a:off x="817517" y="1896563"/>
+              <a:ext cx="4166463" cy="82021"/>
+            </a:xfrm>
+            <a:prstGeom prst="rect">
+              <a:avLst/>
+            </a:prstGeom>
+            <a:noFill/>
+          </p:spPr>
+          <p:txBody>
+            <a:bodyPr lIns="0" rIns="0" tIns="0" bIns="0" anchorCtr="1" anchor="ctr" wrap="none"/>
+            <a:lstStyle/>
+            <a:p>
+              <a:pPr algn="l" marL="0" marR="0" indent="0">
+                <a:lnSpc>
+                  <a:spcPts val="900"/>
+                </a:lnSpc>
+                <a:spcBef>
+                  <a:spcPts val="0"/>
+                </a:spcBef>
+                <a:spcAft>
+                  <a:spcPts val="0"/>
+                </a:spcAft>
+              </a:pPr>
+              <a:r>
+                <a:rPr sz="900">
+                  <a:solidFill>
+                    <a:srgbClr val="404040">
+                      <a:alpha val="100000"/>
+                    </a:srgbClr>
+                  </a:solidFill>
+                  <a:latin typeface="Helvetica"/>
+                  <a:cs typeface="Helvetica"/>
+                </a:rPr>
+                <a:t>subHR = 0.68 (95% CI 0.42-1.10), p = 0.113   (per 0.1-unit increase in eGFR ratio)</a:t>
+              </a:r>
+            </a:p>
+          </p:txBody>
+        </p:sp>
+        <p:sp>
+          <p:nvSpPr>
+            <p:cNvPr id="39" name="tx39"/>
             <p:cNvSpPr/>
             <p:nvPr/>
           </p:nvSpPr>

--- a/docs/plots/carbo/jx_carbo_linsubhr_ratio_grade3.pptx
+++ b/docs/plots/carbo/jx_carbo_linsubhr_ratio_grade3.pptx
@@ -2271,26 +2271,26 @@
           </p:nvSpPr>
           <p:spPr>
             <a:xfrm>
-              <a:off x="817517" y="5142518"/>
-              <a:ext cx="7799693" cy="0"/>
+              <a:off x="915645" y="5071743"/>
+              <a:ext cx="7682587" cy="0"/>
             </a:xfrm>
             <a:custGeom>
               <a:avLst/>
               <a:pathLst>
-                <a:path w="7799693" h="0">
+                <a:path w="7682587" h="0">
                   <a:moveTo>
                     <a:pt x="0" y="0"/>
                   </a:moveTo>
                   <a:lnTo>
-                    <a:pt x="7799693" y="0"/>
-                  </a:lnTo>
-                  <a:lnTo>
-                    <a:pt x="7799693" y="0"/>
+                    <a:pt x="7682587" y="0"/>
+                  </a:lnTo>
+                  <a:lnTo>
+                    <a:pt x="7682587" y="0"/>
                   </a:lnTo>
                 </a:path>
               </a:pathLst>
             </a:custGeom>
-            <a:ln w="6775" cap="flat">
+            <a:ln w="8623" cap="flat">
               <a:solidFill>
                 <a:srgbClr val="EBEBEB">
                   <a:alpha val="100000"/>
@@ -2314,26 +2314,26 @@
           </p:nvSpPr>
           <p:spPr>
             <a:xfrm>
-              <a:off x="817517" y="4313054"/>
-              <a:ext cx="7799693" cy="0"/>
+              <a:off x="915645" y="4298074"/>
+              <a:ext cx="7682587" cy="0"/>
             </a:xfrm>
             <a:custGeom>
               <a:avLst/>
               <a:pathLst>
-                <a:path w="7799693" h="0">
+                <a:path w="7682587" h="0">
                   <a:moveTo>
                     <a:pt x="0" y="0"/>
                   </a:moveTo>
                   <a:lnTo>
-                    <a:pt x="7799693" y="0"/>
-                  </a:lnTo>
-                  <a:lnTo>
-                    <a:pt x="7799693" y="0"/>
+                    <a:pt x="7682587" y="0"/>
+                  </a:lnTo>
+                  <a:lnTo>
+                    <a:pt x="7682587" y="0"/>
                   </a:lnTo>
                 </a:path>
               </a:pathLst>
             </a:custGeom>
-            <a:ln w="6775" cap="flat">
+            <a:ln w="8623" cap="flat">
               <a:solidFill>
                 <a:srgbClr val="EBEBEB">
                   <a:alpha val="100000"/>
@@ -2357,26 +2357,26 @@
           </p:nvSpPr>
           <p:spPr>
             <a:xfrm>
-              <a:off x="817517" y="3483591"/>
-              <a:ext cx="7799693" cy="0"/>
+              <a:off x="915645" y="3524405"/>
+              <a:ext cx="7682587" cy="0"/>
             </a:xfrm>
             <a:custGeom>
               <a:avLst/>
               <a:pathLst>
-                <a:path w="7799693" h="0">
+                <a:path w="7682587" h="0">
                   <a:moveTo>
                     <a:pt x="0" y="0"/>
                   </a:moveTo>
                   <a:lnTo>
-                    <a:pt x="7799693" y="0"/>
-                  </a:lnTo>
-                  <a:lnTo>
-                    <a:pt x="7799693" y="0"/>
+                    <a:pt x="7682587" y="0"/>
+                  </a:lnTo>
+                  <a:lnTo>
+                    <a:pt x="7682587" y="0"/>
                   </a:lnTo>
                 </a:path>
               </a:pathLst>
             </a:custGeom>
-            <a:ln w="6775" cap="flat">
+            <a:ln w="8623" cap="flat">
               <a:solidFill>
                 <a:srgbClr val="EBEBEB">
                   <a:alpha val="100000"/>
@@ -2400,26 +2400,26 @@
           </p:nvSpPr>
           <p:spPr>
             <a:xfrm>
-              <a:off x="817517" y="2654127"/>
-              <a:ext cx="7799693" cy="0"/>
+              <a:off x="915645" y="2750737"/>
+              <a:ext cx="7682587" cy="0"/>
             </a:xfrm>
             <a:custGeom>
               <a:avLst/>
               <a:pathLst>
-                <a:path w="7799693" h="0">
+                <a:path w="7682587" h="0">
                   <a:moveTo>
                     <a:pt x="0" y="0"/>
                   </a:moveTo>
                   <a:lnTo>
-                    <a:pt x="7799693" y="0"/>
-                  </a:lnTo>
-                  <a:lnTo>
-                    <a:pt x="7799693" y="0"/>
+                    <a:pt x="7682587" y="0"/>
+                  </a:lnTo>
+                  <a:lnTo>
+                    <a:pt x="7682587" y="0"/>
                   </a:lnTo>
                 </a:path>
               </a:pathLst>
             </a:custGeom>
-            <a:ln w="6775" cap="flat">
+            <a:ln w="8623" cap="flat">
               <a:solidFill>
                 <a:srgbClr val="EBEBEB">
                   <a:alpha val="100000"/>
@@ -2443,15 +2443,15 @@
           </p:nvSpPr>
           <p:spPr>
             <a:xfrm>
-              <a:off x="1615213" y="2073503"/>
-              <a:ext cx="0" cy="3649639"/>
+              <a:off x="1701364" y="2209169"/>
+              <a:ext cx="0" cy="3404141"/>
             </a:xfrm>
             <a:custGeom>
               <a:avLst/>
               <a:pathLst>
-                <a:path w="0" h="3649639">
+                <a:path w="0" h="3404141">
                   <a:moveTo>
-                    <a:pt x="0" y="3649639"/>
+                    <a:pt x="0" y="3404141"/>
                   </a:moveTo>
                   <a:lnTo>
                     <a:pt x="0" y="0"/>
@@ -2462,7 +2462,7 @@
                 </a:path>
               </a:pathLst>
             </a:custGeom>
-            <a:ln w="6775" cap="flat">
+            <a:ln w="8623" cap="flat">
               <a:solidFill>
                 <a:srgbClr val="EBEBEB">
                   <a:alpha val="100000"/>
@@ -2486,15 +2486,15 @@
           </p:nvSpPr>
           <p:spPr>
             <a:xfrm>
-              <a:off x="3387871" y="2073503"/>
-              <a:ext cx="0" cy="3649639"/>
+              <a:off x="3447406" y="2209169"/>
+              <a:ext cx="0" cy="3404141"/>
             </a:xfrm>
             <a:custGeom>
               <a:avLst/>
               <a:pathLst>
-                <a:path w="0" h="3649639">
+                <a:path w="0" h="3404141">
                   <a:moveTo>
-                    <a:pt x="0" y="3649639"/>
+                    <a:pt x="0" y="3404141"/>
                   </a:moveTo>
                   <a:lnTo>
                     <a:pt x="0" y="0"/>
@@ -2505,7 +2505,7 @@
                 </a:path>
               </a:pathLst>
             </a:custGeom>
-            <a:ln w="6775" cap="flat">
+            <a:ln w="8623" cap="flat">
               <a:solidFill>
                 <a:srgbClr val="EBEBEB">
                   <a:alpha val="100000"/>
@@ -2529,15 +2529,15 @@
           </p:nvSpPr>
           <p:spPr>
             <a:xfrm>
-              <a:off x="5160528" y="2073503"/>
-              <a:ext cx="0" cy="3649639"/>
+              <a:off x="5193449" y="2209169"/>
+              <a:ext cx="0" cy="3404141"/>
             </a:xfrm>
             <a:custGeom>
               <a:avLst/>
               <a:pathLst>
-                <a:path w="0" h="3649639">
+                <a:path w="0" h="3404141">
                   <a:moveTo>
-                    <a:pt x="0" y="3649639"/>
+                    <a:pt x="0" y="3404141"/>
                   </a:moveTo>
                   <a:lnTo>
                     <a:pt x="0" y="0"/>
@@ -2548,7 +2548,7 @@
                 </a:path>
               </a:pathLst>
             </a:custGeom>
-            <a:ln w="6775" cap="flat">
+            <a:ln w="8623" cap="flat">
               <a:solidFill>
                 <a:srgbClr val="EBEBEB">
                   <a:alpha val="100000"/>
@@ -2572,15 +2572,15 @@
           </p:nvSpPr>
           <p:spPr>
             <a:xfrm>
-              <a:off x="6933186" y="2073503"/>
-              <a:ext cx="0" cy="3649639"/>
+              <a:off x="6939491" y="2209169"/>
+              <a:ext cx="0" cy="3404141"/>
             </a:xfrm>
             <a:custGeom>
               <a:avLst/>
               <a:pathLst>
-                <a:path w="0" h="3649639">
+                <a:path w="0" h="3404141">
                   <a:moveTo>
-                    <a:pt x="0" y="3649639"/>
+                    <a:pt x="0" y="3404141"/>
                   </a:moveTo>
                   <a:lnTo>
                     <a:pt x="0" y="0"/>
@@ -2591,7 +2591,7 @@
                 </a:path>
               </a:pathLst>
             </a:custGeom>
-            <a:ln w="6775" cap="flat">
+            <a:ln w="8623" cap="flat">
               <a:solidFill>
                 <a:srgbClr val="EBEBEB">
                   <a:alpha val="100000"/>
@@ -2615,26 +2615,26 @@
           </p:nvSpPr>
           <p:spPr>
             <a:xfrm>
-              <a:off x="817517" y="5557249"/>
-              <a:ext cx="7799693" cy="0"/>
+              <a:off x="915645" y="5458577"/>
+              <a:ext cx="7682587" cy="0"/>
             </a:xfrm>
             <a:custGeom>
               <a:avLst/>
               <a:pathLst>
-                <a:path w="7799693" h="0">
+                <a:path w="7682587" h="0">
                   <a:moveTo>
                     <a:pt x="0" y="0"/>
                   </a:moveTo>
                   <a:lnTo>
-                    <a:pt x="7799693" y="0"/>
-                  </a:lnTo>
-                  <a:lnTo>
-                    <a:pt x="7799693" y="0"/>
+                    <a:pt x="7682587" y="0"/>
+                  </a:lnTo>
+                  <a:lnTo>
+                    <a:pt x="7682587" y="0"/>
                   </a:lnTo>
                 </a:path>
               </a:pathLst>
             </a:custGeom>
-            <a:ln w="13550" cap="flat">
+            <a:ln w="17246" cap="flat">
               <a:solidFill>
                 <a:srgbClr val="EBEBEB">
                   <a:alpha val="100000"/>
@@ -2658,26 +2658,26 @@
           </p:nvSpPr>
           <p:spPr>
             <a:xfrm>
-              <a:off x="817517" y="4727786"/>
-              <a:ext cx="7799693" cy="0"/>
+              <a:off x="915645" y="4684908"/>
+              <a:ext cx="7682587" cy="0"/>
             </a:xfrm>
             <a:custGeom>
               <a:avLst/>
               <a:pathLst>
-                <a:path w="7799693" h="0">
+                <a:path w="7682587" h="0">
                   <a:moveTo>
                     <a:pt x="0" y="0"/>
                   </a:moveTo>
                   <a:lnTo>
-                    <a:pt x="7799693" y="0"/>
-                  </a:lnTo>
-                  <a:lnTo>
-                    <a:pt x="7799693" y="0"/>
+                    <a:pt x="7682587" y="0"/>
+                  </a:lnTo>
+                  <a:lnTo>
+                    <a:pt x="7682587" y="0"/>
                   </a:lnTo>
                 </a:path>
               </a:pathLst>
             </a:custGeom>
-            <a:ln w="13550" cap="flat">
+            <a:ln w="17246" cap="flat">
               <a:solidFill>
                 <a:srgbClr val="EBEBEB">
                   <a:alpha val="100000"/>
@@ -2701,26 +2701,26 @@
           </p:nvSpPr>
           <p:spPr>
             <a:xfrm>
-              <a:off x="817517" y="3898322"/>
-              <a:ext cx="7799693" cy="0"/>
+              <a:off x="915645" y="3911240"/>
+              <a:ext cx="7682587" cy="0"/>
             </a:xfrm>
             <a:custGeom>
               <a:avLst/>
               <a:pathLst>
-                <a:path w="7799693" h="0">
+                <a:path w="7682587" h="0">
                   <a:moveTo>
                     <a:pt x="0" y="0"/>
                   </a:moveTo>
                   <a:lnTo>
-                    <a:pt x="7799693" y="0"/>
-                  </a:lnTo>
-                  <a:lnTo>
-                    <a:pt x="7799693" y="0"/>
+                    <a:pt x="7682587" y="0"/>
+                  </a:lnTo>
+                  <a:lnTo>
+                    <a:pt x="7682587" y="0"/>
                   </a:lnTo>
                 </a:path>
               </a:pathLst>
             </a:custGeom>
-            <a:ln w="13550" cap="flat">
+            <a:ln w="17246" cap="flat">
               <a:solidFill>
                 <a:srgbClr val="EBEBEB">
                   <a:alpha val="100000"/>
@@ -2744,26 +2744,26 @@
           </p:nvSpPr>
           <p:spPr>
             <a:xfrm>
-              <a:off x="817517" y="3068859"/>
-              <a:ext cx="7799693" cy="0"/>
+              <a:off x="915645" y="3137571"/>
+              <a:ext cx="7682587" cy="0"/>
             </a:xfrm>
             <a:custGeom>
               <a:avLst/>
               <a:pathLst>
-                <a:path w="7799693" h="0">
+                <a:path w="7682587" h="0">
                   <a:moveTo>
                     <a:pt x="0" y="0"/>
                   </a:moveTo>
                   <a:lnTo>
-                    <a:pt x="7799693" y="0"/>
-                  </a:lnTo>
-                  <a:lnTo>
-                    <a:pt x="7799693" y="0"/>
+                    <a:pt x="7682587" y="0"/>
+                  </a:lnTo>
+                  <a:lnTo>
+                    <a:pt x="7682587" y="0"/>
                   </a:lnTo>
                 </a:path>
               </a:pathLst>
             </a:custGeom>
-            <a:ln w="13550" cap="flat">
+            <a:ln w="17246" cap="flat">
               <a:solidFill>
                 <a:srgbClr val="EBEBEB">
                   <a:alpha val="100000"/>
@@ -2787,26 +2787,26 @@
           </p:nvSpPr>
           <p:spPr>
             <a:xfrm>
-              <a:off x="817517" y="2239395"/>
-              <a:ext cx="7799693" cy="0"/>
+              <a:off x="915645" y="2363903"/>
+              <a:ext cx="7682587" cy="0"/>
             </a:xfrm>
             <a:custGeom>
               <a:avLst/>
               <a:pathLst>
-                <a:path w="7799693" h="0">
+                <a:path w="7682587" h="0">
                   <a:moveTo>
                     <a:pt x="0" y="0"/>
                   </a:moveTo>
                   <a:lnTo>
-                    <a:pt x="7799693" y="0"/>
-                  </a:lnTo>
-                  <a:lnTo>
-                    <a:pt x="7799693" y="0"/>
+                    <a:pt x="7682587" y="0"/>
+                  </a:lnTo>
+                  <a:lnTo>
+                    <a:pt x="7682587" y="0"/>
                   </a:lnTo>
                 </a:path>
               </a:pathLst>
             </a:custGeom>
-            <a:ln w="13550" cap="flat">
+            <a:ln w="17246" cap="flat">
               <a:solidFill>
                 <a:srgbClr val="EBEBEB">
                   <a:alpha val="100000"/>
@@ -2830,15 +2830,15 @@
           </p:nvSpPr>
           <p:spPr>
             <a:xfrm>
-              <a:off x="2501542" y="2073503"/>
-              <a:ext cx="0" cy="3649639"/>
+              <a:off x="2574385" y="2209169"/>
+              <a:ext cx="0" cy="3404141"/>
             </a:xfrm>
             <a:custGeom>
               <a:avLst/>
               <a:pathLst>
-                <a:path w="0" h="3649639">
+                <a:path w="0" h="3404141">
                   <a:moveTo>
-                    <a:pt x="0" y="3649639"/>
+                    <a:pt x="0" y="3404141"/>
                   </a:moveTo>
                   <a:lnTo>
                     <a:pt x="0" y="0"/>
@@ -2849,7 +2849,7 @@
                 </a:path>
               </a:pathLst>
             </a:custGeom>
-            <a:ln w="13550" cap="flat">
+            <a:ln w="17246" cap="flat">
               <a:solidFill>
                 <a:srgbClr val="EBEBEB">
                   <a:alpha val="100000"/>
@@ -2873,15 +2873,15 @@
           </p:nvSpPr>
           <p:spPr>
             <a:xfrm>
-              <a:off x="4274200" y="2073503"/>
-              <a:ext cx="0" cy="3649639"/>
+              <a:off x="4320427" y="2209169"/>
+              <a:ext cx="0" cy="3404141"/>
             </a:xfrm>
             <a:custGeom>
               <a:avLst/>
               <a:pathLst>
-                <a:path w="0" h="3649639">
+                <a:path w="0" h="3404141">
                   <a:moveTo>
-                    <a:pt x="0" y="3649639"/>
+                    <a:pt x="0" y="3404141"/>
                   </a:moveTo>
                   <a:lnTo>
                     <a:pt x="0" y="0"/>
@@ -2892,7 +2892,7 @@
                 </a:path>
               </a:pathLst>
             </a:custGeom>
-            <a:ln w="13550" cap="flat">
+            <a:ln w="17246" cap="flat">
               <a:solidFill>
                 <a:srgbClr val="EBEBEB">
                   <a:alpha val="100000"/>
@@ -2916,15 +2916,15 @@
           </p:nvSpPr>
           <p:spPr>
             <a:xfrm>
-              <a:off x="6046857" y="2073503"/>
-              <a:ext cx="0" cy="3649639"/>
+              <a:off x="6066470" y="2209169"/>
+              <a:ext cx="0" cy="3404141"/>
             </a:xfrm>
             <a:custGeom>
               <a:avLst/>
               <a:pathLst>
-                <a:path w="0" h="3649639">
+                <a:path w="0" h="3404141">
                   <a:moveTo>
-                    <a:pt x="0" y="3649639"/>
+                    <a:pt x="0" y="3404141"/>
                   </a:moveTo>
                   <a:lnTo>
                     <a:pt x="0" y="0"/>
@@ -2935,7 +2935,7 @@
                 </a:path>
               </a:pathLst>
             </a:custGeom>
-            <a:ln w="13550" cap="flat">
+            <a:ln w="17246" cap="flat">
               <a:solidFill>
                 <a:srgbClr val="EBEBEB">
                   <a:alpha val="100000"/>
@@ -2959,15 +2959,15 @@
           </p:nvSpPr>
           <p:spPr>
             <a:xfrm>
-              <a:off x="7819515" y="2073503"/>
-              <a:ext cx="0" cy="3649639"/>
+              <a:off x="7812512" y="2209169"/>
+              <a:ext cx="0" cy="3404141"/>
             </a:xfrm>
             <a:custGeom>
               <a:avLst/>
               <a:pathLst>
-                <a:path w="0" h="3649639">
+                <a:path w="0" h="3404141">
                   <a:moveTo>
-                    <a:pt x="0" y="3649639"/>
+                    <a:pt x="0" y="3404141"/>
                   </a:moveTo>
                   <a:lnTo>
                     <a:pt x="0" y="0"/>
@@ -2978,7 +2978,7 @@
                 </a:path>
               </a:pathLst>
             </a:custGeom>
-            <a:ln w="13550" cap="flat">
+            <a:ln w="17246" cap="flat">
               <a:solidFill>
                 <a:srgbClr val="EBEBEB">
                   <a:alpha val="100000"/>
@@ -3002,516 +3002,516 @@
           </p:nvSpPr>
           <p:spPr>
             <a:xfrm>
-              <a:off x="817517" y="2073503"/>
-              <a:ext cx="7370972" cy="3467649"/>
+              <a:off x="915645" y="2209169"/>
+              <a:ext cx="7260303" cy="3234393"/>
             </a:xfrm>
             <a:custGeom>
               <a:avLst/>
               <a:pathLst>
-                <a:path w="7370972" h="3467649">
+                <a:path w="7260303" h="3234393">
                   <a:moveTo>
-                    <a:pt x="1935558" y="0"/>
+                    <a:pt x="1906497" y="0"/>
                   </a:moveTo>
                   <a:lnTo>
-                    <a:pt x="1936589" y="3688"/>
-                  </a:lnTo>
-                  <a:lnTo>
-                    <a:pt x="2014223" y="260957"/>
-                  </a:lnTo>
-                  <a:lnTo>
-                    <a:pt x="2091857" y="499206"/>
-                  </a:lnTo>
-                  <a:lnTo>
-                    <a:pt x="2169491" y="719843"/>
-                  </a:lnTo>
-                  <a:lnTo>
-                    <a:pt x="2247125" y="924169"/>
-                  </a:lnTo>
-                  <a:lnTo>
-                    <a:pt x="2324759" y="1113390"/>
-                  </a:lnTo>
-                  <a:lnTo>
-                    <a:pt x="2402393" y="1288622"/>
-                  </a:lnTo>
-                  <a:lnTo>
-                    <a:pt x="2480027" y="1450900"/>
-                  </a:lnTo>
-                  <a:lnTo>
-                    <a:pt x="2557661" y="1601182"/>
-                  </a:lnTo>
-                  <a:lnTo>
-                    <a:pt x="2635295" y="1740353"/>
-                  </a:lnTo>
-                  <a:lnTo>
-                    <a:pt x="2712930" y="1869236"/>
-                  </a:lnTo>
-                  <a:lnTo>
-                    <a:pt x="2790564" y="1988591"/>
-                  </a:lnTo>
-                  <a:lnTo>
-                    <a:pt x="2868198" y="2099123"/>
-                  </a:lnTo>
-                  <a:lnTo>
-                    <a:pt x="2945832" y="2201483"/>
-                  </a:lnTo>
-                  <a:lnTo>
-                    <a:pt x="3023466" y="2296277"/>
-                  </a:lnTo>
-                  <a:lnTo>
-                    <a:pt x="3101100" y="2384062"/>
-                  </a:lnTo>
-                  <a:lnTo>
-                    <a:pt x="3178734" y="2465358"/>
-                  </a:lnTo>
-                  <a:lnTo>
-                    <a:pt x="3256368" y="2540644"/>
-                  </a:lnTo>
-                  <a:lnTo>
-                    <a:pt x="3334002" y="2610364"/>
-                  </a:lnTo>
-                  <a:lnTo>
-                    <a:pt x="3411636" y="2652057"/>
-                  </a:lnTo>
-                  <a:lnTo>
-                    <a:pt x="3489270" y="2645239"/>
-                  </a:lnTo>
-                  <a:lnTo>
-                    <a:pt x="3566904" y="2638365"/>
-                  </a:lnTo>
-                  <a:lnTo>
-                    <a:pt x="3644538" y="2631434"/>
-                  </a:lnTo>
-                  <a:lnTo>
-                    <a:pt x="3722172" y="2624447"/>
-                  </a:lnTo>
-                  <a:lnTo>
-                    <a:pt x="3799806" y="2617402"/>
-                  </a:lnTo>
-                  <a:lnTo>
-                    <a:pt x="3877440" y="2610300"/>
-                  </a:lnTo>
-                  <a:lnTo>
-                    <a:pt x="3955074" y="2603139"/>
-                  </a:lnTo>
-                  <a:lnTo>
-                    <a:pt x="4032708" y="2595920"/>
-                  </a:lnTo>
-                  <a:lnTo>
-                    <a:pt x="4110342" y="2588642"/>
-                  </a:lnTo>
-                  <a:lnTo>
-                    <a:pt x="4187976" y="2581304"/>
-                  </a:lnTo>
-                  <a:lnTo>
-                    <a:pt x="4265610" y="2573905"/>
-                  </a:lnTo>
-                  <a:lnTo>
-                    <a:pt x="4343244" y="2566446"/>
-                  </a:lnTo>
-                  <a:lnTo>
-                    <a:pt x="4420879" y="2558926"/>
-                  </a:lnTo>
-                  <a:lnTo>
-                    <a:pt x="4498513" y="2551345"/>
-                  </a:lnTo>
-                  <a:lnTo>
-                    <a:pt x="4576147" y="2543701"/>
-                  </a:lnTo>
-                  <a:lnTo>
-                    <a:pt x="4653781" y="2535994"/>
-                  </a:lnTo>
-                  <a:lnTo>
-                    <a:pt x="4731415" y="2528224"/>
-                  </a:lnTo>
-                  <a:lnTo>
-                    <a:pt x="4809049" y="2520391"/>
-                  </a:lnTo>
-                  <a:lnTo>
-                    <a:pt x="4886683" y="2512493"/>
-                  </a:lnTo>
-                  <a:lnTo>
-                    <a:pt x="4964317" y="2504531"/>
-                  </a:lnTo>
-                  <a:lnTo>
-                    <a:pt x="5041951" y="2496503"/>
-                  </a:lnTo>
-                  <a:lnTo>
-                    <a:pt x="5119585" y="2488410"/>
-                  </a:lnTo>
-                  <a:lnTo>
-                    <a:pt x="5197219" y="2480250"/>
-                  </a:lnTo>
-                  <a:lnTo>
-                    <a:pt x="5274853" y="2472023"/>
-                  </a:lnTo>
-                  <a:lnTo>
-                    <a:pt x="5352487" y="2463729"/>
-                  </a:lnTo>
-                  <a:lnTo>
-                    <a:pt x="5430121" y="2455367"/>
-                  </a:lnTo>
-                  <a:lnTo>
-                    <a:pt x="5507755" y="2446936"/>
-                  </a:lnTo>
-                  <a:lnTo>
-                    <a:pt x="5585389" y="2438436"/>
-                  </a:lnTo>
-                  <a:lnTo>
-                    <a:pt x="5663023" y="2429867"/>
-                  </a:lnTo>
-                  <a:lnTo>
-                    <a:pt x="5740657" y="2421227"/>
-                  </a:lnTo>
-                  <a:lnTo>
-                    <a:pt x="5818291" y="2412516"/>
-                  </a:lnTo>
-                  <a:lnTo>
-                    <a:pt x="5895925" y="2403734"/>
-                  </a:lnTo>
-                  <a:lnTo>
-                    <a:pt x="5973559" y="2394880"/>
-                  </a:lnTo>
-                  <a:lnTo>
-                    <a:pt x="6051193" y="2385954"/>
-                  </a:lnTo>
-                  <a:lnTo>
-                    <a:pt x="6128827" y="2376954"/>
-                  </a:lnTo>
-                  <a:lnTo>
-                    <a:pt x="6206462" y="2367881"/>
-                  </a:lnTo>
-                  <a:lnTo>
-                    <a:pt x="6284096" y="2358733"/>
-                  </a:lnTo>
-                  <a:lnTo>
-                    <a:pt x="6361730" y="2349510"/>
-                  </a:lnTo>
-                  <a:lnTo>
-                    <a:pt x="6439364" y="2340211"/>
-                  </a:lnTo>
-                  <a:lnTo>
-                    <a:pt x="6516998" y="2330836"/>
-                  </a:lnTo>
-                  <a:lnTo>
-                    <a:pt x="6594632" y="2321385"/>
-                  </a:lnTo>
-                  <a:lnTo>
-                    <a:pt x="6672266" y="2311856"/>
-                  </a:lnTo>
-                  <a:lnTo>
-                    <a:pt x="6749900" y="2302248"/>
-                  </a:lnTo>
-                  <a:lnTo>
-                    <a:pt x="6827534" y="2292562"/>
-                  </a:lnTo>
-                  <a:lnTo>
-                    <a:pt x="6905168" y="2282797"/>
-                  </a:lnTo>
-                  <a:lnTo>
-                    <a:pt x="6982802" y="2272952"/>
-                  </a:lnTo>
-                  <a:lnTo>
-                    <a:pt x="7060436" y="2263025"/>
-                  </a:lnTo>
-                  <a:lnTo>
-                    <a:pt x="7138070" y="2253018"/>
-                  </a:lnTo>
-                  <a:lnTo>
-                    <a:pt x="7215704" y="2242928"/>
-                  </a:lnTo>
-                  <a:lnTo>
-                    <a:pt x="7293338" y="2232756"/>
-                  </a:lnTo>
-                  <a:lnTo>
-                    <a:pt x="7370972" y="2222500"/>
-                  </a:lnTo>
-                  <a:lnTo>
-                    <a:pt x="7370972" y="3467649"/>
-                  </a:lnTo>
-                  <a:lnTo>
-                    <a:pt x="7293338" y="3466364"/>
-                  </a:lnTo>
-                  <a:lnTo>
-                    <a:pt x="7215704" y="3464976"/>
-                  </a:lnTo>
-                  <a:lnTo>
-                    <a:pt x="7138070" y="3463478"/>
-                  </a:lnTo>
-                  <a:lnTo>
-                    <a:pt x="7060436" y="3461859"/>
-                  </a:lnTo>
-                  <a:lnTo>
-                    <a:pt x="6982802" y="3460112"/>
-                  </a:lnTo>
-                  <a:lnTo>
-                    <a:pt x="6905168" y="3458226"/>
-                  </a:lnTo>
-                  <a:lnTo>
-                    <a:pt x="6827534" y="3456188"/>
-                  </a:lnTo>
-                  <a:lnTo>
-                    <a:pt x="6749900" y="3453988"/>
-                  </a:lnTo>
-                  <a:lnTo>
-                    <a:pt x="6672266" y="3451613"/>
-                  </a:lnTo>
-                  <a:lnTo>
-                    <a:pt x="6594632" y="3449048"/>
-                  </a:lnTo>
-                  <a:lnTo>
-                    <a:pt x="6516998" y="3446278"/>
-                  </a:lnTo>
-                  <a:lnTo>
-                    <a:pt x="6439364" y="3443287"/>
-                  </a:lnTo>
-                  <a:lnTo>
-                    <a:pt x="6361730" y="3440057"/>
-                  </a:lnTo>
-                  <a:lnTo>
-                    <a:pt x="6284096" y="3436569"/>
-                  </a:lnTo>
-                  <a:lnTo>
-                    <a:pt x="6206462" y="3432803"/>
-                  </a:lnTo>
-                  <a:lnTo>
-                    <a:pt x="6128827" y="3428737"/>
-                  </a:lnTo>
-                  <a:lnTo>
-                    <a:pt x="6051193" y="3424345"/>
-                  </a:lnTo>
-                  <a:lnTo>
-                    <a:pt x="5973559" y="3419603"/>
-                  </a:lnTo>
-                  <a:lnTo>
-                    <a:pt x="5895925" y="3414483"/>
-                  </a:lnTo>
-                  <a:lnTo>
-                    <a:pt x="5818291" y="3408954"/>
-                  </a:lnTo>
-                  <a:lnTo>
-                    <a:pt x="5740657" y="3402983"/>
-                  </a:lnTo>
-                  <a:lnTo>
-                    <a:pt x="5663023" y="3396536"/>
-                  </a:lnTo>
-                  <a:lnTo>
-                    <a:pt x="5585389" y="3389574"/>
-                  </a:lnTo>
-                  <a:lnTo>
-                    <a:pt x="5507755" y="3382057"/>
-                  </a:lnTo>
-                  <a:lnTo>
-                    <a:pt x="5430121" y="3373939"/>
-                  </a:lnTo>
-                  <a:lnTo>
-                    <a:pt x="5352487" y="3365174"/>
-                  </a:lnTo>
-                  <a:lnTo>
-                    <a:pt x="5274853" y="3355708"/>
-                  </a:lnTo>
-                  <a:lnTo>
-                    <a:pt x="5197219" y="3345487"/>
-                  </a:lnTo>
-                  <a:lnTo>
-                    <a:pt x="5119585" y="3334450"/>
-                  </a:lnTo>
-                  <a:lnTo>
-                    <a:pt x="5041951" y="3322532"/>
-                  </a:lnTo>
-                  <a:lnTo>
-                    <a:pt x="4964317" y="3309663"/>
-                  </a:lnTo>
-                  <a:lnTo>
-                    <a:pt x="4886683" y="3295766"/>
-                  </a:lnTo>
-                  <a:lnTo>
-                    <a:pt x="4809049" y="3280760"/>
-                  </a:lnTo>
-                  <a:lnTo>
-                    <a:pt x="4731415" y="3264556"/>
-                  </a:lnTo>
-                  <a:lnTo>
-                    <a:pt x="4653781" y="3247058"/>
-                  </a:lnTo>
-                  <a:lnTo>
-                    <a:pt x="4576147" y="3228164"/>
-                  </a:lnTo>
-                  <a:lnTo>
-                    <a:pt x="4498513" y="3207761"/>
-                  </a:lnTo>
-                  <a:lnTo>
-                    <a:pt x="4420879" y="3185730"/>
-                  </a:lnTo>
-                  <a:lnTo>
-                    <a:pt x="4343244" y="3161940"/>
-                  </a:lnTo>
-                  <a:lnTo>
-                    <a:pt x="4265610" y="3136251"/>
-                  </a:lnTo>
-                  <a:lnTo>
-                    <a:pt x="4187976" y="3108511"/>
-                  </a:lnTo>
-                  <a:lnTo>
-                    <a:pt x="4110342" y="3078557"/>
-                  </a:lnTo>
-                  <a:lnTo>
-                    <a:pt x="4032708" y="3046211"/>
-                  </a:lnTo>
-                  <a:lnTo>
-                    <a:pt x="3955074" y="3011284"/>
-                  </a:lnTo>
-                  <a:lnTo>
-                    <a:pt x="3877440" y="2973568"/>
-                  </a:lnTo>
-                  <a:lnTo>
-                    <a:pt x="3799806" y="2932841"/>
-                  </a:lnTo>
-                  <a:lnTo>
-                    <a:pt x="3722172" y="2888864"/>
-                  </a:lnTo>
-                  <a:lnTo>
-                    <a:pt x="3644538" y="2841375"/>
-                  </a:lnTo>
-                  <a:lnTo>
-                    <a:pt x="3566904" y="2790096"/>
-                  </a:lnTo>
-                  <a:lnTo>
-                    <a:pt x="3489270" y="2734724"/>
-                  </a:lnTo>
-                  <a:lnTo>
-                    <a:pt x="3411636" y="2674931"/>
-                  </a:lnTo>
-                  <a:lnTo>
-                    <a:pt x="3334002" y="2658820"/>
-                  </a:lnTo>
-                  <a:lnTo>
-                    <a:pt x="3256368" y="2665528"/>
-                  </a:lnTo>
-                  <a:lnTo>
-                    <a:pt x="3178734" y="2672181"/>
-                  </a:lnTo>
-                  <a:lnTo>
-                    <a:pt x="3101100" y="2678780"/>
-                  </a:lnTo>
-                  <a:lnTo>
-                    <a:pt x="3023466" y="2685326"/>
-                  </a:lnTo>
-                  <a:lnTo>
-                    <a:pt x="2945832" y="2691818"/>
-                  </a:lnTo>
-                  <a:lnTo>
-                    <a:pt x="2868198" y="2698257"/>
-                  </a:lnTo>
-                  <a:lnTo>
-                    <a:pt x="2790564" y="2704644"/>
-                  </a:lnTo>
-                  <a:lnTo>
-                    <a:pt x="2712930" y="2710980"/>
-                  </a:lnTo>
-                  <a:lnTo>
-                    <a:pt x="2635295" y="2717263"/>
-                  </a:lnTo>
-                  <a:lnTo>
-                    <a:pt x="2557661" y="2723496"/>
-                  </a:lnTo>
-                  <a:lnTo>
-                    <a:pt x="2480027" y="2729678"/>
-                  </a:lnTo>
-                  <a:lnTo>
-                    <a:pt x="2402393" y="2735809"/>
-                  </a:lnTo>
-                  <a:lnTo>
-                    <a:pt x="2324759" y="2741891"/>
-                  </a:lnTo>
-                  <a:lnTo>
-                    <a:pt x="2247125" y="2747924"/>
-                  </a:lnTo>
-                  <a:lnTo>
-                    <a:pt x="2169491" y="2753907"/>
-                  </a:lnTo>
-                  <a:lnTo>
-                    <a:pt x="2091857" y="2759841"/>
-                  </a:lnTo>
-                  <a:lnTo>
-                    <a:pt x="2014223" y="2765728"/>
-                  </a:lnTo>
-                  <a:lnTo>
-                    <a:pt x="1936589" y="2771566"/>
-                  </a:lnTo>
-                  <a:lnTo>
-                    <a:pt x="1858955" y="2777357"/>
-                  </a:lnTo>
-                  <a:lnTo>
-                    <a:pt x="1781321" y="2783101"/>
-                  </a:lnTo>
-                  <a:lnTo>
-                    <a:pt x="1703687" y="2788798"/>
-                  </a:lnTo>
-                  <a:lnTo>
-                    <a:pt x="1626053" y="2794449"/>
-                  </a:lnTo>
-                  <a:lnTo>
-                    <a:pt x="1548419" y="2800054"/>
-                  </a:lnTo>
-                  <a:lnTo>
-                    <a:pt x="1470785" y="2805614"/>
-                  </a:lnTo>
-                  <a:lnTo>
-                    <a:pt x="1393151" y="2811128"/>
-                  </a:lnTo>
-                  <a:lnTo>
-                    <a:pt x="1315517" y="2816597"/>
-                  </a:lnTo>
-                  <a:lnTo>
-                    <a:pt x="1237883" y="2822022"/>
-                  </a:lnTo>
-                  <a:lnTo>
-                    <a:pt x="1160249" y="2827403"/>
-                  </a:lnTo>
-                  <a:lnTo>
-                    <a:pt x="1082615" y="2832740"/>
-                  </a:lnTo>
-                  <a:lnTo>
-                    <a:pt x="1004981" y="2838033"/>
-                  </a:lnTo>
-                  <a:lnTo>
-                    <a:pt x="927346" y="2843284"/>
-                  </a:lnTo>
-                  <a:lnTo>
-                    <a:pt x="849712" y="2848492"/>
-                  </a:lnTo>
-                  <a:lnTo>
-                    <a:pt x="772078" y="2853657"/>
-                  </a:lnTo>
-                  <a:lnTo>
-                    <a:pt x="694444" y="2858781"/>
-                  </a:lnTo>
-                  <a:lnTo>
-                    <a:pt x="616810" y="2863863"/>
-                  </a:lnTo>
-                  <a:lnTo>
-                    <a:pt x="539176" y="2868903"/>
-                  </a:lnTo>
-                  <a:lnTo>
-                    <a:pt x="461542" y="2873903"/>
-                  </a:lnTo>
-                  <a:lnTo>
-                    <a:pt x="383908" y="2878862"/>
-                  </a:lnTo>
-                  <a:lnTo>
-                    <a:pt x="306274" y="2883780"/>
-                  </a:lnTo>
-                  <a:lnTo>
-                    <a:pt x="228640" y="2888659"/>
-                  </a:lnTo>
-                  <a:lnTo>
-                    <a:pt x="151006" y="2893498"/>
-                  </a:lnTo>
-                  <a:lnTo>
-                    <a:pt x="73372" y="2898297"/>
-                  </a:lnTo>
-                  <a:lnTo>
-                    <a:pt x="0" y="2902796"/>
+                    <a:pt x="1907513" y="3440"/>
+                  </a:lnTo>
+                  <a:lnTo>
+                    <a:pt x="1983981" y="243403"/>
+                  </a:lnTo>
+                  <a:lnTo>
+                    <a:pt x="2060450" y="465627"/>
+                  </a:lnTo>
+                  <a:lnTo>
+                    <a:pt x="2136918" y="671422"/>
+                  </a:lnTo>
+                  <a:lnTo>
+                    <a:pt x="2213386" y="862004"/>
+                  </a:lnTo>
+                  <a:lnTo>
+                    <a:pt x="2289855" y="1038496"/>
+                  </a:lnTo>
+                  <a:lnTo>
+                    <a:pt x="2366323" y="1201941"/>
+                  </a:lnTo>
+                  <a:lnTo>
+                    <a:pt x="2442792" y="1353303"/>
+                  </a:lnTo>
+                  <a:lnTo>
+                    <a:pt x="2519260" y="1493476"/>
+                  </a:lnTo>
+                  <a:lnTo>
+                    <a:pt x="2595729" y="1623286"/>
+                  </a:lnTo>
+                  <a:lnTo>
+                    <a:pt x="2672197" y="1743499"/>
+                  </a:lnTo>
+                  <a:lnTo>
+                    <a:pt x="2748666" y="1854826"/>
+                  </a:lnTo>
+                  <a:lnTo>
+                    <a:pt x="2825134" y="1957923"/>
+                  </a:lnTo>
+                  <a:lnTo>
+                    <a:pt x="2901602" y="2053398"/>
+                  </a:lnTo>
+                  <a:lnTo>
+                    <a:pt x="2978071" y="2141815"/>
+                  </a:lnTo>
+                  <a:lnTo>
+                    <a:pt x="3054539" y="2223695"/>
+                  </a:lnTo>
+                  <a:lnTo>
+                    <a:pt x="3131008" y="2299523"/>
+                  </a:lnTo>
+                  <a:lnTo>
+                    <a:pt x="3207476" y="2369744"/>
+                  </a:lnTo>
+                  <a:lnTo>
+                    <a:pt x="3283945" y="2434775"/>
+                  </a:lnTo>
+                  <a:lnTo>
+                    <a:pt x="3360413" y="2473663"/>
+                  </a:lnTo>
+                  <a:lnTo>
+                    <a:pt x="3436881" y="2467303"/>
+                  </a:lnTo>
+                  <a:lnTo>
+                    <a:pt x="3513350" y="2460892"/>
+                  </a:lnTo>
+                  <a:lnTo>
+                    <a:pt x="3589818" y="2454427"/>
+                  </a:lnTo>
+                  <a:lnTo>
+                    <a:pt x="3666287" y="2447910"/>
+                  </a:lnTo>
+                  <a:lnTo>
+                    <a:pt x="3742755" y="2441339"/>
+                  </a:lnTo>
+                  <a:lnTo>
+                    <a:pt x="3819224" y="2434715"/>
+                  </a:lnTo>
+                  <a:lnTo>
+                    <a:pt x="3895692" y="2428036"/>
+                  </a:lnTo>
+                  <a:lnTo>
+                    <a:pt x="3972160" y="2421302"/>
+                  </a:lnTo>
+                  <a:lnTo>
+                    <a:pt x="4048629" y="2414513"/>
+                  </a:lnTo>
+                  <a:lnTo>
+                    <a:pt x="4125097" y="2407669"/>
+                  </a:lnTo>
+                  <a:lnTo>
+                    <a:pt x="4201566" y="2400768"/>
+                  </a:lnTo>
+                  <a:lnTo>
+                    <a:pt x="4278034" y="2393811"/>
+                  </a:lnTo>
+                  <a:lnTo>
+                    <a:pt x="4354503" y="2386797"/>
+                  </a:lnTo>
+                  <a:lnTo>
+                    <a:pt x="4430971" y="2379725"/>
+                  </a:lnTo>
+                  <a:lnTo>
+                    <a:pt x="4507439" y="2372595"/>
+                  </a:lnTo>
+                  <a:lnTo>
+                    <a:pt x="4583908" y="2365407"/>
+                  </a:lnTo>
+                  <a:lnTo>
+                    <a:pt x="4660376" y="2358160"/>
+                  </a:lnTo>
+                  <a:lnTo>
+                    <a:pt x="4736845" y="2350853"/>
+                  </a:lnTo>
+                  <a:lnTo>
+                    <a:pt x="4813313" y="2343487"/>
+                  </a:lnTo>
+                  <a:lnTo>
+                    <a:pt x="4889782" y="2336060"/>
+                  </a:lnTo>
+                  <a:lnTo>
+                    <a:pt x="4966250" y="2328573"/>
+                  </a:lnTo>
+                  <a:lnTo>
+                    <a:pt x="5042719" y="2321024"/>
+                  </a:lnTo>
+                  <a:lnTo>
+                    <a:pt x="5119187" y="2313413"/>
+                  </a:lnTo>
+                  <a:lnTo>
+                    <a:pt x="5195655" y="2305739"/>
+                  </a:lnTo>
+                  <a:lnTo>
+                    <a:pt x="5272124" y="2298003"/>
+                  </a:lnTo>
+                  <a:lnTo>
+                    <a:pt x="5348592" y="2290203"/>
+                  </a:lnTo>
+                  <a:lnTo>
+                    <a:pt x="5425061" y="2282340"/>
+                  </a:lnTo>
+                  <a:lnTo>
+                    <a:pt x="5501529" y="2274412"/>
+                  </a:lnTo>
+                  <a:lnTo>
+                    <a:pt x="5577998" y="2266419"/>
+                  </a:lnTo>
+                  <a:lnTo>
+                    <a:pt x="5654466" y="2258360"/>
+                  </a:lnTo>
+                  <a:lnTo>
+                    <a:pt x="5730934" y="2250235"/>
+                  </a:lnTo>
+                  <a:lnTo>
+                    <a:pt x="5807403" y="2242044"/>
+                  </a:lnTo>
+                  <a:lnTo>
+                    <a:pt x="5883871" y="2233786"/>
+                  </a:lnTo>
+                  <a:lnTo>
+                    <a:pt x="5960340" y="2225459"/>
+                  </a:lnTo>
+                  <a:lnTo>
+                    <a:pt x="6036808" y="2217065"/>
+                  </a:lnTo>
+                  <a:lnTo>
+                    <a:pt x="6113277" y="2208602"/>
+                  </a:lnTo>
+                  <a:lnTo>
+                    <a:pt x="6189745" y="2200069"/>
+                  </a:lnTo>
+                  <a:lnTo>
+                    <a:pt x="6266213" y="2191467"/>
+                  </a:lnTo>
+                  <a:lnTo>
+                    <a:pt x="6342682" y="2182794"/>
+                  </a:lnTo>
+                  <a:lnTo>
+                    <a:pt x="6419150" y="2174050"/>
+                  </a:lnTo>
+                  <a:lnTo>
+                    <a:pt x="6495619" y="2165234"/>
+                  </a:lnTo>
+                  <a:lnTo>
+                    <a:pt x="6572087" y="2156346"/>
+                  </a:lnTo>
+                  <a:lnTo>
+                    <a:pt x="6648556" y="2147385"/>
+                  </a:lnTo>
+                  <a:lnTo>
+                    <a:pt x="6725024" y="2138350"/>
+                  </a:lnTo>
+                  <a:lnTo>
+                    <a:pt x="6801492" y="2129242"/>
+                  </a:lnTo>
+                  <a:lnTo>
+                    <a:pt x="6877961" y="2120058"/>
+                  </a:lnTo>
+                  <a:lnTo>
+                    <a:pt x="6954429" y="2110800"/>
+                  </a:lnTo>
+                  <a:lnTo>
+                    <a:pt x="7030898" y="2101466"/>
+                  </a:lnTo>
+                  <a:lnTo>
+                    <a:pt x="7107366" y="2092055"/>
+                  </a:lnTo>
+                  <a:lnTo>
+                    <a:pt x="7183835" y="2082567"/>
+                  </a:lnTo>
+                  <a:lnTo>
+                    <a:pt x="7260303" y="2073001"/>
+                  </a:lnTo>
+                  <a:lnTo>
+                    <a:pt x="7260303" y="3234393"/>
+                  </a:lnTo>
+                  <a:lnTo>
+                    <a:pt x="7183835" y="3233194"/>
+                  </a:lnTo>
+                  <a:lnTo>
+                    <a:pt x="7107366" y="3231900"/>
+                  </a:lnTo>
+                  <a:lnTo>
+                    <a:pt x="7030898" y="3230502"/>
+                  </a:lnTo>
+                  <a:lnTo>
+                    <a:pt x="6954429" y="3228993"/>
+                  </a:lnTo>
+                  <a:lnTo>
+                    <a:pt x="6877961" y="3227363"/>
+                  </a:lnTo>
+                  <a:lnTo>
+                    <a:pt x="6801492" y="3225603"/>
+                  </a:lnTo>
+                  <a:lnTo>
+                    <a:pt x="6725024" y="3223703"/>
+                  </a:lnTo>
+                  <a:lnTo>
+                    <a:pt x="6648556" y="3221651"/>
+                  </a:lnTo>
+                  <a:lnTo>
+                    <a:pt x="6572087" y="3219436"/>
+                  </a:lnTo>
+                  <a:lnTo>
+                    <a:pt x="6495619" y="3217043"/>
+                  </a:lnTo>
+                  <a:lnTo>
+                    <a:pt x="6419150" y="3214459"/>
+                  </a:lnTo>
+                  <a:lnTo>
+                    <a:pt x="6342682" y="3211670"/>
+                  </a:lnTo>
+                  <a:lnTo>
+                    <a:pt x="6266213" y="3208657"/>
+                  </a:lnTo>
+                  <a:lnTo>
+                    <a:pt x="6189745" y="3205404"/>
+                  </a:lnTo>
+                  <a:lnTo>
+                    <a:pt x="6113277" y="3201891"/>
+                  </a:lnTo>
+                  <a:lnTo>
+                    <a:pt x="6036808" y="3198098"/>
+                  </a:lnTo>
+                  <a:lnTo>
+                    <a:pt x="5960340" y="3194002"/>
+                  </a:lnTo>
+                  <a:lnTo>
+                    <a:pt x="5883871" y="3189579"/>
+                  </a:lnTo>
+                  <a:lnTo>
+                    <a:pt x="5807403" y="3184803"/>
+                  </a:lnTo>
+                  <a:lnTo>
+                    <a:pt x="5730934" y="3179646"/>
+                  </a:lnTo>
+                  <a:lnTo>
+                    <a:pt x="5654466" y="3174077"/>
+                  </a:lnTo>
+                  <a:lnTo>
+                    <a:pt x="5577998" y="3168064"/>
+                  </a:lnTo>
+                  <a:lnTo>
+                    <a:pt x="5501529" y="3161570"/>
+                  </a:lnTo>
+                  <a:lnTo>
+                    <a:pt x="5425061" y="3154558"/>
+                  </a:lnTo>
+                  <a:lnTo>
+                    <a:pt x="5348592" y="3146987"/>
+                  </a:lnTo>
+                  <a:lnTo>
+                    <a:pt x="5272124" y="3138811"/>
+                  </a:lnTo>
+                  <a:lnTo>
+                    <a:pt x="5195655" y="3129982"/>
+                  </a:lnTo>
+                  <a:lnTo>
+                    <a:pt x="5119187" y="3120448"/>
+                  </a:lnTo>
+                  <a:lnTo>
+                    <a:pt x="5042719" y="3110154"/>
+                  </a:lnTo>
+                  <a:lnTo>
+                    <a:pt x="4966250" y="3099038"/>
+                  </a:lnTo>
+                  <a:lnTo>
+                    <a:pt x="4889782" y="3087034"/>
+                  </a:lnTo>
+                  <a:lnTo>
+                    <a:pt x="4813313" y="3074072"/>
+                  </a:lnTo>
+                  <a:lnTo>
+                    <a:pt x="4736845" y="3060075"/>
+                  </a:lnTo>
+                  <a:lnTo>
+                    <a:pt x="4660376" y="3044961"/>
+                  </a:lnTo>
+                  <a:lnTo>
+                    <a:pt x="4583908" y="3028641"/>
+                  </a:lnTo>
+                  <a:lnTo>
+                    <a:pt x="4507439" y="3011017"/>
+                  </a:lnTo>
+                  <a:lnTo>
+                    <a:pt x="4430971" y="2991987"/>
+                  </a:lnTo>
+                  <a:lnTo>
+                    <a:pt x="4354503" y="2971438"/>
+                  </a:lnTo>
+                  <a:lnTo>
+                    <a:pt x="4278034" y="2949248"/>
+                  </a:lnTo>
+                  <a:lnTo>
+                    <a:pt x="4201566" y="2925287"/>
+                  </a:lnTo>
+                  <a:lnTo>
+                    <a:pt x="4125097" y="2899413"/>
+                  </a:lnTo>
+                  <a:lnTo>
+                    <a:pt x="4048629" y="2871473"/>
+                  </a:lnTo>
+                  <a:lnTo>
+                    <a:pt x="3972160" y="2841304"/>
+                  </a:lnTo>
+                  <a:lnTo>
+                    <a:pt x="3895692" y="2808726"/>
+                  </a:lnTo>
+                  <a:lnTo>
+                    <a:pt x="3819224" y="2773547"/>
+                  </a:lnTo>
+                  <a:lnTo>
+                    <a:pt x="3742755" y="2735560"/>
+                  </a:lnTo>
+                  <a:lnTo>
+                    <a:pt x="3666287" y="2694540"/>
+                  </a:lnTo>
+                  <a:lnTo>
+                    <a:pt x="3589818" y="2650247"/>
+                  </a:lnTo>
+                  <a:lnTo>
+                    <a:pt x="3513350" y="2602417"/>
+                  </a:lnTo>
+                  <a:lnTo>
+                    <a:pt x="3436881" y="2550769"/>
+                  </a:lnTo>
+                  <a:lnTo>
+                    <a:pt x="3360413" y="2494998"/>
+                  </a:lnTo>
+                  <a:lnTo>
+                    <a:pt x="3283945" y="2479971"/>
+                  </a:lnTo>
+                  <a:lnTo>
+                    <a:pt x="3207476" y="2486227"/>
+                  </a:lnTo>
+                  <a:lnTo>
+                    <a:pt x="3131008" y="2492433"/>
+                  </a:lnTo>
+                  <a:lnTo>
+                    <a:pt x="3054539" y="2498588"/>
+                  </a:lnTo>
+                  <a:lnTo>
+                    <a:pt x="2978071" y="2504694"/>
+                  </a:lnTo>
+                  <a:lnTo>
+                    <a:pt x="2901602" y="2510749"/>
+                  </a:lnTo>
+                  <a:lnTo>
+                    <a:pt x="2825134" y="2516755"/>
+                  </a:lnTo>
+                  <a:lnTo>
+                    <a:pt x="2748666" y="2522713"/>
+                  </a:lnTo>
+                  <a:lnTo>
+                    <a:pt x="2672197" y="2528622"/>
+                  </a:lnTo>
+                  <a:lnTo>
+                    <a:pt x="2595729" y="2534483"/>
+                  </a:lnTo>
+                  <a:lnTo>
+                    <a:pt x="2519260" y="2540296"/>
+                  </a:lnTo>
+                  <a:lnTo>
+                    <a:pt x="2442792" y="2546062"/>
+                  </a:lnTo>
+                  <a:lnTo>
+                    <a:pt x="2366323" y="2551782"/>
+                  </a:lnTo>
+                  <a:lnTo>
+                    <a:pt x="2289855" y="2557454"/>
+                  </a:lnTo>
+                  <a:lnTo>
+                    <a:pt x="2213386" y="2563081"/>
+                  </a:lnTo>
+                  <a:lnTo>
+                    <a:pt x="2136918" y="2568662"/>
+                  </a:lnTo>
+                  <a:lnTo>
+                    <a:pt x="2060450" y="2574197"/>
+                  </a:lnTo>
+                  <a:lnTo>
+                    <a:pt x="1983981" y="2579687"/>
+                  </a:lnTo>
+                  <a:lnTo>
+                    <a:pt x="1907513" y="2585133"/>
+                  </a:lnTo>
+                  <a:lnTo>
+                    <a:pt x="1831044" y="2590535"/>
+                  </a:lnTo>
+                  <a:lnTo>
+                    <a:pt x="1754576" y="2595892"/>
+                  </a:lnTo>
+                  <a:lnTo>
+                    <a:pt x="1678107" y="2601206"/>
+                  </a:lnTo>
+                  <a:lnTo>
+                    <a:pt x="1601639" y="2606477"/>
+                  </a:lnTo>
+                  <a:lnTo>
+                    <a:pt x="1525171" y="2611705"/>
+                  </a:lnTo>
+                  <a:lnTo>
+                    <a:pt x="1448702" y="2616890"/>
+                  </a:lnTo>
+                  <a:lnTo>
+                    <a:pt x="1372234" y="2622034"/>
+                  </a:lnTo>
+                  <a:lnTo>
+                    <a:pt x="1295765" y="2627135"/>
+                  </a:lnTo>
+                  <a:lnTo>
+                    <a:pt x="1219297" y="2632195"/>
+                  </a:lnTo>
+                  <a:lnTo>
+                    <a:pt x="1142828" y="2637214"/>
+                  </a:lnTo>
+                  <a:lnTo>
+                    <a:pt x="1066360" y="2642192"/>
+                  </a:lnTo>
+                  <a:lnTo>
+                    <a:pt x="989892" y="2647129"/>
+                  </a:lnTo>
+                  <a:lnTo>
+                    <a:pt x="913423" y="2652027"/>
+                  </a:lnTo>
+                  <a:lnTo>
+                    <a:pt x="836955" y="2656884"/>
+                  </a:lnTo>
+                  <a:lnTo>
+                    <a:pt x="760486" y="2661702"/>
+                  </a:lnTo>
+                  <a:lnTo>
+                    <a:pt x="684018" y="2666481"/>
+                  </a:lnTo>
+                  <a:lnTo>
+                    <a:pt x="607549" y="2671221"/>
+                  </a:lnTo>
+                  <a:lnTo>
+                    <a:pt x="531081" y="2675923"/>
+                  </a:lnTo>
+                  <a:lnTo>
+                    <a:pt x="454613" y="2680586"/>
+                  </a:lnTo>
+                  <a:lnTo>
+                    <a:pt x="378144" y="2685211"/>
+                  </a:lnTo>
+                  <a:lnTo>
+                    <a:pt x="301676" y="2689799"/>
+                  </a:lnTo>
+                  <a:lnTo>
+                    <a:pt x="225207" y="2694349"/>
+                  </a:lnTo>
+                  <a:lnTo>
+                    <a:pt x="148739" y="2698863"/>
+                  </a:lnTo>
+                  <a:lnTo>
+                    <a:pt x="72270" y="2703339"/>
+                  </a:lnTo>
+                  <a:lnTo>
+                    <a:pt x="0" y="2707536"/>
                   </a:lnTo>
                   <a:close/>
                 </a:path>
@@ -3537,228 +3537,228 @@
           </p:nvSpPr>
           <p:spPr>
             <a:xfrm>
-              <a:off x="2753076" y="2073503"/>
-              <a:ext cx="5435413" cy="2652057"/>
+              <a:off x="2822143" y="2209169"/>
+              <a:ext cx="5353805" cy="2473663"/>
             </a:xfrm>
             <a:custGeom>
               <a:avLst/>
               <a:pathLst>
-                <a:path w="5435413" h="2652057">
+                <a:path w="5353805" h="2473663">
                   <a:moveTo>
                     <a:pt x="0" y="0"/>
                   </a:moveTo>
                   <a:lnTo>
-                    <a:pt x="1030" y="3688"/>
-                  </a:lnTo>
-                  <a:lnTo>
-                    <a:pt x="78664" y="260957"/>
-                  </a:lnTo>
-                  <a:lnTo>
-                    <a:pt x="156298" y="499206"/>
-                  </a:lnTo>
-                  <a:lnTo>
-                    <a:pt x="233932" y="719843"/>
-                  </a:lnTo>
-                  <a:lnTo>
-                    <a:pt x="311566" y="924169"/>
-                  </a:lnTo>
-                  <a:lnTo>
-                    <a:pt x="389200" y="1113390"/>
-                  </a:lnTo>
-                  <a:lnTo>
-                    <a:pt x="466835" y="1288622"/>
-                  </a:lnTo>
-                  <a:lnTo>
-                    <a:pt x="544469" y="1450900"/>
-                  </a:lnTo>
-                  <a:lnTo>
-                    <a:pt x="622103" y="1601182"/>
-                  </a:lnTo>
-                  <a:lnTo>
-                    <a:pt x="699737" y="1740353"/>
-                  </a:lnTo>
-                  <a:lnTo>
-                    <a:pt x="777371" y="1869236"/>
-                  </a:lnTo>
-                  <a:lnTo>
-                    <a:pt x="855005" y="1988591"/>
-                  </a:lnTo>
-                  <a:lnTo>
-                    <a:pt x="932639" y="2099123"/>
-                  </a:lnTo>
-                  <a:lnTo>
-                    <a:pt x="1010273" y="2201483"/>
-                  </a:lnTo>
-                  <a:lnTo>
-                    <a:pt x="1087907" y="2296277"/>
-                  </a:lnTo>
-                  <a:lnTo>
-                    <a:pt x="1165541" y="2384062"/>
-                  </a:lnTo>
-                  <a:lnTo>
-                    <a:pt x="1243175" y="2465358"/>
-                  </a:lnTo>
-                  <a:lnTo>
-                    <a:pt x="1320809" y="2540644"/>
-                  </a:lnTo>
-                  <a:lnTo>
-                    <a:pt x="1398443" y="2610364"/>
-                  </a:lnTo>
-                  <a:lnTo>
-                    <a:pt x="1476077" y="2652057"/>
-                  </a:lnTo>
-                  <a:lnTo>
-                    <a:pt x="1553711" y="2645239"/>
-                  </a:lnTo>
-                  <a:lnTo>
-                    <a:pt x="1631345" y="2638365"/>
-                  </a:lnTo>
-                  <a:lnTo>
-                    <a:pt x="1708979" y="2631434"/>
-                  </a:lnTo>
-                  <a:lnTo>
-                    <a:pt x="1786613" y="2624447"/>
-                  </a:lnTo>
-                  <a:lnTo>
-                    <a:pt x="1864247" y="2617402"/>
-                  </a:lnTo>
-                  <a:lnTo>
-                    <a:pt x="1941881" y="2610300"/>
-                  </a:lnTo>
-                  <a:lnTo>
-                    <a:pt x="2019515" y="2603139"/>
-                  </a:lnTo>
-                  <a:lnTo>
-                    <a:pt x="2097149" y="2595920"/>
-                  </a:lnTo>
-                  <a:lnTo>
-                    <a:pt x="2174784" y="2588642"/>
-                  </a:lnTo>
-                  <a:lnTo>
-                    <a:pt x="2252418" y="2581304"/>
-                  </a:lnTo>
-                  <a:lnTo>
-                    <a:pt x="2330052" y="2573905"/>
-                  </a:lnTo>
-                  <a:lnTo>
-                    <a:pt x="2407686" y="2566446"/>
-                  </a:lnTo>
-                  <a:lnTo>
-                    <a:pt x="2485320" y="2558926"/>
-                  </a:lnTo>
-                  <a:lnTo>
-                    <a:pt x="2562954" y="2551345"/>
-                  </a:lnTo>
-                  <a:lnTo>
-                    <a:pt x="2640588" y="2543701"/>
-                  </a:lnTo>
-                  <a:lnTo>
-                    <a:pt x="2718222" y="2535994"/>
-                  </a:lnTo>
-                  <a:lnTo>
-                    <a:pt x="2795856" y="2528224"/>
-                  </a:lnTo>
-                  <a:lnTo>
-                    <a:pt x="2873490" y="2520391"/>
-                  </a:lnTo>
-                  <a:lnTo>
-                    <a:pt x="2951124" y="2512493"/>
-                  </a:lnTo>
-                  <a:lnTo>
-                    <a:pt x="3028758" y="2504531"/>
-                  </a:lnTo>
-                  <a:lnTo>
-                    <a:pt x="3106392" y="2496503"/>
-                  </a:lnTo>
-                  <a:lnTo>
-                    <a:pt x="3184026" y="2488410"/>
-                  </a:lnTo>
-                  <a:lnTo>
-                    <a:pt x="3261660" y="2480250"/>
-                  </a:lnTo>
-                  <a:lnTo>
-                    <a:pt x="3339294" y="2472023"/>
-                  </a:lnTo>
-                  <a:lnTo>
-                    <a:pt x="3416928" y="2463729"/>
-                  </a:lnTo>
-                  <a:lnTo>
-                    <a:pt x="3494562" y="2455367"/>
-                  </a:lnTo>
-                  <a:lnTo>
-                    <a:pt x="3572196" y="2446936"/>
-                  </a:lnTo>
-                  <a:lnTo>
-                    <a:pt x="3649830" y="2438436"/>
-                  </a:lnTo>
-                  <a:lnTo>
-                    <a:pt x="3727464" y="2429867"/>
-                  </a:lnTo>
-                  <a:lnTo>
-                    <a:pt x="3805098" y="2421227"/>
-                  </a:lnTo>
-                  <a:lnTo>
-                    <a:pt x="3882732" y="2412516"/>
-                  </a:lnTo>
-                  <a:lnTo>
-                    <a:pt x="3960367" y="2403734"/>
-                  </a:lnTo>
-                  <a:lnTo>
-                    <a:pt x="4038001" y="2394880"/>
-                  </a:lnTo>
-                  <a:lnTo>
-                    <a:pt x="4115635" y="2385954"/>
-                  </a:lnTo>
-                  <a:lnTo>
-                    <a:pt x="4193269" y="2376954"/>
-                  </a:lnTo>
-                  <a:lnTo>
-                    <a:pt x="4270903" y="2367881"/>
-                  </a:lnTo>
-                  <a:lnTo>
-                    <a:pt x="4348537" y="2358733"/>
-                  </a:lnTo>
-                  <a:lnTo>
-                    <a:pt x="4426171" y="2349510"/>
-                  </a:lnTo>
-                  <a:lnTo>
-                    <a:pt x="4503805" y="2340211"/>
-                  </a:lnTo>
-                  <a:lnTo>
-                    <a:pt x="4581439" y="2330836"/>
-                  </a:lnTo>
-                  <a:lnTo>
-                    <a:pt x="4659073" y="2321385"/>
-                  </a:lnTo>
-                  <a:lnTo>
-                    <a:pt x="4736707" y="2311856"/>
-                  </a:lnTo>
-                  <a:lnTo>
-                    <a:pt x="4814341" y="2302248"/>
-                  </a:lnTo>
-                  <a:lnTo>
-                    <a:pt x="4891975" y="2292562"/>
-                  </a:lnTo>
-                  <a:lnTo>
-                    <a:pt x="4969609" y="2282797"/>
-                  </a:lnTo>
-                  <a:lnTo>
-                    <a:pt x="5047243" y="2272952"/>
-                  </a:lnTo>
-                  <a:lnTo>
-                    <a:pt x="5124877" y="2263025"/>
-                  </a:lnTo>
-                  <a:lnTo>
-                    <a:pt x="5202511" y="2253018"/>
-                  </a:lnTo>
-                  <a:lnTo>
-                    <a:pt x="5280145" y="2242928"/>
-                  </a:lnTo>
-                  <a:lnTo>
-                    <a:pt x="5357779" y="2232756"/>
-                  </a:lnTo>
-                  <a:lnTo>
-                    <a:pt x="5435413" y="2222500"/>
+                    <a:pt x="1015" y="3440"/>
+                  </a:lnTo>
+                  <a:lnTo>
+                    <a:pt x="77483" y="243403"/>
+                  </a:lnTo>
+                  <a:lnTo>
+                    <a:pt x="153952" y="465627"/>
+                  </a:lnTo>
+                  <a:lnTo>
+                    <a:pt x="230420" y="671422"/>
+                  </a:lnTo>
+                  <a:lnTo>
+                    <a:pt x="306889" y="862004"/>
+                  </a:lnTo>
+                  <a:lnTo>
+                    <a:pt x="383357" y="1038496"/>
+                  </a:lnTo>
+                  <a:lnTo>
+                    <a:pt x="459825" y="1201941"/>
+                  </a:lnTo>
+                  <a:lnTo>
+                    <a:pt x="536294" y="1353303"/>
+                  </a:lnTo>
+                  <a:lnTo>
+                    <a:pt x="612762" y="1493476"/>
+                  </a:lnTo>
+                  <a:lnTo>
+                    <a:pt x="689231" y="1623286"/>
+                  </a:lnTo>
+                  <a:lnTo>
+                    <a:pt x="765699" y="1743499"/>
+                  </a:lnTo>
+                  <a:lnTo>
+                    <a:pt x="842168" y="1854826"/>
+                  </a:lnTo>
+                  <a:lnTo>
+                    <a:pt x="918636" y="1957923"/>
+                  </a:lnTo>
+                  <a:lnTo>
+                    <a:pt x="995104" y="2053398"/>
+                  </a:lnTo>
+                  <a:lnTo>
+                    <a:pt x="1071573" y="2141815"/>
+                  </a:lnTo>
+                  <a:lnTo>
+                    <a:pt x="1148041" y="2223695"/>
+                  </a:lnTo>
+                  <a:lnTo>
+                    <a:pt x="1224510" y="2299523"/>
+                  </a:lnTo>
+                  <a:lnTo>
+                    <a:pt x="1300978" y="2369744"/>
+                  </a:lnTo>
+                  <a:lnTo>
+                    <a:pt x="1377447" y="2434775"/>
+                  </a:lnTo>
+                  <a:lnTo>
+                    <a:pt x="1453915" y="2473663"/>
+                  </a:lnTo>
+                  <a:lnTo>
+                    <a:pt x="1530383" y="2467303"/>
+                  </a:lnTo>
+                  <a:lnTo>
+                    <a:pt x="1606852" y="2460892"/>
+                  </a:lnTo>
+                  <a:lnTo>
+                    <a:pt x="1683320" y="2454427"/>
+                  </a:lnTo>
+                  <a:lnTo>
+                    <a:pt x="1759789" y="2447910"/>
+                  </a:lnTo>
+                  <a:lnTo>
+                    <a:pt x="1836257" y="2441339"/>
+                  </a:lnTo>
+                  <a:lnTo>
+                    <a:pt x="1912726" y="2434715"/>
+                  </a:lnTo>
+                  <a:lnTo>
+                    <a:pt x="1989194" y="2428036"/>
+                  </a:lnTo>
+                  <a:lnTo>
+                    <a:pt x="2065662" y="2421302"/>
+                  </a:lnTo>
+                  <a:lnTo>
+                    <a:pt x="2142131" y="2414513"/>
+                  </a:lnTo>
+                  <a:lnTo>
+                    <a:pt x="2218599" y="2407669"/>
+                  </a:lnTo>
+                  <a:lnTo>
+                    <a:pt x="2295068" y="2400768"/>
+                  </a:lnTo>
+                  <a:lnTo>
+                    <a:pt x="2371536" y="2393811"/>
+                  </a:lnTo>
+                  <a:lnTo>
+                    <a:pt x="2448005" y="2386797"/>
+                  </a:lnTo>
+                  <a:lnTo>
+                    <a:pt x="2524473" y="2379725"/>
+                  </a:lnTo>
+                  <a:lnTo>
+                    <a:pt x="2600941" y="2372595"/>
+                  </a:lnTo>
+                  <a:lnTo>
+                    <a:pt x="2677410" y="2365407"/>
+                  </a:lnTo>
+                  <a:lnTo>
+                    <a:pt x="2753878" y="2358160"/>
+                  </a:lnTo>
+                  <a:lnTo>
+                    <a:pt x="2830347" y="2350853"/>
+                  </a:lnTo>
+                  <a:lnTo>
+                    <a:pt x="2906815" y="2343487"/>
+                  </a:lnTo>
+                  <a:lnTo>
+                    <a:pt x="2983284" y="2336060"/>
+                  </a:lnTo>
+                  <a:lnTo>
+                    <a:pt x="3059752" y="2328573"/>
+                  </a:lnTo>
+                  <a:lnTo>
+                    <a:pt x="3136221" y="2321024"/>
+                  </a:lnTo>
+                  <a:lnTo>
+                    <a:pt x="3212689" y="2313413"/>
+                  </a:lnTo>
+                  <a:lnTo>
+                    <a:pt x="3289157" y="2305739"/>
+                  </a:lnTo>
+                  <a:lnTo>
+                    <a:pt x="3365626" y="2298003"/>
+                  </a:lnTo>
+                  <a:lnTo>
+                    <a:pt x="3442094" y="2290203"/>
+                  </a:lnTo>
+                  <a:lnTo>
+                    <a:pt x="3518563" y="2282340"/>
+                  </a:lnTo>
+                  <a:lnTo>
+                    <a:pt x="3595031" y="2274412"/>
+                  </a:lnTo>
+                  <a:lnTo>
+                    <a:pt x="3671500" y="2266419"/>
+                  </a:lnTo>
+                  <a:lnTo>
+                    <a:pt x="3747968" y="2258360"/>
+                  </a:lnTo>
+                  <a:lnTo>
+                    <a:pt x="3824436" y="2250235"/>
+                  </a:lnTo>
+                  <a:lnTo>
+                    <a:pt x="3900905" y="2242044"/>
+                  </a:lnTo>
+                  <a:lnTo>
+                    <a:pt x="3977373" y="2233786"/>
+                  </a:lnTo>
+                  <a:lnTo>
+                    <a:pt x="4053842" y="2225459"/>
+                  </a:lnTo>
+                  <a:lnTo>
+                    <a:pt x="4130310" y="2217065"/>
+                  </a:lnTo>
+                  <a:lnTo>
+                    <a:pt x="4206779" y="2208602"/>
+                  </a:lnTo>
+                  <a:lnTo>
+                    <a:pt x="4283247" y="2200069"/>
+                  </a:lnTo>
+                  <a:lnTo>
+                    <a:pt x="4359715" y="2191467"/>
+                  </a:lnTo>
+                  <a:lnTo>
+                    <a:pt x="4436184" y="2182794"/>
+                  </a:lnTo>
+                  <a:lnTo>
+                    <a:pt x="4512652" y="2174050"/>
+                  </a:lnTo>
+                  <a:lnTo>
+                    <a:pt x="4589121" y="2165234"/>
+                  </a:lnTo>
+                  <a:lnTo>
+                    <a:pt x="4665589" y="2156346"/>
+                  </a:lnTo>
+                  <a:lnTo>
+                    <a:pt x="4742058" y="2147385"/>
+                  </a:lnTo>
+                  <a:lnTo>
+                    <a:pt x="4818526" y="2138350"/>
+                  </a:lnTo>
+                  <a:lnTo>
+                    <a:pt x="4894994" y="2129242"/>
+                  </a:lnTo>
+                  <a:lnTo>
+                    <a:pt x="4971463" y="2120058"/>
+                  </a:lnTo>
+                  <a:lnTo>
+                    <a:pt x="5047931" y="2110800"/>
+                  </a:lnTo>
+                  <a:lnTo>
+                    <a:pt x="5124400" y="2101466"/>
+                  </a:lnTo>
+                  <a:lnTo>
+                    <a:pt x="5200868" y="2092055"/>
+                  </a:lnTo>
+                  <a:lnTo>
+                    <a:pt x="5277337" y="2082567"/>
+                  </a:lnTo>
+                  <a:lnTo>
+                    <a:pt x="5353805" y="2073001"/>
                   </a:lnTo>
                 </a:path>
               </a:pathLst>
@@ -3778,300 +3778,300 @@
           </p:nvSpPr>
           <p:spPr>
             <a:xfrm>
-              <a:off x="817517" y="4732323"/>
-              <a:ext cx="7370972" cy="808828"/>
+              <a:off x="915645" y="4689140"/>
+              <a:ext cx="7260303" cy="754421"/>
             </a:xfrm>
             <a:custGeom>
               <a:avLst/>
               <a:pathLst>
-                <a:path w="7370972" h="808828">
+                <a:path w="7260303" h="754421">
                   <a:moveTo>
-                    <a:pt x="7370972" y="808828"/>
+                    <a:pt x="7260303" y="754421"/>
                   </a:moveTo>
                   <a:lnTo>
-                    <a:pt x="7293338" y="807543"/>
-                  </a:lnTo>
-                  <a:lnTo>
-                    <a:pt x="7215704" y="806156"/>
-                  </a:lnTo>
-                  <a:lnTo>
-                    <a:pt x="7138070" y="804657"/>
-                  </a:lnTo>
-                  <a:lnTo>
-                    <a:pt x="7060436" y="803039"/>
-                  </a:lnTo>
-                  <a:lnTo>
-                    <a:pt x="6982802" y="801292"/>
-                  </a:lnTo>
-                  <a:lnTo>
-                    <a:pt x="6905168" y="799405"/>
-                  </a:lnTo>
-                  <a:lnTo>
-                    <a:pt x="6827534" y="797368"/>
-                  </a:lnTo>
-                  <a:lnTo>
-                    <a:pt x="6749900" y="795168"/>
-                  </a:lnTo>
-                  <a:lnTo>
-                    <a:pt x="6672266" y="792793"/>
-                  </a:lnTo>
-                  <a:lnTo>
-                    <a:pt x="6594632" y="790227"/>
-                  </a:lnTo>
-                  <a:lnTo>
-                    <a:pt x="6516998" y="787458"/>
-                  </a:lnTo>
-                  <a:lnTo>
-                    <a:pt x="6439364" y="784466"/>
-                  </a:lnTo>
-                  <a:lnTo>
-                    <a:pt x="6361730" y="781237"/>
-                  </a:lnTo>
-                  <a:lnTo>
-                    <a:pt x="6284096" y="777749"/>
-                  </a:lnTo>
-                  <a:lnTo>
-                    <a:pt x="6206462" y="773983"/>
-                  </a:lnTo>
-                  <a:lnTo>
-                    <a:pt x="6128827" y="769916"/>
-                  </a:lnTo>
-                  <a:lnTo>
-                    <a:pt x="6051193" y="765525"/>
-                  </a:lnTo>
-                  <a:lnTo>
-                    <a:pt x="5973559" y="760783"/>
-                  </a:lnTo>
-                  <a:lnTo>
-                    <a:pt x="5895925" y="755663"/>
-                  </a:lnTo>
-                  <a:lnTo>
-                    <a:pt x="5818291" y="750134"/>
-                  </a:lnTo>
-                  <a:lnTo>
-                    <a:pt x="5740657" y="744163"/>
-                  </a:lnTo>
-                  <a:lnTo>
-                    <a:pt x="5663023" y="737716"/>
-                  </a:lnTo>
-                  <a:lnTo>
-                    <a:pt x="5585389" y="730754"/>
-                  </a:lnTo>
-                  <a:lnTo>
-                    <a:pt x="5507755" y="723237"/>
-                  </a:lnTo>
-                  <a:lnTo>
-                    <a:pt x="5430121" y="715119"/>
-                  </a:lnTo>
-                  <a:lnTo>
-                    <a:pt x="5352487" y="706353"/>
-                  </a:lnTo>
-                  <a:lnTo>
-                    <a:pt x="5274853" y="696888"/>
-                  </a:lnTo>
-                  <a:lnTo>
-                    <a:pt x="5197219" y="686667"/>
-                  </a:lnTo>
-                  <a:lnTo>
-                    <a:pt x="5119585" y="675630"/>
-                  </a:lnTo>
-                  <a:lnTo>
-                    <a:pt x="5041951" y="663712"/>
-                  </a:lnTo>
-                  <a:lnTo>
-                    <a:pt x="4964317" y="650842"/>
-                  </a:lnTo>
-                  <a:lnTo>
-                    <a:pt x="4886683" y="636946"/>
-                  </a:lnTo>
-                  <a:lnTo>
-                    <a:pt x="4809049" y="621939"/>
-                  </a:lnTo>
-                  <a:lnTo>
-                    <a:pt x="4731415" y="605735"/>
-                  </a:lnTo>
-                  <a:lnTo>
-                    <a:pt x="4653781" y="588238"/>
-                  </a:lnTo>
-                  <a:lnTo>
-                    <a:pt x="4576147" y="569344"/>
-                  </a:lnTo>
-                  <a:lnTo>
-                    <a:pt x="4498513" y="548941"/>
-                  </a:lnTo>
-                  <a:lnTo>
-                    <a:pt x="4420879" y="526910"/>
-                  </a:lnTo>
-                  <a:lnTo>
-                    <a:pt x="4343244" y="503120"/>
-                  </a:lnTo>
-                  <a:lnTo>
-                    <a:pt x="4265610" y="477430"/>
-                  </a:lnTo>
-                  <a:lnTo>
-                    <a:pt x="4187976" y="449691"/>
-                  </a:lnTo>
-                  <a:lnTo>
-                    <a:pt x="4110342" y="419736"/>
-                  </a:lnTo>
-                  <a:lnTo>
-                    <a:pt x="4032708" y="387391"/>
-                  </a:lnTo>
-                  <a:lnTo>
-                    <a:pt x="3955074" y="352463"/>
-                  </a:lnTo>
-                  <a:lnTo>
-                    <a:pt x="3877440" y="314747"/>
-                  </a:lnTo>
-                  <a:lnTo>
-                    <a:pt x="3799806" y="274021"/>
-                  </a:lnTo>
-                  <a:lnTo>
-                    <a:pt x="3722172" y="230043"/>
-                  </a:lnTo>
-                  <a:lnTo>
-                    <a:pt x="3644538" y="182555"/>
-                  </a:lnTo>
-                  <a:lnTo>
-                    <a:pt x="3566904" y="131276"/>
-                  </a:lnTo>
-                  <a:lnTo>
-                    <a:pt x="3489270" y="75903"/>
-                  </a:lnTo>
-                  <a:lnTo>
-                    <a:pt x="3411636" y="16110"/>
-                  </a:lnTo>
-                  <a:lnTo>
-                    <a:pt x="3334002" y="0"/>
-                  </a:lnTo>
-                  <a:lnTo>
-                    <a:pt x="3256368" y="6707"/>
-                  </a:lnTo>
-                  <a:lnTo>
-                    <a:pt x="3178734" y="13361"/>
-                  </a:lnTo>
-                  <a:lnTo>
-                    <a:pt x="3101100" y="19960"/>
-                  </a:lnTo>
-                  <a:lnTo>
-                    <a:pt x="3023466" y="26505"/>
-                  </a:lnTo>
-                  <a:lnTo>
-                    <a:pt x="2945832" y="32998"/>
-                  </a:lnTo>
-                  <a:lnTo>
-                    <a:pt x="2868198" y="39437"/>
-                  </a:lnTo>
-                  <a:lnTo>
-                    <a:pt x="2790564" y="45824"/>
-                  </a:lnTo>
-                  <a:lnTo>
-                    <a:pt x="2712930" y="52159"/>
-                  </a:lnTo>
-                  <a:lnTo>
-                    <a:pt x="2635295" y="58443"/>
-                  </a:lnTo>
-                  <a:lnTo>
-                    <a:pt x="2557661" y="64676"/>
-                  </a:lnTo>
-                  <a:lnTo>
-                    <a:pt x="2480027" y="70857"/>
-                  </a:lnTo>
-                  <a:lnTo>
-                    <a:pt x="2402393" y="76989"/>
-                  </a:lnTo>
-                  <a:lnTo>
-                    <a:pt x="2324759" y="83071"/>
-                  </a:lnTo>
-                  <a:lnTo>
-                    <a:pt x="2247125" y="89103"/>
-                  </a:lnTo>
-                  <a:lnTo>
-                    <a:pt x="2169491" y="95086"/>
-                  </a:lnTo>
-                  <a:lnTo>
-                    <a:pt x="2091857" y="101021"/>
-                  </a:lnTo>
-                  <a:lnTo>
-                    <a:pt x="2014223" y="106907"/>
-                  </a:lnTo>
-                  <a:lnTo>
-                    <a:pt x="1936589" y="112746"/>
-                  </a:lnTo>
-                  <a:lnTo>
-                    <a:pt x="1858955" y="118537"/>
-                  </a:lnTo>
-                  <a:lnTo>
-                    <a:pt x="1781321" y="124281"/>
-                  </a:lnTo>
-                  <a:lnTo>
-                    <a:pt x="1703687" y="129978"/>
-                  </a:lnTo>
-                  <a:lnTo>
-                    <a:pt x="1626053" y="135629"/>
-                  </a:lnTo>
-                  <a:lnTo>
-                    <a:pt x="1548419" y="141234"/>
-                  </a:lnTo>
-                  <a:lnTo>
-                    <a:pt x="1470785" y="146793"/>
-                  </a:lnTo>
-                  <a:lnTo>
-                    <a:pt x="1393151" y="152307"/>
-                  </a:lnTo>
-                  <a:lnTo>
-                    <a:pt x="1315517" y="157777"/>
-                  </a:lnTo>
-                  <a:lnTo>
-                    <a:pt x="1237883" y="163202"/>
-                  </a:lnTo>
-                  <a:lnTo>
-                    <a:pt x="1160249" y="168582"/>
-                  </a:lnTo>
-                  <a:lnTo>
-                    <a:pt x="1082615" y="173919"/>
-                  </a:lnTo>
-                  <a:lnTo>
-                    <a:pt x="1004981" y="179213"/>
-                  </a:lnTo>
-                  <a:lnTo>
-                    <a:pt x="927346" y="184464"/>
-                  </a:lnTo>
-                  <a:lnTo>
-                    <a:pt x="849712" y="189671"/>
-                  </a:lnTo>
-                  <a:lnTo>
-                    <a:pt x="772078" y="194837"/>
-                  </a:lnTo>
-                  <a:lnTo>
-                    <a:pt x="694444" y="199960"/>
-                  </a:lnTo>
-                  <a:lnTo>
-                    <a:pt x="616810" y="205042"/>
-                  </a:lnTo>
-                  <a:lnTo>
-                    <a:pt x="539176" y="210083"/>
-                  </a:lnTo>
-                  <a:lnTo>
-                    <a:pt x="461542" y="215082"/>
-                  </a:lnTo>
-                  <a:lnTo>
-                    <a:pt x="383908" y="220041"/>
-                  </a:lnTo>
-                  <a:lnTo>
-                    <a:pt x="306274" y="224960"/>
-                  </a:lnTo>
-                  <a:lnTo>
-                    <a:pt x="228640" y="229838"/>
-                  </a:lnTo>
-                  <a:lnTo>
-                    <a:pt x="151006" y="234677"/>
-                  </a:lnTo>
-                  <a:lnTo>
-                    <a:pt x="73372" y="239477"/>
-                  </a:lnTo>
-                  <a:lnTo>
-                    <a:pt x="0" y="243976"/>
+                    <a:pt x="7183835" y="753223"/>
+                  </a:lnTo>
+                  <a:lnTo>
+                    <a:pt x="7107366" y="751928"/>
+                  </a:lnTo>
+                  <a:lnTo>
+                    <a:pt x="7030898" y="750531"/>
+                  </a:lnTo>
+                  <a:lnTo>
+                    <a:pt x="6954429" y="749022"/>
+                  </a:lnTo>
+                  <a:lnTo>
+                    <a:pt x="6877961" y="747392"/>
+                  </a:lnTo>
+                  <a:lnTo>
+                    <a:pt x="6801492" y="745632"/>
+                  </a:lnTo>
+                  <a:lnTo>
+                    <a:pt x="6725024" y="743732"/>
+                  </a:lnTo>
+                  <a:lnTo>
+                    <a:pt x="6648556" y="741680"/>
+                  </a:lnTo>
+                  <a:lnTo>
+                    <a:pt x="6572087" y="739464"/>
+                  </a:lnTo>
+                  <a:lnTo>
+                    <a:pt x="6495619" y="737072"/>
+                  </a:lnTo>
+                  <a:lnTo>
+                    <a:pt x="6419150" y="734488"/>
+                  </a:lnTo>
+                  <a:lnTo>
+                    <a:pt x="6342682" y="731698"/>
+                  </a:lnTo>
+                  <a:lnTo>
+                    <a:pt x="6266213" y="728686"/>
+                  </a:lnTo>
+                  <a:lnTo>
+                    <a:pt x="6189745" y="725433"/>
+                  </a:lnTo>
+                  <a:lnTo>
+                    <a:pt x="6113277" y="721920"/>
+                  </a:lnTo>
+                  <a:lnTo>
+                    <a:pt x="6036808" y="718127"/>
+                  </a:lnTo>
+                  <a:lnTo>
+                    <a:pt x="5960340" y="714031"/>
+                  </a:lnTo>
+                  <a:lnTo>
+                    <a:pt x="5883871" y="709608"/>
+                  </a:lnTo>
+                  <a:lnTo>
+                    <a:pt x="5807403" y="704832"/>
+                  </a:lnTo>
+                  <a:lnTo>
+                    <a:pt x="5730934" y="699675"/>
+                  </a:lnTo>
+                  <a:lnTo>
+                    <a:pt x="5654466" y="694106"/>
+                  </a:lnTo>
+                  <a:lnTo>
+                    <a:pt x="5577998" y="688092"/>
+                  </a:lnTo>
+                  <a:lnTo>
+                    <a:pt x="5501529" y="681599"/>
+                  </a:lnTo>
+                  <a:lnTo>
+                    <a:pt x="5425061" y="674587"/>
+                  </a:lnTo>
+                  <a:lnTo>
+                    <a:pt x="5348592" y="667015"/>
+                  </a:lnTo>
+                  <a:lnTo>
+                    <a:pt x="5272124" y="658839"/>
+                  </a:lnTo>
+                  <a:lnTo>
+                    <a:pt x="5195655" y="650011"/>
+                  </a:lnTo>
+                  <a:lnTo>
+                    <a:pt x="5119187" y="640477"/>
+                  </a:lnTo>
+                  <a:lnTo>
+                    <a:pt x="5042719" y="630183"/>
+                  </a:lnTo>
+                  <a:lnTo>
+                    <a:pt x="4966250" y="619066"/>
+                  </a:lnTo>
+                  <a:lnTo>
+                    <a:pt x="4889782" y="607063"/>
+                  </a:lnTo>
+                  <a:lnTo>
+                    <a:pt x="4813313" y="594101"/>
+                  </a:lnTo>
+                  <a:lnTo>
+                    <a:pt x="4736845" y="580104"/>
+                  </a:lnTo>
+                  <a:lnTo>
+                    <a:pt x="4660376" y="564990"/>
+                  </a:lnTo>
+                  <a:lnTo>
+                    <a:pt x="4583908" y="548669"/>
+                  </a:lnTo>
+                  <a:lnTo>
+                    <a:pt x="4507439" y="531046"/>
+                  </a:lnTo>
+                  <a:lnTo>
+                    <a:pt x="4430971" y="512016"/>
+                  </a:lnTo>
+                  <a:lnTo>
+                    <a:pt x="4354503" y="491466"/>
+                  </a:lnTo>
+                  <a:lnTo>
+                    <a:pt x="4278034" y="469277"/>
+                  </a:lnTo>
+                  <a:lnTo>
+                    <a:pt x="4201566" y="445315"/>
+                  </a:lnTo>
+                  <a:lnTo>
+                    <a:pt x="4125097" y="419441"/>
+                  </a:lnTo>
+                  <a:lnTo>
+                    <a:pt x="4048629" y="391502"/>
+                  </a:lnTo>
+                  <a:lnTo>
+                    <a:pt x="3972160" y="361332"/>
+                  </a:lnTo>
+                  <a:lnTo>
+                    <a:pt x="3895692" y="328754"/>
+                  </a:lnTo>
+                  <a:lnTo>
+                    <a:pt x="3819224" y="293576"/>
+                  </a:lnTo>
+                  <a:lnTo>
+                    <a:pt x="3742755" y="255589"/>
+                  </a:lnTo>
+                  <a:lnTo>
+                    <a:pt x="3666287" y="214569"/>
+                  </a:lnTo>
+                  <a:lnTo>
+                    <a:pt x="3589818" y="170275"/>
+                  </a:lnTo>
+                  <a:lnTo>
+                    <a:pt x="3513350" y="122445"/>
+                  </a:lnTo>
+                  <a:lnTo>
+                    <a:pt x="3436881" y="70797"/>
+                  </a:lnTo>
+                  <a:lnTo>
+                    <a:pt x="3360413" y="15027"/>
+                  </a:lnTo>
+                  <a:lnTo>
+                    <a:pt x="3283945" y="0"/>
+                  </a:lnTo>
+                  <a:lnTo>
+                    <a:pt x="3207476" y="6256"/>
+                  </a:lnTo>
+                  <a:lnTo>
+                    <a:pt x="3131008" y="12462"/>
+                  </a:lnTo>
+                  <a:lnTo>
+                    <a:pt x="3054539" y="18617"/>
+                  </a:lnTo>
+                  <a:lnTo>
+                    <a:pt x="2978071" y="24722"/>
+                  </a:lnTo>
+                  <a:lnTo>
+                    <a:pt x="2901602" y="30778"/>
+                  </a:lnTo>
+                  <a:lnTo>
+                    <a:pt x="2825134" y="36784"/>
+                  </a:lnTo>
+                  <a:lnTo>
+                    <a:pt x="2748666" y="42742"/>
+                  </a:lnTo>
+                  <a:lnTo>
+                    <a:pt x="2672197" y="48651"/>
+                  </a:lnTo>
+                  <a:lnTo>
+                    <a:pt x="2595729" y="54512"/>
+                  </a:lnTo>
+                  <a:lnTo>
+                    <a:pt x="2519260" y="60325"/>
+                  </a:lnTo>
+                  <a:lnTo>
+                    <a:pt x="2442792" y="66091"/>
+                  </a:lnTo>
+                  <a:lnTo>
+                    <a:pt x="2366323" y="71810"/>
+                  </a:lnTo>
+                  <a:lnTo>
+                    <a:pt x="2289855" y="77483"/>
+                  </a:lnTo>
+                  <a:lnTo>
+                    <a:pt x="2213386" y="83110"/>
+                  </a:lnTo>
+                  <a:lnTo>
+                    <a:pt x="2136918" y="88690"/>
+                  </a:lnTo>
+                  <a:lnTo>
+                    <a:pt x="2060450" y="94226"/>
+                  </a:lnTo>
+                  <a:lnTo>
+                    <a:pt x="1983981" y="99716"/>
+                  </a:lnTo>
+                  <a:lnTo>
+                    <a:pt x="1907513" y="105162"/>
+                  </a:lnTo>
+                  <a:lnTo>
+                    <a:pt x="1831044" y="110563"/>
+                  </a:lnTo>
+                  <a:lnTo>
+                    <a:pt x="1754576" y="115921"/>
+                  </a:lnTo>
+                  <a:lnTo>
+                    <a:pt x="1678107" y="121235"/>
+                  </a:lnTo>
+                  <a:lnTo>
+                    <a:pt x="1601639" y="126506"/>
+                  </a:lnTo>
+                  <a:lnTo>
+                    <a:pt x="1525171" y="131734"/>
+                  </a:lnTo>
+                  <a:lnTo>
+                    <a:pt x="1448702" y="136919"/>
+                  </a:lnTo>
+                  <a:lnTo>
+                    <a:pt x="1372234" y="142062"/>
+                  </a:lnTo>
+                  <a:lnTo>
+                    <a:pt x="1295765" y="147164"/>
+                  </a:lnTo>
+                  <a:lnTo>
+                    <a:pt x="1219297" y="152224"/>
+                  </a:lnTo>
+                  <a:lnTo>
+                    <a:pt x="1142828" y="157242"/>
+                  </a:lnTo>
+                  <a:lnTo>
+                    <a:pt x="1066360" y="162220"/>
+                  </a:lnTo>
+                  <a:lnTo>
+                    <a:pt x="989892" y="167158"/>
+                  </a:lnTo>
+                  <a:lnTo>
+                    <a:pt x="913423" y="172055"/>
+                  </a:lnTo>
+                  <a:lnTo>
+                    <a:pt x="836955" y="176913"/>
+                  </a:lnTo>
+                  <a:lnTo>
+                    <a:pt x="760486" y="181731"/>
+                  </a:lnTo>
+                  <a:lnTo>
+                    <a:pt x="684018" y="186510"/>
+                  </a:lnTo>
+                  <a:lnTo>
+                    <a:pt x="607549" y="191250"/>
+                  </a:lnTo>
+                  <a:lnTo>
+                    <a:pt x="531081" y="195951"/>
+                  </a:lnTo>
+                  <a:lnTo>
+                    <a:pt x="454613" y="200614"/>
+                  </a:lnTo>
+                  <a:lnTo>
+                    <a:pt x="378144" y="205240"/>
+                  </a:lnTo>
+                  <a:lnTo>
+                    <a:pt x="301676" y="209828"/>
+                  </a:lnTo>
+                  <a:lnTo>
+                    <a:pt x="225207" y="214378"/>
+                  </a:lnTo>
+                  <a:lnTo>
+                    <a:pt x="148739" y="218891"/>
+                  </a:lnTo>
+                  <a:lnTo>
+                    <a:pt x="72270" y="223368"/>
+                  </a:lnTo>
+                  <a:lnTo>
+                    <a:pt x="0" y="227565"/>
                   </a:lnTo>
                 </a:path>
               </a:pathLst>
@@ -4091,297 +4091,297 @@
           </p:nvSpPr>
           <p:spPr>
             <a:xfrm>
-              <a:off x="957447" y="2073503"/>
-              <a:ext cx="7231043" cy="3341257"/>
+              <a:off x="1053473" y="2209169"/>
+              <a:ext cx="7122475" cy="3116503"/>
             </a:xfrm>
             <a:custGeom>
               <a:avLst/>
               <a:pathLst>
-                <a:path w="7231043" h="3341257">
+                <a:path w="7122475" h="3116503">
                   <a:moveTo>
                     <a:pt x="0" y="0"/>
                   </a:moveTo>
                   <a:lnTo>
-                    <a:pt x="11077" y="17269"/>
-                  </a:lnTo>
-                  <a:lnTo>
-                    <a:pt x="88711" y="134215"/>
-                  </a:lnTo>
-                  <a:lnTo>
-                    <a:pt x="166345" y="247216"/>
-                  </a:lnTo>
-                  <a:lnTo>
-                    <a:pt x="243979" y="356405"/>
-                  </a:lnTo>
-                  <a:lnTo>
-                    <a:pt x="321613" y="461910"/>
-                  </a:lnTo>
-                  <a:lnTo>
-                    <a:pt x="399247" y="563855"/>
-                  </a:lnTo>
-                  <a:lnTo>
-                    <a:pt x="476881" y="662362"/>
-                  </a:lnTo>
-                  <a:lnTo>
-                    <a:pt x="554515" y="757545"/>
-                  </a:lnTo>
-                  <a:lnTo>
-                    <a:pt x="632149" y="849517"/>
-                  </a:lnTo>
-                  <a:lnTo>
-                    <a:pt x="709783" y="938386"/>
-                  </a:lnTo>
-                  <a:lnTo>
-                    <a:pt x="787417" y="1024258"/>
-                  </a:lnTo>
-                  <a:lnTo>
-                    <a:pt x="865051" y="1107232"/>
-                  </a:lnTo>
-                  <a:lnTo>
-                    <a:pt x="942685" y="1187407"/>
-                  </a:lnTo>
-                  <a:lnTo>
-                    <a:pt x="1020319" y="1264877"/>
-                  </a:lnTo>
-                  <a:lnTo>
-                    <a:pt x="1097953" y="1339733"/>
-                  </a:lnTo>
-                  <a:lnTo>
-                    <a:pt x="1175587" y="1412065"/>
-                  </a:lnTo>
-                  <a:lnTo>
-                    <a:pt x="1253221" y="1481956"/>
-                  </a:lnTo>
-                  <a:lnTo>
-                    <a:pt x="1330855" y="1549489"/>
-                  </a:lnTo>
-                  <a:lnTo>
-                    <a:pt x="1408489" y="1614743"/>
-                  </a:lnTo>
-                  <a:lnTo>
-                    <a:pt x="1486124" y="1677797"/>
-                  </a:lnTo>
-                  <a:lnTo>
-                    <a:pt x="1563758" y="1738723"/>
-                  </a:lnTo>
-                  <a:lnTo>
-                    <a:pt x="1641392" y="1797594"/>
-                  </a:lnTo>
-                  <a:lnTo>
-                    <a:pt x="1719026" y="1854478"/>
-                  </a:lnTo>
-                  <a:lnTo>
-                    <a:pt x="1796660" y="1909444"/>
-                  </a:lnTo>
-                  <a:lnTo>
-                    <a:pt x="1874294" y="1962555"/>
-                  </a:lnTo>
-                  <a:lnTo>
-                    <a:pt x="1951928" y="2013875"/>
-                  </a:lnTo>
-                  <a:lnTo>
-                    <a:pt x="2029562" y="2063463"/>
-                  </a:lnTo>
-                  <a:lnTo>
-                    <a:pt x="2107196" y="2111378"/>
-                  </a:lnTo>
-                  <a:lnTo>
-                    <a:pt x="2184830" y="2157677"/>
-                  </a:lnTo>
-                  <a:lnTo>
-                    <a:pt x="2262464" y="2202413"/>
-                  </a:lnTo>
-                  <a:lnTo>
-                    <a:pt x="2340098" y="2245641"/>
-                  </a:lnTo>
-                  <a:lnTo>
-                    <a:pt x="2417732" y="2287410"/>
-                  </a:lnTo>
-                  <a:lnTo>
-                    <a:pt x="2495366" y="2327770"/>
-                  </a:lnTo>
-                  <a:lnTo>
-                    <a:pt x="2573000" y="2366768"/>
-                  </a:lnTo>
-                  <a:lnTo>
-                    <a:pt x="2650634" y="2404451"/>
-                  </a:lnTo>
-                  <a:lnTo>
-                    <a:pt x="2728268" y="2440863"/>
-                  </a:lnTo>
-                  <a:lnTo>
-                    <a:pt x="2805902" y="2476046"/>
-                  </a:lnTo>
-                  <a:lnTo>
-                    <a:pt x="2883536" y="2510042"/>
-                  </a:lnTo>
-                  <a:lnTo>
-                    <a:pt x="2961170" y="2542891"/>
-                  </a:lnTo>
-                  <a:lnTo>
-                    <a:pt x="3038804" y="2574632"/>
-                  </a:lnTo>
-                  <a:lnTo>
-                    <a:pt x="3116438" y="2605302"/>
-                  </a:lnTo>
-                  <a:lnTo>
-                    <a:pt x="3194073" y="2634938"/>
-                  </a:lnTo>
-                  <a:lnTo>
-                    <a:pt x="3271707" y="2663574"/>
-                  </a:lnTo>
-                  <a:lnTo>
-                    <a:pt x="3349341" y="2691243"/>
-                  </a:lnTo>
-                  <a:lnTo>
-                    <a:pt x="3426975" y="2717979"/>
-                  </a:lnTo>
-                  <a:lnTo>
-                    <a:pt x="3504609" y="2743814"/>
-                  </a:lnTo>
-                  <a:lnTo>
-                    <a:pt x="3582243" y="2768776"/>
-                  </a:lnTo>
-                  <a:lnTo>
-                    <a:pt x="3659877" y="2792897"/>
-                  </a:lnTo>
-                  <a:lnTo>
-                    <a:pt x="3737511" y="2816203"/>
-                  </a:lnTo>
-                  <a:lnTo>
-                    <a:pt x="3815145" y="2838724"/>
-                  </a:lnTo>
-                  <a:lnTo>
-                    <a:pt x="3892779" y="2860485"/>
-                  </a:lnTo>
-                  <a:lnTo>
-                    <a:pt x="3970413" y="2881511"/>
-                  </a:lnTo>
-                  <a:lnTo>
-                    <a:pt x="4048047" y="2901828"/>
-                  </a:lnTo>
-                  <a:lnTo>
-                    <a:pt x="4125681" y="2921460"/>
-                  </a:lnTo>
-                  <a:lnTo>
-                    <a:pt x="4203315" y="2940430"/>
-                  </a:lnTo>
-                  <a:lnTo>
-                    <a:pt x="4280949" y="2958759"/>
-                  </a:lnTo>
-                  <a:lnTo>
-                    <a:pt x="4358583" y="2976470"/>
-                  </a:lnTo>
-                  <a:lnTo>
-                    <a:pt x="4436217" y="2993584"/>
-                  </a:lnTo>
-                  <a:lnTo>
-                    <a:pt x="4513851" y="3010120"/>
-                  </a:lnTo>
-                  <a:lnTo>
-                    <a:pt x="4591485" y="3026099"/>
-                  </a:lnTo>
-                  <a:lnTo>
-                    <a:pt x="4669119" y="3041538"/>
-                  </a:lnTo>
-                  <a:lnTo>
-                    <a:pt x="4746753" y="3056457"/>
-                  </a:lnTo>
-                  <a:lnTo>
-                    <a:pt x="4824387" y="3070872"/>
-                  </a:lnTo>
-                  <a:lnTo>
-                    <a:pt x="4902022" y="3084801"/>
-                  </a:lnTo>
-                  <a:lnTo>
-                    <a:pt x="4979656" y="3098260"/>
-                  </a:lnTo>
-                  <a:lnTo>
-                    <a:pt x="5057290" y="3111265"/>
-                  </a:lnTo>
-                  <a:lnTo>
-                    <a:pt x="5134924" y="3123831"/>
-                  </a:lnTo>
-                  <a:lnTo>
-                    <a:pt x="5212558" y="3135973"/>
-                  </a:lnTo>
-                  <a:lnTo>
-                    <a:pt x="5290192" y="3147706"/>
-                  </a:lnTo>
-                  <a:lnTo>
-                    <a:pt x="5367826" y="3159042"/>
-                  </a:lnTo>
-                  <a:lnTo>
-                    <a:pt x="5445460" y="3169997"/>
-                  </a:lnTo>
-                  <a:lnTo>
-                    <a:pt x="5523094" y="3180581"/>
-                  </a:lnTo>
-                  <a:lnTo>
-                    <a:pt x="5600728" y="3190809"/>
-                  </a:lnTo>
-                  <a:lnTo>
-                    <a:pt x="5678362" y="3200692"/>
-                  </a:lnTo>
-                  <a:lnTo>
-                    <a:pt x="5755996" y="3210241"/>
-                  </a:lnTo>
-                  <a:lnTo>
-                    <a:pt x="5833630" y="3219468"/>
-                  </a:lnTo>
-                  <a:lnTo>
-                    <a:pt x="5911264" y="3228384"/>
-                  </a:lnTo>
-                  <a:lnTo>
-                    <a:pt x="5988898" y="3236999"/>
-                  </a:lnTo>
-                  <a:lnTo>
-                    <a:pt x="6066532" y="3245323"/>
-                  </a:lnTo>
-                  <a:lnTo>
-                    <a:pt x="6144166" y="3253367"/>
-                  </a:lnTo>
-                  <a:lnTo>
-                    <a:pt x="6221800" y="3261139"/>
-                  </a:lnTo>
-                  <a:lnTo>
-                    <a:pt x="6299434" y="3268649"/>
-                  </a:lnTo>
-                  <a:lnTo>
-                    <a:pt x="6377068" y="3275905"/>
-                  </a:lnTo>
-                  <a:lnTo>
-                    <a:pt x="6454702" y="3282917"/>
-                  </a:lnTo>
-                  <a:lnTo>
-                    <a:pt x="6532336" y="3289693"/>
-                  </a:lnTo>
-                  <a:lnTo>
-                    <a:pt x="6609971" y="3296239"/>
-                  </a:lnTo>
-                  <a:lnTo>
-                    <a:pt x="6687605" y="3302565"/>
-                  </a:lnTo>
-                  <a:lnTo>
-                    <a:pt x="6765239" y="3308677"/>
-                  </a:lnTo>
-                  <a:lnTo>
-                    <a:pt x="6842873" y="3314584"/>
-                  </a:lnTo>
-                  <a:lnTo>
-                    <a:pt x="6920507" y="3320291"/>
-                  </a:lnTo>
-                  <a:lnTo>
-                    <a:pt x="6998141" y="3325805"/>
-                  </a:lnTo>
-                  <a:lnTo>
-                    <a:pt x="7075775" y="3331133"/>
-                  </a:lnTo>
-                  <a:lnTo>
-                    <a:pt x="7153409" y="3336282"/>
-                  </a:lnTo>
-                  <a:lnTo>
-                    <a:pt x="7231043" y="3341257"/>
+                    <a:pt x="10910" y="16107"/>
+                  </a:lnTo>
+                  <a:lnTo>
+                    <a:pt x="87379" y="125187"/>
+                  </a:lnTo>
+                  <a:lnTo>
+                    <a:pt x="163847" y="230586"/>
+                  </a:lnTo>
+                  <a:lnTo>
+                    <a:pt x="240316" y="332430"/>
+                  </a:lnTo>
+                  <a:lnTo>
+                    <a:pt x="316784" y="430839"/>
+                  </a:lnTo>
+                  <a:lnTo>
+                    <a:pt x="393253" y="525927"/>
+                  </a:lnTo>
+                  <a:lnTo>
+                    <a:pt x="469721" y="617807"/>
+                  </a:lnTo>
+                  <a:lnTo>
+                    <a:pt x="546189" y="706588"/>
+                  </a:lnTo>
+                  <a:lnTo>
+                    <a:pt x="622658" y="792373"/>
+                  </a:lnTo>
+                  <a:lnTo>
+                    <a:pt x="699126" y="875265"/>
+                  </a:lnTo>
+                  <a:lnTo>
+                    <a:pt x="775595" y="955360"/>
+                  </a:lnTo>
+                  <a:lnTo>
+                    <a:pt x="852063" y="1032752"/>
+                  </a:lnTo>
+                  <a:lnTo>
+                    <a:pt x="928532" y="1107534"/>
+                  </a:lnTo>
+                  <a:lnTo>
+                    <a:pt x="1005000" y="1179793"/>
+                  </a:lnTo>
+                  <a:lnTo>
+                    <a:pt x="1081468" y="1249614"/>
+                  </a:lnTo>
+                  <a:lnTo>
+                    <a:pt x="1157937" y="1317080"/>
+                  </a:lnTo>
+                  <a:lnTo>
+                    <a:pt x="1234405" y="1382270"/>
+                  </a:lnTo>
+                  <a:lnTo>
+                    <a:pt x="1310874" y="1445260"/>
+                  </a:lnTo>
+                  <a:lnTo>
+                    <a:pt x="1387342" y="1506126"/>
+                  </a:lnTo>
+                  <a:lnTo>
+                    <a:pt x="1463811" y="1564938"/>
+                  </a:lnTo>
+                  <a:lnTo>
+                    <a:pt x="1540279" y="1621765"/>
+                  </a:lnTo>
+                  <a:lnTo>
+                    <a:pt x="1616747" y="1676676"/>
+                  </a:lnTo>
+                  <a:lnTo>
+                    <a:pt x="1693216" y="1729734"/>
+                  </a:lnTo>
+                  <a:lnTo>
+                    <a:pt x="1769684" y="1781003"/>
+                  </a:lnTo>
+                  <a:lnTo>
+                    <a:pt x="1846153" y="1830541"/>
+                  </a:lnTo>
+                  <a:lnTo>
+                    <a:pt x="1922621" y="1878409"/>
+                  </a:lnTo>
+                  <a:lnTo>
+                    <a:pt x="1999090" y="1924661"/>
+                  </a:lnTo>
+                  <a:lnTo>
+                    <a:pt x="2075558" y="1969353"/>
+                  </a:lnTo>
+                  <a:lnTo>
+                    <a:pt x="2152026" y="2012538"/>
+                  </a:lnTo>
+                  <a:lnTo>
+                    <a:pt x="2228495" y="2054265"/>
+                  </a:lnTo>
+                  <a:lnTo>
+                    <a:pt x="2304963" y="2094585"/>
+                  </a:lnTo>
+                  <a:lnTo>
+                    <a:pt x="2381432" y="2133544"/>
+                  </a:lnTo>
+                  <a:lnTo>
+                    <a:pt x="2457900" y="2171189"/>
+                  </a:lnTo>
+                  <a:lnTo>
+                    <a:pt x="2534369" y="2207565"/>
+                  </a:lnTo>
+                  <a:lnTo>
+                    <a:pt x="2610837" y="2242713"/>
+                  </a:lnTo>
+                  <a:lnTo>
+                    <a:pt x="2687306" y="2276675"/>
+                  </a:lnTo>
+                  <a:lnTo>
+                    <a:pt x="2763774" y="2309491"/>
+                  </a:lnTo>
+                  <a:lnTo>
+                    <a:pt x="2840242" y="2341201"/>
+                  </a:lnTo>
+                  <a:lnTo>
+                    <a:pt x="2916711" y="2371840"/>
+                  </a:lnTo>
+                  <a:lnTo>
+                    <a:pt x="2993179" y="2401446"/>
+                  </a:lnTo>
+                  <a:lnTo>
+                    <a:pt x="3069648" y="2430053"/>
+                  </a:lnTo>
+                  <a:lnTo>
+                    <a:pt x="3146116" y="2457695"/>
+                  </a:lnTo>
+                  <a:lnTo>
+                    <a:pt x="3222585" y="2484405"/>
+                  </a:lnTo>
+                  <a:lnTo>
+                    <a:pt x="3299053" y="2510213"/>
+                  </a:lnTo>
+                  <a:lnTo>
+                    <a:pt x="3375521" y="2535151"/>
+                  </a:lnTo>
+                  <a:lnTo>
+                    <a:pt x="3451990" y="2559247"/>
+                  </a:lnTo>
+                  <a:lnTo>
+                    <a:pt x="3528458" y="2582531"/>
+                  </a:lnTo>
+                  <a:lnTo>
+                    <a:pt x="3604927" y="2605029"/>
+                  </a:lnTo>
+                  <a:lnTo>
+                    <a:pt x="3681395" y="2626768"/>
+                  </a:lnTo>
+                  <a:lnTo>
+                    <a:pt x="3757864" y="2647773"/>
+                  </a:lnTo>
+                  <a:lnTo>
+                    <a:pt x="3834332" y="2668070"/>
+                  </a:lnTo>
+                  <a:lnTo>
+                    <a:pt x="3910800" y="2687682"/>
+                  </a:lnTo>
+                  <a:lnTo>
+                    <a:pt x="3987269" y="2706633"/>
+                  </a:lnTo>
+                  <a:lnTo>
+                    <a:pt x="4063737" y="2724944"/>
+                  </a:lnTo>
+                  <a:lnTo>
+                    <a:pt x="4140206" y="2742638"/>
+                  </a:lnTo>
+                  <a:lnTo>
+                    <a:pt x="4216674" y="2759734"/>
+                  </a:lnTo>
+                  <a:lnTo>
+                    <a:pt x="4293143" y="2776254"/>
+                  </a:lnTo>
+                  <a:lnTo>
+                    <a:pt x="4369611" y="2792217"/>
+                  </a:lnTo>
+                  <a:lnTo>
+                    <a:pt x="4446079" y="2807641"/>
+                  </a:lnTo>
+                  <a:lnTo>
+                    <a:pt x="4522548" y="2822544"/>
+                  </a:lnTo>
+                  <a:lnTo>
+                    <a:pt x="4599016" y="2836945"/>
+                  </a:lnTo>
+                  <a:lnTo>
+                    <a:pt x="4675485" y="2850860"/>
+                  </a:lnTo>
+                  <a:lnTo>
+                    <a:pt x="4751953" y="2864305"/>
+                  </a:lnTo>
+                  <a:lnTo>
+                    <a:pt x="4828422" y="2877297"/>
+                  </a:lnTo>
+                  <a:lnTo>
+                    <a:pt x="4904890" y="2889851"/>
+                  </a:lnTo>
+                  <a:lnTo>
+                    <a:pt x="4981359" y="2901981"/>
+                  </a:lnTo>
+                  <a:lnTo>
+                    <a:pt x="5057827" y="2913702"/>
+                  </a:lnTo>
+                  <a:lnTo>
+                    <a:pt x="5134295" y="2925028"/>
+                  </a:lnTo>
+                  <a:lnTo>
+                    <a:pt x="5210764" y="2935971"/>
+                  </a:lnTo>
+                  <a:lnTo>
+                    <a:pt x="5287232" y="2946545"/>
+                  </a:lnTo>
+                  <a:lnTo>
+                    <a:pt x="5363701" y="2956763"/>
+                  </a:lnTo>
+                  <a:lnTo>
+                    <a:pt x="5440169" y="2966635"/>
+                  </a:lnTo>
+                  <a:lnTo>
+                    <a:pt x="5516638" y="2976175"/>
+                  </a:lnTo>
+                  <a:lnTo>
+                    <a:pt x="5593106" y="2985393"/>
+                  </a:lnTo>
+                  <a:lnTo>
+                    <a:pt x="5669574" y="2994300"/>
+                  </a:lnTo>
+                  <a:lnTo>
+                    <a:pt x="5746043" y="3002906"/>
+                  </a:lnTo>
+                  <a:lnTo>
+                    <a:pt x="5822511" y="3011222"/>
+                  </a:lnTo>
+                  <a:lnTo>
+                    <a:pt x="5898980" y="3019258"/>
+                  </a:lnTo>
+                  <a:lnTo>
+                    <a:pt x="5975448" y="3027022"/>
+                  </a:lnTo>
+                  <a:lnTo>
+                    <a:pt x="6051917" y="3034525"/>
+                  </a:lnTo>
+                  <a:lnTo>
+                    <a:pt x="6128385" y="3041774"/>
+                  </a:lnTo>
+                  <a:lnTo>
+                    <a:pt x="6204853" y="3048779"/>
+                  </a:lnTo>
+                  <a:lnTo>
+                    <a:pt x="6281322" y="3055547"/>
+                  </a:lnTo>
+                  <a:lnTo>
+                    <a:pt x="6357790" y="3062087"/>
+                  </a:lnTo>
+                  <a:lnTo>
+                    <a:pt x="6434259" y="3068407"/>
+                  </a:lnTo>
+                  <a:lnTo>
+                    <a:pt x="6510727" y="3074513"/>
+                  </a:lnTo>
+                  <a:lnTo>
+                    <a:pt x="6587196" y="3080414"/>
+                  </a:lnTo>
+                  <a:lnTo>
+                    <a:pt x="6663664" y="3086115"/>
+                  </a:lnTo>
+                  <a:lnTo>
+                    <a:pt x="6740132" y="3091624"/>
+                  </a:lnTo>
+                  <a:lnTo>
+                    <a:pt x="6816601" y="3096947"/>
+                  </a:lnTo>
+                  <a:lnTo>
+                    <a:pt x="6893069" y="3102090"/>
+                  </a:lnTo>
+                  <a:lnTo>
+                    <a:pt x="6969538" y="3107060"/>
+                  </a:lnTo>
+                  <a:lnTo>
+                    <a:pt x="7046006" y="3111862"/>
+                  </a:lnTo>
+                  <a:lnTo>
+                    <a:pt x="7122475" y="3116503"/>
                   </a:lnTo>
                 </a:path>
               </a:pathLst>
@@ -4410,21 +4410,21 @@
           </p:nvSpPr>
           <p:spPr>
             <a:xfrm>
-              <a:off x="817517" y="4727786"/>
-              <a:ext cx="7799693" cy="0"/>
+              <a:off x="915645" y="4684908"/>
+              <a:ext cx="7682587" cy="0"/>
             </a:xfrm>
             <a:custGeom>
               <a:avLst/>
               <a:pathLst>
-                <a:path w="7799693" h="0">
+                <a:path w="7682587" h="0">
                   <a:moveTo>
                     <a:pt x="0" y="0"/>
                   </a:moveTo>
                   <a:lnTo>
-                    <a:pt x="7799693" y="0"/>
-                  </a:lnTo>
-                  <a:lnTo>
-                    <a:pt x="7799693" y="0"/>
+                    <a:pt x="7682587" y="0"/>
+                  </a:lnTo>
+                  <a:lnTo>
+                    <a:pt x="7682587" y="0"/>
                   </a:lnTo>
                 </a:path>
               </a:pathLst>
@@ -4453,15 +4453,15 @@
           </p:nvSpPr>
           <p:spPr>
             <a:xfrm>
-              <a:off x="4203673" y="2073503"/>
-              <a:ext cx="0" cy="3649639"/>
+              <a:off x="4250960" y="2209169"/>
+              <a:ext cx="0" cy="3404141"/>
             </a:xfrm>
             <a:custGeom>
               <a:avLst/>
               <a:pathLst>
-                <a:path w="0" h="3649639">
+                <a:path w="0" h="3404141">
                   <a:moveTo>
-                    <a:pt x="0" y="3649639"/>
+                    <a:pt x="0" y="3404141"/>
                   </a:moveTo>
                   <a:lnTo>
                     <a:pt x="0" y="0"/>
@@ -4496,8 +4496,8 @@
           </p:nvSpPr>
           <p:spPr>
             <a:xfrm>
-              <a:off x="692708" y="5517199"/>
-              <a:ext cx="62179" cy="80101"/>
+              <a:off x="756929" y="5407599"/>
+              <a:ext cx="79004" cy="101955"/>
             </a:xfrm>
             <a:prstGeom prst="rect">
               <a:avLst/>
@@ -4510,7 +4510,7 @@
             <a:p>
               <a:pPr algn="l" marL="0" marR="0" indent="0">
                 <a:lnSpc>
-                  <a:spcPts val="880"/>
+                  <a:spcPts val="1120"/>
                 </a:lnSpc>
                 <a:spcBef>
                   <a:spcPts val="0"/>
@@ -4520,7 +4520,7 @@
                 </a:spcAft>
               </a:pPr>
               <a:r>
-                <a:rPr sz="880">
+                <a:rPr sz="1120">
                   <a:solidFill>
                     <a:srgbClr val="4D4D4D">
                       <a:alpha val="100000"/>
@@ -4542,8 +4542,8 @@
           </p:nvSpPr>
           <p:spPr>
             <a:xfrm>
-              <a:off x="692708" y="4687735"/>
-              <a:ext cx="62179" cy="80101"/>
+              <a:off x="756929" y="4633931"/>
+              <a:ext cx="79004" cy="101955"/>
             </a:xfrm>
             <a:prstGeom prst="rect">
               <a:avLst/>
@@ -4556,7 +4556,7 @@
             <a:p>
               <a:pPr algn="l" marL="0" marR="0" indent="0">
                 <a:lnSpc>
-                  <a:spcPts val="880"/>
+                  <a:spcPts val="1120"/>
                 </a:lnSpc>
                 <a:spcBef>
                   <a:spcPts val="0"/>
@@ -4566,7 +4566,7 @@
                 </a:spcAft>
               </a:pPr>
               <a:r>
-                <a:rPr sz="880">
+                <a:rPr sz="1120">
                   <a:solidFill>
                     <a:srgbClr val="4D4D4D">
                       <a:alpha val="100000"/>
@@ -4588,8 +4588,8 @@
           </p:nvSpPr>
           <p:spPr>
             <a:xfrm>
-              <a:off x="692708" y="3858272"/>
-              <a:ext cx="62179" cy="80101"/>
+              <a:off x="756929" y="3860262"/>
+              <a:ext cx="79004" cy="101955"/>
             </a:xfrm>
             <a:prstGeom prst="rect">
               <a:avLst/>
@@ -4602,7 +4602,7 @@
             <a:p>
               <a:pPr algn="l" marL="0" marR="0" indent="0">
                 <a:lnSpc>
-                  <a:spcPts val="880"/>
+                  <a:spcPts val="1120"/>
                 </a:lnSpc>
                 <a:spcBef>
                   <a:spcPts val="0"/>
@@ -4612,7 +4612,7 @@
                 </a:spcAft>
               </a:pPr>
               <a:r>
-                <a:rPr sz="880">
+                <a:rPr sz="1120">
                   <a:solidFill>
                     <a:srgbClr val="4D4D4D">
                       <a:alpha val="100000"/>
@@ -4634,8 +4634,8 @@
           </p:nvSpPr>
           <p:spPr>
             <a:xfrm>
-              <a:off x="692708" y="3028808"/>
-              <a:ext cx="62179" cy="80101"/>
+              <a:off x="756929" y="3086593"/>
+              <a:ext cx="79004" cy="101955"/>
             </a:xfrm>
             <a:prstGeom prst="rect">
               <a:avLst/>
@@ -4648,7 +4648,7 @@
             <a:p>
               <a:pPr algn="l" marL="0" marR="0" indent="0">
                 <a:lnSpc>
-                  <a:spcPts val="880"/>
+                  <a:spcPts val="1120"/>
                 </a:lnSpc>
                 <a:spcBef>
                   <a:spcPts val="0"/>
@@ -4658,7 +4658,7 @@
                 </a:spcAft>
               </a:pPr>
               <a:r>
-                <a:rPr sz="880">
+                <a:rPr sz="1120">
                   <a:solidFill>
                     <a:srgbClr val="4D4D4D">
                       <a:alpha val="100000"/>
@@ -4680,8 +4680,8 @@
           </p:nvSpPr>
           <p:spPr>
             <a:xfrm>
-              <a:off x="692708" y="2199345"/>
-              <a:ext cx="62179" cy="80101"/>
+              <a:off x="756929" y="2312925"/>
+              <a:ext cx="79004" cy="101955"/>
             </a:xfrm>
             <a:prstGeom prst="rect">
               <a:avLst/>
@@ -4694,7 +4694,7 @@
             <a:p>
               <a:pPr algn="l" marL="0" marR="0" indent="0">
                 <a:lnSpc>
-                  <a:spcPts val="880"/>
+                  <a:spcPts val="1120"/>
                 </a:lnSpc>
                 <a:spcBef>
                   <a:spcPts val="0"/>
@@ -4704,7 +4704,7 @@
                 </a:spcAft>
               </a:pPr>
               <a:r>
-                <a:rPr sz="880">
+                <a:rPr sz="1120">
                   <a:solidFill>
                     <a:srgbClr val="4D4D4D">
                       <a:alpha val="100000"/>
@@ -4726,8 +4726,8 @@
           </p:nvSpPr>
           <p:spPr>
             <a:xfrm>
-              <a:off x="2423864" y="5785772"/>
-              <a:ext cx="155356" cy="80101"/>
+              <a:off x="2475630" y="5693022"/>
+              <a:ext cx="197510" cy="101955"/>
             </a:xfrm>
             <a:prstGeom prst="rect">
               <a:avLst/>
@@ -4740,7 +4740,7 @@
             <a:p>
               <a:pPr algn="l" marL="0" marR="0" indent="0">
                 <a:lnSpc>
-                  <a:spcPts val="880"/>
+                  <a:spcPts val="1120"/>
                 </a:lnSpc>
                 <a:spcBef>
                   <a:spcPts val="0"/>
@@ -4750,7 +4750,7 @@
                 </a:spcAft>
               </a:pPr>
               <a:r>
-                <a:rPr sz="880">
+                <a:rPr sz="1120">
                   <a:solidFill>
                     <a:srgbClr val="4D4D4D">
                       <a:alpha val="100000"/>
@@ -4772,8 +4772,8 @@
           </p:nvSpPr>
           <p:spPr>
             <a:xfrm>
-              <a:off x="4196521" y="5785772"/>
-              <a:ext cx="155356" cy="80101"/>
+              <a:off x="4221672" y="5693022"/>
+              <a:ext cx="197510" cy="101955"/>
             </a:xfrm>
             <a:prstGeom prst="rect">
               <a:avLst/>
@@ -4786,7 +4786,7 @@
             <a:p>
               <a:pPr algn="l" marL="0" marR="0" indent="0">
                 <a:lnSpc>
-                  <a:spcPts val="880"/>
+                  <a:spcPts val="1120"/>
                 </a:lnSpc>
                 <a:spcBef>
                   <a:spcPts val="0"/>
@@ -4796,7 +4796,7 @@
                 </a:spcAft>
               </a:pPr>
               <a:r>
-                <a:rPr sz="880">
+                <a:rPr sz="1120">
                   <a:solidFill>
                     <a:srgbClr val="4D4D4D">
                       <a:alpha val="100000"/>
@@ -4818,8 +4818,8 @@
           </p:nvSpPr>
           <p:spPr>
             <a:xfrm>
-              <a:off x="5969179" y="5785772"/>
-              <a:ext cx="155356" cy="80101"/>
+              <a:off x="5967715" y="5693022"/>
+              <a:ext cx="197510" cy="101955"/>
             </a:xfrm>
             <a:prstGeom prst="rect">
               <a:avLst/>
@@ -4832,7 +4832,7 @@
             <a:p>
               <a:pPr algn="l" marL="0" marR="0" indent="0">
                 <a:lnSpc>
-                  <a:spcPts val="880"/>
+                  <a:spcPts val="1120"/>
                 </a:lnSpc>
                 <a:spcBef>
                   <a:spcPts val="0"/>
@@ -4842,7 +4842,7 @@
                 </a:spcAft>
               </a:pPr>
               <a:r>
-                <a:rPr sz="880">
+                <a:rPr sz="1120">
                   <a:solidFill>
                     <a:srgbClr val="4D4D4D">
                       <a:alpha val="100000"/>
@@ -4864,8 +4864,8 @@
           </p:nvSpPr>
           <p:spPr>
             <a:xfrm>
-              <a:off x="7741836" y="5785772"/>
-              <a:ext cx="155356" cy="80101"/>
+              <a:off x="7713757" y="5693022"/>
+              <a:ext cx="197510" cy="101955"/>
             </a:xfrm>
             <a:prstGeom prst="rect">
               <a:avLst/>
@@ -4878,7 +4878,7 @@
             <a:p>
               <a:pPr algn="l" marL="0" marR="0" indent="0">
                 <a:lnSpc>
-                  <a:spcPts val="880"/>
+                  <a:spcPts val="1120"/>
                 </a:lnSpc>
                 <a:spcBef>
                   <a:spcPts val="0"/>
@@ -4888,7 +4888,7 @@
                 </a:spcAft>
               </a:pPr>
               <a:r>
-                <a:rPr sz="880">
+                <a:rPr sz="1120">
                   <a:solidFill>
                     <a:srgbClr val="4D4D4D">
                       <a:alpha val="100000"/>
@@ -4910,8 +4910,8 @@
           </p:nvSpPr>
           <p:spPr>
             <a:xfrm>
-              <a:off x="3879271" y="5925448"/>
-              <a:ext cx="1676186" cy="100218"/>
+              <a:off x="3690153" y="5870717"/>
+              <a:ext cx="2133569" cy="127558"/>
             </a:xfrm>
             <a:prstGeom prst="rect">
               <a:avLst/>
@@ -4924,7 +4924,7 @@
             <a:p>
               <a:pPr algn="l" marL="0" marR="0" indent="0">
                 <a:lnSpc>
-                  <a:spcPts val="1100"/>
+                  <a:spcPts val="1400"/>
                 </a:lnSpc>
                 <a:spcBef>
                   <a:spcPts val="0"/>
@@ -4934,7 +4934,7 @@
                 </a:spcAft>
               </a:pPr>
               <a:r>
-                <a:rPr sz="1100">
+                <a:rPr sz="1400">
                   <a:solidFill>
                     <a:srgbClr val="000000">
                       <a:alpha val="100000"/>
@@ -4956,8 +4956,8 @@
           </p:nvSpPr>
           <p:spPr>
             <a:xfrm rot="-5400000">
-              <a:off x="68446" y="3848213"/>
-              <a:ext cx="1016904" cy="100218"/>
+              <a:off x="-37527" y="3847460"/>
+              <a:ext cx="1294150" cy="127558"/>
             </a:xfrm>
             <a:prstGeom prst="rect">
               <a:avLst/>
@@ -4970,7 +4970,7 @@
             <a:p>
               <a:pPr algn="l" marL="0" marR="0" indent="0">
                 <a:lnSpc>
-                  <a:spcPts val="1100"/>
+                  <a:spcPts val="1400"/>
                 </a:lnSpc>
                 <a:spcBef>
                   <a:spcPts val="0"/>
@@ -4980,7 +4980,7 @@
                 </a:spcAft>
               </a:pPr>
               <a:r>
-                <a:rPr sz="1100">
+                <a:rPr sz="1400">
                   <a:solidFill>
                     <a:srgbClr val="000000">
                       <a:alpha val="100000"/>
@@ -5002,8 +5002,8 @@
           </p:nvSpPr>
           <p:spPr>
             <a:xfrm>
-              <a:off x="817517" y="1896563"/>
-              <a:ext cx="4166463" cy="82021"/>
+              <a:off x="915645" y="1977589"/>
+              <a:ext cx="5556900" cy="109362"/>
             </a:xfrm>
             <a:prstGeom prst="rect">
               <a:avLst/>
@@ -5016,7 +5016,7 @@
             <a:p>
               <a:pPr algn="l" marL="0" marR="0" indent="0">
                 <a:lnSpc>
-                  <a:spcPts val="900"/>
+                  <a:spcPts val="1200"/>
                 </a:lnSpc>
                 <a:spcBef>
                   <a:spcPts val="0"/>
@@ -5026,7 +5026,7 @@
                 </a:spcAft>
               </a:pPr>
               <a:r>
-                <a:rPr sz="900">
+                <a:rPr sz="1200">
                   <a:solidFill>
                     <a:srgbClr val="404040">
                       <a:alpha val="100000"/>
@@ -5048,8 +5048,8 @@
           </p:nvSpPr>
           <p:spPr>
             <a:xfrm>
-              <a:off x="817517" y="1669789"/>
-              <a:ext cx="2821289" cy="120152"/>
+              <a:off x="915645" y="1688767"/>
+              <a:ext cx="3591763" cy="153070"/>
             </a:xfrm>
             <a:prstGeom prst="rect">
               <a:avLst/>
@@ -5062,7 +5062,7 @@
             <a:p>
               <a:pPr algn="l" marL="0" marR="0" indent="0">
                 <a:lnSpc>
-                  <a:spcPts val="1320"/>
+                  <a:spcPts val="1680"/>
                 </a:lnSpc>
                 <a:spcBef>
                   <a:spcPts val="0"/>
@@ -5072,7 +5072,7 @@
                 </a:spcAft>
               </a:pPr>
               <a:r>
-                <a:rPr sz="1320">
+                <a:rPr sz="1680">
                   <a:solidFill>
                     <a:srgbClr val="000000">
                       <a:alpha val="100000"/>
